--- a/Slides/Exec_Summary/KU_AI_Direction.pptx
+++ b/Slides/Exec_Summary/KU_AI_Direction.pptx
@@ -10,9 +10,11 @@
     <p:sldId id="258" r:id="rId4"/>
     <p:sldId id="259" r:id="rId5"/>
     <p:sldId id="260" r:id="rId6"/>
+    <p:sldId id="261" r:id="rId7"/>
+    <p:sldId id="262" r:id="rId8"/>
   </p:sldIdLst>
   <p:notesMasterIdLst>
-    <p:notesMasterId r:id="rId7"/>
+    <p:notesMasterId r:id="rId9"/>
   </p:notesMasterIdLst>
   <p:sldSz cx="9144000" cy="5143500"/>
   <p:notesSz cx="5143500" cy="9144000"/>
@@ -882,6 +884,182 @@
             <a:fld id="{F7021451-1387-4CA6-816F-3879F97B5CBC}" type="slidenum">
               <a:rPr lang="en-US"/>
               <a:t>5</a:t>
+            </a:fld>
+            <a:endParaRPr lang="en-US"/>
+          </a:p>
+        </p:txBody>
+      </p:sp>
+    </p:spTree>
+    <p:extLst>
+      <p:ext uri="{BB962C8B-B14F-4D97-AF65-F5344CB8AC3E}">
+        <p14:creationId xmlns:p14="http://schemas.microsoft.com/office/powerpoint/2010/main" val="1024086991"/>
+      </p:ext>
+    </p:extLst>
+  </p:cSld>
+  <p:clrMapOvr>
+    <a:masterClrMapping/>
+  </p:clrMapOvr>
+</p:notes>
+</file>
+
+<file path=ppt/notesSlides/notesSlide6.xml><?xml version="1.0" encoding="utf-8"?>
+<p:notes xmlns:a="http://schemas.openxmlformats.org/drawingml/2006/main" xmlns:r="http://schemas.openxmlformats.org/officeDocument/2006/relationships" xmlns:p="http://schemas.openxmlformats.org/presentationml/2006/main">
+  <p:cSld>
+    <p:spTree>
+      <p:nvGrpSpPr>
+        <p:cNvPr id="1" name=""/>
+        <p:cNvGrpSpPr/>
+        <p:nvPr/>
+      </p:nvGrpSpPr>
+      <p:grpSpPr>
+        <a:xfrm>
+          <a:off x="0" y="0"/>
+          <a:ext cx="0" cy="0"/>
+          <a:chOff x="0" y="0"/>
+          <a:chExt cx="0" cy="0"/>
+        </a:xfrm>
+      </p:grpSpPr>
+      <p:sp>
+        <p:nvSpPr>
+          <p:cNvPr id="2" name="Slide Image Placeholder 1"/>
+          <p:cNvSpPr>
+            <a:spLocks noGrp="1" noRot="1" noChangeAspect="1"/>
+          </p:cNvSpPr>
+          <p:nvPr>
+            <p:ph type="sldImg"/>
+          </p:nvPr>
+        </p:nvSpPr>
+        <p:spPr/>
+      </p:sp>
+      <p:sp>
+        <p:nvSpPr>
+          <p:cNvPr id="3" name="Notes Placeholder 2"/>
+          <p:cNvSpPr>
+            <a:spLocks noGrp="1"/>
+          </p:cNvSpPr>
+          <p:nvPr>
+            <p:ph type="body" idx="1"/>
+          </p:nvPr>
+        </p:nvSpPr>
+        <p:spPr/>
+        <p:txBody>
+          <a:bodyPr/>
+          <a:lstStyle/>
+          <a:p>
+            <a:r>
+              <a:rPr lang="en-US" dirty="0"/>
+              <a:t/>
+            </a:r>
+            <a:endParaRPr lang="en-US" dirty="0"/>
+          </a:p>
+        </p:txBody>
+      </p:sp>
+      <p:sp>
+        <p:nvSpPr>
+          <p:cNvPr id="4" name="Slide Number Placeholder 3"/>
+          <p:cNvSpPr>
+            <a:spLocks noGrp="1"/>
+          </p:cNvSpPr>
+          <p:nvPr>
+            <p:ph type="sldNum" sz="quarter" idx="10"/>
+          </p:nvPr>
+        </p:nvSpPr>
+        <p:spPr/>
+        <p:txBody>
+          <a:bodyPr/>
+          <a:lstStyle/>
+          <a:p>
+            <a:fld id="{F7021451-1387-4CA6-816F-3879F97B5CBC}" type="slidenum">
+              <a:rPr lang="en-US"/>
+              <a:t>6</a:t>
+            </a:fld>
+            <a:endParaRPr lang="en-US"/>
+          </a:p>
+        </p:txBody>
+      </p:sp>
+    </p:spTree>
+    <p:extLst>
+      <p:ext uri="{BB962C8B-B14F-4D97-AF65-F5344CB8AC3E}">
+        <p14:creationId xmlns:p14="http://schemas.microsoft.com/office/powerpoint/2010/main" val="1024086991"/>
+      </p:ext>
+    </p:extLst>
+  </p:cSld>
+  <p:clrMapOvr>
+    <a:masterClrMapping/>
+  </p:clrMapOvr>
+</p:notes>
+</file>
+
+<file path=ppt/notesSlides/notesSlide7.xml><?xml version="1.0" encoding="utf-8"?>
+<p:notes xmlns:a="http://schemas.openxmlformats.org/drawingml/2006/main" xmlns:r="http://schemas.openxmlformats.org/officeDocument/2006/relationships" xmlns:p="http://schemas.openxmlformats.org/presentationml/2006/main">
+  <p:cSld>
+    <p:spTree>
+      <p:nvGrpSpPr>
+        <p:cNvPr id="1" name=""/>
+        <p:cNvGrpSpPr/>
+        <p:nvPr/>
+      </p:nvGrpSpPr>
+      <p:grpSpPr>
+        <a:xfrm>
+          <a:off x="0" y="0"/>
+          <a:ext cx="0" cy="0"/>
+          <a:chOff x="0" y="0"/>
+          <a:chExt cx="0" cy="0"/>
+        </a:xfrm>
+      </p:grpSpPr>
+      <p:sp>
+        <p:nvSpPr>
+          <p:cNvPr id="2" name="Slide Image Placeholder 1"/>
+          <p:cNvSpPr>
+            <a:spLocks noGrp="1" noRot="1" noChangeAspect="1"/>
+          </p:cNvSpPr>
+          <p:nvPr>
+            <p:ph type="sldImg"/>
+          </p:nvPr>
+        </p:nvSpPr>
+        <p:spPr/>
+      </p:sp>
+      <p:sp>
+        <p:nvSpPr>
+          <p:cNvPr id="3" name="Notes Placeholder 2"/>
+          <p:cNvSpPr>
+            <a:spLocks noGrp="1"/>
+          </p:cNvSpPr>
+          <p:nvPr>
+            <p:ph type="body" idx="1"/>
+          </p:nvPr>
+        </p:nvSpPr>
+        <p:spPr/>
+        <p:txBody>
+          <a:bodyPr/>
+          <a:lstStyle/>
+          <a:p>
+            <a:r>
+              <a:rPr lang="en-US" dirty="0"/>
+              <a:t/>
+            </a:r>
+            <a:endParaRPr lang="en-US" dirty="0"/>
+          </a:p>
+        </p:txBody>
+      </p:sp>
+      <p:sp>
+        <p:nvSpPr>
+          <p:cNvPr id="4" name="Slide Number Placeholder 3"/>
+          <p:cNvSpPr>
+            <a:spLocks noGrp="1"/>
+          </p:cNvSpPr>
+          <p:nvPr>
+            <p:ph type="sldNum" sz="quarter" idx="10"/>
+          </p:nvPr>
+        </p:nvSpPr>
+        <p:spPr/>
+        <p:txBody>
+          <a:bodyPr/>
+          <a:lstStyle/>
+          <a:p>
+            <a:fld id="{F7021451-1387-4CA6-816F-3879F97B5CBC}" type="slidenum">
+              <a:rPr lang="en-US"/>
+              <a:t>7</a:t>
             </a:fld>
             <a:endParaRPr lang="en-US"/>
           </a:p>
@@ -2911,7 +3089,7 @@
                 <a:ea typeface="Calibri" pitchFamily="34" charset="-122"/>
                 <a:cs typeface="Calibri" pitchFamily="34" charset="-120"/>
               </a:rPr>
-              <a:t>02 / 05</a:t>
+              <a:t>02 / 07</a:t>
             </a:r>
             <a:endParaRPr lang="en-US" sz="900" dirty="0"/>
           </a:p>
@@ -4607,7 +4785,7 @@
                 <a:ea typeface="Calibri" pitchFamily="34" charset="-122"/>
                 <a:cs typeface="Calibri" pitchFamily="34" charset="-120"/>
               </a:rPr>
-              <a:t>03 / 05</a:t>
+              <a:t>03 / 07</a:t>
             </a:r>
             <a:endParaRPr lang="en-US" sz="900" dirty="0"/>
           </a:p>
@@ -4627,7 +4805,7 @@
     <p:bg>
       <p:bgPr>
         <a:solidFill>
-          <a:srgbClr val="FAF6EE"/>
+          <a:srgbClr val="FFFFFF"/>
         </a:solidFill>
       </p:bgPr>
     </p:bg>
@@ -4653,8 +4831,8 @@
         </p:nvSpPr>
         <p:spPr>
           <a:xfrm>
-            <a:off x="457200" y="320040"/>
-            <a:ext cx="8229600" cy="640080"/>
+            <a:off x="457200" y="274320"/>
+            <a:ext cx="8229600" cy="502920"/>
           </a:xfrm>
           <a:prstGeom prst="rect">
             <a:avLst/>
@@ -4678,7 +4856,7 @@
                 <a:ea typeface="TH Sarabun New" pitchFamily="34" charset="-122"/>
                 <a:cs typeface="TH Sarabun New" pitchFamily="34" charset="-120"/>
               </a:rPr>
-              <a:t>ทำได้แล้ววันนี้ — 5 Pattern ที่ขยายต่อได้ทันที</a:t>
+              <a:t>สถาปัตยกรรม AI Agent</a:t>
             </a:r>
             <a:endParaRPr lang="en-US" sz="3200" dirty="0"/>
           </a:p>
@@ -4692,24 +4870,24 @@
         </p:nvSpPr>
         <p:spPr>
           <a:xfrm>
-            <a:off x="457200" y="914400"/>
-            <a:ext cx="8229600" cy="320040"/>
-          </a:xfrm>
-          <a:prstGeom prst="rect">
-            <a:avLst/>
-          </a:prstGeom>
-          <a:noFill/>
-          <a:ln/>
-        </p:spPr>
-        <p:txBody>
-          <a:bodyPr wrap="square" lIns="0" tIns="0" rIns="0" bIns="0" rtlCol="0" anchor="ctr"/>
-          <a:lstStyle/>
-          <a:p>
-            <a:pPr indent="0" marL="0">
-              <a:buNone/>
-            </a:pPr>
-            <a:r>
-              <a:rPr lang="en-US" sz="1400" i="1" dirty="0">
+            <a:off x="457200" y="777240"/>
+            <a:ext cx="8229600" cy="274320"/>
+          </a:xfrm>
+          <a:prstGeom prst="rect">
+            <a:avLst/>
+          </a:prstGeom>
+          <a:noFill/>
+          <a:ln/>
+        </p:spPr>
+        <p:txBody>
+          <a:bodyPr wrap="square" lIns="0" tIns="0" rIns="0" bIns="0" rtlCol="0" anchor="ctr"/>
+          <a:lstStyle/>
+          <a:p>
+            <a:pPr indent="0" marL="0">
+              <a:buNone/>
+            </a:pPr>
+            <a:r>
+              <a:rPr lang="en-US" sz="1300" i="1" dirty="0">
                 <a:solidFill>
                   <a:srgbClr val="6B6B6B"/>
                 </a:solidFill>
@@ -4717,7 +4895,82 @@
                 <a:ea typeface="TH Sarabun New" pitchFamily="34" charset="-122"/>
                 <a:cs typeface="TH Sarabun New" pitchFamily="34" charset="-120"/>
               </a:rPr>
-              <a:t>Quick Wins — Use cases ที่บุคลากร 119 คน ทดสอบแล้วใน Foundation Workshop</a:t>
+              <a:t>User สั่งงาน → Agent ใช้ Tools/Database + LLM → ทำ Action → Feedback Loop</a:t>
+            </a:r>
+            <a:endParaRPr lang="en-US" sz="1300" dirty="0"/>
+          </a:p>
+        </p:txBody>
+      </p:sp>
+      <p:sp>
+        <p:nvSpPr>
+          <p:cNvPr id="4" name="Text 2"/>
+          <p:cNvSpPr/>
+          <p:nvPr/>
+        </p:nvSpPr>
+        <p:spPr>
+          <a:xfrm>
+            <a:off x="3794760" y="1097280"/>
+            <a:ext cx="548640" cy="457200"/>
+          </a:xfrm>
+          <a:prstGeom prst="rect">
+            <a:avLst/>
+          </a:prstGeom>
+          <a:noFill/>
+          <a:ln/>
+        </p:spPr>
+        <p:txBody>
+          <a:bodyPr wrap="square" lIns="0" tIns="0" rIns="0" bIns="0" rtlCol="0" anchor="ctr"/>
+          <a:lstStyle/>
+          <a:p>
+            <a:pPr algn="ctr" indent="0" marL="0">
+              <a:buNone/>
+            </a:pPr>
+            <a:r>
+              <a:rPr lang="en-US" sz="2600" dirty="0">
+                <a:solidFill>
+                  <a:srgbClr val="000000"/>
+                </a:solidFill>
+              </a:rPr>
+              <a:t>👥</a:t>
+            </a:r>
+            <a:endParaRPr lang="en-US" sz="2600" dirty="0"/>
+          </a:p>
+        </p:txBody>
+      </p:sp>
+      <p:sp>
+        <p:nvSpPr>
+          <p:cNvPr id="5" name="Text 3"/>
+          <p:cNvSpPr/>
+          <p:nvPr/>
+        </p:nvSpPr>
+        <p:spPr>
+          <a:xfrm>
+            <a:off x="4343400" y="1188720"/>
+            <a:ext cx="731520" cy="320040"/>
+          </a:xfrm>
+          <a:prstGeom prst="rect">
+            <a:avLst/>
+          </a:prstGeom>
+          <a:noFill/>
+          <a:ln/>
+        </p:spPr>
+        <p:txBody>
+          <a:bodyPr wrap="square" lIns="0" tIns="0" rIns="0" bIns="0" rtlCol="0" anchor="ctr"/>
+          <a:lstStyle/>
+          <a:p>
+            <a:pPr indent="0" marL="0">
+              <a:buNone/>
+            </a:pPr>
+            <a:r>
+              <a:rPr lang="en-US" sz="1400" b="1" dirty="0">
+                <a:solidFill>
+                  <a:srgbClr val="006633"/>
+                </a:solidFill>
+                <a:latin typeface="TH Sarabun New" pitchFamily="34" charset="0"/>
+                <a:ea typeface="TH Sarabun New" pitchFamily="34" charset="-122"/>
+                <a:cs typeface="TH Sarabun New" pitchFamily="34" charset="-120"/>
+              </a:rPr>
+              <a:t>User</a:t>
             </a:r>
             <a:endParaRPr lang="en-US" sz="1400" dirty="0"/>
           </a:p>
@@ -4725,20 +4978,118 @@
       </p:sp>
       <p:sp>
         <p:nvSpPr>
-          <p:cNvPr id="4" name="Shape 2"/>
-          <p:cNvSpPr/>
-          <p:nvPr/>
-        </p:nvSpPr>
-        <p:spPr>
-          <a:xfrm>
-            <a:off x="365760" y="1371600"/>
-            <a:ext cx="1645920" cy="2468880"/>
+          <p:cNvPr id="6" name="Shape 4"/>
+          <p:cNvSpPr/>
+          <p:nvPr/>
+        </p:nvSpPr>
+        <p:spPr>
+          <a:xfrm>
+            <a:off x="4023360" y="1645920"/>
+            <a:ext cx="0" cy="274320"/>
+          </a:xfrm>
+          <a:prstGeom prst="line">
+            <a:avLst/>
+          </a:prstGeom>
+          <a:noFill/>
+          <a:ln w="25400">
+            <a:solidFill>
+              <a:srgbClr val="1A1A1A"/>
+            </a:solidFill>
+            <a:prstDash val="solid"/>
+            <a:tailEnd type="triangle"/>
+          </a:ln>
+        </p:spPr>
+      </p:sp>
+      <p:sp>
+        <p:nvSpPr>
+          <p:cNvPr id="7" name="Shape 5"/>
+          <p:cNvSpPr/>
+          <p:nvPr/>
+        </p:nvSpPr>
+        <p:spPr>
+          <a:xfrm>
+            <a:off x="4206240" y="1645920"/>
+            <a:ext cx="0" cy="274320"/>
+          </a:xfrm>
+          <a:prstGeom prst="line">
+            <a:avLst/>
+          </a:prstGeom>
+          <a:noFill/>
+          <a:ln w="25400">
+            <a:solidFill>
+              <a:srgbClr val="1A1A1A"/>
+            </a:solidFill>
+            <a:prstDash val="solid"/>
+            <a:headEnd type="triangle"/>
+          </a:ln>
+        </p:spPr>
+      </p:sp>
+      <p:sp>
+        <p:nvSpPr>
+          <p:cNvPr id="8" name="Shape 6"/>
+          <p:cNvSpPr/>
+          <p:nvPr/>
+        </p:nvSpPr>
+        <p:spPr>
+          <a:xfrm>
+            <a:off x="1371600" y="1691640"/>
+            <a:ext cx="6400800" cy="2697480"/>
+          </a:xfrm>
+          <a:prstGeom prst="rect">
+            <a:avLst/>
+          </a:prstGeom>
+          <a:solidFill>
+            <a:srgbClr val="F8F9F7"/>
+          </a:solidFill>
+          <a:ln w="19050">
+            <a:solidFill>
+              <a:srgbClr val="1A1A1A"/>
+            </a:solidFill>
+            <a:prstDash val="solid"/>
+          </a:ln>
+        </p:spPr>
+      </p:sp>
+      <p:sp>
+        <p:nvSpPr>
+          <p:cNvPr id="9" name="Shape 7"/>
+          <p:cNvSpPr/>
+          <p:nvPr/>
+        </p:nvSpPr>
+        <p:spPr>
+          <a:xfrm>
+            <a:off x="3749040" y="1783080"/>
+            <a:ext cx="731520" cy="640080"/>
           </a:xfrm>
           <a:prstGeom prst="rect">
             <a:avLst/>
           </a:prstGeom>
           <a:solidFill>
             <a:srgbClr val="FFFFFF"/>
+          </a:solidFill>
+          <a:ln w="31750">
+            <a:solidFill>
+              <a:srgbClr val="006633"/>
+            </a:solidFill>
+            <a:prstDash val="solid"/>
+          </a:ln>
+        </p:spPr>
+      </p:sp>
+      <p:sp>
+        <p:nvSpPr>
+          <p:cNvPr id="10" name="Shape 8"/>
+          <p:cNvSpPr/>
+          <p:nvPr/>
+        </p:nvSpPr>
+        <p:spPr>
+          <a:xfrm>
+            <a:off x="3840480" y="1874520"/>
+            <a:ext cx="548640" cy="457200"/>
+          </a:xfrm>
+          <a:prstGeom prst="rect">
+            <a:avLst/>
+          </a:prstGeom>
+          <a:solidFill>
+            <a:srgbClr val="E8F5E9"/>
           </a:solidFill>
           <a:ln w="6350">
             <a:solidFill>
@@ -4746,65 +5097,156 @@
             </a:solidFill>
             <a:prstDash val="solid"/>
           </a:ln>
-          <a:effectLst>
-            <a:outerShdw sx="100000" sy="100000" kx="0" ky="0" algn="bl" rotWithShape="0" blurRad="101600" dist="25400" dir="5400000">
-              <a:srgbClr val="000000">
-                <a:alpha val="8000"/>
-              </a:srgbClr>
-            </a:outerShdw>
-          </a:effectLst>
-        </p:spPr>
-      </p:sp>
-      <p:sp>
-        <p:nvSpPr>
-          <p:cNvPr id="5" name="Shape 3"/>
-          <p:cNvSpPr/>
-          <p:nvPr/>
-        </p:nvSpPr>
-        <p:spPr>
-          <a:xfrm>
-            <a:off x="365760" y="1371600"/>
-            <a:ext cx="1645920" cy="109728"/>
-          </a:xfrm>
-          <a:prstGeom prst="rect">
-            <a:avLst/>
-          </a:prstGeom>
-          <a:solidFill>
-            <a:srgbClr val="006633"/>
-          </a:solidFill>
-          <a:ln/>
-        </p:spPr>
-      </p:sp>
-      <p:sp>
-        <p:nvSpPr>
-          <p:cNvPr id="6" name="Shape 4"/>
-          <p:cNvSpPr/>
-          <p:nvPr/>
-        </p:nvSpPr>
-        <p:spPr>
-          <a:xfrm>
-            <a:off x="1554480" y="1554480"/>
-            <a:ext cx="320040" cy="320040"/>
-          </a:xfrm>
-          <a:prstGeom prst="ellipse">
-            <a:avLst/>
-          </a:prstGeom>
-          <a:solidFill>
-            <a:srgbClr val="006633"/>
-          </a:solidFill>
-          <a:ln/>
-        </p:spPr>
-      </p:sp>
-      <p:sp>
-        <p:nvSpPr>
-          <p:cNvPr id="7" name="Text 5"/>
-          <p:cNvSpPr/>
-          <p:nvPr/>
-        </p:nvSpPr>
-        <p:spPr>
-          <a:xfrm>
-            <a:off x="1554480" y="1554480"/>
-            <a:ext cx="320040" cy="320040"/>
+        </p:spPr>
+      </p:sp>
+      <p:sp>
+        <p:nvSpPr>
+          <p:cNvPr id="11" name="Shape 9"/>
+          <p:cNvSpPr/>
+          <p:nvPr/>
+        </p:nvSpPr>
+        <p:spPr>
+          <a:xfrm>
+            <a:off x="3675888" y="1920240"/>
+            <a:ext cx="73152" cy="0"/>
+          </a:xfrm>
+          <a:prstGeom prst="line">
+            <a:avLst/>
+          </a:prstGeom>
+          <a:noFill/>
+          <a:ln w="19050">
+            <a:solidFill>
+              <a:srgbClr val="006633"/>
+            </a:solidFill>
+            <a:prstDash val="solid"/>
+          </a:ln>
+        </p:spPr>
+      </p:sp>
+      <p:sp>
+        <p:nvSpPr>
+          <p:cNvPr id="12" name="Shape 10"/>
+          <p:cNvSpPr/>
+          <p:nvPr/>
+        </p:nvSpPr>
+        <p:spPr>
+          <a:xfrm>
+            <a:off x="4480560" y="1920240"/>
+            <a:ext cx="73152" cy="0"/>
+          </a:xfrm>
+          <a:prstGeom prst="line">
+            <a:avLst/>
+          </a:prstGeom>
+          <a:noFill/>
+          <a:ln w="19050">
+            <a:solidFill>
+              <a:srgbClr val="006633"/>
+            </a:solidFill>
+            <a:prstDash val="solid"/>
+          </a:ln>
+        </p:spPr>
+      </p:sp>
+      <p:sp>
+        <p:nvSpPr>
+          <p:cNvPr id="13" name="Shape 11"/>
+          <p:cNvSpPr/>
+          <p:nvPr/>
+        </p:nvSpPr>
+        <p:spPr>
+          <a:xfrm>
+            <a:off x="3675888" y="2103120"/>
+            <a:ext cx="73152" cy="0"/>
+          </a:xfrm>
+          <a:prstGeom prst="line">
+            <a:avLst/>
+          </a:prstGeom>
+          <a:noFill/>
+          <a:ln w="19050">
+            <a:solidFill>
+              <a:srgbClr val="006633"/>
+            </a:solidFill>
+            <a:prstDash val="solid"/>
+          </a:ln>
+        </p:spPr>
+      </p:sp>
+      <p:sp>
+        <p:nvSpPr>
+          <p:cNvPr id="14" name="Shape 12"/>
+          <p:cNvSpPr/>
+          <p:nvPr/>
+        </p:nvSpPr>
+        <p:spPr>
+          <a:xfrm>
+            <a:off x="4480560" y="2103120"/>
+            <a:ext cx="73152" cy="0"/>
+          </a:xfrm>
+          <a:prstGeom prst="line">
+            <a:avLst/>
+          </a:prstGeom>
+          <a:noFill/>
+          <a:ln w="19050">
+            <a:solidFill>
+              <a:srgbClr val="006633"/>
+            </a:solidFill>
+            <a:prstDash val="solid"/>
+          </a:ln>
+        </p:spPr>
+      </p:sp>
+      <p:sp>
+        <p:nvSpPr>
+          <p:cNvPr id="15" name="Shape 13"/>
+          <p:cNvSpPr/>
+          <p:nvPr/>
+        </p:nvSpPr>
+        <p:spPr>
+          <a:xfrm>
+            <a:off x="3675888" y="2286000"/>
+            <a:ext cx="73152" cy="0"/>
+          </a:xfrm>
+          <a:prstGeom prst="line">
+            <a:avLst/>
+          </a:prstGeom>
+          <a:noFill/>
+          <a:ln w="19050">
+            <a:solidFill>
+              <a:srgbClr val="006633"/>
+            </a:solidFill>
+            <a:prstDash val="solid"/>
+          </a:ln>
+        </p:spPr>
+      </p:sp>
+      <p:sp>
+        <p:nvSpPr>
+          <p:cNvPr id="16" name="Shape 14"/>
+          <p:cNvSpPr/>
+          <p:nvPr/>
+        </p:nvSpPr>
+        <p:spPr>
+          <a:xfrm>
+            <a:off x="4480560" y="2286000"/>
+            <a:ext cx="73152" cy="0"/>
+          </a:xfrm>
+          <a:prstGeom prst="line">
+            <a:avLst/>
+          </a:prstGeom>
+          <a:noFill/>
+          <a:ln w="19050">
+            <a:solidFill>
+              <a:srgbClr val="006633"/>
+            </a:solidFill>
+            <a:prstDash val="solid"/>
+          </a:ln>
+        </p:spPr>
+      </p:sp>
+      <p:sp>
+        <p:nvSpPr>
+          <p:cNvPr id="17" name="Text 15"/>
+          <p:cNvSpPr/>
+          <p:nvPr/>
+        </p:nvSpPr>
+        <p:spPr>
+          <a:xfrm>
+            <a:off x="3749040" y="1828800"/>
+            <a:ext cx="731520" cy="548640"/>
           </a:xfrm>
           <a:prstGeom prst="rect">
             <a:avLst/>
@@ -4820,15 +5262,54 @@
               <a:buNone/>
             </a:pPr>
             <a:r>
-              <a:rPr lang="en-US" sz="1400" b="1" dirty="0">
-                <a:solidFill>
-                  <a:srgbClr val="FFFFFF"/>
+              <a:rPr lang="en-US" sz="2200" b="1" i="1" dirty="0">
+                <a:solidFill>
+                  <a:srgbClr val="006633"/>
                 </a:solidFill>
                 <a:latin typeface="Calibri" pitchFamily="34" charset="0"/>
                 <a:ea typeface="Calibri" pitchFamily="34" charset="-122"/>
                 <a:cs typeface="Calibri" pitchFamily="34" charset="-120"/>
               </a:rPr>
-              <a:t>1</a:t>
+              <a:t>AI</a:t>
+            </a:r>
+            <a:endParaRPr lang="en-US" sz="2200" dirty="0"/>
+          </a:p>
+        </p:txBody>
+      </p:sp>
+      <p:sp>
+        <p:nvSpPr>
+          <p:cNvPr id="18" name="Text 16"/>
+          <p:cNvSpPr/>
+          <p:nvPr/>
+        </p:nvSpPr>
+        <p:spPr>
+          <a:xfrm>
+            <a:off x="2468880" y="1920240"/>
+            <a:ext cx="1188720" cy="320040"/>
+          </a:xfrm>
+          <a:prstGeom prst="rect">
+            <a:avLst/>
+          </a:prstGeom>
+          <a:noFill/>
+          <a:ln/>
+        </p:spPr>
+        <p:txBody>
+          <a:bodyPr wrap="square" lIns="0" tIns="0" rIns="0" bIns="0" rtlCol="0" anchor="ctr"/>
+          <a:lstStyle/>
+          <a:p>
+            <a:pPr algn="r" indent="0" marL="0">
+              <a:buNone/>
+            </a:pPr>
+            <a:r>
+              <a:rPr lang="en-US" sz="1400" b="1" dirty="0">
+                <a:solidFill>
+                  <a:srgbClr val="1A1A1A"/>
+                </a:solidFill>
+                <a:latin typeface="TH Sarabun New" pitchFamily="34" charset="0"/>
+                <a:ea typeface="TH Sarabun New" pitchFamily="34" charset="-122"/>
+                <a:cs typeface="TH Sarabun New" pitchFamily="34" charset="-120"/>
+              </a:rPr>
+              <a:t>AI Agent</a:t>
             </a:r>
             <a:endParaRPr lang="en-US" sz="1400" dirty="0"/>
           </a:p>
@@ -4836,281 +5317,39 @@
       </p:sp>
       <p:sp>
         <p:nvSpPr>
-          <p:cNvPr id="8" name="Text 6"/>
-          <p:cNvSpPr/>
-          <p:nvPr/>
-        </p:nvSpPr>
-        <p:spPr>
-          <a:xfrm>
-            <a:off x="502920" y="1600200"/>
-            <a:ext cx="1005840" cy="365760"/>
-          </a:xfrm>
-          <a:prstGeom prst="rect">
-            <a:avLst/>
-          </a:prstGeom>
-          <a:noFill/>
-          <a:ln/>
-        </p:spPr>
-        <p:txBody>
-          <a:bodyPr wrap="square" lIns="0" tIns="0" rIns="0" bIns="0" rtlCol="0" anchor="ctr"/>
-          <a:lstStyle/>
-          <a:p>
-            <a:pPr indent="0" marL="0">
-              <a:buNone/>
-            </a:pPr>
-            <a:r>
-              <a:rPr lang="en-US" sz="1800" b="1" dirty="0">
-                <a:solidFill>
-                  <a:srgbClr val="1A1A1A"/>
-                </a:solidFill>
-                <a:latin typeface="TH Sarabun New" pitchFamily="34" charset="0"/>
-                <a:ea typeface="TH Sarabun New" pitchFamily="34" charset="-122"/>
-                <a:cs typeface="TH Sarabun New" pitchFamily="34" charset="-120"/>
-              </a:rPr>
-              <a:t>คำร้องนิสิต</a:t>
-            </a:r>
-            <a:endParaRPr lang="en-US" sz="1800" dirty="0"/>
-          </a:p>
-        </p:txBody>
-      </p:sp>
-      <p:sp>
-        <p:nvSpPr>
-          <p:cNvPr id="9" name="Text 7"/>
-          <p:cNvSpPr/>
-          <p:nvPr/>
-        </p:nvSpPr>
-        <p:spPr>
-          <a:xfrm>
-            <a:off x="502920" y="2011680"/>
-            <a:ext cx="1371600" cy="228600"/>
-          </a:xfrm>
-          <a:prstGeom prst="rect">
-            <a:avLst/>
-          </a:prstGeom>
-          <a:noFill/>
-          <a:ln/>
-        </p:spPr>
-        <p:txBody>
-          <a:bodyPr wrap="square" lIns="0" tIns="0" rIns="0" bIns="0" rtlCol="0" anchor="ctr"/>
-          <a:lstStyle/>
-          <a:p>
-            <a:pPr indent="0" marL="0">
-              <a:buNone/>
-            </a:pPr>
-            <a:r>
-              <a:rPr lang="en-US" sz="900" b="1" spc="200" kern="0" dirty="0">
-                <a:solidFill>
-                  <a:srgbClr val="006633"/>
-                </a:solidFill>
-                <a:latin typeface="Calibri" pitchFamily="34" charset="0"/>
-                <a:ea typeface="Calibri" pitchFamily="34" charset="-122"/>
-                <a:cs typeface="Calibri" pitchFamily="34" charset="-120"/>
-              </a:rPr>
-              <a:t>Forms → LINE</a:t>
-            </a:r>
-            <a:endParaRPr lang="en-US" sz="900" dirty="0"/>
-          </a:p>
-        </p:txBody>
-      </p:sp>
-      <p:sp>
-        <p:nvSpPr>
-          <p:cNvPr id="10" name="Text 8"/>
-          <p:cNvSpPr/>
-          <p:nvPr/>
-        </p:nvSpPr>
-        <p:spPr>
-          <a:xfrm>
-            <a:off x="502920" y="2286000"/>
-            <a:ext cx="1371600" cy="822960"/>
-          </a:xfrm>
-          <a:prstGeom prst="rect">
-            <a:avLst/>
-          </a:prstGeom>
-          <a:noFill/>
-          <a:ln/>
-        </p:spPr>
-        <p:txBody>
-          <a:bodyPr wrap="square" lIns="0" tIns="0" rIns="0" bIns="0" rtlCol="0" anchor="ctr"/>
-          <a:lstStyle/>
-          <a:p>
-            <a:pPr indent="0" marL="0">
-              <a:buNone/>
-            </a:pPr>
-            <a:r>
-              <a:rPr lang="en-US" sz="1100" dirty="0">
-                <a:solidFill>
-                  <a:srgbClr val="4A4A4A"/>
-                </a:solidFill>
-                <a:latin typeface="TH Sarabun New" pitchFamily="34" charset="0"/>
-                <a:ea typeface="TH Sarabun New" pitchFamily="34" charset="-122"/>
-                <a:cs typeface="TH Sarabun New" pitchFamily="34" charset="-120"/>
-              </a:rPr>
-              <a:t>นิสิตยื่นคำร้อง → แจ้งเจ้าหน้าที่ทันทีใน LINE</a:t>
-            </a:r>
-            <a:endParaRPr lang="en-US" sz="1100" dirty="0"/>
-          </a:p>
-          <a:p>
-            <a:pPr indent="0" marL="0">
-              <a:buNone/>
-            </a:pPr>
-            <a:r>
-              <a:rPr lang="en-US" sz="1100" dirty="0">
-                <a:solidFill>
-                  <a:srgbClr val="4A4A4A"/>
-                </a:solidFill>
-                <a:latin typeface="TH Sarabun New" pitchFamily="34" charset="0"/>
-                <a:ea typeface="TH Sarabun New" pitchFamily="34" charset="-122"/>
-                <a:cs typeface="TH Sarabun New" pitchFamily="34" charset="-120"/>
-              </a:rPr>
-              <a:t>ลด lag time จาก 2 วัน → 5 วินาที</a:t>
-            </a:r>
-            <a:endParaRPr lang="en-US" sz="1100" dirty="0"/>
-          </a:p>
-        </p:txBody>
-      </p:sp>
-      <p:sp>
-        <p:nvSpPr>
-          <p:cNvPr id="11" name="Shape 9"/>
-          <p:cNvSpPr/>
-          <p:nvPr/>
-        </p:nvSpPr>
-        <p:spPr>
-          <a:xfrm>
-            <a:off x="502920" y="3154680"/>
-            <a:ext cx="1371600" cy="0"/>
-          </a:xfrm>
-          <a:prstGeom prst="line">
-            <a:avLst/>
-          </a:prstGeom>
-          <a:noFill/>
-          <a:ln w="6350">
-            <a:solidFill>
-              <a:srgbClr val="006633"/>
-            </a:solidFill>
-            <a:prstDash val="dash"/>
-          </a:ln>
-        </p:spPr>
-      </p:sp>
-      <p:sp>
-        <p:nvSpPr>
-          <p:cNvPr id="12" name="Text 10"/>
-          <p:cNvSpPr/>
-          <p:nvPr/>
-        </p:nvSpPr>
-        <p:spPr>
-          <a:xfrm>
-            <a:off x="502920" y="3200400"/>
-            <a:ext cx="1371600" cy="411480"/>
-          </a:xfrm>
-          <a:prstGeom prst="rect">
-            <a:avLst/>
-          </a:prstGeom>
-          <a:noFill/>
-          <a:ln/>
-        </p:spPr>
-        <p:txBody>
-          <a:bodyPr wrap="square" lIns="0" tIns="0" rIns="0" bIns="0" rtlCol="0" anchor="ctr"/>
-          <a:lstStyle/>
-          <a:p>
-            <a:pPr algn="ctr" indent="0" marL="0">
-              <a:buNone/>
-            </a:pPr>
-            <a:r>
-              <a:rPr lang="en-US" sz="2800" b="1" dirty="0">
-                <a:solidFill>
-                  <a:srgbClr val="006633"/>
-                </a:solidFill>
-                <a:latin typeface="Calibri" pitchFamily="34" charset="0"/>
-                <a:ea typeface="Calibri" pitchFamily="34" charset="-122"/>
-                <a:cs typeface="Calibri" pitchFamily="34" charset="-120"/>
-              </a:rPr>
-              <a:t>250</a:t>
-            </a:r>
-            <a:endParaRPr lang="en-US" sz="2800" dirty="0"/>
-          </a:p>
-        </p:txBody>
-      </p:sp>
-      <p:sp>
-        <p:nvSpPr>
-          <p:cNvPr id="13" name="Text 11"/>
-          <p:cNvSpPr/>
-          <p:nvPr/>
-        </p:nvSpPr>
-        <p:spPr>
-          <a:xfrm>
-            <a:off x="502920" y="3584448"/>
-            <a:ext cx="1371600" cy="228600"/>
-          </a:xfrm>
-          <a:prstGeom prst="rect">
-            <a:avLst/>
-          </a:prstGeom>
-          <a:noFill/>
-          <a:ln/>
-        </p:spPr>
-        <p:txBody>
-          <a:bodyPr wrap="square" lIns="0" tIns="0" rIns="0" bIns="0" rtlCol="0" anchor="ctr"/>
-          <a:lstStyle/>
-          <a:p>
-            <a:pPr algn="ctr" indent="0" marL="0">
-              <a:buNone/>
-            </a:pPr>
-            <a:r>
-              <a:rPr lang="en-US" sz="1100" dirty="0">
-                <a:solidFill>
-                  <a:srgbClr val="6B6B6B"/>
-                </a:solidFill>
-                <a:latin typeface="TH Sarabun New" pitchFamily="34" charset="0"/>
-                <a:ea typeface="TH Sarabun New" pitchFamily="34" charset="-122"/>
-                <a:cs typeface="TH Sarabun New" pitchFamily="34" charset="-120"/>
-              </a:rPr>
-              <a:t>ชม./ปี</a:t>
-            </a:r>
-            <a:endParaRPr lang="en-US" sz="1100" dirty="0"/>
-          </a:p>
-        </p:txBody>
-      </p:sp>
-      <p:sp>
-        <p:nvSpPr>
-          <p:cNvPr id="14" name="Shape 12"/>
-          <p:cNvSpPr/>
-          <p:nvPr/>
-        </p:nvSpPr>
-        <p:spPr>
-          <a:xfrm>
-            <a:off x="2057400" y="1371600"/>
-            <a:ext cx="1645920" cy="2468880"/>
-          </a:xfrm>
-          <a:prstGeom prst="rect">
+          <p:cNvPr id="19" name="Shape 17"/>
+          <p:cNvSpPr/>
+          <p:nvPr/>
+        </p:nvSpPr>
+        <p:spPr>
+          <a:xfrm>
+            <a:off x="1645920" y="2194560"/>
+            <a:ext cx="777240" cy="182880"/>
+          </a:xfrm>
+          <a:prstGeom prst="ellipse">
             <a:avLst/>
           </a:prstGeom>
           <a:solidFill>
-            <a:srgbClr val="FFFFFF"/>
+            <a:srgbClr val="C9A961"/>
           </a:solidFill>
-          <a:ln w="6350">
+          <a:ln w="12700">
             <a:solidFill>
               <a:srgbClr val="C9A961"/>
             </a:solidFill>
             <a:prstDash val="solid"/>
           </a:ln>
-          <a:effectLst>
-            <a:outerShdw sx="100000" sy="100000" kx="0" ky="0" algn="bl" rotWithShape="0" blurRad="101600" dist="25400" dir="5400000">
-              <a:srgbClr val="000000">
-                <a:alpha val="8000"/>
-              </a:srgbClr>
-            </a:outerShdw>
-          </a:effectLst>
-        </p:spPr>
-      </p:sp>
-      <p:sp>
-        <p:nvSpPr>
-          <p:cNvPr id="15" name="Shape 13"/>
-          <p:cNvSpPr/>
-          <p:nvPr/>
-        </p:nvSpPr>
-        <p:spPr>
-          <a:xfrm>
-            <a:off x="2057400" y="1371600"/>
-            <a:ext cx="1645920" cy="109728"/>
+        </p:spPr>
+      </p:sp>
+      <p:sp>
+        <p:nvSpPr>
+          <p:cNvPr id="20" name="Shape 18"/>
+          <p:cNvSpPr/>
+          <p:nvPr/>
+        </p:nvSpPr>
+        <p:spPr>
+          <a:xfrm>
+            <a:off x="1645920" y="2286000"/>
+            <a:ext cx="777240" cy="411480"/>
           </a:xfrm>
           <a:prstGeom prst="rect">
             <a:avLst/>
@@ -5123,230 +5362,62 @@
       </p:sp>
       <p:sp>
         <p:nvSpPr>
-          <p:cNvPr id="16" name="Shape 14"/>
-          <p:cNvSpPr/>
-          <p:nvPr/>
-        </p:nvSpPr>
-        <p:spPr>
-          <a:xfrm>
-            <a:off x="3246120" y="1554480"/>
-            <a:ext cx="320040" cy="320040"/>
+          <p:cNvPr id="21" name="Shape 19"/>
+          <p:cNvSpPr/>
+          <p:nvPr/>
+        </p:nvSpPr>
+        <p:spPr>
+          <a:xfrm>
+            <a:off x="1645920" y="2606040"/>
+            <a:ext cx="777240" cy="182880"/>
           </a:xfrm>
           <a:prstGeom prst="ellipse">
             <a:avLst/>
           </a:prstGeom>
           <a:solidFill>
-            <a:srgbClr val="C9A961"/>
+            <a:srgbClr val="F5EDD6"/>
           </a:solidFill>
-          <a:ln/>
-        </p:spPr>
-      </p:sp>
-      <p:sp>
-        <p:nvSpPr>
-          <p:cNvPr id="17" name="Text 15"/>
-          <p:cNvSpPr/>
-          <p:nvPr/>
-        </p:nvSpPr>
-        <p:spPr>
-          <a:xfrm>
-            <a:off x="3246120" y="1554480"/>
-            <a:ext cx="320040" cy="320040"/>
-          </a:xfrm>
-          <a:prstGeom prst="rect">
-            <a:avLst/>
-          </a:prstGeom>
-          <a:noFill/>
-          <a:ln/>
-        </p:spPr>
-        <p:txBody>
-          <a:bodyPr wrap="square" lIns="0" tIns="0" rIns="0" bIns="0" rtlCol="0" anchor="ctr"/>
-          <a:lstStyle/>
-          <a:p>
-            <a:pPr algn="ctr" indent="0" marL="0">
-              <a:buNone/>
-            </a:pPr>
-            <a:r>
-              <a:rPr lang="en-US" sz="1400" b="1" dirty="0">
-                <a:solidFill>
-                  <a:srgbClr val="FFFFFF"/>
-                </a:solidFill>
-                <a:latin typeface="Calibri" pitchFamily="34" charset="0"/>
-                <a:ea typeface="Calibri" pitchFamily="34" charset="-122"/>
-                <a:cs typeface="Calibri" pitchFamily="34" charset="-120"/>
-              </a:rPr>
-              <a:t>2</a:t>
-            </a:r>
-            <a:endParaRPr lang="en-US" sz="1400" dirty="0"/>
-          </a:p>
-        </p:txBody>
-      </p:sp>
-      <p:sp>
-        <p:nvSpPr>
-          <p:cNvPr id="18" name="Text 16"/>
-          <p:cNvSpPr/>
-          <p:nvPr/>
-        </p:nvSpPr>
-        <p:spPr>
-          <a:xfrm>
-            <a:off x="2194560" y="1600200"/>
-            <a:ext cx="1005840" cy="365760"/>
-          </a:xfrm>
-          <a:prstGeom prst="rect">
-            <a:avLst/>
-          </a:prstGeom>
-          <a:noFill/>
-          <a:ln/>
-        </p:spPr>
-        <p:txBody>
-          <a:bodyPr wrap="square" lIns="0" tIns="0" rIns="0" bIns="0" rtlCol="0" anchor="ctr"/>
-          <a:lstStyle/>
-          <a:p>
-            <a:pPr indent="0" marL="0">
-              <a:buNone/>
-            </a:pPr>
-            <a:r>
-              <a:rPr lang="en-US" sz="1800" b="1" dirty="0">
-                <a:solidFill>
-                  <a:srgbClr val="1A1A1A"/>
-                </a:solidFill>
-                <a:latin typeface="TH Sarabun New" pitchFamily="34" charset="0"/>
-                <a:ea typeface="TH Sarabun New" pitchFamily="34" charset="-122"/>
-                <a:cs typeface="TH Sarabun New" pitchFamily="34" charset="-120"/>
-              </a:rPr>
-              <a:t>รวบรวมเอกสาร</a:t>
-            </a:r>
-            <a:endParaRPr lang="en-US" sz="1800" dirty="0"/>
-          </a:p>
-        </p:txBody>
-      </p:sp>
-      <p:sp>
-        <p:nvSpPr>
-          <p:cNvPr id="19" name="Text 17"/>
-          <p:cNvSpPr/>
-          <p:nvPr/>
-        </p:nvSpPr>
-        <p:spPr>
-          <a:xfrm>
-            <a:off x="2194560" y="2011680"/>
-            <a:ext cx="1371600" cy="228600"/>
-          </a:xfrm>
-          <a:prstGeom prst="rect">
-            <a:avLst/>
-          </a:prstGeom>
-          <a:noFill/>
-          <a:ln/>
-        </p:spPr>
-        <p:txBody>
-          <a:bodyPr wrap="square" lIns="0" tIns="0" rIns="0" bIns="0" rtlCol="0" anchor="ctr"/>
-          <a:lstStyle/>
-          <a:p>
-            <a:pPr indent="0" marL="0">
-              <a:buNone/>
-            </a:pPr>
-            <a:r>
-              <a:rPr lang="en-US" sz="900" b="1" spc="200" kern="0" dirty="0">
-                <a:solidFill>
-                  <a:srgbClr val="C9A961"/>
-                </a:solidFill>
-                <a:latin typeface="Calibri" pitchFamily="34" charset="0"/>
-                <a:ea typeface="Calibri" pitchFamily="34" charset="-122"/>
-                <a:cs typeface="Calibri" pitchFamily="34" charset="-120"/>
-              </a:rPr>
-              <a:t>Gmail → Drive</a:t>
-            </a:r>
-            <a:endParaRPr lang="en-US" sz="900" dirty="0"/>
-          </a:p>
-        </p:txBody>
-      </p:sp>
-      <p:sp>
-        <p:nvSpPr>
-          <p:cNvPr id="20" name="Text 18"/>
-          <p:cNvSpPr/>
-          <p:nvPr/>
-        </p:nvSpPr>
-        <p:spPr>
-          <a:xfrm>
-            <a:off x="2194560" y="2286000"/>
-            <a:ext cx="1371600" cy="822960"/>
-          </a:xfrm>
-          <a:prstGeom prst="rect">
-            <a:avLst/>
-          </a:prstGeom>
-          <a:noFill/>
-          <a:ln/>
-        </p:spPr>
-        <p:txBody>
-          <a:bodyPr wrap="square" lIns="0" tIns="0" rIns="0" bIns="0" rtlCol="0" anchor="ctr"/>
-          <a:lstStyle/>
-          <a:p>
-            <a:pPr indent="0" marL="0">
-              <a:buNone/>
-            </a:pPr>
-            <a:r>
-              <a:rPr lang="en-US" sz="1100" dirty="0">
-                <a:solidFill>
-                  <a:srgbClr val="4A4A4A"/>
-                </a:solidFill>
-                <a:latin typeface="TH Sarabun New" pitchFamily="34" charset="0"/>
-                <a:ea typeface="TH Sarabun New" pitchFamily="34" charset="-122"/>
-                <a:cs typeface="TH Sarabun New" pitchFamily="34" charset="-120"/>
-              </a:rPr>
-              <a:t>ใบเสร็จ/รายงานที่เข้ามาทาง email</a:t>
-            </a:r>
-            <a:endParaRPr lang="en-US" sz="1100" dirty="0"/>
-          </a:p>
-          <a:p>
-            <a:pPr indent="0" marL="0">
-              <a:buNone/>
-            </a:pPr>
-            <a:r>
-              <a:rPr lang="en-US" sz="1100" dirty="0">
-                <a:solidFill>
-                  <a:srgbClr val="4A4A4A"/>
-                </a:solidFill>
-                <a:latin typeface="TH Sarabun New" pitchFamily="34" charset="0"/>
-                <a:ea typeface="TH Sarabun New" pitchFamily="34" charset="-122"/>
-                <a:cs typeface="TH Sarabun New" pitchFamily="34" charset="-120"/>
-              </a:rPr>
-              <a:t>จัดเก็บอัตโนมัติใน Drive โฟลเดอร์ที่กำหนด</a:t>
-            </a:r>
-            <a:endParaRPr lang="en-US" sz="1100" dirty="0"/>
-          </a:p>
-        </p:txBody>
-      </p:sp>
-      <p:sp>
-        <p:nvSpPr>
-          <p:cNvPr id="21" name="Shape 19"/>
-          <p:cNvSpPr/>
-          <p:nvPr/>
-        </p:nvSpPr>
-        <p:spPr>
-          <a:xfrm>
-            <a:off x="2194560" y="3154680"/>
-            <a:ext cx="1371600" cy="0"/>
-          </a:xfrm>
-          <a:prstGeom prst="line">
-            <a:avLst/>
-          </a:prstGeom>
-          <a:noFill/>
-          <a:ln w="6350">
+          <a:ln w="12700">
             <a:solidFill>
               <a:srgbClr val="C9A961"/>
             </a:solidFill>
-            <a:prstDash val="dash"/>
+            <a:prstDash val="solid"/>
           </a:ln>
         </p:spPr>
       </p:sp>
       <p:sp>
         <p:nvSpPr>
-          <p:cNvPr id="22" name="Text 20"/>
-          <p:cNvSpPr/>
-          <p:nvPr/>
-        </p:nvSpPr>
-        <p:spPr>
-          <a:xfrm>
-            <a:off x="2194560" y="3200400"/>
-            <a:ext cx="1371600" cy="411480"/>
+          <p:cNvPr id="22" name="Shape 20"/>
+          <p:cNvSpPr/>
+          <p:nvPr/>
+        </p:nvSpPr>
+        <p:spPr>
+          <a:xfrm>
+            <a:off x="1737360" y="2468880"/>
+            <a:ext cx="594360" cy="0"/>
+          </a:xfrm>
+          <a:prstGeom prst="line">
+            <a:avLst/>
+          </a:prstGeom>
+          <a:noFill/>
+          <a:ln w="6350">
+            <a:solidFill>
+              <a:srgbClr val="FFFFFF"/>
+            </a:solidFill>
+            <a:prstDash val="solid"/>
+          </a:ln>
+        </p:spPr>
+      </p:sp>
+      <p:sp>
+        <p:nvSpPr>
+          <p:cNvPr id="23" name="Text 21"/>
+          <p:cNvSpPr/>
+          <p:nvPr/>
+        </p:nvSpPr>
+        <p:spPr>
+          <a:xfrm>
+            <a:off x="1371600" y="2834640"/>
+            <a:ext cx="1325880" cy="274320"/>
           </a:xfrm>
           <a:prstGeom prst="rect">
             <a:avLst/>
@@ -5362,56 +5433,17 @@
               <a:buNone/>
             </a:pPr>
             <a:r>
-              <a:rPr lang="en-US" sz="2800" b="1" dirty="0">
-                <a:solidFill>
-                  <a:srgbClr val="C9A961"/>
-                </a:solidFill>
-                <a:latin typeface="Calibri" pitchFamily="34" charset="0"/>
-                <a:ea typeface="Calibri" pitchFamily="34" charset="-122"/>
-                <a:cs typeface="Calibri" pitchFamily="34" charset="-120"/>
-              </a:rPr>
-              <a:t>33</a:t>
-            </a:r>
-            <a:endParaRPr lang="en-US" sz="2800" dirty="0"/>
-          </a:p>
-        </p:txBody>
-      </p:sp>
-      <p:sp>
-        <p:nvSpPr>
-          <p:cNvPr id="23" name="Text 21"/>
-          <p:cNvSpPr/>
-          <p:nvPr/>
-        </p:nvSpPr>
-        <p:spPr>
-          <a:xfrm>
-            <a:off x="2194560" y="3584448"/>
-            <a:ext cx="1371600" cy="228600"/>
-          </a:xfrm>
-          <a:prstGeom prst="rect">
-            <a:avLst/>
-          </a:prstGeom>
-          <a:noFill/>
-          <a:ln/>
-        </p:spPr>
-        <p:txBody>
-          <a:bodyPr wrap="square" lIns="0" tIns="0" rIns="0" bIns="0" rtlCol="0" anchor="ctr"/>
-          <a:lstStyle/>
-          <a:p>
-            <a:pPr algn="ctr" indent="0" marL="0">
-              <a:buNone/>
-            </a:pPr>
-            <a:r>
-              <a:rPr lang="en-US" sz="1100" dirty="0">
-                <a:solidFill>
-                  <a:srgbClr val="6B6B6B"/>
-                </a:solidFill>
-                <a:latin typeface="TH Sarabun New" pitchFamily="34" charset="0"/>
-                <a:ea typeface="TH Sarabun New" pitchFamily="34" charset="-122"/>
-                <a:cs typeface="TH Sarabun New" pitchFamily="34" charset="-120"/>
-              </a:rPr>
-              <a:t>ชม./ปี</a:t>
-            </a:r>
-            <a:endParaRPr lang="en-US" sz="1100" dirty="0"/>
+              <a:rPr lang="en-US" sz="1200" b="1" dirty="0">
+                <a:solidFill>
+                  <a:srgbClr val="1A1A1A"/>
+                </a:solidFill>
+                <a:latin typeface="TH Sarabun New" pitchFamily="34" charset="0"/>
+                <a:ea typeface="TH Sarabun New" pitchFamily="34" charset="-122"/>
+                <a:cs typeface="TH Sarabun New" pitchFamily="34" charset="-120"/>
+              </a:rPr>
+              <a:t>Database</a:t>
+            </a:r>
+            <a:endParaRPr lang="en-US" sz="1200" dirty="0"/>
           </a:p>
         </p:txBody>
       </p:sp>
@@ -5423,80 +5455,319 @@
         </p:nvSpPr>
         <p:spPr>
           <a:xfrm>
-            <a:off x="3749040" y="1371600"/>
-            <a:ext cx="1645920" cy="2468880"/>
-          </a:xfrm>
-          <a:prstGeom prst="rect">
+            <a:off x="1645920" y="3429000"/>
+            <a:ext cx="777240" cy="182880"/>
+          </a:xfrm>
+          <a:prstGeom prst="ellipse">
+            <a:avLst/>
+          </a:prstGeom>
+          <a:solidFill>
+            <a:srgbClr val="2E8B57"/>
+          </a:solidFill>
+          <a:ln w="12700">
+            <a:solidFill>
+              <a:srgbClr val="006633"/>
+            </a:solidFill>
+            <a:prstDash val="solid"/>
+          </a:ln>
+        </p:spPr>
+      </p:sp>
+      <p:sp>
+        <p:nvSpPr>
+          <p:cNvPr id="25" name="Shape 23"/>
+          <p:cNvSpPr/>
+          <p:nvPr/>
+        </p:nvSpPr>
+        <p:spPr>
+          <a:xfrm>
+            <a:off x="1645920" y="3520440"/>
+            <a:ext cx="777240" cy="411480"/>
+          </a:xfrm>
+          <a:prstGeom prst="rect">
+            <a:avLst/>
+          </a:prstGeom>
+          <a:solidFill>
+            <a:srgbClr val="2E8B57"/>
+          </a:solidFill>
+          <a:ln/>
+        </p:spPr>
+      </p:sp>
+      <p:sp>
+        <p:nvSpPr>
+          <p:cNvPr id="26" name="Shape 24"/>
+          <p:cNvSpPr/>
+          <p:nvPr/>
+        </p:nvSpPr>
+        <p:spPr>
+          <a:xfrm>
+            <a:off x="1645920" y="3840480"/>
+            <a:ext cx="777240" cy="182880"/>
+          </a:xfrm>
+          <a:prstGeom prst="ellipse">
+            <a:avLst/>
+          </a:prstGeom>
+          <a:solidFill>
+            <a:srgbClr val="E8F5E9"/>
+          </a:solidFill>
+          <a:ln w="12700">
+            <a:solidFill>
+              <a:srgbClr val="006633"/>
+            </a:solidFill>
+            <a:prstDash val="solid"/>
+          </a:ln>
+        </p:spPr>
+      </p:sp>
+      <p:sp>
+        <p:nvSpPr>
+          <p:cNvPr id="27" name="Shape 25"/>
+          <p:cNvSpPr/>
+          <p:nvPr/>
+        </p:nvSpPr>
+        <p:spPr>
+          <a:xfrm>
+            <a:off x="1783080" y="3685032"/>
+            <a:ext cx="36576" cy="36576"/>
+          </a:xfrm>
+          <a:prstGeom prst="ellipse">
             <a:avLst/>
           </a:prstGeom>
           <a:solidFill>
             <a:srgbClr val="FFFFFF"/>
           </a:solidFill>
-          <a:ln w="6350">
+          <a:ln/>
+        </p:spPr>
+      </p:sp>
+      <p:sp>
+        <p:nvSpPr>
+          <p:cNvPr id="28" name="Shape 26"/>
+          <p:cNvSpPr/>
+          <p:nvPr/>
+        </p:nvSpPr>
+        <p:spPr>
+          <a:xfrm>
+            <a:off x="1783080" y="3794760"/>
+            <a:ext cx="36576" cy="36576"/>
+          </a:xfrm>
+          <a:prstGeom prst="ellipse">
+            <a:avLst/>
+          </a:prstGeom>
+          <a:solidFill>
+            <a:srgbClr val="FFFFFF"/>
+          </a:solidFill>
+          <a:ln/>
+        </p:spPr>
+      </p:sp>
+      <p:sp>
+        <p:nvSpPr>
+          <p:cNvPr id="29" name="Shape 27"/>
+          <p:cNvSpPr/>
+          <p:nvPr/>
+        </p:nvSpPr>
+        <p:spPr>
+          <a:xfrm>
+            <a:off x="1901952" y="3685032"/>
+            <a:ext cx="36576" cy="36576"/>
+          </a:xfrm>
+          <a:prstGeom prst="ellipse">
+            <a:avLst/>
+          </a:prstGeom>
+          <a:solidFill>
+            <a:srgbClr val="FFFFFF"/>
+          </a:solidFill>
+          <a:ln/>
+        </p:spPr>
+      </p:sp>
+      <p:sp>
+        <p:nvSpPr>
+          <p:cNvPr id="30" name="Shape 28"/>
+          <p:cNvSpPr/>
+          <p:nvPr/>
+        </p:nvSpPr>
+        <p:spPr>
+          <a:xfrm>
+            <a:off x="1901952" y="3794760"/>
+            <a:ext cx="36576" cy="36576"/>
+          </a:xfrm>
+          <a:prstGeom prst="ellipse">
+            <a:avLst/>
+          </a:prstGeom>
+          <a:solidFill>
+            <a:srgbClr val="FFFFFF"/>
+          </a:solidFill>
+          <a:ln/>
+        </p:spPr>
+      </p:sp>
+      <p:sp>
+        <p:nvSpPr>
+          <p:cNvPr id="31" name="Shape 29"/>
+          <p:cNvSpPr/>
+          <p:nvPr/>
+        </p:nvSpPr>
+        <p:spPr>
+          <a:xfrm>
+            <a:off x="2020824" y="3685032"/>
+            <a:ext cx="36576" cy="36576"/>
+          </a:xfrm>
+          <a:prstGeom prst="ellipse">
+            <a:avLst/>
+          </a:prstGeom>
+          <a:solidFill>
+            <a:srgbClr val="FFFFFF"/>
+          </a:solidFill>
+          <a:ln/>
+        </p:spPr>
+      </p:sp>
+      <p:sp>
+        <p:nvSpPr>
+          <p:cNvPr id="32" name="Shape 30"/>
+          <p:cNvSpPr/>
+          <p:nvPr/>
+        </p:nvSpPr>
+        <p:spPr>
+          <a:xfrm>
+            <a:off x="2020824" y="3794760"/>
+            <a:ext cx="36576" cy="36576"/>
+          </a:xfrm>
+          <a:prstGeom prst="ellipse">
+            <a:avLst/>
+          </a:prstGeom>
+          <a:solidFill>
+            <a:srgbClr val="FFFFFF"/>
+          </a:solidFill>
+          <a:ln/>
+        </p:spPr>
+      </p:sp>
+      <p:sp>
+        <p:nvSpPr>
+          <p:cNvPr id="33" name="Shape 31"/>
+          <p:cNvSpPr/>
+          <p:nvPr/>
+        </p:nvSpPr>
+        <p:spPr>
+          <a:xfrm>
+            <a:off x="2139696" y="3685032"/>
+            <a:ext cx="36576" cy="36576"/>
+          </a:xfrm>
+          <a:prstGeom prst="ellipse">
+            <a:avLst/>
+          </a:prstGeom>
+          <a:solidFill>
+            <a:srgbClr val="FFFFFF"/>
+          </a:solidFill>
+          <a:ln/>
+        </p:spPr>
+      </p:sp>
+      <p:sp>
+        <p:nvSpPr>
+          <p:cNvPr id="34" name="Shape 32"/>
+          <p:cNvSpPr/>
+          <p:nvPr/>
+        </p:nvSpPr>
+        <p:spPr>
+          <a:xfrm>
+            <a:off x="2139696" y="3794760"/>
+            <a:ext cx="36576" cy="36576"/>
+          </a:xfrm>
+          <a:prstGeom prst="ellipse">
+            <a:avLst/>
+          </a:prstGeom>
+          <a:solidFill>
+            <a:srgbClr val="FFFFFF"/>
+          </a:solidFill>
+          <a:ln/>
+        </p:spPr>
+      </p:sp>
+      <p:sp>
+        <p:nvSpPr>
+          <p:cNvPr id="35" name="Text 33"/>
+          <p:cNvSpPr/>
+          <p:nvPr/>
+        </p:nvSpPr>
+        <p:spPr>
+          <a:xfrm>
+            <a:off x="1280160" y="4069080"/>
+            <a:ext cx="1508760" cy="411480"/>
+          </a:xfrm>
+          <a:prstGeom prst="rect">
+            <a:avLst/>
+          </a:prstGeom>
+          <a:noFill/>
+          <a:ln/>
+        </p:spPr>
+        <p:txBody>
+          <a:bodyPr wrap="square" lIns="0" tIns="0" rIns="0" bIns="0" rtlCol="0" anchor="ctr"/>
+          <a:lstStyle/>
+          <a:p>
+            <a:pPr algn="ctr" indent="0" marL="0">
+              <a:buNone/>
+            </a:pPr>
+            <a:r>
+              <a:rPr lang="en-US" sz="1200" b="1" dirty="0">
+                <a:solidFill>
+                  <a:srgbClr val="1A1A1A"/>
+                </a:solidFill>
+                <a:latin typeface="TH Sarabun New" pitchFamily="34" charset="0"/>
+                <a:ea typeface="TH Sarabun New" pitchFamily="34" charset="-122"/>
+                <a:cs typeface="TH Sarabun New" pitchFamily="34" charset="-120"/>
+              </a:rPr>
+              <a:t>Vector</a:t>
+            </a:r>
+            <a:endParaRPr lang="en-US" sz="1200" dirty="0"/>
+          </a:p>
+          <a:p>
+            <a:pPr algn="ctr" indent="0" marL="0">
+              <a:buNone/>
+            </a:pPr>
+            <a:r>
+              <a:rPr lang="en-US" sz="1200" b="1" dirty="0">
+                <a:solidFill>
+                  <a:srgbClr val="1A1A1A"/>
+                </a:solidFill>
+                <a:latin typeface="TH Sarabun New" pitchFamily="34" charset="0"/>
+                <a:ea typeface="TH Sarabun New" pitchFamily="34" charset="-122"/>
+                <a:cs typeface="TH Sarabun New" pitchFamily="34" charset="-120"/>
+              </a:rPr>
+              <a:t>Database</a:t>
+            </a:r>
+            <a:endParaRPr lang="en-US" sz="1200" dirty="0"/>
+          </a:p>
+        </p:txBody>
+      </p:sp>
+      <p:sp>
+        <p:nvSpPr>
+          <p:cNvPr id="36" name="Shape 34"/>
+          <p:cNvSpPr/>
+          <p:nvPr/>
+        </p:nvSpPr>
+        <p:spPr>
+          <a:xfrm>
+            <a:off x="4069080" y="2926080"/>
+            <a:ext cx="822960" cy="777240"/>
+          </a:xfrm>
+          <a:prstGeom prst="rect">
+            <a:avLst/>
+          </a:prstGeom>
+          <a:solidFill>
+            <a:srgbClr val="FFFFFF"/>
+          </a:solidFill>
+          <a:ln w="25400">
             <a:solidFill>
-              <a:srgbClr val="2E8B57"/>
+              <a:srgbClr val="006633"/>
             </a:solidFill>
             <a:prstDash val="solid"/>
           </a:ln>
-          <a:effectLst>
-            <a:outerShdw sx="100000" sy="100000" kx="0" ky="0" algn="bl" rotWithShape="0" blurRad="101600" dist="25400" dir="5400000">
-              <a:srgbClr val="000000">
-                <a:alpha val="8000"/>
-              </a:srgbClr>
-            </a:outerShdw>
-          </a:effectLst>
-        </p:spPr>
-      </p:sp>
-      <p:sp>
-        <p:nvSpPr>
-          <p:cNvPr id="25" name="Shape 23"/>
-          <p:cNvSpPr/>
-          <p:nvPr/>
-        </p:nvSpPr>
-        <p:spPr>
-          <a:xfrm>
-            <a:off x="3749040" y="1371600"/>
-            <a:ext cx="1645920" cy="109728"/>
-          </a:xfrm>
-          <a:prstGeom prst="rect">
-            <a:avLst/>
-          </a:prstGeom>
-          <a:solidFill>
-            <a:srgbClr val="2E8B57"/>
-          </a:solidFill>
-          <a:ln/>
-        </p:spPr>
-      </p:sp>
-      <p:sp>
-        <p:nvSpPr>
-          <p:cNvPr id="26" name="Shape 24"/>
-          <p:cNvSpPr/>
-          <p:nvPr/>
-        </p:nvSpPr>
-        <p:spPr>
-          <a:xfrm>
-            <a:off x="4937760" y="1554480"/>
-            <a:ext cx="320040" cy="320040"/>
-          </a:xfrm>
-          <a:prstGeom prst="ellipse">
-            <a:avLst/>
-          </a:prstGeom>
-          <a:solidFill>
-            <a:srgbClr val="2E8B57"/>
-          </a:solidFill>
-          <a:ln/>
-        </p:spPr>
-      </p:sp>
-      <p:sp>
-        <p:nvSpPr>
-          <p:cNvPr id="27" name="Text 25"/>
-          <p:cNvSpPr/>
-          <p:nvPr/>
-        </p:nvSpPr>
-        <p:spPr>
-          <a:xfrm>
-            <a:off x="4937760" y="1554480"/>
-            <a:ext cx="320040" cy="320040"/>
+        </p:spPr>
+      </p:sp>
+      <p:sp>
+        <p:nvSpPr>
+          <p:cNvPr id="37" name="Text 35"/>
+          <p:cNvSpPr/>
+          <p:nvPr/>
+        </p:nvSpPr>
+        <p:spPr>
+          <a:xfrm>
+            <a:off x="4069080" y="2926080"/>
+            <a:ext cx="822960" cy="777240"/>
           </a:xfrm>
           <a:prstGeom prst="rect">
             <a:avLst/>
@@ -5512,46 +5783,43 @@
               <a:buNone/>
             </a:pPr>
             <a:r>
-              <a:rPr lang="en-US" sz="1400" b="1" dirty="0">
-                <a:solidFill>
-                  <a:srgbClr val="FFFFFF"/>
-                </a:solidFill>
-                <a:latin typeface="Calibri" pitchFamily="34" charset="0"/>
-                <a:ea typeface="Calibri" pitchFamily="34" charset="-122"/>
-                <a:cs typeface="Calibri" pitchFamily="34" charset="-120"/>
-              </a:rPr>
-              <a:t>3</a:t>
-            </a:r>
-            <a:endParaRPr lang="en-US" sz="1400" dirty="0"/>
-          </a:p>
-        </p:txBody>
-      </p:sp>
-      <p:sp>
-        <p:nvSpPr>
-          <p:cNvPr id="28" name="Text 26"/>
-          <p:cNvSpPr/>
-          <p:nvPr/>
-        </p:nvSpPr>
-        <p:spPr>
-          <a:xfrm>
-            <a:off x="3886200" y="1600200"/>
-            <a:ext cx="1005840" cy="365760"/>
-          </a:xfrm>
-          <a:prstGeom prst="rect">
-            <a:avLst/>
-          </a:prstGeom>
-          <a:noFill/>
-          <a:ln/>
-        </p:spPr>
-        <p:txBody>
-          <a:bodyPr wrap="square" lIns="0" tIns="0" rIns="0" bIns="0" rtlCol="0" anchor="ctr"/>
-          <a:lstStyle/>
-          <a:p>
-            <a:pPr indent="0" marL="0">
-              <a:buNone/>
-            </a:pPr>
-            <a:r>
-              <a:rPr lang="en-US" sz="1800" b="1" dirty="0">
+              <a:rPr lang="en-US" sz="3200" dirty="0">
+                <a:solidFill>
+                  <a:srgbClr val="000000"/>
+                </a:solidFill>
+              </a:rPr>
+              <a:t>🧠</a:t>
+            </a:r>
+            <a:endParaRPr lang="en-US" sz="3200" dirty="0"/>
+          </a:p>
+        </p:txBody>
+      </p:sp>
+      <p:sp>
+        <p:nvSpPr>
+          <p:cNvPr id="38" name="Text 36"/>
+          <p:cNvSpPr/>
+          <p:nvPr/>
+        </p:nvSpPr>
+        <p:spPr>
+          <a:xfrm>
+            <a:off x="3611880" y="3749040"/>
+            <a:ext cx="1737360" cy="274320"/>
+          </a:xfrm>
+          <a:prstGeom prst="rect">
+            <a:avLst/>
+          </a:prstGeom>
+          <a:noFill/>
+          <a:ln/>
+        </p:spPr>
+        <p:txBody>
+          <a:bodyPr wrap="square" lIns="0" tIns="0" rIns="0" bIns="0" rtlCol="0" anchor="ctr"/>
+          <a:lstStyle/>
+          <a:p>
+            <a:pPr algn="ctr" indent="0" marL="0">
+              <a:buNone/>
+            </a:pPr>
+            <a:r>
+              <a:rPr lang="en-US" sz="1300" b="1" dirty="0">
                 <a:solidFill>
                   <a:srgbClr val="1A1A1A"/>
                 </a:solidFill>
@@ -5559,218 +5827,22 @@
                 <a:ea typeface="TH Sarabun New" pitchFamily="34" charset="-122"/>
                 <a:cs typeface="TH Sarabun New" pitchFamily="34" charset="-120"/>
               </a:rPr>
-              <a:t>อวยพรอัตโนมัติ</a:t>
-            </a:r>
-            <a:endParaRPr lang="en-US" sz="1800" dirty="0"/>
-          </a:p>
-        </p:txBody>
-      </p:sp>
-      <p:sp>
-        <p:nvSpPr>
-          <p:cNvPr id="29" name="Text 27"/>
-          <p:cNvSpPr/>
-          <p:nvPr/>
-        </p:nvSpPr>
-        <p:spPr>
-          <a:xfrm>
-            <a:off x="3886200" y="2011680"/>
-            <a:ext cx="1371600" cy="228600"/>
-          </a:xfrm>
-          <a:prstGeom prst="rect">
-            <a:avLst/>
-          </a:prstGeom>
-          <a:noFill/>
-          <a:ln/>
-        </p:spPr>
-        <p:txBody>
-          <a:bodyPr wrap="square" lIns="0" tIns="0" rIns="0" bIns="0" rtlCol="0" anchor="ctr"/>
-          <a:lstStyle/>
-          <a:p>
-            <a:pPr indent="0" marL="0">
-              <a:buNone/>
-            </a:pPr>
-            <a:r>
-              <a:rPr lang="en-US" sz="900" b="1" spc="200" kern="0" dirty="0">
-                <a:solidFill>
-                  <a:srgbClr val="2E8B57"/>
-                </a:solidFill>
-                <a:latin typeface="Calibri" pitchFamily="34" charset="0"/>
-                <a:ea typeface="Calibri" pitchFamily="34" charset="-122"/>
-                <a:cs typeface="Calibri" pitchFamily="34" charset="-120"/>
-              </a:rPr>
-              <a:t>Schedule → LINE</a:t>
-            </a:r>
-            <a:endParaRPr lang="en-US" sz="900" dirty="0"/>
-          </a:p>
-        </p:txBody>
-      </p:sp>
-      <p:sp>
-        <p:nvSpPr>
-          <p:cNvPr id="30" name="Text 28"/>
-          <p:cNvSpPr/>
-          <p:nvPr/>
-        </p:nvSpPr>
-        <p:spPr>
-          <a:xfrm>
-            <a:off x="3886200" y="2286000"/>
-            <a:ext cx="1371600" cy="822960"/>
-          </a:xfrm>
-          <a:prstGeom prst="rect">
-            <a:avLst/>
-          </a:prstGeom>
-          <a:noFill/>
-          <a:ln/>
-        </p:spPr>
-        <p:txBody>
-          <a:bodyPr wrap="square" lIns="0" tIns="0" rIns="0" bIns="0" rtlCol="0" anchor="ctr"/>
-          <a:lstStyle/>
-          <a:p>
-            <a:pPr indent="0" marL="0">
-              <a:buNone/>
-            </a:pPr>
-            <a:r>
-              <a:rPr lang="en-US" sz="1100" dirty="0">
-                <a:solidFill>
-                  <a:srgbClr val="4A4A4A"/>
-                </a:solidFill>
-                <a:latin typeface="TH Sarabun New" pitchFamily="34" charset="0"/>
-                <a:ea typeface="TH Sarabun New" pitchFamily="34" charset="-122"/>
-                <a:cs typeface="TH Sarabun New" pitchFamily="34" charset="-120"/>
-              </a:rPr>
-              <a:t>ส่งข้อความวันเกิด/วันสำคัญ</a:t>
-            </a:r>
-            <a:endParaRPr lang="en-US" sz="1100" dirty="0"/>
-          </a:p>
-          <a:p>
-            <a:pPr indent="0" marL="0">
-              <a:buNone/>
-            </a:pPr>
-            <a:r>
-              <a:rPr lang="en-US" sz="1100" dirty="0">
-                <a:solidFill>
-                  <a:srgbClr val="4A4A4A"/>
-                </a:solidFill>
-                <a:latin typeface="TH Sarabun New" pitchFamily="34" charset="0"/>
-                <a:ea typeface="TH Sarabun New" pitchFamily="34" charset="-122"/>
-                <a:cs typeface="TH Sarabun New" pitchFamily="34" charset="-120"/>
-              </a:rPr>
-              <a:t>ให้บุคลากรในหน่วยงานทุกเช้า</a:t>
-            </a:r>
-            <a:endParaRPr lang="en-US" sz="1100" dirty="0"/>
-          </a:p>
-        </p:txBody>
-      </p:sp>
-      <p:sp>
-        <p:nvSpPr>
-          <p:cNvPr id="31" name="Shape 29"/>
-          <p:cNvSpPr/>
-          <p:nvPr/>
-        </p:nvSpPr>
-        <p:spPr>
-          <a:xfrm>
-            <a:off x="3886200" y="3154680"/>
-            <a:ext cx="1371600" cy="0"/>
-          </a:xfrm>
-          <a:prstGeom prst="line">
-            <a:avLst/>
-          </a:prstGeom>
-          <a:noFill/>
-          <a:ln w="6350">
-            <a:solidFill>
-              <a:srgbClr val="2E8B57"/>
-            </a:solidFill>
-            <a:prstDash val="dash"/>
-          </a:ln>
-        </p:spPr>
-      </p:sp>
-      <p:sp>
-        <p:nvSpPr>
-          <p:cNvPr id="32" name="Text 30"/>
-          <p:cNvSpPr/>
-          <p:nvPr/>
-        </p:nvSpPr>
-        <p:spPr>
-          <a:xfrm>
-            <a:off x="3886200" y="3200400"/>
-            <a:ext cx="1371600" cy="411480"/>
-          </a:xfrm>
-          <a:prstGeom prst="rect">
-            <a:avLst/>
-          </a:prstGeom>
-          <a:noFill/>
-          <a:ln/>
-        </p:spPr>
-        <p:txBody>
-          <a:bodyPr wrap="square" lIns="0" tIns="0" rIns="0" bIns="0" rtlCol="0" anchor="ctr"/>
-          <a:lstStyle/>
-          <a:p>
-            <a:pPr algn="ctr" indent="0" marL="0">
-              <a:buNone/>
-            </a:pPr>
-            <a:r>
-              <a:rPr lang="en-US" sz="2800" b="1" dirty="0">
-                <a:solidFill>
-                  <a:srgbClr val="2E8B57"/>
-                </a:solidFill>
-                <a:latin typeface="Calibri" pitchFamily="34" charset="0"/>
-                <a:ea typeface="Calibri" pitchFamily="34" charset="-122"/>
-                <a:cs typeface="Calibri" pitchFamily="34" charset="-120"/>
-              </a:rPr>
-              <a:t>30</a:t>
-            </a:r>
-            <a:endParaRPr lang="en-US" sz="2800" dirty="0"/>
-          </a:p>
-        </p:txBody>
-      </p:sp>
-      <p:sp>
-        <p:nvSpPr>
-          <p:cNvPr id="33" name="Text 31"/>
-          <p:cNvSpPr/>
-          <p:nvPr/>
-        </p:nvSpPr>
-        <p:spPr>
-          <a:xfrm>
-            <a:off x="3886200" y="3584448"/>
-            <a:ext cx="1371600" cy="228600"/>
-          </a:xfrm>
-          <a:prstGeom prst="rect">
-            <a:avLst/>
-          </a:prstGeom>
-          <a:noFill/>
-          <a:ln/>
-        </p:spPr>
-        <p:txBody>
-          <a:bodyPr wrap="square" lIns="0" tIns="0" rIns="0" bIns="0" rtlCol="0" anchor="ctr"/>
-          <a:lstStyle/>
-          <a:p>
-            <a:pPr algn="ctr" indent="0" marL="0">
-              <a:buNone/>
-            </a:pPr>
-            <a:r>
-              <a:rPr lang="en-US" sz="1100" dirty="0">
-                <a:solidFill>
-                  <a:srgbClr val="6B6B6B"/>
-                </a:solidFill>
-                <a:latin typeface="TH Sarabun New" pitchFamily="34" charset="0"/>
-                <a:ea typeface="TH Sarabun New" pitchFamily="34" charset="-122"/>
-                <a:cs typeface="TH Sarabun New" pitchFamily="34" charset="-120"/>
-              </a:rPr>
-              <a:t>ชม./ปี</a:t>
-            </a:r>
-            <a:endParaRPr lang="en-US" sz="1100" dirty="0"/>
-          </a:p>
-        </p:txBody>
-      </p:sp>
-      <p:sp>
-        <p:nvSpPr>
-          <p:cNvPr id="34" name="Shape 32"/>
-          <p:cNvSpPr/>
-          <p:nvPr/>
-        </p:nvSpPr>
-        <p:spPr>
-          <a:xfrm>
-            <a:off x="5440680" y="1371600"/>
-            <a:ext cx="1645920" cy="2468880"/>
+              <a:t>LLM</a:t>
+            </a:r>
+            <a:endParaRPr lang="en-US" sz="1300" dirty="0"/>
+          </a:p>
+        </p:txBody>
+      </p:sp>
+      <p:sp>
+        <p:nvSpPr>
+          <p:cNvPr id="39" name="Shape 37"/>
+          <p:cNvSpPr/>
+          <p:nvPr/>
+        </p:nvSpPr>
+        <p:spPr>
+          <a:xfrm>
+            <a:off x="6126480" y="2926080"/>
+            <a:ext cx="822960" cy="777240"/>
           </a:xfrm>
           <a:prstGeom prst="rect">
             <a:avLst/>
@@ -5778,365 +5850,159 @@
           <a:solidFill>
             <a:srgbClr val="FFFFFF"/>
           </a:solidFill>
-          <a:ln w="6350">
-            <a:solidFill>
-              <a:srgbClr val="004D26"/>
-            </a:solidFill>
-            <a:prstDash val="solid"/>
-          </a:ln>
-          <a:effectLst>
-            <a:outerShdw sx="100000" sy="100000" kx="0" ky="0" algn="bl" rotWithShape="0" blurRad="101600" dist="25400" dir="5400000">
-              <a:srgbClr val="000000">
-                <a:alpha val="8000"/>
-              </a:srgbClr>
-            </a:outerShdw>
-          </a:effectLst>
-        </p:spPr>
-      </p:sp>
-      <p:sp>
-        <p:nvSpPr>
-          <p:cNvPr id="35" name="Shape 33"/>
-          <p:cNvSpPr/>
-          <p:nvPr/>
-        </p:nvSpPr>
-        <p:spPr>
-          <a:xfrm>
-            <a:off x="5440680" y="1371600"/>
-            <a:ext cx="1645920" cy="109728"/>
-          </a:xfrm>
-          <a:prstGeom prst="rect">
-            <a:avLst/>
-          </a:prstGeom>
-          <a:solidFill>
-            <a:srgbClr val="004D26"/>
-          </a:solidFill>
-          <a:ln/>
-        </p:spPr>
-      </p:sp>
-      <p:sp>
-        <p:nvSpPr>
-          <p:cNvPr id="36" name="Shape 34"/>
-          <p:cNvSpPr/>
-          <p:nvPr/>
-        </p:nvSpPr>
-        <p:spPr>
-          <a:xfrm>
-            <a:off x="6629400" y="1554480"/>
-            <a:ext cx="320040" cy="320040"/>
-          </a:xfrm>
-          <a:prstGeom prst="ellipse">
-            <a:avLst/>
-          </a:prstGeom>
-          <a:solidFill>
-            <a:srgbClr val="004D26"/>
-          </a:solidFill>
-          <a:ln/>
-        </p:spPr>
-      </p:sp>
-      <p:sp>
-        <p:nvSpPr>
-          <p:cNvPr id="37" name="Text 35"/>
-          <p:cNvSpPr/>
-          <p:nvPr/>
-        </p:nvSpPr>
-        <p:spPr>
-          <a:xfrm>
-            <a:off x="6629400" y="1554480"/>
-            <a:ext cx="320040" cy="320040"/>
-          </a:xfrm>
-          <a:prstGeom prst="rect">
-            <a:avLst/>
-          </a:prstGeom>
-          <a:noFill/>
-          <a:ln/>
-        </p:spPr>
-        <p:txBody>
-          <a:bodyPr wrap="square" lIns="0" tIns="0" rIns="0" bIns="0" rtlCol="0" anchor="ctr"/>
-          <a:lstStyle/>
-          <a:p>
-            <a:pPr algn="ctr" indent="0" marL="0">
-              <a:buNone/>
-            </a:pPr>
-            <a:r>
-              <a:rPr lang="en-US" sz="1400" b="1" dirty="0">
-                <a:solidFill>
-                  <a:srgbClr val="FFFFFF"/>
-                </a:solidFill>
-                <a:latin typeface="Calibri" pitchFamily="34" charset="0"/>
-                <a:ea typeface="Calibri" pitchFamily="34" charset="-122"/>
-                <a:cs typeface="Calibri" pitchFamily="34" charset="-120"/>
-              </a:rPr>
-              <a:t>4</a:t>
-            </a:r>
-            <a:endParaRPr lang="en-US" sz="1400" dirty="0"/>
-          </a:p>
-        </p:txBody>
-      </p:sp>
-      <p:sp>
-        <p:nvSpPr>
-          <p:cNvPr id="38" name="Text 36"/>
-          <p:cNvSpPr/>
-          <p:nvPr/>
-        </p:nvSpPr>
-        <p:spPr>
-          <a:xfrm>
-            <a:off x="5577840" y="1600200"/>
-            <a:ext cx="1005840" cy="365760"/>
-          </a:xfrm>
-          <a:prstGeom prst="rect">
-            <a:avLst/>
-          </a:prstGeom>
-          <a:noFill/>
-          <a:ln/>
-        </p:spPr>
-        <p:txBody>
-          <a:bodyPr wrap="square" lIns="0" tIns="0" rIns="0" bIns="0" rtlCol="0" anchor="ctr"/>
-          <a:lstStyle/>
-          <a:p>
-            <a:pPr indent="0" marL="0">
-              <a:buNone/>
-            </a:pPr>
-            <a:r>
-              <a:rPr lang="en-US" sz="1800" b="1" dirty="0">
-                <a:solidFill>
-                  <a:srgbClr val="1A1A1A"/>
-                </a:solidFill>
-                <a:latin typeface="TH Sarabun New" pitchFamily="34" charset="0"/>
-                <a:ea typeface="TH Sarabun New" pitchFamily="34" charset="-122"/>
-                <a:cs typeface="TH Sarabun New" pitchFamily="34" charset="-120"/>
-              </a:rPr>
-              <a:t>เฝ้าระวังสต๊อก</a:t>
-            </a:r>
-            <a:endParaRPr lang="en-US" sz="1800" dirty="0"/>
-          </a:p>
-        </p:txBody>
-      </p:sp>
-      <p:sp>
-        <p:nvSpPr>
-          <p:cNvPr id="39" name="Text 37"/>
-          <p:cNvSpPr/>
-          <p:nvPr/>
-        </p:nvSpPr>
-        <p:spPr>
-          <a:xfrm>
-            <a:off x="5577840" y="2011680"/>
-            <a:ext cx="1371600" cy="228600"/>
-          </a:xfrm>
-          <a:prstGeom prst="rect">
-            <a:avLst/>
-          </a:prstGeom>
-          <a:noFill/>
-          <a:ln/>
-        </p:spPr>
-        <p:txBody>
-          <a:bodyPr wrap="square" lIns="0" tIns="0" rIns="0" bIns="0" rtlCol="0" anchor="ctr"/>
-          <a:lstStyle/>
-          <a:p>
-            <a:pPr indent="0" marL="0">
-              <a:buNone/>
-            </a:pPr>
-            <a:r>
-              <a:rPr lang="en-US" sz="900" b="1" spc="200" kern="0" dirty="0">
-                <a:solidFill>
-                  <a:srgbClr val="004D26"/>
-                </a:solidFill>
-                <a:latin typeface="Calibri" pitchFamily="34" charset="0"/>
-                <a:ea typeface="Calibri" pitchFamily="34" charset="-122"/>
-                <a:cs typeface="Calibri" pitchFamily="34" charset="-120"/>
-              </a:rPr>
-              <a:t>Sheets → Alert</a:t>
-            </a:r>
-            <a:endParaRPr lang="en-US" sz="900" dirty="0"/>
-          </a:p>
-        </p:txBody>
-      </p:sp>
-      <p:sp>
-        <p:nvSpPr>
-          <p:cNvPr id="40" name="Text 38"/>
-          <p:cNvSpPr/>
-          <p:nvPr/>
-        </p:nvSpPr>
-        <p:spPr>
-          <a:xfrm>
-            <a:off x="5577840" y="2286000"/>
-            <a:ext cx="1371600" cy="822960"/>
-          </a:xfrm>
-          <a:prstGeom prst="rect">
-            <a:avLst/>
-          </a:prstGeom>
-          <a:noFill/>
-          <a:ln/>
-        </p:spPr>
-        <p:txBody>
-          <a:bodyPr wrap="square" lIns="0" tIns="0" rIns="0" bIns="0" rtlCol="0" anchor="ctr"/>
-          <a:lstStyle/>
-          <a:p>
-            <a:pPr indent="0" marL="0">
-              <a:buNone/>
-            </a:pPr>
-            <a:r>
-              <a:rPr lang="en-US" sz="1100" dirty="0">
-                <a:solidFill>
-                  <a:srgbClr val="4A4A4A"/>
-                </a:solidFill>
-                <a:latin typeface="TH Sarabun New" pitchFamily="34" charset="0"/>
-                <a:ea typeface="TH Sarabun New" pitchFamily="34" charset="-122"/>
-                <a:cs typeface="TH Sarabun New" pitchFamily="34" charset="-120"/>
-              </a:rPr>
-              <a:t>ตรวจ stock ทุก 6 ชม. → ถ้าต่ำ</a:t>
-            </a:r>
-            <a:endParaRPr lang="en-US" sz="1100" dirty="0"/>
-          </a:p>
-          <a:p>
-            <a:pPr indent="0" marL="0">
-              <a:buNone/>
-            </a:pPr>
-            <a:r>
-              <a:rPr lang="en-US" sz="1100" dirty="0">
-                <a:solidFill>
-                  <a:srgbClr val="4A4A4A"/>
-                </a:solidFill>
-                <a:latin typeface="TH Sarabun New" pitchFamily="34" charset="0"/>
-                <a:ea typeface="TH Sarabun New" pitchFamily="34" charset="-122"/>
-                <a:cs typeface="TH Sarabun New" pitchFamily="34" charset="-120"/>
-              </a:rPr>
-              <a:t>แจ้งผู้รับผิดชอบทาง LINE/Email</a:t>
-            </a:r>
-            <a:endParaRPr lang="en-US" sz="1100" dirty="0"/>
-          </a:p>
-        </p:txBody>
-      </p:sp>
-      <p:sp>
-        <p:nvSpPr>
-          <p:cNvPr id="41" name="Shape 39"/>
-          <p:cNvSpPr/>
-          <p:nvPr/>
-        </p:nvSpPr>
-        <p:spPr>
-          <a:xfrm>
-            <a:off x="5577840" y="3154680"/>
-            <a:ext cx="1371600" cy="0"/>
-          </a:xfrm>
-          <a:prstGeom prst="line">
-            <a:avLst/>
-          </a:prstGeom>
-          <a:noFill/>
-          <a:ln w="6350">
-            <a:solidFill>
-              <a:srgbClr val="004D26"/>
-            </a:solidFill>
-            <a:prstDash val="dash"/>
-          </a:ln>
-        </p:spPr>
-      </p:sp>
-      <p:sp>
-        <p:nvSpPr>
-          <p:cNvPr id="42" name="Text 40"/>
-          <p:cNvSpPr/>
-          <p:nvPr/>
-        </p:nvSpPr>
-        <p:spPr>
-          <a:xfrm>
-            <a:off x="5577840" y="3200400"/>
-            <a:ext cx="1371600" cy="411480"/>
-          </a:xfrm>
-          <a:prstGeom prst="rect">
-            <a:avLst/>
-          </a:prstGeom>
-          <a:noFill/>
-          <a:ln/>
-        </p:spPr>
-        <p:txBody>
-          <a:bodyPr wrap="square" lIns="0" tIns="0" rIns="0" bIns="0" rtlCol="0" anchor="ctr"/>
-          <a:lstStyle/>
-          <a:p>
-            <a:pPr algn="ctr" indent="0" marL="0">
-              <a:buNone/>
-            </a:pPr>
-            <a:r>
-              <a:rPr lang="en-US" sz="2800" b="1" dirty="0">
-                <a:solidFill>
-                  <a:srgbClr val="004D26"/>
-                </a:solidFill>
-                <a:latin typeface="Calibri" pitchFamily="34" charset="0"/>
-                <a:ea typeface="Calibri" pitchFamily="34" charset="-122"/>
-                <a:cs typeface="Calibri" pitchFamily="34" charset="-120"/>
-              </a:rPr>
-              <a:t>-2</a:t>
-            </a:r>
-            <a:endParaRPr lang="en-US" sz="2800" dirty="0"/>
-          </a:p>
-        </p:txBody>
-      </p:sp>
-      <p:sp>
-        <p:nvSpPr>
-          <p:cNvPr id="43" name="Text 41"/>
-          <p:cNvSpPr/>
-          <p:nvPr/>
-        </p:nvSpPr>
-        <p:spPr>
-          <a:xfrm>
-            <a:off x="5577840" y="3584448"/>
-            <a:ext cx="1371600" cy="228600"/>
-          </a:xfrm>
-          <a:prstGeom prst="rect">
-            <a:avLst/>
-          </a:prstGeom>
-          <a:noFill/>
-          <a:ln/>
-        </p:spPr>
-        <p:txBody>
-          <a:bodyPr wrap="square" lIns="0" tIns="0" rIns="0" bIns="0" rtlCol="0" anchor="ctr"/>
-          <a:lstStyle/>
-          <a:p>
-            <a:pPr algn="ctr" indent="0" marL="0">
-              <a:buNone/>
-            </a:pPr>
-            <a:r>
-              <a:rPr lang="en-US" sz="1100" dirty="0">
-                <a:solidFill>
-                  <a:srgbClr val="6B6B6B"/>
-                </a:solidFill>
-                <a:latin typeface="TH Sarabun New" pitchFamily="34" charset="0"/>
-                <a:ea typeface="TH Sarabun New" pitchFamily="34" charset="-122"/>
-                <a:cs typeface="TH Sarabun New" pitchFamily="34" charset="-120"/>
-              </a:rPr>
-              <a:t>stockout/ปี</a:t>
-            </a:r>
-            <a:endParaRPr lang="en-US" sz="1100" dirty="0"/>
-          </a:p>
-        </p:txBody>
-      </p:sp>
-      <p:sp>
-        <p:nvSpPr>
-          <p:cNvPr id="44" name="Shape 42"/>
-          <p:cNvSpPr/>
-          <p:nvPr/>
-        </p:nvSpPr>
-        <p:spPr>
-          <a:xfrm>
-            <a:off x="7132320" y="1371600"/>
-            <a:ext cx="1645920" cy="2468880"/>
-          </a:xfrm>
-          <a:prstGeom prst="rect">
-            <a:avLst/>
-          </a:prstGeom>
-          <a:solidFill>
-            <a:srgbClr val="FFFFFF"/>
-          </a:solidFill>
-          <a:ln w="6350">
+          <a:ln w="25400">
             <a:solidFill>
               <a:srgbClr val="B83D3D"/>
             </a:solidFill>
             <a:prstDash val="solid"/>
           </a:ln>
-          <a:effectLst>
-            <a:outerShdw sx="100000" sy="100000" kx="0" ky="0" algn="bl" rotWithShape="0" blurRad="101600" dist="25400" dir="5400000">
-              <a:srgbClr val="000000">
-                <a:alpha val="8000"/>
-              </a:srgbClr>
-            </a:outerShdw>
-          </a:effectLst>
+        </p:spPr>
+      </p:sp>
+      <p:sp>
+        <p:nvSpPr>
+          <p:cNvPr id="40" name="Text 38"/>
+          <p:cNvSpPr/>
+          <p:nvPr/>
+        </p:nvSpPr>
+        <p:spPr>
+          <a:xfrm>
+            <a:off x="6126480" y="2926080"/>
+            <a:ext cx="822960" cy="777240"/>
+          </a:xfrm>
+          <a:prstGeom prst="rect">
+            <a:avLst/>
+          </a:prstGeom>
+          <a:noFill/>
+          <a:ln/>
+        </p:spPr>
+        <p:txBody>
+          <a:bodyPr wrap="square" lIns="0" tIns="0" rIns="0" bIns="0" rtlCol="0" anchor="ctr"/>
+          <a:lstStyle/>
+          <a:p>
+            <a:pPr algn="ctr" indent="0" marL="0">
+              <a:buNone/>
+            </a:pPr>
+            <a:r>
+              <a:rPr lang="en-US" sz="3200" dirty="0">
+                <a:solidFill>
+                  <a:srgbClr val="000000"/>
+                </a:solidFill>
+              </a:rPr>
+              <a:t>⚙️</a:t>
+            </a:r>
+            <a:endParaRPr lang="en-US" sz="3200" dirty="0"/>
+          </a:p>
+        </p:txBody>
+      </p:sp>
+      <p:sp>
+        <p:nvSpPr>
+          <p:cNvPr id="41" name="Text 39"/>
+          <p:cNvSpPr/>
+          <p:nvPr/>
+        </p:nvSpPr>
+        <p:spPr>
+          <a:xfrm>
+            <a:off x="5669280" y="3749040"/>
+            <a:ext cx="1737360" cy="274320"/>
+          </a:xfrm>
+          <a:prstGeom prst="rect">
+            <a:avLst/>
+          </a:prstGeom>
+          <a:noFill/>
+          <a:ln/>
+        </p:spPr>
+        <p:txBody>
+          <a:bodyPr wrap="square" lIns="0" tIns="0" rIns="0" bIns="0" rtlCol="0" anchor="ctr"/>
+          <a:lstStyle/>
+          <a:p>
+            <a:pPr algn="ctr" indent="0" marL="0">
+              <a:buNone/>
+            </a:pPr>
+            <a:r>
+              <a:rPr lang="en-US" sz="1300" b="1" dirty="0">
+                <a:solidFill>
+                  <a:srgbClr val="1A1A1A"/>
+                </a:solidFill>
+                <a:latin typeface="TH Sarabun New" pitchFamily="34" charset="0"/>
+                <a:ea typeface="TH Sarabun New" pitchFamily="34" charset="-122"/>
+                <a:cs typeface="TH Sarabun New" pitchFamily="34" charset="-120"/>
+              </a:rPr>
+              <a:t>Action</a:t>
+            </a:r>
+            <a:endParaRPr lang="en-US" sz="1300" dirty="0"/>
+          </a:p>
+        </p:txBody>
+      </p:sp>
+      <p:sp>
+        <p:nvSpPr>
+          <p:cNvPr id="42" name="Shape 40"/>
+          <p:cNvSpPr/>
+          <p:nvPr/>
+        </p:nvSpPr>
+        <p:spPr>
+          <a:xfrm>
+            <a:off x="2468880" y="2423160"/>
+            <a:ext cx="1234440" cy="-274320"/>
+          </a:xfrm>
+          <a:prstGeom prst="line">
+            <a:avLst/>
+          </a:prstGeom>
+          <a:noFill/>
+          <a:ln w="19050">
+            <a:solidFill>
+              <a:srgbClr val="1A1A1A"/>
+            </a:solidFill>
+            <a:prstDash val="solid"/>
+            <a:tailEnd type="triangle"/>
+          </a:ln>
+        </p:spPr>
+      </p:sp>
+      <p:sp>
+        <p:nvSpPr>
+          <p:cNvPr id="43" name="Shape 41"/>
+          <p:cNvSpPr/>
+          <p:nvPr/>
+        </p:nvSpPr>
+        <p:spPr>
+          <a:xfrm>
+            <a:off x="2468880" y="2606040"/>
+            <a:ext cx="1234440" cy="-320040"/>
+          </a:xfrm>
+          <a:prstGeom prst="line">
+            <a:avLst/>
+          </a:prstGeom>
+          <a:noFill/>
+          <a:ln w="19050">
+            <a:solidFill>
+              <a:srgbClr val="1A1A1A"/>
+            </a:solidFill>
+            <a:prstDash val="solid"/>
+            <a:headEnd type="triangle"/>
+          </a:ln>
+        </p:spPr>
+      </p:sp>
+      <p:sp>
+        <p:nvSpPr>
+          <p:cNvPr id="44" name="Shape 42"/>
+          <p:cNvSpPr/>
+          <p:nvPr/>
+        </p:nvSpPr>
+        <p:spPr>
+          <a:xfrm flipV="1">
+            <a:off x="2468880" y="3657600"/>
+            <a:ext cx="1234440" cy="-1508760"/>
+          </a:xfrm>
+          <a:prstGeom prst="line">
+            <a:avLst/>
+          </a:prstGeom>
+          <a:noFill/>
+          <a:ln w="19050">
+            <a:solidFill>
+              <a:srgbClr val="1A1A1A"/>
+            </a:solidFill>
+            <a:prstDash val="solid"/>
+            <a:tailEnd type="triangle"/>
+          </a:ln>
         </p:spPr>
       </p:sp>
       <p:sp>
@@ -6146,49 +6012,278 @@
           <p:nvPr/>
         </p:nvSpPr>
         <p:spPr>
-          <a:xfrm>
-            <a:off x="7132320" y="1371600"/>
-            <a:ext cx="1645920" cy="109728"/>
+          <a:xfrm flipV="1">
+            <a:off x="2468880" y="3840480"/>
+            <a:ext cx="1234440" cy="-1508760"/>
+          </a:xfrm>
+          <a:prstGeom prst="line">
+            <a:avLst/>
+          </a:prstGeom>
+          <a:noFill/>
+          <a:ln w="19050">
+            <a:solidFill>
+              <a:srgbClr val="1A1A1A"/>
+            </a:solidFill>
+            <a:prstDash val="solid"/>
+            <a:headEnd type="triangle"/>
+          </a:ln>
+        </p:spPr>
+      </p:sp>
+      <p:sp>
+        <p:nvSpPr>
+          <p:cNvPr id="46" name="Shape 44"/>
+          <p:cNvSpPr/>
+          <p:nvPr/>
+        </p:nvSpPr>
+        <p:spPr>
+          <a:xfrm>
+            <a:off x="4114800" y="2468880"/>
+            <a:ext cx="0" cy="411480"/>
+          </a:xfrm>
+          <a:prstGeom prst="line">
+            <a:avLst/>
+          </a:prstGeom>
+          <a:noFill/>
+          <a:ln w="25400">
+            <a:solidFill>
+              <a:srgbClr val="1A1A1A"/>
+            </a:solidFill>
+            <a:prstDash val="solid"/>
+            <a:tailEnd type="triangle"/>
+          </a:ln>
+        </p:spPr>
+      </p:sp>
+      <p:sp>
+        <p:nvSpPr>
+          <p:cNvPr id="47" name="Shape 45"/>
+          <p:cNvSpPr/>
+          <p:nvPr/>
+        </p:nvSpPr>
+        <p:spPr>
+          <a:xfrm>
+            <a:off x="4937760" y="3314700"/>
+            <a:ext cx="1143000" cy="0"/>
+          </a:xfrm>
+          <a:prstGeom prst="line">
+            <a:avLst/>
+          </a:prstGeom>
+          <a:noFill/>
+          <a:ln w="25400">
+            <a:solidFill>
+              <a:srgbClr val="1A1A1A"/>
+            </a:solidFill>
+            <a:prstDash val="solid"/>
+            <a:tailEnd type="triangle"/>
+          </a:ln>
+        </p:spPr>
+      </p:sp>
+      <p:sp>
+        <p:nvSpPr>
+          <p:cNvPr id="48" name="Shape 46"/>
+          <p:cNvSpPr/>
+          <p:nvPr/>
+        </p:nvSpPr>
+        <p:spPr>
+          <a:xfrm>
+            <a:off x="4069080" y="4160520"/>
+            <a:ext cx="822960" cy="457200"/>
           </a:xfrm>
           <a:prstGeom prst="rect">
             <a:avLst/>
           </a:prstGeom>
           <a:solidFill>
-            <a:srgbClr val="B83D3D"/>
+            <a:srgbClr val="FFFFFF"/>
           </a:solidFill>
-          <a:ln/>
-        </p:spPr>
-      </p:sp>
-      <p:sp>
-        <p:nvSpPr>
-          <p:cNvPr id="46" name="Shape 44"/>
-          <p:cNvSpPr/>
-          <p:nvPr/>
-        </p:nvSpPr>
-        <p:spPr>
-          <a:xfrm>
-            <a:off x="8321040" y="1554480"/>
-            <a:ext cx="320040" cy="320040"/>
-          </a:xfrm>
-          <a:prstGeom prst="ellipse">
+          <a:ln w="25400">
+            <a:solidFill>
+              <a:srgbClr val="006633"/>
+            </a:solidFill>
+            <a:prstDash val="solid"/>
+          </a:ln>
+        </p:spPr>
+      </p:sp>
+      <p:sp>
+        <p:nvSpPr>
+          <p:cNvPr id="49" name="Text 47"/>
+          <p:cNvSpPr/>
+          <p:nvPr/>
+        </p:nvSpPr>
+        <p:spPr>
+          <a:xfrm>
+            <a:off x="4069080" y="4160520"/>
+            <a:ext cx="822960" cy="457200"/>
+          </a:xfrm>
+          <a:prstGeom prst="rect">
+            <a:avLst/>
+          </a:prstGeom>
+          <a:noFill/>
+          <a:ln/>
+        </p:spPr>
+        <p:txBody>
+          <a:bodyPr wrap="square" lIns="0" tIns="0" rIns="0" bIns="0" rtlCol="0" anchor="ctr"/>
+          <a:lstStyle/>
+          <a:p>
+            <a:pPr algn="ctr" indent="0" marL="0">
+              <a:buNone/>
+            </a:pPr>
+            <a:r>
+              <a:rPr lang="en-US" sz="2200" dirty="0">
+                <a:solidFill>
+                  <a:srgbClr val="000000"/>
+                </a:solidFill>
+              </a:rPr>
+              <a:t>🔄</a:t>
+            </a:r>
+            <a:endParaRPr lang="en-US" sz="2200" dirty="0"/>
+          </a:p>
+        </p:txBody>
+      </p:sp>
+      <p:sp>
+        <p:nvSpPr>
+          <p:cNvPr id="50" name="Text 48"/>
+          <p:cNvSpPr/>
+          <p:nvPr/>
+        </p:nvSpPr>
+        <p:spPr>
+          <a:xfrm>
+            <a:off x="4983480" y="4251960"/>
+            <a:ext cx="1463040" cy="274320"/>
+          </a:xfrm>
+          <a:prstGeom prst="rect">
+            <a:avLst/>
+          </a:prstGeom>
+          <a:noFill/>
+          <a:ln/>
+        </p:spPr>
+        <p:txBody>
+          <a:bodyPr wrap="square" lIns="0" tIns="0" rIns="0" bIns="0" rtlCol="0" anchor="ctr"/>
+          <a:lstStyle/>
+          <a:p>
+            <a:pPr indent="0" marL="0">
+              <a:buNone/>
+            </a:pPr>
+            <a:r>
+              <a:rPr lang="en-US" sz="1200" b="1" dirty="0">
+                <a:solidFill>
+                  <a:srgbClr val="1A1A1A"/>
+                </a:solidFill>
+                <a:latin typeface="TH Sarabun New" pitchFamily="34" charset="0"/>
+                <a:ea typeface="TH Sarabun New" pitchFamily="34" charset="-122"/>
+                <a:cs typeface="TH Sarabun New" pitchFamily="34" charset="-120"/>
+              </a:rPr>
+              <a:t>Feedback Loop</a:t>
+            </a:r>
+            <a:endParaRPr lang="en-US" sz="1200" dirty="0"/>
+          </a:p>
+        </p:txBody>
+      </p:sp>
+      <p:sp>
+        <p:nvSpPr>
+          <p:cNvPr id="51" name="Text 49"/>
+          <p:cNvSpPr/>
+          <p:nvPr/>
+        </p:nvSpPr>
+        <p:spPr>
+          <a:xfrm>
+            <a:off x="3703320" y="4663440"/>
+            <a:ext cx="457200" cy="274320"/>
+          </a:xfrm>
+          <a:prstGeom prst="rect">
+            <a:avLst/>
+          </a:prstGeom>
+          <a:noFill/>
+          <a:ln/>
+        </p:spPr>
+        <p:txBody>
+          <a:bodyPr wrap="square" lIns="0" tIns="0" rIns="0" bIns="0" rtlCol="0" anchor="ctr"/>
+          <a:lstStyle/>
+          <a:p>
+            <a:pPr algn="ctr" indent="0" marL="0">
+              <a:buNone/>
+            </a:pPr>
+            <a:r>
+              <a:rPr lang="en-US" sz="1600" dirty="0">
+                <a:solidFill>
+                  <a:srgbClr val="B0B0B0"/>
+                </a:solidFill>
+              </a:rPr>
+              <a:t>↻</a:t>
+            </a:r>
+            <a:endParaRPr lang="en-US" sz="1600" dirty="0"/>
+          </a:p>
+        </p:txBody>
+      </p:sp>
+      <p:sp>
+        <p:nvSpPr>
+          <p:cNvPr id="52" name="Text 50"/>
+          <p:cNvSpPr/>
+          <p:nvPr/>
+        </p:nvSpPr>
+        <p:spPr>
+          <a:xfrm>
+            <a:off x="4800600" y="4663440"/>
+            <a:ext cx="457200" cy="274320"/>
+          </a:xfrm>
+          <a:prstGeom prst="rect">
+            <a:avLst/>
+          </a:prstGeom>
+          <a:noFill/>
+          <a:ln/>
+        </p:spPr>
+        <p:txBody>
+          <a:bodyPr wrap="square" lIns="0" tIns="0" rIns="0" bIns="0" rtlCol="0" anchor="ctr"/>
+          <a:lstStyle/>
+          <a:p>
+            <a:pPr algn="ctr" indent="0" marL="0">
+              <a:buNone/>
+            </a:pPr>
+            <a:r>
+              <a:rPr lang="en-US" sz="1600" dirty="0">
+                <a:solidFill>
+                  <a:srgbClr val="B0B0B0"/>
+                </a:solidFill>
+              </a:rPr>
+              <a:t>↺</a:t>
+            </a:r>
+            <a:endParaRPr lang="en-US" sz="1600" dirty="0"/>
+          </a:p>
+        </p:txBody>
+      </p:sp>
+      <p:sp>
+        <p:nvSpPr>
+          <p:cNvPr id="53" name="Shape 51"/>
+          <p:cNvSpPr/>
+          <p:nvPr/>
+        </p:nvSpPr>
+        <p:spPr>
+          <a:xfrm>
+            <a:off x="7955280" y="1783080"/>
+            <a:ext cx="1097280" cy="2606040"/>
+          </a:xfrm>
+          <a:prstGeom prst="rect">
             <a:avLst/>
           </a:prstGeom>
           <a:solidFill>
-            <a:srgbClr val="B83D3D"/>
+            <a:srgbClr val="E8F5E9"/>
           </a:solidFill>
-          <a:ln/>
-        </p:spPr>
-      </p:sp>
-      <p:sp>
-        <p:nvSpPr>
-          <p:cNvPr id="47" name="Text 45"/>
-          <p:cNvSpPr/>
-          <p:nvPr/>
-        </p:nvSpPr>
-        <p:spPr>
-          <a:xfrm>
-            <a:off x="8321040" y="1554480"/>
-            <a:ext cx="320040" cy="320040"/>
+          <a:ln w="6350">
+            <a:solidFill>
+              <a:srgbClr val="006633"/>
+            </a:solidFill>
+            <a:prstDash val="solid"/>
+          </a:ln>
+        </p:spPr>
+      </p:sp>
+      <p:sp>
+        <p:nvSpPr>
+          <p:cNvPr id="54" name="Text 52"/>
+          <p:cNvSpPr/>
+          <p:nvPr/>
+        </p:nvSpPr>
+        <p:spPr>
+          <a:xfrm>
+            <a:off x="7955280" y="1874520"/>
+            <a:ext cx="1097280" cy="502920"/>
           </a:xfrm>
           <a:prstGeom prst="rect">
             <a:avLst/>
@@ -6204,46 +6299,102 @@
               <a:buNone/>
             </a:pPr>
             <a:r>
-              <a:rPr lang="en-US" sz="1400" b="1" dirty="0">
-                <a:solidFill>
-                  <a:srgbClr val="FFFFFF"/>
+              <a:rPr lang="en-US" sz="1100" b="1" dirty="0">
+                <a:solidFill>
+                  <a:srgbClr val="006633"/>
+                </a:solidFill>
+                <a:latin typeface="TH Sarabun New" pitchFamily="34" charset="0"/>
+                <a:ea typeface="TH Sarabun New" pitchFamily="34" charset="-122"/>
+                <a:cs typeface="TH Sarabun New" pitchFamily="34" charset="-120"/>
+              </a:rPr>
+              <a:t>ตัวอย่าง</a:t>
+            </a:r>
+            <a:endParaRPr lang="en-US" sz="1100" dirty="0"/>
+          </a:p>
+          <a:p>
+            <a:pPr algn="ctr" indent="0" marL="0">
+              <a:buNone/>
+            </a:pPr>
+            <a:r>
+              <a:rPr lang="en-US" sz="1100" b="1" dirty="0">
+                <a:solidFill>
+                  <a:srgbClr val="006633"/>
+                </a:solidFill>
+                <a:latin typeface="TH Sarabun New" pitchFamily="34" charset="0"/>
+                <a:ea typeface="TH Sarabun New" pitchFamily="34" charset="-122"/>
+                <a:cs typeface="TH Sarabun New" pitchFamily="34" charset="-120"/>
+              </a:rPr>
+              <a:t>ใน มก.</a:t>
+            </a:r>
+            <a:endParaRPr lang="en-US" sz="1100" dirty="0"/>
+          </a:p>
+        </p:txBody>
+      </p:sp>
+      <p:sp>
+        <p:nvSpPr>
+          <p:cNvPr id="55" name="Text 53"/>
+          <p:cNvSpPr/>
+          <p:nvPr/>
+        </p:nvSpPr>
+        <p:spPr>
+          <a:xfrm>
+            <a:off x="8001000" y="2423160"/>
+            <a:ext cx="1005840" cy="182880"/>
+          </a:xfrm>
+          <a:prstGeom prst="rect">
+            <a:avLst/>
+          </a:prstGeom>
+          <a:noFill/>
+          <a:ln/>
+        </p:spPr>
+        <p:txBody>
+          <a:bodyPr wrap="square" lIns="0" tIns="0" rIns="0" bIns="0" rtlCol="0" anchor="ctr"/>
+          <a:lstStyle/>
+          <a:p>
+            <a:pPr algn="ctr" indent="0" marL="0">
+              <a:buNone/>
+            </a:pPr>
+            <a:r>
+              <a:rPr lang="en-US" sz="800" b="1" spc="100" kern="0" dirty="0">
+                <a:solidFill>
+                  <a:srgbClr val="006633"/>
                 </a:solidFill>
                 <a:latin typeface="Calibri" pitchFamily="34" charset="0"/>
                 <a:ea typeface="Calibri" pitchFamily="34" charset="-122"/>
                 <a:cs typeface="Calibri" pitchFamily="34" charset="-120"/>
               </a:rPr>
-              <a:t>5</a:t>
-            </a:r>
-            <a:endParaRPr lang="en-US" sz="1400" dirty="0"/>
-          </a:p>
-        </p:txBody>
-      </p:sp>
-      <p:sp>
-        <p:nvSpPr>
-          <p:cNvPr id="48" name="Text 46"/>
-          <p:cNvSpPr/>
-          <p:nvPr/>
-        </p:nvSpPr>
-        <p:spPr>
-          <a:xfrm>
-            <a:off x="7269480" y="1600200"/>
-            <a:ext cx="1005840" cy="365760"/>
-          </a:xfrm>
-          <a:prstGeom prst="rect">
-            <a:avLst/>
-          </a:prstGeom>
-          <a:noFill/>
-          <a:ln/>
-        </p:spPr>
-        <p:txBody>
-          <a:bodyPr wrap="square" lIns="0" tIns="0" rIns="0" bIns="0" rtlCol="0" anchor="ctr"/>
-          <a:lstStyle/>
-          <a:p>
-            <a:pPr indent="0" marL="0">
-              <a:buNone/>
-            </a:pPr>
-            <a:r>
-              <a:rPr lang="en-US" sz="1800" b="1" dirty="0">
+              <a:t>User</a:t>
+            </a:r>
+            <a:endParaRPr lang="en-US" sz="800" dirty="0"/>
+          </a:p>
+        </p:txBody>
+      </p:sp>
+      <p:sp>
+        <p:nvSpPr>
+          <p:cNvPr id="56" name="Text 54"/>
+          <p:cNvSpPr/>
+          <p:nvPr/>
+        </p:nvSpPr>
+        <p:spPr>
+          <a:xfrm>
+            <a:off x="8001000" y="2560320"/>
+            <a:ext cx="1005840" cy="201168"/>
+          </a:xfrm>
+          <a:prstGeom prst="rect">
+            <a:avLst/>
+          </a:prstGeom>
+          <a:noFill/>
+          <a:ln/>
+        </p:spPr>
+        <p:txBody>
+          <a:bodyPr wrap="square" lIns="0" tIns="0" rIns="0" bIns="0" rtlCol="0" anchor="ctr"/>
+          <a:lstStyle/>
+          <a:p>
+            <a:pPr algn="ctr" indent="0" marL="0">
+              <a:buNone/>
+            </a:pPr>
+            <a:r>
+              <a:rPr lang="en-US" sz="1000" dirty="0">
                 <a:solidFill>
                   <a:srgbClr val="1A1A1A"/>
                 </a:solidFill>
@@ -6251,140 +6402,61 @@
                 <a:ea typeface="TH Sarabun New" pitchFamily="34" charset="-122"/>
                 <a:cs typeface="TH Sarabun New" pitchFamily="34" charset="-120"/>
               </a:rPr>
-              <a:t>สรุปเอกสาร + AI</a:t>
-            </a:r>
-            <a:endParaRPr lang="en-US" sz="1800" dirty="0"/>
-          </a:p>
-        </p:txBody>
-      </p:sp>
-      <p:sp>
-        <p:nvSpPr>
-          <p:cNvPr id="49" name="Text 47"/>
-          <p:cNvSpPr/>
-          <p:nvPr/>
-        </p:nvSpPr>
-        <p:spPr>
-          <a:xfrm>
-            <a:off x="7269480" y="2011680"/>
-            <a:ext cx="1371600" cy="228600"/>
-          </a:xfrm>
-          <a:prstGeom prst="rect">
-            <a:avLst/>
-          </a:prstGeom>
-          <a:noFill/>
-          <a:ln/>
-        </p:spPr>
-        <p:txBody>
-          <a:bodyPr wrap="square" lIns="0" tIns="0" rIns="0" bIns="0" rtlCol="0" anchor="ctr"/>
-          <a:lstStyle/>
-          <a:p>
-            <a:pPr indent="0" marL="0">
-              <a:buNone/>
-            </a:pPr>
-            <a:r>
-              <a:rPr lang="en-US" sz="900" b="1" spc="200" kern="0" dirty="0">
-                <a:solidFill>
-                  <a:srgbClr val="B83D3D"/>
+              <a:t>นิสิต/อาจารย์</a:t>
+            </a:r>
+            <a:endParaRPr lang="en-US" sz="1000" dirty="0"/>
+          </a:p>
+        </p:txBody>
+      </p:sp>
+      <p:sp>
+        <p:nvSpPr>
+          <p:cNvPr id="57" name="Text 55"/>
+          <p:cNvSpPr/>
+          <p:nvPr/>
+        </p:nvSpPr>
+        <p:spPr>
+          <a:xfrm>
+            <a:off x="8001000" y="2788920"/>
+            <a:ext cx="1005840" cy="182880"/>
+          </a:xfrm>
+          <a:prstGeom prst="rect">
+            <a:avLst/>
+          </a:prstGeom>
+          <a:noFill/>
+          <a:ln/>
+        </p:spPr>
+        <p:txBody>
+          <a:bodyPr wrap="square" lIns="0" tIns="0" rIns="0" bIns="0" rtlCol="0" anchor="ctr"/>
+          <a:lstStyle/>
+          <a:p>
+            <a:pPr algn="ctr" indent="0" marL="0">
+              <a:buNone/>
+            </a:pPr>
+            <a:r>
+              <a:rPr lang="en-US" sz="800" b="1" spc="100" kern="0" dirty="0">
+                <a:solidFill>
+                  <a:srgbClr val="006633"/>
                 </a:solidFill>
                 <a:latin typeface="Calibri" pitchFamily="34" charset="0"/>
                 <a:ea typeface="Calibri" pitchFamily="34" charset="-122"/>
                 <a:cs typeface="Calibri" pitchFamily="34" charset="-120"/>
               </a:rPr>
-              <a:t>Sheets → KU LLM → Email</a:t>
-            </a:r>
-            <a:endParaRPr lang="en-US" sz="900" dirty="0"/>
-          </a:p>
-        </p:txBody>
-      </p:sp>
-      <p:sp>
-        <p:nvSpPr>
-          <p:cNvPr id="50" name="Text 48"/>
-          <p:cNvSpPr/>
-          <p:nvPr/>
-        </p:nvSpPr>
-        <p:spPr>
-          <a:xfrm>
-            <a:off x="7269480" y="2286000"/>
-            <a:ext cx="1371600" cy="822960"/>
-          </a:xfrm>
-          <a:prstGeom prst="rect">
-            <a:avLst/>
-          </a:prstGeom>
-          <a:noFill/>
-          <a:ln/>
-        </p:spPr>
-        <p:txBody>
-          <a:bodyPr wrap="square" lIns="0" tIns="0" rIns="0" bIns="0" rtlCol="0" anchor="ctr"/>
-          <a:lstStyle/>
-          <a:p>
-            <a:pPr indent="0" marL="0">
-              <a:buNone/>
-            </a:pPr>
-            <a:r>
-              <a:rPr lang="en-US" sz="1100" dirty="0">
-                <a:solidFill>
-                  <a:srgbClr val="4A4A4A"/>
-                </a:solidFill>
-                <a:latin typeface="TH Sarabun New" pitchFamily="34" charset="0"/>
-                <a:ea typeface="TH Sarabun New" pitchFamily="34" charset="-122"/>
-                <a:cs typeface="TH Sarabun New" pitchFamily="34" charset="-120"/>
-              </a:rPr>
-              <a:t>AI สรุปรายงานเบิกจ่ายรายเดือน</a:t>
-            </a:r>
-            <a:endParaRPr lang="en-US" sz="1100" dirty="0"/>
-          </a:p>
-          <a:p>
-            <a:pPr indent="0" marL="0">
-              <a:buNone/>
-            </a:pPr>
-            <a:r>
-              <a:rPr lang="en-US" sz="1100" dirty="0">
-                <a:solidFill>
-                  <a:srgbClr val="4A4A4A"/>
-                </a:solidFill>
-                <a:latin typeface="TH Sarabun New" pitchFamily="34" charset="0"/>
-                <a:ea typeface="TH Sarabun New" pitchFamily="34" charset="-122"/>
-                <a:cs typeface="TH Sarabun New" pitchFamily="34" charset="-120"/>
-              </a:rPr>
-              <a:t>ส่ง executive ทางอีเมล</a:t>
-            </a:r>
-            <a:endParaRPr lang="en-US" sz="1100" dirty="0"/>
-          </a:p>
-        </p:txBody>
-      </p:sp>
-      <p:sp>
-        <p:nvSpPr>
-          <p:cNvPr id="51" name="Shape 49"/>
-          <p:cNvSpPr/>
-          <p:nvPr/>
-        </p:nvSpPr>
-        <p:spPr>
-          <a:xfrm>
-            <a:off x="7269480" y="3154680"/>
-            <a:ext cx="1371600" cy="0"/>
-          </a:xfrm>
-          <a:prstGeom prst="line">
-            <a:avLst/>
-          </a:prstGeom>
-          <a:noFill/>
-          <a:ln w="6350">
-            <a:solidFill>
-              <a:srgbClr val="B83D3D"/>
-            </a:solidFill>
-            <a:prstDash val="dash"/>
-          </a:ln>
-        </p:spPr>
-      </p:sp>
-      <p:sp>
-        <p:nvSpPr>
-          <p:cNvPr id="52" name="Text 50"/>
-          <p:cNvSpPr/>
-          <p:nvPr/>
-        </p:nvSpPr>
-        <p:spPr>
-          <a:xfrm>
-            <a:off x="7269480" y="3200400"/>
-            <a:ext cx="1371600" cy="411480"/>
+              <a:t>LLM</a:t>
+            </a:r>
+            <a:endParaRPr lang="en-US" sz="800" dirty="0"/>
+          </a:p>
+        </p:txBody>
+      </p:sp>
+      <p:sp>
+        <p:nvSpPr>
+          <p:cNvPr id="58" name="Text 56"/>
+          <p:cNvSpPr/>
+          <p:nvPr/>
+        </p:nvSpPr>
+        <p:spPr>
+          <a:xfrm>
+            <a:off x="8001000" y="2926080"/>
+            <a:ext cx="1005840" cy="201168"/>
           </a:xfrm>
           <a:prstGeom prst="rect">
             <a:avLst/>
@@ -6400,30 +6472,69 @@
               <a:buNone/>
             </a:pPr>
             <a:r>
-              <a:rPr lang="en-US" sz="2800" b="1" dirty="0">
-                <a:solidFill>
-                  <a:srgbClr val="B83D3D"/>
+              <a:rPr lang="en-US" sz="1000" dirty="0">
+                <a:solidFill>
+                  <a:srgbClr val="1A1A1A"/>
+                </a:solidFill>
+                <a:latin typeface="TH Sarabun New" pitchFamily="34" charset="0"/>
+                <a:ea typeface="TH Sarabun New" pitchFamily="34" charset="-122"/>
+                <a:cs typeface="TH Sarabun New" pitchFamily="34" charset="-120"/>
+              </a:rPr>
+              <a:t>KU LLM</a:t>
+            </a:r>
+            <a:endParaRPr lang="en-US" sz="1000" dirty="0"/>
+          </a:p>
+        </p:txBody>
+      </p:sp>
+      <p:sp>
+        <p:nvSpPr>
+          <p:cNvPr id="59" name="Text 57"/>
+          <p:cNvSpPr/>
+          <p:nvPr/>
+        </p:nvSpPr>
+        <p:spPr>
+          <a:xfrm>
+            <a:off x="8001000" y="3154680"/>
+            <a:ext cx="1005840" cy="182880"/>
+          </a:xfrm>
+          <a:prstGeom prst="rect">
+            <a:avLst/>
+          </a:prstGeom>
+          <a:noFill/>
+          <a:ln/>
+        </p:spPr>
+        <p:txBody>
+          <a:bodyPr wrap="square" lIns="0" tIns="0" rIns="0" bIns="0" rtlCol="0" anchor="ctr"/>
+          <a:lstStyle/>
+          <a:p>
+            <a:pPr algn="ctr" indent="0" marL="0">
+              <a:buNone/>
+            </a:pPr>
+            <a:r>
+              <a:rPr lang="en-US" sz="800" b="1" spc="100" kern="0" dirty="0">
+                <a:solidFill>
+                  <a:srgbClr val="006633"/>
                 </a:solidFill>
                 <a:latin typeface="Calibri" pitchFamily="34" charset="0"/>
                 <a:ea typeface="Calibri" pitchFamily="34" charset="-122"/>
                 <a:cs typeface="Calibri" pitchFamily="34" charset="-120"/>
               </a:rPr>
-              <a:t>50</a:t>
-            </a:r>
-            <a:endParaRPr lang="en-US" sz="2800" dirty="0"/>
-          </a:p>
-        </p:txBody>
-      </p:sp>
-      <p:sp>
-        <p:nvSpPr>
-          <p:cNvPr id="53" name="Text 51"/>
-          <p:cNvSpPr/>
-          <p:nvPr/>
-        </p:nvSpPr>
-        <p:spPr>
-          <a:xfrm>
-            <a:off x="7269480" y="3584448"/>
-            <a:ext cx="1371600" cy="228600"/>
+              <a:t>DB</a:t>
+            </a:r>
+            <a:endParaRPr lang="en-US" sz="800" dirty="0"/>
+          </a:p>
+        </p:txBody>
+      </p:sp>
+      <p:sp>
+        <p:nvSpPr>
+          <p:cNvPr id="60" name="Text 58"/>
+          <p:cNvSpPr/>
+          <p:nvPr/>
+        </p:nvSpPr>
+        <p:spPr>
+          <a:xfrm>
+            <a:off x="8001000" y="3291840"/>
+            <a:ext cx="1005840" cy="201168"/>
           </a:xfrm>
           <a:prstGeom prst="rect">
             <a:avLst/>
@@ -6439,50 +6550,30 @@
               <a:buNone/>
             </a:pPr>
             <a:r>
-              <a:rPr lang="en-US" sz="1100" dirty="0">
-                <a:solidFill>
-                  <a:srgbClr val="6B6B6B"/>
-                </a:solidFill>
-                <a:latin typeface="TH Sarabun New" pitchFamily="34" charset="0"/>
-                <a:ea typeface="TH Sarabun New" pitchFamily="34" charset="-122"/>
-                <a:cs typeface="TH Sarabun New" pitchFamily="34" charset="-120"/>
-              </a:rPr>
-              <a:t>ชม./ปี</a:t>
-            </a:r>
-            <a:endParaRPr lang="en-US" sz="1100" dirty="0"/>
-          </a:p>
-        </p:txBody>
-      </p:sp>
-      <p:sp>
-        <p:nvSpPr>
-          <p:cNvPr id="54" name="Shape 52"/>
-          <p:cNvSpPr/>
-          <p:nvPr/>
-        </p:nvSpPr>
-        <p:spPr>
-          <a:xfrm>
-            <a:off x="457200" y="4160520"/>
-            <a:ext cx="8229600" cy="777240"/>
-          </a:xfrm>
-          <a:prstGeom prst="rect">
-            <a:avLst/>
-          </a:prstGeom>
-          <a:solidFill>
-            <a:srgbClr val="006633"/>
-          </a:solidFill>
-          <a:ln/>
-        </p:spPr>
-      </p:sp>
-      <p:sp>
-        <p:nvSpPr>
-          <p:cNvPr id="55" name="Text 53"/>
-          <p:cNvSpPr/>
-          <p:nvPr/>
-        </p:nvSpPr>
-        <p:spPr>
-          <a:xfrm>
-            <a:off x="457200" y="4160520"/>
-            <a:ext cx="8229600" cy="411480"/>
+              <a:rPr lang="en-US" sz="1000" dirty="0">
+                <a:solidFill>
+                  <a:srgbClr val="1A1A1A"/>
+                </a:solidFill>
+                <a:latin typeface="TH Sarabun New" pitchFamily="34" charset="0"/>
+                <a:ea typeface="TH Sarabun New" pitchFamily="34" charset="-122"/>
+                <a:cs typeface="TH Sarabun New" pitchFamily="34" charset="-120"/>
+              </a:rPr>
+              <a:t>ทะเบียน</a:t>
+            </a:r>
+            <a:endParaRPr lang="en-US" sz="1000" dirty="0"/>
+          </a:p>
+        </p:txBody>
+      </p:sp>
+      <p:sp>
+        <p:nvSpPr>
+          <p:cNvPr id="61" name="Text 59"/>
+          <p:cNvSpPr/>
+          <p:nvPr/>
+        </p:nvSpPr>
+        <p:spPr>
+          <a:xfrm>
+            <a:off x="8001000" y="3520440"/>
+            <a:ext cx="1005840" cy="182880"/>
           </a:xfrm>
           <a:prstGeom prst="rect">
             <a:avLst/>
@@ -6498,121 +6589,264 @@
               <a:buNone/>
             </a:pPr>
             <a:r>
-              <a:rPr lang="en-US" sz="2200" b="1" dirty="0">
-                <a:solidFill>
-                  <a:srgbClr val="C9A961"/>
-                </a:solidFill>
-                <a:latin typeface="TH Sarabun New" pitchFamily="34" charset="0"/>
-                <a:ea typeface="TH Sarabun New" pitchFamily="34" charset="-122"/>
-                <a:cs typeface="TH Sarabun New" pitchFamily="34" charset="-120"/>
-              </a:rPr>
-              <a:t>5 Pattern</a:t>
-            </a:r>
-            <a:pPr algn="ctr" indent="0" marL="0">
-              <a:buNone/>
-            </a:pPr>
-            <a:r>
-              <a:rPr lang="en-US" sz="1800" dirty="0">
-                <a:solidFill>
-                  <a:srgbClr val="FFFFFF"/>
-                </a:solidFill>
-                <a:latin typeface="TH Sarabun New" pitchFamily="34" charset="0"/>
-                <a:ea typeface="TH Sarabun New" pitchFamily="34" charset="-122"/>
-                <a:cs typeface="TH Sarabun New" pitchFamily="34" charset="-120"/>
-              </a:rPr>
-              <a:t>  ×  33 ส่วนงาน  ×  4 วิทยาเขต  =  </a:t>
-            </a:r>
-            <a:pPr algn="ctr" indent="0" marL="0">
-              <a:buNone/>
-            </a:pPr>
-            <a:r>
-              <a:rPr lang="en-US" sz="2200" b="1" dirty="0">
-                <a:solidFill>
-                  <a:srgbClr val="C9A961"/>
-                </a:solidFill>
-                <a:latin typeface="TH Sarabun New" pitchFamily="34" charset="0"/>
-                <a:ea typeface="TH Sarabun New" pitchFamily="34" charset="-122"/>
-                <a:cs typeface="TH Sarabun New" pitchFamily="34" charset="-120"/>
-              </a:rPr>
-              <a:t>ROI หลักหมื่นชั่วโมง/ปี</a:t>
-            </a:r>
-            <a:endParaRPr lang="en-US" sz="2200" dirty="0"/>
-          </a:p>
-        </p:txBody>
-      </p:sp>
-      <p:sp>
-        <p:nvSpPr>
-          <p:cNvPr id="56" name="Text 54"/>
-          <p:cNvSpPr/>
-          <p:nvPr/>
-        </p:nvSpPr>
-        <p:spPr>
-          <a:xfrm>
-            <a:off x="457200" y="4526280"/>
-            <a:ext cx="8229600" cy="365760"/>
-          </a:xfrm>
-          <a:prstGeom prst="rect">
-            <a:avLst/>
-          </a:prstGeom>
-          <a:noFill/>
-          <a:ln/>
-        </p:spPr>
-        <p:txBody>
-          <a:bodyPr wrap="square" lIns="0" tIns="0" rIns="0" bIns="0" rtlCol="0" anchor="ctr"/>
-          <a:lstStyle/>
-          <a:p>
-            <a:pPr algn="ctr" indent="0" marL="0">
-              <a:buNone/>
-            </a:pPr>
-            <a:r>
-              <a:rPr lang="en-US" sz="1300" i="1" dirty="0">
-                <a:solidFill>
-                  <a:srgbClr val="F5EDD6"/>
-                </a:solidFill>
-                <a:latin typeface="TH Sarabun New" pitchFamily="34" charset="0"/>
-                <a:ea typeface="TH Sarabun New" pitchFamily="34" charset="-122"/>
-                <a:cs typeface="TH Sarabun New" pitchFamily="34" charset="-120"/>
-              </a:rPr>
-              <a:t>ทุก pattern reuse ได้ในงานอื่น — บุคลากรปรับเองได้โดยไม่ต้องเขียน code</a:t>
-            </a:r>
-            <a:endParaRPr lang="en-US" sz="1300" dirty="0"/>
-          </a:p>
-        </p:txBody>
-      </p:sp>
-      <p:sp>
-        <p:nvSpPr>
-          <p:cNvPr id="57" name="Text 55"/>
-          <p:cNvSpPr/>
-          <p:nvPr/>
-        </p:nvSpPr>
-        <p:spPr>
-          <a:xfrm>
-            <a:off x="8503920" y="4846320"/>
-            <a:ext cx="548640" cy="228600"/>
-          </a:xfrm>
-          <a:prstGeom prst="rect">
-            <a:avLst/>
-          </a:prstGeom>
-          <a:noFill/>
-          <a:ln/>
-        </p:spPr>
-        <p:txBody>
-          <a:bodyPr wrap="square" lIns="0" tIns="0" rIns="0" bIns="0" rtlCol="0" anchor="ctr"/>
-          <a:lstStyle/>
-          <a:p>
-            <a:pPr algn="r" indent="0" marL="0">
-              <a:buNone/>
-            </a:pPr>
-            <a:r>
-              <a:rPr lang="en-US" sz="900" dirty="0">
-                <a:solidFill>
-                  <a:srgbClr val="B0B0B0"/>
+              <a:rPr lang="en-US" sz="800" b="1" spc="100" kern="0" dirty="0">
+                <a:solidFill>
+                  <a:srgbClr val="006633"/>
                 </a:solidFill>
                 <a:latin typeface="Calibri" pitchFamily="34" charset="0"/>
                 <a:ea typeface="Calibri" pitchFamily="34" charset="-122"/>
                 <a:cs typeface="Calibri" pitchFamily="34" charset="-120"/>
               </a:rPr>
-              <a:t>04 / 05</a:t>
+              <a:t>Vector</a:t>
+            </a:r>
+            <a:endParaRPr lang="en-US" sz="800" dirty="0"/>
+          </a:p>
+        </p:txBody>
+      </p:sp>
+      <p:sp>
+        <p:nvSpPr>
+          <p:cNvPr id="62" name="Text 60"/>
+          <p:cNvSpPr/>
+          <p:nvPr/>
+        </p:nvSpPr>
+        <p:spPr>
+          <a:xfrm>
+            <a:off x="8001000" y="3657600"/>
+            <a:ext cx="1005840" cy="201168"/>
+          </a:xfrm>
+          <a:prstGeom prst="rect">
+            <a:avLst/>
+          </a:prstGeom>
+          <a:noFill/>
+          <a:ln/>
+        </p:spPr>
+        <p:txBody>
+          <a:bodyPr wrap="square" lIns="0" tIns="0" rIns="0" bIns="0" rtlCol="0" anchor="ctr"/>
+          <a:lstStyle/>
+          <a:p>
+            <a:pPr algn="ctr" indent="0" marL="0">
+              <a:buNone/>
+            </a:pPr>
+            <a:r>
+              <a:rPr lang="en-US" sz="1000" dirty="0">
+                <a:solidFill>
+                  <a:srgbClr val="1A1A1A"/>
+                </a:solidFill>
+                <a:latin typeface="TH Sarabun New" pitchFamily="34" charset="0"/>
+                <a:ea typeface="TH Sarabun New" pitchFamily="34" charset="-122"/>
+                <a:cs typeface="TH Sarabun New" pitchFamily="34" charset="-120"/>
+              </a:rPr>
+              <a:t>BGE-M3</a:t>
+            </a:r>
+            <a:endParaRPr lang="en-US" sz="1000" dirty="0"/>
+          </a:p>
+        </p:txBody>
+      </p:sp>
+      <p:sp>
+        <p:nvSpPr>
+          <p:cNvPr id="63" name="Text 61"/>
+          <p:cNvSpPr/>
+          <p:nvPr/>
+        </p:nvSpPr>
+        <p:spPr>
+          <a:xfrm>
+            <a:off x="8001000" y="3886200"/>
+            <a:ext cx="1005840" cy="182880"/>
+          </a:xfrm>
+          <a:prstGeom prst="rect">
+            <a:avLst/>
+          </a:prstGeom>
+          <a:noFill/>
+          <a:ln/>
+        </p:spPr>
+        <p:txBody>
+          <a:bodyPr wrap="square" lIns="0" tIns="0" rIns="0" bIns="0" rtlCol="0" anchor="ctr"/>
+          <a:lstStyle/>
+          <a:p>
+            <a:pPr algn="ctr" indent="0" marL="0">
+              <a:buNone/>
+            </a:pPr>
+            <a:r>
+              <a:rPr lang="en-US" sz="800" b="1" spc="100" kern="0" dirty="0">
+                <a:solidFill>
+                  <a:srgbClr val="006633"/>
+                </a:solidFill>
+                <a:latin typeface="Calibri" pitchFamily="34" charset="0"/>
+                <a:ea typeface="Calibri" pitchFamily="34" charset="-122"/>
+                <a:cs typeface="Calibri" pitchFamily="34" charset="-120"/>
+              </a:rPr>
+              <a:t>Action</a:t>
+            </a:r>
+            <a:endParaRPr lang="en-US" sz="800" dirty="0"/>
+          </a:p>
+        </p:txBody>
+      </p:sp>
+      <p:sp>
+        <p:nvSpPr>
+          <p:cNvPr id="64" name="Text 62"/>
+          <p:cNvSpPr/>
+          <p:nvPr/>
+        </p:nvSpPr>
+        <p:spPr>
+          <a:xfrm>
+            <a:off x="8001000" y="4023360"/>
+            <a:ext cx="1005840" cy="201168"/>
+          </a:xfrm>
+          <a:prstGeom prst="rect">
+            <a:avLst/>
+          </a:prstGeom>
+          <a:noFill/>
+          <a:ln/>
+        </p:spPr>
+        <p:txBody>
+          <a:bodyPr wrap="square" lIns="0" tIns="0" rIns="0" bIns="0" rtlCol="0" anchor="ctr"/>
+          <a:lstStyle/>
+          <a:p>
+            <a:pPr algn="ctr" indent="0" marL="0">
+              <a:buNone/>
+            </a:pPr>
+            <a:r>
+              <a:rPr lang="en-US" sz="1000" dirty="0">
+                <a:solidFill>
+                  <a:srgbClr val="1A1A1A"/>
+                </a:solidFill>
+                <a:latin typeface="TH Sarabun New" pitchFamily="34" charset="0"/>
+                <a:ea typeface="TH Sarabun New" pitchFamily="34" charset="-122"/>
+                <a:cs typeface="TH Sarabun New" pitchFamily="34" charset="-120"/>
+              </a:rPr>
+              <a:t>ตอบ / Email</a:t>
+            </a:r>
+            <a:endParaRPr lang="en-US" sz="1000" dirty="0"/>
+          </a:p>
+        </p:txBody>
+      </p:sp>
+      <p:sp>
+        <p:nvSpPr>
+          <p:cNvPr id="65" name="Shape 63"/>
+          <p:cNvSpPr/>
+          <p:nvPr/>
+        </p:nvSpPr>
+        <p:spPr>
+          <a:xfrm>
+            <a:off x="457200" y="4663440"/>
+            <a:ext cx="8229600" cy="365760"/>
+          </a:xfrm>
+          <a:prstGeom prst="rect">
+            <a:avLst/>
+          </a:prstGeom>
+          <a:solidFill>
+            <a:srgbClr val="004D26"/>
+          </a:solidFill>
+          <a:ln/>
+        </p:spPr>
+      </p:sp>
+      <p:sp>
+        <p:nvSpPr>
+          <p:cNvPr id="66" name="Shape 64"/>
+          <p:cNvSpPr/>
+          <p:nvPr/>
+        </p:nvSpPr>
+        <p:spPr>
+          <a:xfrm>
+            <a:off x="457200" y="4663440"/>
+            <a:ext cx="109728" cy="365760"/>
+          </a:xfrm>
+          <a:prstGeom prst="rect">
+            <a:avLst/>
+          </a:prstGeom>
+          <a:solidFill>
+            <a:srgbClr val="C9A961"/>
+          </a:solidFill>
+          <a:ln/>
+        </p:spPr>
+      </p:sp>
+      <p:sp>
+        <p:nvSpPr>
+          <p:cNvPr id="67" name="Text 65"/>
+          <p:cNvSpPr/>
+          <p:nvPr/>
+        </p:nvSpPr>
+        <p:spPr>
+          <a:xfrm>
+            <a:off x="685800" y="4663440"/>
+            <a:ext cx="8229600" cy="365760"/>
+          </a:xfrm>
+          <a:prstGeom prst="rect">
+            <a:avLst/>
+          </a:prstGeom>
+          <a:noFill/>
+          <a:ln/>
+        </p:spPr>
+        <p:txBody>
+          <a:bodyPr wrap="square" lIns="0" tIns="0" rIns="0" bIns="0" rtlCol="0" anchor="ctr"/>
+          <a:lstStyle/>
+          <a:p>
+            <a:pPr indent="0" marL="0">
+              <a:buNone/>
+            </a:pPr>
+            <a:r>
+              <a:rPr lang="en-US" sz="1200" b="1" dirty="0">
+                <a:solidFill>
+                  <a:srgbClr val="C9A961"/>
+                </a:solidFill>
+                <a:latin typeface="TH Sarabun New" pitchFamily="34" charset="0"/>
+                <a:ea typeface="TH Sarabun New" pitchFamily="34" charset="-122"/>
+                <a:cs typeface="TH Sarabun New" pitchFamily="34" charset="-120"/>
+              </a:rPr>
+              <a:t>Use case มก. :  </a:t>
+            </a:r>
+            <a:pPr indent="0" marL="0">
+              <a:buNone/>
+            </a:pPr>
+            <a:r>
+              <a:rPr lang="en-US" sz="1200" dirty="0">
+                <a:solidFill>
+                  <a:srgbClr val="FFFFFF"/>
+                </a:solidFill>
+                <a:latin typeface="TH Sarabun New" pitchFamily="34" charset="0"/>
+                <a:ea typeface="TH Sarabun New" pitchFamily="34" charset="-122"/>
+                <a:cs typeface="TH Sarabun New" pitchFamily="34" charset="-120"/>
+              </a:rPr>
+              <a:t>ผู้ช่วยอาจารย์ตอบคำถามนิสิต 24/7  —  ค้นจาก KU LLM + Vector DB (course materials) + ระบบทะเบียน</a:t>
+            </a:r>
+            <a:endParaRPr lang="en-US" sz="1200" dirty="0"/>
+          </a:p>
+        </p:txBody>
+      </p:sp>
+      <p:sp>
+        <p:nvSpPr>
+          <p:cNvPr id="68" name="Text 66"/>
+          <p:cNvSpPr/>
+          <p:nvPr/>
+        </p:nvSpPr>
+        <p:spPr>
+          <a:xfrm>
+            <a:off x="8503920" y="4846320"/>
+            <a:ext cx="548640" cy="228600"/>
+          </a:xfrm>
+          <a:prstGeom prst="rect">
+            <a:avLst/>
+          </a:prstGeom>
+          <a:noFill/>
+          <a:ln/>
+        </p:spPr>
+        <p:txBody>
+          <a:bodyPr wrap="square" lIns="0" tIns="0" rIns="0" bIns="0" rtlCol="0" anchor="ctr"/>
+          <a:lstStyle/>
+          <a:p>
+            <a:pPr algn="r" indent="0" marL="0">
+              <a:buNone/>
+            </a:pPr>
+            <a:r>
+              <a:rPr lang="en-US" sz="900" dirty="0">
+                <a:solidFill>
+                  <a:srgbClr val="B0B0B0"/>
+                </a:solidFill>
+                <a:latin typeface="Calibri" pitchFamily="34" charset="0"/>
+                <a:ea typeface="Calibri" pitchFamily="34" charset="-122"/>
+                <a:cs typeface="Calibri" pitchFamily="34" charset="-120"/>
+              </a:rPr>
+              <a:t>04 / 07</a:t>
             </a:r>
             <a:endParaRPr lang="en-US" sz="900" dirty="0"/>
           </a:p>
@@ -6683,6 +6917,4318 @@
                 <a:ea typeface="TH Sarabun New" pitchFamily="34" charset="-122"/>
                 <a:cs typeface="TH Sarabun New" pitchFamily="34" charset="-120"/>
               </a:rPr>
+              <a:t>สถาปัตยกรรม Agentic AI</a:t>
+            </a:r>
+            <a:endParaRPr lang="en-US" sz="3600" dirty="0"/>
+          </a:p>
+        </p:txBody>
+      </p:sp>
+      <p:sp>
+        <p:nvSpPr>
+          <p:cNvPr id="3" name="Text 1"/>
+          <p:cNvSpPr/>
+          <p:nvPr/>
+        </p:nvSpPr>
+        <p:spPr>
+          <a:xfrm>
+            <a:off x="457200" y="914400"/>
+            <a:ext cx="8229600" cy="320040"/>
+          </a:xfrm>
+          <a:prstGeom prst="rect">
+            <a:avLst/>
+          </a:prstGeom>
+          <a:noFill/>
+          <a:ln/>
+        </p:spPr>
+        <p:txBody>
+          <a:bodyPr wrap="square" lIns="0" tIns="0" rIns="0" bIns="0" rtlCol="0" anchor="ctr"/>
+          <a:lstStyle/>
+          <a:p>
+            <a:pPr indent="0" marL="0">
+              <a:buNone/>
+            </a:pPr>
+            <a:r>
+              <a:rPr lang="en-US" sz="1400" i="1" dirty="0">
+                <a:solidFill>
+                  <a:srgbClr val="6B6B6B"/>
+                </a:solidFill>
+                <a:latin typeface="TH Sarabun New" pitchFamily="34" charset="0"/>
+                <a:ea typeface="TH Sarabun New" pitchFamily="34" charset="-122"/>
+                <a:cs typeface="TH Sarabun New" pitchFamily="34" charset="-120"/>
+              </a:rPr>
+              <a:t>Multi-Agent System  —  ทีม AI ที่ทำงานร่วมกัน (เหมาะกับงานซับซ้อน เช่น วิจัย วิเคราะห์ ตัดสินใจ)</a:t>
+            </a:r>
+            <a:endParaRPr lang="en-US" sz="1400" dirty="0"/>
+          </a:p>
+        </p:txBody>
+      </p:sp>
+      <p:sp>
+        <p:nvSpPr>
+          <p:cNvPr id="4" name="Shape 2"/>
+          <p:cNvSpPr/>
+          <p:nvPr/>
+        </p:nvSpPr>
+        <p:spPr>
+          <a:xfrm>
+            <a:off x="457200" y="1417320"/>
+            <a:ext cx="5029200" cy="3291840"/>
+          </a:xfrm>
+          <a:prstGeom prst="rect">
+            <a:avLst/>
+          </a:prstGeom>
+          <a:solidFill>
+            <a:srgbClr val="F8F9F7"/>
+          </a:solidFill>
+          <a:ln/>
+        </p:spPr>
+      </p:sp>
+      <p:sp>
+        <p:nvSpPr>
+          <p:cNvPr id="5" name="Shape 3"/>
+          <p:cNvSpPr/>
+          <p:nvPr/>
+        </p:nvSpPr>
+        <p:spPr>
+          <a:xfrm>
+            <a:off x="1691640" y="1600200"/>
+            <a:ext cx="2560320" cy="640080"/>
+          </a:xfrm>
+          <a:prstGeom prst="rect">
+            <a:avLst/>
+          </a:prstGeom>
+          <a:solidFill>
+            <a:srgbClr val="004D26"/>
+          </a:solidFill>
+          <a:ln w="25400">
+            <a:solidFill>
+              <a:srgbClr val="006633"/>
+            </a:solidFill>
+            <a:prstDash val="solid"/>
+          </a:ln>
+          <a:effectLst>
+            <a:outerShdw sx="100000" sy="100000" kx="0" ky="0" algn="bl" rotWithShape="0" blurRad="101600" dist="25400" dir="5400000">
+              <a:srgbClr val="000000">
+                <a:alpha val="15000"/>
+              </a:srgbClr>
+            </a:outerShdw>
+          </a:effectLst>
+        </p:spPr>
+      </p:sp>
+      <p:sp>
+        <p:nvSpPr>
+          <p:cNvPr id="6" name="Text 4"/>
+          <p:cNvSpPr/>
+          <p:nvPr/>
+        </p:nvSpPr>
+        <p:spPr>
+          <a:xfrm>
+            <a:off x="1783080" y="1691640"/>
+            <a:ext cx="457200" cy="457200"/>
+          </a:xfrm>
+          <a:prstGeom prst="rect">
+            <a:avLst/>
+          </a:prstGeom>
+          <a:noFill/>
+          <a:ln/>
+        </p:spPr>
+        <p:txBody>
+          <a:bodyPr wrap="square" lIns="0" tIns="0" rIns="0" bIns="0" rtlCol="0" anchor="ctr"/>
+          <a:lstStyle/>
+          <a:p>
+            <a:pPr algn="ctr" indent="0" marL="0">
+              <a:buNone/>
+            </a:pPr>
+            <a:r>
+              <a:rPr lang="en-US" sz="2200" dirty="0">
+                <a:solidFill>
+                  <a:srgbClr val="000000"/>
+                </a:solidFill>
+              </a:rPr>
+              <a:t>🎭</a:t>
+            </a:r>
+            <a:endParaRPr lang="en-US" sz="2200" dirty="0"/>
+          </a:p>
+        </p:txBody>
+      </p:sp>
+      <p:sp>
+        <p:nvSpPr>
+          <p:cNvPr id="7" name="Text 5"/>
+          <p:cNvSpPr/>
+          <p:nvPr/>
+        </p:nvSpPr>
+        <p:spPr>
+          <a:xfrm>
+            <a:off x="2286000" y="1645920"/>
+            <a:ext cx="1874520" cy="274320"/>
+          </a:xfrm>
+          <a:prstGeom prst="rect">
+            <a:avLst/>
+          </a:prstGeom>
+          <a:noFill/>
+          <a:ln/>
+        </p:spPr>
+        <p:txBody>
+          <a:bodyPr wrap="square" lIns="0" tIns="0" rIns="0" bIns="0" rtlCol="0" anchor="ctr"/>
+          <a:lstStyle/>
+          <a:p>
+            <a:pPr indent="0" marL="0">
+              <a:buNone/>
+            </a:pPr>
+            <a:r>
+              <a:rPr lang="en-US" sz="1500" b="1" dirty="0">
+                <a:solidFill>
+                  <a:srgbClr val="FFFFFF"/>
+                </a:solidFill>
+                <a:latin typeface="TH Sarabun New" pitchFamily="34" charset="0"/>
+                <a:ea typeface="TH Sarabun New" pitchFamily="34" charset="-122"/>
+                <a:cs typeface="TH Sarabun New" pitchFamily="34" charset="-120"/>
+              </a:rPr>
+              <a:t>Orchestrator</a:t>
+            </a:r>
+            <a:endParaRPr lang="en-US" sz="1500" dirty="0"/>
+          </a:p>
+        </p:txBody>
+      </p:sp>
+      <p:sp>
+        <p:nvSpPr>
+          <p:cNvPr id="8" name="Text 6"/>
+          <p:cNvSpPr/>
+          <p:nvPr/>
+        </p:nvSpPr>
+        <p:spPr>
+          <a:xfrm>
+            <a:off x="2286000" y="1920240"/>
+            <a:ext cx="1874520" cy="274320"/>
+          </a:xfrm>
+          <a:prstGeom prst="rect">
+            <a:avLst/>
+          </a:prstGeom>
+          <a:noFill/>
+          <a:ln/>
+        </p:spPr>
+        <p:txBody>
+          <a:bodyPr wrap="square" lIns="0" tIns="0" rIns="0" bIns="0" rtlCol="0" anchor="ctr"/>
+          <a:lstStyle/>
+          <a:p>
+            <a:pPr indent="0" marL="0">
+              <a:buNone/>
+            </a:pPr>
+            <a:r>
+              <a:rPr lang="en-US" sz="1100" dirty="0">
+                <a:solidFill>
+                  <a:srgbClr val="F5EDD6"/>
+                </a:solidFill>
+                <a:latin typeface="TH Sarabun New" pitchFamily="34" charset="0"/>
+                <a:ea typeface="TH Sarabun New" pitchFamily="34" charset="-122"/>
+                <a:cs typeface="TH Sarabun New" pitchFamily="34" charset="-120"/>
+              </a:rPr>
+              <a:t>แบ่งงาน + รวบรวมผล</a:t>
+            </a:r>
+            <a:endParaRPr lang="en-US" sz="1100" dirty="0"/>
+          </a:p>
+        </p:txBody>
+      </p:sp>
+      <p:sp>
+        <p:nvSpPr>
+          <p:cNvPr id="9" name="Shape 7"/>
+          <p:cNvSpPr/>
+          <p:nvPr/>
+        </p:nvSpPr>
+        <p:spPr>
+          <a:xfrm flipH="1">
+            <a:off x="2971800" y="2240280"/>
+            <a:ext cx="-1783080" cy="548640"/>
+          </a:xfrm>
+          <a:prstGeom prst="line">
+            <a:avLst/>
+          </a:prstGeom>
+          <a:noFill/>
+          <a:ln w="12700">
+            <a:solidFill>
+              <a:srgbClr val="006633"/>
+            </a:solidFill>
+            <a:prstDash val="dash"/>
+          </a:ln>
+        </p:spPr>
+      </p:sp>
+      <p:sp>
+        <p:nvSpPr>
+          <p:cNvPr id="10" name="Shape 8"/>
+          <p:cNvSpPr/>
+          <p:nvPr/>
+        </p:nvSpPr>
+        <p:spPr>
+          <a:xfrm>
+            <a:off x="649224" y="2788920"/>
+            <a:ext cx="1078992" cy="914400"/>
+          </a:xfrm>
+          <a:prstGeom prst="rect">
+            <a:avLst/>
+          </a:prstGeom>
+          <a:solidFill>
+            <a:srgbClr val="FFFFFF"/>
+          </a:solidFill>
+          <a:ln w="19050">
+            <a:solidFill>
+              <a:srgbClr val="C9A961"/>
+            </a:solidFill>
+            <a:prstDash val="solid"/>
+          </a:ln>
+        </p:spPr>
+      </p:sp>
+      <p:sp>
+        <p:nvSpPr>
+          <p:cNvPr id="11" name="Shape 9"/>
+          <p:cNvSpPr/>
+          <p:nvPr/>
+        </p:nvSpPr>
+        <p:spPr>
+          <a:xfrm>
+            <a:off x="649224" y="2788920"/>
+            <a:ext cx="1078992" cy="73152"/>
+          </a:xfrm>
+          <a:prstGeom prst="rect">
+            <a:avLst/>
+          </a:prstGeom>
+          <a:solidFill>
+            <a:srgbClr val="C9A961"/>
+          </a:solidFill>
+          <a:ln/>
+        </p:spPr>
+      </p:sp>
+      <p:sp>
+        <p:nvSpPr>
+          <p:cNvPr id="12" name="Text 10"/>
+          <p:cNvSpPr/>
+          <p:nvPr/>
+        </p:nvSpPr>
+        <p:spPr>
+          <a:xfrm>
+            <a:off x="649224" y="2926080"/>
+            <a:ext cx="1078992" cy="365760"/>
+          </a:xfrm>
+          <a:prstGeom prst="rect">
+            <a:avLst/>
+          </a:prstGeom>
+          <a:noFill/>
+          <a:ln/>
+        </p:spPr>
+        <p:txBody>
+          <a:bodyPr wrap="square" lIns="0" tIns="0" rIns="0" bIns="0" rtlCol="0" anchor="ctr"/>
+          <a:lstStyle/>
+          <a:p>
+            <a:pPr algn="ctr" indent="0" marL="0">
+              <a:buNone/>
+            </a:pPr>
+            <a:r>
+              <a:rPr lang="en-US" sz="2200" dirty="0">
+                <a:solidFill>
+                  <a:srgbClr val="000000"/>
+                </a:solidFill>
+              </a:rPr>
+              <a:t>🔍</a:t>
+            </a:r>
+            <a:endParaRPr lang="en-US" sz="2200" dirty="0"/>
+          </a:p>
+        </p:txBody>
+      </p:sp>
+      <p:sp>
+        <p:nvSpPr>
+          <p:cNvPr id="13" name="Text 11"/>
+          <p:cNvSpPr/>
+          <p:nvPr/>
+        </p:nvSpPr>
+        <p:spPr>
+          <a:xfrm>
+            <a:off x="649224" y="3291840"/>
+            <a:ext cx="1078992" cy="228600"/>
+          </a:xfrm>
+          <a:prstGeom prst="rect">
+            <a:avLst/>
+          </a:prstGeom>
+          <a:noFill/>
+          <a:ln/>
+        </p:spPr>
+        <p:txBody>
+          <a:bodyPr wrap="square" lIns="0" tIns="0" rIns="0" bIns="0" rtlCol="0" anchor="ctr"/>
+          <a:lstStyle/>
+          <a:p>
+            <a:pPr algn="ctr" indent="0" marL="0">
+              <a:buNone/>
+            </a:pPr>
+            <a:r>
+              <a:rPr lang="en-US" sz="1200" b="1" dirty="0">
+                <a:solidFill>
+                  <a:srgbClr val="1A1A1A"/>
+                </a:solidFill>
+                <a:latin typeface="TH Sarabun New" pitchFamily="34" charset="0"/>
+                <a:ea typeface="TH Sarabun New" pitchFamily="34" charset="-122"/>
+                <a:cs typeface="TH Sarabun New" pitchFamily="34" charset="-120"/>
+              </a:rPr>
+              <a:t>Researcher</a:t>
+            </a:r>
+            <a:endParaRPr lang="en-US" sz="1200" dirty="0"/>
+          </a:p>
+        </p:txBody>
+      </p:sp>
+      <p:sp>
+        <p:nvSpPr>
+          <p:cNvPr id="14" name="Text 12"/>
+          <p:cNvSpPr/>
+          <p:nvPr/>
+        </p:nvSpPr>
+        <p:spPr>
+          <a:xfrm>
+            <a:off x="649224" y="3502152"/>
+            <a:ext cx="1078992" cy="201168"/>
+          </a:xfrm>
+          <a:prstGeom prst="rect">
+            <a:avLst/>
+          </a:prstGeom>
+          <a:noFill/>
+          <a:ln/>
+        </p:spPr>
+        <p:txBody>
+          <a:bodyPr wrap="square" lIns="0" tIns="0" rIns="0" bIns="0" rtlCol="0" anchor="ctr"/>
+          <a:lstStyle/>
+          <a:p>
+            <a:pPr algn="ctr" indent="0" marL="0">
+              <a:buNone/>
+            </a:pPr>
+            <a:r>
+              <a:rPr lang="en-US" sz="1000" dirty="0">
+                <a:solidFill>
+                  <a:srgbClr val="6B6B6B"/>
+                </a:solidFill>
+                <a:latin typeface="TH Sarabun New" pitchFamily="34" charset="0"/>
+                <a:ea typeface="TH Sarabun New" pitchFamily="34" charset="-122"/>
+                <a:cs typeface="TH Sarabun New" pitchFamily="34" charset="-120"/>
+              </a:rPr>
+              <a:t>ค้นหา / รวบรวม</a:t>
+            </a:r>
+            <a:endParaRPr lang="en-US" sz="1000" dirty="0"/>
+          </a:p>
+        </p:txBody>
+      </p:sp>
+      <p:sp>
+        <p:nvSpPr>
+          <p:cNvPr id="15" name="Shape 13"/>
+          <p:cNvSpPr/>
+          <p:nvPr/>
+        </p:nvSpPr>
+        <p:spPr>
+          <a:xfrm flipH="1">
+            <a:off x="2971800" y="2240280"/>
+            <a:ext cx="-594360" cy="548640"/>
+          </a:xfrm>
+          <a:prstGeom prst="line">
+            <a:avLst/>
+          </a:prstGeom>
+          <a:noFill/>
+          <a:ln w="12700">
+            <a:solidFill>
+              <a:srgbClr val="006633"/>
+            </a:solidFill>
+            <a:prstDash val="dash"/>
+          </a:ln>
+        </p:spPr>
+      </p:sp>
+      <p:sp>
+        <p:nvSpPr>
+          <p:cNvPr id="16" name="Shape 14"/>
+          <p:cNvSpPr/>
+          <p:nvPr/>
+        </p:nvSpPr>
+        <p:spPr>
+          <a:xfrm>
+            <a:off x="1837944" y="2788920"/>
+            <a:ext cx="1078992" cy="914400"/>
+          </a:xfrm>
+          <a:prstGeom prst="rect">
+            <a:avLst/>
+          </a:prstGeom>
+          <a:solidFill>
+            <a:srgbClr val="FFFFFF"/>
+          </a:solidFill>
+          <a:ln w="19050">
+            <a:solidFill>
+              <a:srgbClr val="2E8B57"/>
+            </a:solidFill>
+            <a:prstDash val="solid"/>
+          </a:ln>
+        </p:spPr>
+      </p:sp>
+      <p:sp>
+        <p:nvSpPr>
+          <p:cNvPr id="17" name="Shape 15"/>
+          <p:cNvSpPr/>
+          <p:nvPr/>
+        </p:nvSpPr>
+        <p:spPr>
+          <a:xfrm>
+            <a:off x="1837944" y="2788920"/>
+            <a:ext cx="1078992" cy="73152"/>
+          </a:xfrm>
+          <a:prstGeom prst="rect">
+            <a:avLst/>
+          </a:prstGeom>
+          <a:solidFill>
+            <a:srgbClr val="2E8B57"/>
+          </a:solidFill>
+          <a:ln/>
+        </p:spPr>
+      </p:sp>
+      <p:sp>
+        <p:nvSpPr>
+          <p:cNvPr id="18" name="Text 16"/>
+          <p:cNvSpPr/>
+          <p:nvPr/>
+        </p:nvSpPr>
+        <p:spPr>
+          <a:xfrm>
+            <a:off x="1837944" y="2926080"/>
+            <a:ext cx="1078992" cy="365760"/>
+          </a:xfrm>
+          <a:prstGeom prst="rect">
+            <a:avLst/>
+          </a:prstGeom>
+          <a:noFill/>
+          <a:ln/>
+        </p:spPr>
+        <p:txBody>
+          <a:bodyPr wrap="square" lIns="0" tIns="0" rIns="0" bIns="0" rtlCol="0" anchor="ctr"/>
+          <a:lstStyle/>
+          <a:p>
+            <a:pPr algn="ctr" indent="0" marL="0">
+              <a:buNone/>
+            </a:pPr>
+            <a:r>
+              <a:rPr lang="en-US" sz="2200" dirty="0">
+                <a:solidFill>
+                  <a:srgbClr val="000000"/>
+                </a:solidFill>
+              </a:rPr>
+              <a:t>📊</a:t>
+            </a:r>
+            <a:endParaRPr lang="en-US" sz="2200" dirty="0"/>
+          </a:p>
+        </p:txBody>
+      </p:sp>
+      <p:sp>
+        <p:nvSpPr>
+          <p:cNvPr id="19" name="Text 17"/>
+          <p:cNvSpPr/>
+          <p:nvPr/>
+        </p:nvSpPr>
+        <p:spPr>
+          <a:xfrm>
+            <a:off x="1837944" y="3291840"/>
+            <a:ext cx="1078992" cy="228600"/>
+          </a:xfrm>
+          <a:prstGeom prst="rect">
+            <a:avLst/>
+          </a:prstGeom>
+          <a:noFill/>
+          <a:ln/>
+        </p:spPr>
+        <p:txBody>
+          <a:bodyPr wrap="square" lIns="0" tIns="0" rIns="0" bIns="0" rtlCol="0" anchor="ctr"/>
+          <a:lstStyle/>
+          <a:p>
+            <a:pPr algn="ctr" indent="0" marL="0">
+              <a:buNone/>
+            </a:pPr>
+            <a:r>
+              <a:rPr lang="en-US" sz="1200" b="1" dirty="0">
+                <a:solidFill>
+                  <a:srgbClr val="1A1A1A"/>
+                </a:solidFill>
+                <a:latin typeface="TH Sarabun New" pitchFamily="34" charset="0"/>
+                <a:ea typeface="TH Sarabun New" pitchFamily="34" charset="-122"/>
+                <a:cs typeface="TH Sarabun New" pitchFamily="34" charset="-120"/>
+              </a:rPr>
+              <a:t>Analyzer</a:t>
+            </a:r>
+            <a:endParaRPr lang="en-US" sz="1200" dirty="0"/>
+          </a:p>
+        </p:txBody>
+      </p:sp>
+      <p:sp>
+        <p:nvSpPr>
+          <p:cNvPr id="20" name="Text 18"/>
+          <p:cNvSpPr/>
+          <p:nvPr/>
+        </p:nvSpPr>
+        <p:spPr>
+          <a:xfrm>
+            <a:off x="1837944" y="3502152"/>
+            <a:ext cx="1078992" cy="201168"/>
+          </a:xfrm>
+          <a:prstGeom prst="rect">
+            <a:avLst/>
+          </a:prstGeom>
+          <a:noFill/>
+          <a:ln/>
+        </p:spPr>
+        <p:txBody>
+          <a:bodyPr wrap="square" lIns="0" tIns="0" rIns="0" bIns="0" rtlCol="0" anchor="ctr"/>
+          <a:lstStyle/>
+          <a:p>
+            <a:pPr algn="ctr" indent="0" marL="0">
+              <a:buNone/>
+            </a:pPr>
+            <a:r>
+              <a:rPr lang="en-US" sz="1000" dirty="0">
+                <a:solidFill>
+                  <a:srgbClr val="6B6B6B"/>
+                </a:solidFill>
+                <a:latin typeface="TH Sarabun New" pitchFamily="34" charset="0"/>
+                <a:ea typeface="TH Sarabun New" pitchFamily="34" charset="-122"/>
+                <a:cs typeface="TH Sarabun New" pitchFamily="34" charset="-120"/>
+              </a:rPr>
+              <a:t>วิเคราะห์ข้อมูล</a:t>
+            </a:r>
+            <a:endParaRPr lang="en-US" sz="1000" dirty="0"/>
+          </a:p>
+        </p:txBody>
+      </p:sp>
+      <p:sp>
+        <p:nvSpPr>
+          <p:cNvPr id="21" name="Shape 19"/>
+          <p:cNvSpPr/>
+          <p:nvPr/>
+        </p:nvSpPr>
+        <p:spPr>
+          <a:xfrm>
+            <a:off x="2971800" y="2240280"/>
+            <a:ext cx="594360" cy="548640"/>
+          </a:xfrm>
+          <a:prstGeom prst="line">
+            <a:avLst/>
+          </a:prstGeom>
+          <a:noFill/>
+          <a:ln w="12700">
+            <a:solidFill>
+              <a:srgbClr val="006633"/>
+            </a:solidFill>
+            <a:prstDash val="dash"/>
+          </a:ln>
+        </p:spPr>
+      </p:sp>
+      <p:sp>
+        <p:nvSpPr>
+          <p:cNvPr id="22" name="Shape 20"/>
+          <p:cNvSpPr/>
+          <p:nvPr/>
+        </p:nvSpPr>
+        <p:spPr>
+          <a:xfrm>
+            <a:off x="3026664" y="2788920"/>
+            <a:ext cx="1078992" cy="914400"/>
+          </a:xfrm>
+          <a:prstGeom prst="rect">
+            <a:avLst/>
+          </a:prstGeom>
+          <a:solidFill>
+            <a:srgbClr val="FFFFFF"/>
+          </a:solidFill>
+          <a:ln w="19050">
+            <a:solidFill>
+              <a:srgbClr val="006633"/>
+            </a:solidFill>
+            <a:prstDash val="solid"/>
+          </a:ln>
+        </p:spPr>
+      </p:sp>
+      <p:sp>
+        <p:nvSpPr>
+          <p:cNvPr id="23" name="Shape 21"/>
+          <p:cNvSpPr/>
+          <p:nvPr/>
+        </p:nvSpPr>
+        <p:spPr>
+          <a:xfrm>
+            <a:off x="3026664" y="2788920"/>
+            <a:ext cx="1078992" cy="73152"/>
+          </a:xfrm>
+          <a:prstGeom prst="rect">
+            <a:avLst/>
+          </a:prstGeom>
+          <a:solidFill>
+            <a:srgbClr val="006633"/>
+          </a:solidFill>
+          <a:ln/>
+        </p:spPr>
+      </p:sp>
+      <p:sp>
+        <p:nvSpPr>
+          <p:cNvPr id="24" name="Text 22"/>
+          <p:cNvSpPr/>
+          <p:nvPr/>
+        </p:nvSpPr>
+        <p:spPr>
+          <a:xfrm>
+            <a:off x="3026664" y="2926080"/>
+            <a:ext cx="1078992" cy="365760"/>
+          </a:xfrm>
+          <a:prstGeom prst="rect">
+            <a:avLst/>
+          </a:prstGeom>
+          <a:noFill/>
+          <a:ln/>
+        </p:spPr>
+        <p:txBody>
+          <a:bodyPr wrap="square" lIns="0" tIns="0" rIns="0" bIns="0" rtlCol="0" anchor="ctr"/>
+          <a:lstStyle/>
+          <a:p>
+            <a:pPr algn="ctr" indent="0" marL="0">
+              <a:buNone/>
+            </a:pPr>
+            <a:r>
+              <a:rPr lang="en-US" sz="2200" dirty="0">
+                <a:solidFill>
+                  <a:srgbClr val="000000"/>
+                </a:solidFill>
+              </a:rPr>
+              <a:t>✍️</a:t>
+            </a:r>
+            <a:endParaRPr lang="en-US" sz="2200" dirty="0"/>
+          </a:p>
+        </p:txBody>
+      </p:sp>
+      <p:sp>
+        <p:nvSpPr>
+          <p:cNvPr id="25" name="Text 23"/>
+          <p:cNvSpPr/>
+          <p:nvPr/>
+        </p:nvSpPr>
+        <p:spPr>
+          <a:xfrm>
+            <a:off x="3026664" y="3291840"/>
+            <a:ext cx="1078992" cy="228600"/>
+          </a:xfrm>
+          <a:prstGeom prst="rect">
+            <a:avLst/>
+          </a:prstGeom>
+          <a:noFill/>
+          <a:ln/>
+        </p:spPr>
+        <p:txBody>
+          <a:bodyPr wrap="square" lIns="0" tIns="0" rIns="0" bIns="0" rtlCol="0" anchor="ctr"/>
+          <a:lstStyle/>
+          <a:p>
+            <a:pPr algn="ctr" indent="0" marL="0">
+              <a:buNone/>
+            </a:pPr>
+            <a:r>
+              <a:rPr lang="en-US" sz="1200" b="1" dirty="0">
+                <a:solidFill>
+                  <a:srgbClr val="1A1A1A"/>
+                </a:solidFill>
+                <a:latin typeface="TH Sarabun New" pitchFamily="34" charset="0"/>
+                <a:ea typeface="TH Sarabun New" pitchFamily="34" charset="-122"/>
+                <a:cs typeface="TH Sarabun New" pitchFamily="34" charset="-120"/>
+              </a:rPr>
+              <a:t>Writer</a:t>
+            </a:r>
+            <a:endParaRPr lang="en-US" sz="1200" dirty="0"/>
+          </a:p>
+        </p:txBody>
+      </p:sp>
+      <p:sp>
+        <p:nvSpPr>
+          <p:cNvPr id="26" name="Text 24"/>
+          <p:cNvSpPr/>
+          <p:nvPr/>
+        </p:nvSpPr>
+        <p:spPr>
+          <a:xfrm>
+            <a:off x="3026664" y="3502152"/>
+            <a:ext cx="1078992" cy="201168"/>
+          </a:xfrm>
+          <a:prstGeom prst="rect">
+            <a:avLst/>
+          </a:prstGeom>
+          <a:noFill/>
+          <a:ln/>
+        </p:spPr>
+        <p:txBody>
+          <a:bodyPr wrap="square" lIns="0" tIns="0" rIns="0" bIns="0" rtlCol="0" anchor="ctr"/>
+          <a:lstStyle/>
+          <a:p>
+            <a:pPr algn="ctr" indent="0" marL="0">
+              <a:buNone/>
+            </a:pPr>
+            <a:r>
+              <a:rPr lang="en-US" sz="1000" dirty="0">
+                <a:solidFill>
+                  <a:srgbClr val="6B6B6B"/>
+                </a:solidFill>
+                <a:latin typeface="TH Sarabun New" pitchFamily="34" charset="0"/>
+                <a:ea typeface="TH Sarabun New" pitchFamily="34" charset="-122"/>
+                <a:cs typeface="TH Sarabun New" pitchFamily="34" charset="-120"/>
+              </a:rPr>
+              <a:t>ร่างเนื้อหา</a:t>
+            </a:r>
+            <a:endParaRPr lang="en-US" sz="1000" dirty="0"/>
+          </a:p>
+        </p:txBody>
+      </p:sp>
+      <p:sp>
+        <p:nvSpPr>
+          <p:cNvPr id="27" name="Shape 25"/>
+          <p:cNvSpPr/>
+          <p:nvPr/>
+        </p:nvSpPr>
+        <p:spPr>
+          <a:xfrm>
+            <a:off x="2971800" y="2240280"/>
+            <a:ext cx="1783080" cy="548640"/>
+          </a:xfrm>
+          <a:prstGeom prst="line">
+            <a:avLst/>
+          </a:prstGeom>
+          <a:noFill/>
+          <a:ln w="12700">
+            <a:solidFill>
+              <a:srgbClr val="006633"/>
+            </a:solidFill>
+            <a:prstDash val="dash"/>
+          </a:ln>
+        </p:spPr>
+      </p:sp>
+      <p:sp>
+        <p:nvSpPr>
+          <p:cNvPr id="28" name="Shape 26"/>
+          <p:cNvSpPr/>
+          <p:nvPr/>
+        </p:nvSpPr>
+        <p:spPr>
+          <a:xfrm>
+            <a:off x="4215384" y="2788920"/>
+            <a:ext cx="1078992" cy="914400"/>
+          </a:xfrm>
+          <a:prstGeom prst="rect">
+            <a:avLst/>
+          </a:prstGeom>
+          <a:solidFill>
+            <a:srgbClr val="FFFFFF"/>
+          </a:solidFill>
+          <a:ln w="19050">
+            <a:solidFill>
+              <a:srgbClr val="B83D3D"/>
+            </a:solidFill>
+            <a:prstDash val="solid"/>
+          </a:ln>
+        </p:spPr>
+      </p:sp>
+      <p:sp>
+        <p:nvSpPr>
+          <p:cNvPr id="29" name="Shape 27"/>
+          <p:cNvSpPr/>
+          <p:nvPr/>
+        </p:nvSpPr>
+        <p:spPr>
+          <a:xfrm>
+            <a:off x="4215384" y="2788920"/>
+            <a:ext cx="1078992" cy="73152"/>
+          </a:xfrm>
+          <a:prstGeom prst="rect">
+            <a:avLst/>
+          </a:prstGeom>
+          <a:solidFill>
+            <a:srgbClr val="B83D3D"/>
+          </a:solidFill>
+          <a:ln/>
+        </p:spPr>
+      </p:sp>
+      <p:sp>
+        <p:nvSpPr>
+          <p:cNvPr id="30" name="Text 28"/>
+          <p:cNvSpPr/>
+          <p:nvPr/>
+        </p:nvSpPr>
+        <p:spPr>
+          <a:xfrm>
+            <a:off x="4215384" y="2926080"/>
+            <a:ext cx="1078992" cy="365760"/>
+          </a:xfrm>
+          <a:prstGeom prst="rect">
+            <a:avLst/>
+          </a:prstGeom>
+          <a:noFill/>
+          <a:ln/>
+        </p:spPr>
+        <p:txBody>
+          <a:bodyPr wrap="square" lIns="0" tIns="0" rIns="0" bIns="0" rtlCol="0" anchor="ctr"/>
+          <a:lstStyle/>
+          <a:p>
+            <a:pPr algn="ctr" indent="0" marL="0">
+              <a:buNone/>
+            </a:pPr>
+            <a:r>
+              <a:rPr lang="en-US" sz="2200" dirty="0">
+                <a:solidFill>
+                  <a:srgbClr val="000000"/>
+                </a:solidFill>
+              </a:rPr>
+              <a:t>✅</a:t>
+            </a:r>
+            <a:endParaRPr lang="en-US" sz="2200" dirty="0"/>
+          </a:p>
+        </p:txBody>
+      </p:sp>
+      <p:sp>
+        <p:nvSpPr>
+          <p:cNvPr id="31" name="Text 29"/>
+          <p:cNvSpPr/>
+          <p:nvPr/>
+        </p:nvSpPr>
+        <p:spPr>
+          <a:xfrm>
+            <a:off x="4215384" y="3291840"/>
+            <a:ext cx="1078992" cy="228600"/>
+          </a:xfrm>
+          <a:prstGeom prst="rect">
+            <a:avLst/>
+          </a:prstGeom>
+          <a:noFill/>
+          <a:ln/>
+        </p:spPr>
+        <p:txBody>
+          <a:bodyPr wrap="square" lIns="0" tIns="0" rIns="0" bIns="0" rtlCol="0" anchor="ctr"/>
+          <a:lstStyle/>
+          <a:p>
+            <a:pPr algn="ctr" indent="0" marL="0">
+              <a:buNone/>
+            </a:pPr>
+            <a:r>
+              <a:rPr lang="en-US" sz="1200" b="1" dirty="0">
+                <a:solidFill>
+                  <a:srgbClr val="1A1A1A"/>
+                </a:solidFill>
+                <a:latin typeface="TH Sarabun New" pitchFamily="34" charset="0"/>
+                <a:ea typeface="TH Sarabun New" pitchFamily="34" charset="-122"/>
+                <a:cs typeface="TH Sarabun New" pitchFamily="34" charset="-120"/>
+              </a:rPr>
+              <a:t>Reviewer</a:t>
+            </a:r>
+            <a:endParaRPr lang="en-US" sz="1200" dirty="0"/>
+          </a:p>
+        </p:txBody>
+      </p:sp>
+      <p:sp>
+        <p:nvSpPr>
+          <p:cNvPr id="32" name="Text 30"/>
+          <p:cNvSpPr/>
+          <p:nvPr/>
+        </p:nvSpPr>
+        <p:spPr>
+          <a:xfrm>
+            <a:off x="4215384" y="3502152"/>
+            <a:ext cx="1078992" cy="201168"/>
+          </a:xfrm>
+          <a:prstGeom prst="rect">
+            <a:avLst/>
+          </a:prstGeom>
+          <a:noFill/>
+          <a:ln/>
+        </p:spPr>
+        <p:txBody>
+          <a:bodyPr wrap="square" lIns="0" tIns="0" rIns="0" bIns="0" rtlCol="0" anchor="ctr"/>
+          <a:lstStyle/>
+          <a:p>
+            <a:pPr algn="ctr" indent="0" marL="0">
+              <a:buNone/>
+            </a:pPr>
+            <a:r>
+              <a:rPr lang="en-US" sz="1000" dirty="0">
+                <a:solidFill>
+                  <a:srgbClr val="6B6B6B"/>
+                </a:solidFill>
+                <a:latin typeface="TH Sarabun New" pitchFamily="34" charset="0"/>
+                <a:ea typeface="TH Sarabun New" pitchFamily="34" charset="-122"/>
+                <a:cs typeface="TH Sarabun New" pitchFamily="34" charset="-120"/>
+              </a:rPr>
+              <a:t>ตรวจคุณภาพ</a:t>
+            </a:r>
+            <a:endParaRPr lang="en-US" sz="1000" dirty="0"/>
+          </a:p>
+        </p:txBody>
+      </p:sp>
+      <p:sp>
+        <p:nvSpPr>
+          <p:cNvPr id="33" name="Shape 31"/>
+          <p:cNvSpPr/>
+          <p:nvPr/>
+        </p:nvSpPr>
+        <p:spPr>
+          <a:xfrm>
+            <a:off x="1691640" y="4023360"/>
+            <a:ext cx="2560320" cy="502920"/>
+          </a:xfrm>
+          <a:prstGeom prst="rect">
+            <a:avLst/>
+          </a:prstGeom>
+          <a:solidFill>
+            <a:srgbClr val="C9A961"/>
+          </a:solidFill>
+          <a:ln w="6350">
+            <a:solidFill>
+              <a:srgbClr val="F5EDD6"/>
+            </a:solidFill>
+            <a:prstDash val="solid"/>
+          </a:ln>
+        </p:spPr>
+      </p:sp>
+      <p:sp>
+        <p:nvSpPr>
+          <p:cNvPr id="34" name="Text 32"/>
+          <p:cNvSpPr/>
+          <p:nvPr/>
+        </p:nvSpPr>
+        <p:spPr>
+          <a:xfrm>
+            <a:off x="1783080" y="4069080"/>
+            <a:ext cx="365760" cy="411480"/>
+          </a:xfrm>
+          <a:prstGeom prst="rect">
+            <a:avLst/>
+          </a:prstGeom>
+          <a:noFill/>
+          <a:ln/>
+        </p:spPr>
+        <p:txBody>
+          <a:bodyPr wrap="square" lIns="0" tIns="0" rIns="0" bIns="0" rtlCol="0" anchor="ctr"/>
+          <a:lstStyle/>
+          <a:p>
+            <a:pPr algn="ctr" indent="0" marL="0">
+              <a:buNone/>
+            </a:pPr>
+            <a:r>
+              <a:rPr lang="en-US" sz="1800" dirty="0">
+                <a:solidFill>
+                  <a:srgbClr val="000000"/>
+                </a:solidFill>
+              </a:rPr>
+              <a:t>👤</a:t>
+            </a:r>
+            <a:endParaRPr lang="en-US" sz="1800" dirty="0"/>
+          </a:p>
+        </p:txBody>
+      </p:sp>
+      <p:sp>
+        <p:nvSpPr>
+          <p:cNvPr id="35" name="Text 33"/>
+          <p:cNvSpPr/>
+          <p:nvPr/>
+        </p:nvSpPr>
+        <p:spPr>
+          <a:xfrm>
+            <a:off x="2194560" y="4023360"/>
+            <a:ext cx="2011680" cy="274320"/>
+          </a:xfrm>
+          <a:prstGeom prst="rect">
+            <a:avLst/>
+          </a:prstGeom>
+          <a:noFill/>
+          <a:ln/>
+        </p:spPr>
+        <p:txBody>
+          <a:bodyPr wrap="square" lIns="0" tIns="0" rIns="0" bIns="0" rtlCol="0" anchor="ctr"/>
+          <a:lstStyle/>
+          <a:p>
+            <a:pPr indent="0" marL="0">
+              <a:buNone/>
+            </a:pPr>
+            <a:r>
+              <a:rPr lang="en-US" sz="1300" b="1" dirty="0">
+                <a:solidFill>
+                  <a:srgbClr val="FFFFFF"/>
+                </a:solidFill>
+                <a:latin typeface="TH Sarabun New" pitchFamily="34" charset="0"/>
+                <a:ea typeface="TH Sarabun New" pitchFamily="34" charset="-122"/>
+                <a:cs typeface="TH Sarabun New" pitchFamily="34" charset="-120"/>
+              </a:rPr>
+              <a:t>Human-in-the-Loop</a:t>
+            </a:r>
+            <a:endParaRPr lang="en-US" sz="1300" dirty="0"/>
+          </a:p>
+        </p:txBody>
+      </p:sp>
+      <p:sp>
+        <p:nvSpPr>
+          <p:cNvPr id="36" name="Text 34"/>
+          <p:cNvSpPr/>
+          <p:nvPr/>
+        </p:nvSpPr>
+        <p:spPr>
+          <a:xfrm>
+            <a:off x="2194560" y="4270248"/>
+            <a:ext cx="2011680" cy="228600"/>
+          </a:xfrm>
+          <a:prstGeom prst="rect">
+            <a:avLst/>
+          </a:prstGeom>
+          <a:noFill/>
+          <a:ln/>
+        </p:spPr>
+        <p:txBody>
+          <a:bodyPr wrap="square" lIns="0" tIns="0" rIns="0" bIns="0" rtlCol="0" anchor="ctr"/>
+          <a:lstStyle/>
+          <a:p>
+            <a:pPr indent="0" marL="0">
+              <a:buNone/>
+            </a:pPr>
+            <a:r>
+              <a:rPr lang="en-US" sz="1000" dirty="0">
+                <a:solidFill>
+                  <a:srgbClr val="FFFFFF"/>
+                </a:solidFill>
+                <a:latin typeface="TH Sarabun New" pitchFamily="34" charset="0"/>
+                <a:ea typeface="TH Sarabun New" pitchFamily="34" charset="-122"/>
+                <a:cs typeface="TH Sarabun New" pitchFamily="34" charset="-120"/>
+              </a:rPr>
+              <a:t>คนตรวจ + อนุมัติ</a:t>
+            </a:r>
+            <a:endParaRPr lang="en-US" sz="1000" dirty="0"/>
+          </a:p>
+        </p:txBody>
+      </p:sp>
+      <p:sp>
+        <p:nvSpPr>
+          <p:cNvPr id="37" name="Shape 35"/>
+          <p:cNvSpPr/>
+          <p:nvPr/>
+        </p:nvSpPr>
+        <p:spPr>
+          <a:xfrm>
+            <a:off x="2971800" y="3703320"/>
+            <a:ext cx="0" cy="320040"/>
+          </a:xfrm>
+          <a:prstGeom prst="line">
+            <a:avLst/>
+          </a:prstGeom>
+          <a:noFill/>
+          <a:ln w="19050">
+            <a:solidFill>
+              <a:srgbClr val="006633"/>
+            </a:solidFill>
+            <a:prstDash val="solid"/>
+          </a:ln>
+        </p:spPr>
+      </p:sp>
+      <p:sp>
+        <p:nvSpPr>
+          <p:cNvPr id="38" name="Text 36"/>
+          <p:cNvSpPr/>
+          <p:nvPr/>
+        </p:nvSpPr>
+        <p:spPr>
+          <a:xfrm>
+            <a:off x="5623560" y="1417320"/>
+            <a:ext cx="3063240" cy="320040"/>
+          </a:xfrm>
+          <a:prstGeom prst="rect">
+            <a:avLst/>
+          </a:prstGeom>
+          <a:noFill/>
+          <a:ln/>
+        </p:spPr>
+        <p:txBody>
+          <a:bodyPr wrap="square" lIns="0" tIns="0" rIns="0" bIns="0" rtlCol="0" anchor="ctr"/>
+          <a:lstStyle/>
+          <a:p>
+            <a:pPr indent="0" marL="0">
+              <a:buNone/>
+            </a:pPr>
+            <a:r>
+              <a:rPr lang="en-US" sz="1400" b="1" dirty="0">
+                <a:solidFill>
+                  <a:srgbClr val="006633"/>
+                </a:solidFill>
+                <a:latin typeface="TH Sarabun New" pitchFamily="34" charset="0"/>
+                <a:ea typeface="TH Sarabun New" pitchFamily="34" charset="-122"/>
+                <a:cs typeface="TH Sarabun New" pitchFamily="34" charset="-120"/>
+              </a:rPr>
+              <a:t>Agent vs Agentic AI — เมื่อไรใช้อะไร?</a:t>
+            </a:r>
+            <a:endParaRPr lang="en-US" sz="1400" dirty="0"/>
+          </a:p>
+        </p:txBody>
+      </p:sp>
+      <p:sp>
+        <p:nvSpPr>
+          <p:cNvPr id="39" name="Shape 37"/>
+          <p:cNvSpPr/>
+          <p:nvPr/>
+        </p:nvSpPr>
+        <p:spPr>
+          <a:xfrm>
+            <a:off x="5623560" y="1783080"/>
+            <a:ext cx="3063240" cy="274320"/>
+          </a:xfrm>
+          <a:prstGeom prst="rect">
+            <a:avLst/>
+          </a:prstGeom>
+          <a:solidFill>
+            <a:srgbClr val="006633"/>
+          </a:solidFill>
+          <a:ln/>
+        </p:spPr>
+      </p:sp>
+      <p:sp>
+        <p:nvSpPr>
+          <p:cNvPr id="40" name="Text 38"/>
+          <p:cNvSpPr/>
+          <p:nvPr/>
+        </p:nvSpPr>
+        <p:spPr>
+          <a:xfrm>
+            <a:off x="5623560" y="1783080"/>
+            <a:ext cx="822960" cy="274320"/>
+          </a:xfrm>
+          <a:prstGeom prst="rect">
+            <a:avLst/>
+          </a:prstGeom>
+          <a:noFill/>
+          <a:ln/>
+        </p:spPr>
+        <p:txBody>
+          <a:bodyPr wrap="square" lIns="0" tIns="0" rIns="0" bIns="0" rtlCol="0" anchor="ctr"/>
+          <a:lstStyle/>
+          <a:p>
+            <a:pPr indent="0" marL="0">
+              <a:buNone/>
+            </a:pPr>
+            <a:endParaRPr lang="en-US" dirty="0"/>
+          </a:p>
+        </p:txBody>
+      </p:sp>
+      <p:sp>
+        <p:nvSpPr>
+          <p:cNvPr id="41" name="Text 39"/>
+          <p:cNvSpPr/>
+          <p:nvPr/>
+        </p:nvSpPr>
+        <p:spPr>
+          <a:xfrm>
+            <a:off x="6446520" y="1783080"/>
+            <a:ext cx="1005840" cy="274320"/>
+          </a:xfrm>
+          <a:prstGeom prst="rect">
+            <a:avLst/>
+          </a:prstGeom>
+          <a:noFill/>
+          <a:ln/>
+        </p:spPr>
+        <p:txBody>
+          <a:bodyPr wrap="square" lIns="0" tIns="0" rIns="0" bIns="0" rtlCol="0" anchor="ctr"/>
+          <a:lstStyle/>
+          <a:p>
+            <a:pPr algn="ctr" indent="0" marL="0">
+              <a:buNone/>
+            </a:pPr>
+            <a:r>
+              <a:rPr lang="en-US" sz="1100" b="1" dirty="0">
+                <a:solidFill>
+                  <a:srgbClr val="FFFFFF"/>
+                </a:solidFill>
+                <a:latin typeface="TH Sarabun New" pitchFamily="34" charset="0"/>
+                <a:ea typeface="TH Sarabun New" pitchFamily="34" charset="-122"/>
+                <a:cs typeface="TH Sarabun New" pitchFamily="34" charset="-120"/>
+              </a:rPr>
+              <a:t>AI Agent</a:t>
+            </a:r>
+            <a:endParaRPr lang="en-US" sz="1100" dirty="0"/>
+          </a:p>
+        </p:txBody>
+      </p:sp>
+      <p:sp>
+        <p:nvSpPr>
+          <p:cNvPr id="42" name="Text 40"/>
+          <p:cNvSpPr/>
+          <p:nvPr/>
+        </p:nvSpPr>
+        <p:spPr>
+          <a:xfrm>
+            <a:off x="7452360" y="1783080"/>
+            <a:ext cx="1234440" cy="274320"/>
+          </a:xfrm>
+          <a:prstGeom prst="rect">
+            <a:avLst/>
+          </a:prstGeom>
+          <a:noFill/>
+          <a:ln/>
+        </p:spPr>
+        <p:txBody>
+          <a:bodyPr wrap="square" lIns="0" tIns="0" rIns="0" bIns="0" rtlCol="0" anchor="ctr"/>
+          <a:lstStyle/>
+          <a:p>
+            <a:pPr algn="ctr" indent="0" marL="0">
+              <a:buNone/>
+            </a:pPr>
+            <a:r>
+              <a:rPr lang="en-US" sz="1100" b="1" dirty="0">
+                <a:solidFill>
+                  <a:srgbClr val="C9A961"/>
+                </a:solidFill>
+                <a:latin typeface="TH Sarabun New" pitchFamily="34" charset="0"/>
+                <a:ea typeface="TH Sarabun New" pitchFamily="34" charset="-122"/>
+                <a:cs typeface="TH Sarabun New" pitchFamily="34" charset="-120"/>
+              </a:rPr>
+              <a:t>Agentic AI</a:t>
+            </a:r>
+            <a:endParaRPr lang="en-US" sz="1100" dirty="0"/>
+          </a:p>
+        </p:txBody>
+      </p:sp>
+      <p:sp>
+        <p:nvSpPr>
+          <p:cNvPr id="43" name="Shape 41"/>
+          <p:cNvSpPr/>
+          <p:nvPr/>
+        </p:nvSpPr>
+        <p:spPr>
+          <a:xfrm>
+            <a:off x="5623560" y="2057400"/>
+            <a:ext cx="3063240" cy="292608"/>
+          </a:xfrm>
+          <a:prstGeom prst="rect">
+            <a:avLst/>
+          </a:prstGeom>
+          <a:solidFill>
+            <a:srgbClr val="F8F9F7"/>
+          </a:solidFill>
+          <a:ln w="6350">
+            <a:solidFill>
+              <a:srgbClr val="F8F9F7"/>
+            </a:solidFill>
+            <a:prstDash val="solid"/>
+          </a:ln>
+        </p:spPr>
+      </p:sp>
+      <p:sp>
+        <p:nvSpPr>
+          <p:cNvPr id="44" name="Text 42"/>
+          <p:cNvSpPr/>
+          <p:nvPr/>
+        </p:nvSpPr>
+        <p:spPr>
+          <a:xfrm>
+            <a:off x="5715000" y="2057400"/>
+            <a:ext cx="731520" cy="292608"/>
+          </a:xfrm>
+          <a:prstGeom prst="rect">
+            <a:avLst/>
+          </a:prstGeom>
+          <a:noFill/>
+          <a:ln/>
+        </p:spPr>
+        <p:txBody>
+          <a:bodyPr wrap="square" lIns="0" tIns="0" rIns="0" bIns="0" rtlCol="0" anchor="ctr"/>
+          <a:lstStyle/>
+          <a:p>
+            <a:pPr indent="0" marL="0">
+              <a:buNone/>
+            </a:pPr>
+            <a:r>
+              <a:rPr lang="en-US" sz="1000" b="1" dirty="0">
+                <a:solidFill>
+                  <a:srgbClr val="6B6B6B"/>
+                </a:solidFill>
+                <a:latin typeface="TH Sarabun New" pitchFamily="34" charset="0"/>
+                <a:ea typeface="TH Sarabun New" pitchFamily="34" charset="-122"/>
+                <a:cs typeface="TH Sarabun New" pitchFamily="34" charset="-120"/>
+              </a:rPr>
+              <a:t>Agents</a:t>
+            </a:r>
+            <a:endParaRPr lang="en-US" sz="1000" dirty="0"/>
+          </a:p>
+        </p:txBody>
+      </p:sp>
+      <p:sp>
+        <p:nvSpPr>
+          <p:cNvPr id="45" name="Text 43"/>
+          <p:cNvSpPr/>
+          <p:nvPr/>
+        </p:nvSpPr>
+        <p:spPr>
+          <a:xfrm>
+            <a:off x="6446520" y="2057400"/>
+            <a:ext cx="1005840" cy="292608"/>
+          </a:xfrm>
+          <a:prstGeom prst="rect">
+            <a:avLst/>
+          </a:prstGeom>
+          <a:noFill/>
+          <a:ln/>
+        </p:spPr>
+        <p:txBody>
+          <a:bodyPr wrap="square" lIns="0" tIns="0" rIns="0" bIns="0" rtlCol="0" anchor="ctr"/>
+          <a:lstStyle/>
+          <a:p>
+            <a:pPr algn="ctr" indent="0" marL="0">
+              <a:buNone/>
+            </a:pPr>
+            <a:r>
+              <a:rPr lang="en-US" sz="1000" dirty="0">
+                <a:solidFill>
+                  <a:srgbClr val="1A1A1A"/>
+                </a:solidFill>
+                <a:latin typeface="TH Sarabun New" pitchFamily="34" charset="0"/>
+                <a:ea typeface="TH Sarabun New" pitchFamily="34" charset="-122"/>
+                <a:cs typeface="TH Sarabun New" pitchFamily="34" charset="-120"/>
+              </a:rPr>
+              <a:t>1 ตัว</a:t>
+            </a:r>
+            <a:endParaRPr lang="en-US" sz="1000" dirty="0"/>
+          </a:p>
+        </p:txBody>
+      </p:sp>
+      <p:sp>
+        <p:nvSpPr>
+          <p:cNvPr id="46" name="Text 44"/>
+          <p:cNvSpPr/>
+          <p:nvPr/>
+        </p:nvSpPr>
+        <p:spPr>
+          <a:xfrm>
+            <a:off x="7452360" y="2057400"/>
+            <a:ext cx="1234440" cy="292608"/>
+          </a:xfrm>
+          <a:prstGeom prst="rect">
+            <a:avLst/>
+          </a:prstGeom>
+          <a:noFill/>
+          <a:ln/>
+        </p:spPr>
+        <p:txBody>
+          <a:bodyPr wrap="square" lIns="0" tIns="0" rIns="0" bIns="0" rtlCol="0" anchor="ctr"/>
+          <a:lstStyle/>
+          <a:p>
+            <a:pPr algn="ctr" indent="0" marL="0">
+              <a:buNone/>
+            </a:pPr>
+            <a:r>
+              <a:rPr lang="en-US" sz="1000" b="1" dirty="0">
+                <a:solidFill>
+                  <a:srgbClr val="006633"/>
+                </a:solidFill>
+                <a:latin typeface="TH Sarabun New" pitchFamily="34" charset="0"/>
+                <a:ea typeface="TH Sarabun New" pitchFamily="34" charset="-122"/>
+                <a:cs typeface="TH Sarabun New" pitchFamily="34" charset="-120"/>
+              </a:rPr>
+              <a:t>หลายตัวเฉพาะทาง</a:t>
+            </a:r>
+            <a:endParaRPr lang="en-US" sz="1000" dirty="0"/>
+          </a:p>
+        </p:txBody>
+      </p:sp>
+      <p:sp>
+        <p:nvSpPr>
+          <p:cNvPr id="47" name="Shape 45"/>
+          <p:cNvSpPr/>
+          <p:nvPr/>
+        </p:nvSpPr>
+        <p:spPr>
+          <a:xfrm>
+            <a:off x="5623560" y="2350008"/>
+            <a:ext cx="3063240" cy="292608"/>
+          </a:xfrm>
+          <a:prstGeom prst="rect">
+            <a:avLst/>
+          </a:prstGeom>
+          <a:solidFill>
+            <a:srgbClr val="FFFFFF"/>
+          </a:solidFill>
+          <a:ln w="6350">
+            <a:solidFill>
+              <a:srgbClr val="F8F9F7"/>
+            </a:solidFill>
+            <a:prstDash val="solid"/>
+          </a:ln>
+        </p:spPr>
+      </p:sp>
+      <p:sp>
+        <p:nvSpPr>
+          <p:cNvPr id="48" name="Text 46"/>
+          <p:cNvSpPr/>
+          <p:nvPr/>
+        </p:nvSpPr>
+        <p:spPr>
+          <a:xfrm>
+            <a:off x="5715000" y="2350008"/>
+            <a:ext cx="731520" cy="292608"/>
+          </a:xfrm>
+          <a:prstGeom prst="rect">
+            <a:avLst/>
+          </a:prstGeom>
+          <a:noFill/>
+          <a:ln/>
+        </p:spPr>
+        <p:txBody>
+          <a:bodyPr wrap="square" lIns="0" tIns="0" rIns="0" bIns="0" rtlCol="0" anchor="ctr"/>
+          <a:lstStyle/>
+          <a:p>
+            <a:pPr indent="0" marL="0">
+              <a:buNone/>
+            </a:pPr>
+            <a:r>
+              <a:rPr lang="en-US" sz="1000" b="1" dirty="0">
+                <a:solidFill>
+                  <a:srgbClr val="6B6B6B"/>
+                </a:solidFill>
+                <a:latin typeface="TH Sarabun New" pitchFamily="34" charset="0"/>
+                <a:ea typeface="TH Sarabun New" pitchFamily="34" charset="-122"/>
+                <a:cs typeface="TH Sarabun New" pitchFamily="34" charset="-120"/>
+              </a:rPr>
+              <a:t>งาน</a:t>
+            </a:r>
+            <a:endParaRPr lang="en-US" sz="1000" dirty="0"/>
+          </a:p>
+        </p:txBody>
+      </p:sp>
+      <p:sp>
+        <p:nvSpPr>
+          <p:cNvPr id="49" name="Text 47"/>
+          <p:cNvSpPr/>
+          <p:nvPr/>
+        </p:nvSpPr>
+        <p:spPr>
+          <a:xfrm>
+            <a:off x="6446520" y="2350008"/>
+            <a:ext cx="1005840" cy="292608"/>
+          </a:xfrm>
+          <a:prstGeom prst="rect">
+            <a:avLst/>
+          </a:prstGeom>
+          <a:noFill/>
+          <a:ln/>
+        </p:spPr>
+        <p:txBody>
+          <a:bodyPr wrap="square" lIns="0" tIns="0" rIns="0" bIns="0" rtlCol="0" anchor="ctr"/>
+          <a:lstStyle/>
+          <a:p>
+            <a:pPr algn="ctr" indent="0" marL="0">
+              <a:buNone/>
+            </a:pPr>
+            <a:r>
+              <a:rPr lang="en-US" sz="1000" dirty="0">
+                <a:solidFill>
+                  <a:srgbClr val="1A1A1A"/>
+                </a:solidFill>
+                <a:latin typeface="TH Sarabun New" pitchFamily="34" charset="0"/>
+                <a:ea typeface="TH Sarabun New" pitchFamily="34" charset="-122"/>
+                <a:cs typeface="TH Sarabun New" pitchFamily="34" charset="-120"/>
+              </a:rPr>
+              <a:t>Q&amp;A, lookup</a:t>
+            </a:r>
+            <a:endParaRPr lang="en-US" sz="1000" dirty="0"/>
+          </a:p>
+        </p:txBody>
+      </p:sp>
+      <p:sp>
+        <p:nvSpPr>
+          <p:cNvPr id="50" name="Text 48"/>
+          <p:cNvSpPr/>
+          <p:nvPr/>
+        </p:nvSpPr>
+        <p:spPr>
+          <a:xfrm>
+            <a:off x="7452360" y="2350008"/>
+            <a:ext cx="1234440" cy="292608"/>
+          </a:xfrm>
+          <a:prstGeom prst="rect">
+            <a:avLst/>
+          </a:prstGeom>
+          <a:noFill/>
+          <a:ln/>
+        </p:spPr>
+        <p:txBody>
+          <a:bodyPr wrap="square" lIns="0" tIns="0" rIns="0" bIns="0" rtlCol="0" anchor="ctr"/>
+          <a:lstStyle/>
+          <a:p>
+            <a:pPr algn="ctr" indent="0" marL="0">
+              <a:buNone/>
+            </a:pPr>
+            <a:r>
+              <a:rPr lang="en-US" sz="1000" b="1" dirty="0">
+                <a:solidFill>
+                  <a:srgbClr val="006633"/>
+                </a:solidFill>
+                <a:latin typeface="TH Sarabun New" pitchFamily="34" charset="0"/>
+                <a:ea typeface="TH Sarabun New" pitchFamily="34" charset="-122"/>
+                <a:cs typeface="TH Sarabun New" pitchFamily="34" charset="-120"/>
+              </a:rPr>
+              <a:t>วิจัย, วิเคราะห์, ตัดสินใจ</a:t>
+            </a:r>
+            <a:endParaRPr lang="en-US" sz="1000" dirty="0"/>
+          </a:p>
+        </p:txBody>
+      </p:sp>
+      <p:sp>
+        <p:nvSpPr>
+          <p:cNvPr id="51" name="Shape 49"/>
+          <p:cNvSpPr/>
+          <p:nvPr/>
+        </p:nvSpPr>
+        <p:spPr>
+          <a:xfrm>
+            <a:off x="5623560" y="2642616"/>
+            <a:ext cx="3063240" cy="292608"/>
+          </a:xfrm>
+          <a:prstGeom prst="rect">
+            <a:avLst/>
+          </a:prstGeom>
+          <a:solidFill>
+            <a:srgbClr val="F8F9F7"/>
+          </a:solidFill>
+          <a:ln w="6350">
+            <a:solidFill>
+              <a:srgbClr val="F8F9F7"/>
+            </a:solidFill>
+            <a:prstDash val="solid"/>
+          </a:ln>
+        </p:spPr>
+      </p:sp>
+      <p:sp>
+        <p:nvSpPr>
+          <p:cNvPr id="52" name="Text 50"/>
+          <p:cNvSpPr/>
+          <p:nvPr/>
+        </p:nvSpPr>
+        <p:spPr>
+          <a:xfrm>
+            <a:off x="5715000" y="2642616"/>
+            <a:ext cx="731520" cy="292608"/>
+          </a:xfrm>
+          <a:prstGeom prst="rect">
+            <a:avLst/>
+          </a:prstGeom>
+          <a:noFill/>
+          <a:ln/>
+        </p:spPr>
+        <p:txBody>
+          <a:bodyPr wrap="square" lIns="0" tIns="0" rIns="0" bIns="0" rtlCol="0" anchor="ctr"/>
+          <a:lstStyle/>
+          <a:p>
+            <a:pPr indent="0" marL="0">
+              <a:buNone/>
+            </a:pPr>
+            <a:r>
+              <a:rPr lang="en-US" sz="1000" b="1" dirty="0">
+                <a:solidFill>
+                  <a:srgbClr val="6B6B6B"/>
+                </a:solidFill>
+                <a:latin typeface="TH Sarabun New" pitchFamily="34" charset="0"/>
+                <a:ea typeface="TH Sarabun New" pitchFamily="34" charset="-122"/>
+                <a:cs typeface="TH Sarabun New" pitchFamily="34" charset="-120"/>
+              </a:rPr>
+              <a:t>ความซับซ้อน</a:t>
+            </a:r>
+            <a:endParaRPr lang="en-US" sz="1000" dirty="0"/>
+          </a:p>
+        </p:txBody>
+      </p:sp>
+      <p:sp>
+        <p:nvSpPr>
+          <p:cNvPr id="53" name="Text 51"/>
+          <p:cNvSpPr/>
+          <p:nvPr/>
+        </p:nvSpPr>
+        <p:spPr>
+          <a:xfrm>
+            <a:off x="6446520" y="2642616"/>
+            <a:ext cx="1005840" cy="292608"/>
+          </a:xfrm>
+          <a:prstGeom prst="rect">
+            <a:avLst/>
+          </a:prstGeom>
+          <a:noFill/>
+          <a:ln/>
+        </p:spPr>
+        <p:txBody>
+          <a:bodyPr wrap="square" lIns="0" tIns="0" rIns="0" bIns="0" rtlCol="0" anchor="ctr"/>
+          <a:lstStyle/>
+          <a:p>
+            <a:pPr algn="ctr" indent="0" marL="0">
+              <a:buNone/>
+            </a:pPr>
+            <a:r>
+              <a:rPr lang="en-US" sz="1000" dirty="0">
+                <a:solidFill>
+                  <a:srgbClr val="1A1A1A"/>
+                </a:solidFill>
+                <a:latin typeface="TH Sarabun New" pitchFamily="34" charset="0"/>
+                <a:ea typeface="TH Sarabun New" pitchFamily="34" charset="-122"/>
+                <a:cs typeface="TH Sarabun New" pitchFamily="34" charset="-120"/>
+              </a:rPr>
+              <a:t>ต่ำ</a:t>
+            </a:r>
+            <a:endParaRPr lang="en-US" sz="1000" dirty="0"/>
+          </a:p>
+        </p:txBody>
+      </p:sp>
+      <p:sp>
+        <p:nvSpPr>
+          <p:cNvPr id="54" name="Text 52"/>
+          <p:cNvSpPr/>
+          <p:nvPr/>
+        </p:nvSpPr>
+        <p:spPr>
+          <a:xfrm>
+            <a:off x="7452360" y="2642616"/>
+            <a:ext cx="1234440" cy="292608"/>
+          </a:xfrm>
+          <a:prstGeom prst="rect">
+            <a:avLst/>
+          </a:prstGeom>
+          <a:noFill/>
+          <a:ln/>
+        </p:spPr>
+        <p:txBody>
+          <a:bodyPr wrap="square" lIns="0" tIns="0" rIns="0" bIns="0" rtlCol="0" anchor="ctr"/>
+          <a:lstStyle/>
+          <a:p>
+            <a:pPr algn="ctr" indent="0" marL="0">
+              <a:buNone/>
+            </a:pPr>
+            <a:r>
+              <a:rPr lang="en-US" sz="1000" b="1" dirty="0">
+                <a:solidFill>
+                  <a:srgbClr val="006633"/>
+                </a:solidFill>
+                <a:latin typeface="TH Sarabun New" pitchFamily="34" charset="0"/>
+                <a:ea typeface="TH Sarabun New" pitchFamily="34" charset="-122"/>
+                <a:cs typeface="TH Sarabun New" pitchFamily="34" charset="-120"/>
+              </a:rPr>
+              <a:t>สูง</a:t>
+            </a:r>
+            <a:endParaRPr lang="en-US" sz="1000" dirty="0"/>
+          </a:p>
+        </p:txBody>
+      </p:sp>
+      <p:sp>
+        <p:nvSpPr>
+          <p:cNvPr id="55" name="Shape 53"/>
+          <p:cNvSpPr/>
+          <p:nvPr/>
+        </p:nvSpPr>
+        <p:spPr>
+          <a:xfrm>
+            <a:off x="5623560" y="2935224"/>
+            <a:ext cx="3063240" cy="292608"/>
+          </a:xfrm>
+          <a:prstGeom prst="rect">
+            <a:avLst/>
+          </a:prstGeom>
+          <a:solidFill>
+            <a:srgbClr val="FFFFFF"/>
+          </a:solidFill>
+          <a:ln w="6350">
+            <a:solidFill>
+              <a:srgbClr val="F8F9F7"/>
+            </a:solidFill>
+            <a:prstDash val="solid"/>
+          </a:ln>
+        </p:spPr>
+      </p:sp>
+      <p:sp>
+        <p:nvSpPr>
+          <p:cNvPr id="56" name="Text 54"/>
+          <p:cNvSpPr/>
+          <p:nvPr/>
+        </p:nvSpPr>
+        <p:spPr>
+          <a:xfrm>
+            <a:off x="5715000" y="2935224"/>
+            <a:ext cx="731520" cy="292608"/>
+          </a:xfrm>
+          <a:prstGeom prst="rect">
+            <a:avLst/>
+          </a:prstGeom>
+          <a:noFill/>
+          <a:ln/>
+        </p:spPr>
+        <p:txBody>
+          <a:bodyPr wrap="square" lIns="0" tIns="0" rIns="0" bIns="0" rtlCol="0" anchor="ctr"/>
+          <a:lstStyle/>
+          <a:p>
+            <a:pPr indent="0" marL="0">
+              <a:buNone/>
+            </a:pPr>
+            <a:r>
+              <a:rPr lang="en-US" sz="1000" b="1" dirty="0">
+                <a:solidFill>
+                  <a:srgbClr val="6B6B6B"/>
+                </a:solidFill>
+                <a:latin typeface="TH Sarabun New" pitchFamily="34" charset="0"/>
+                <a:ea typeface="TH Sarabun New" pitchFamily="34" charset="-122"/>
+                <a:cs typeface="TH Sarabun New" pitchFamily="34" charset="-120"/>
+              </a:rPr>
+              <a:t>ความเชื่อถือ</a:t>
+            </a:r>
+            <a:endParaRPr lang="en-US" sz="1000" dirty="0"/>
+          </a:p>
+        </p:txBody>
+      </p:sp>
+      <p:sp>
+        <p:nvSpPr>
+          <p:cNvPr id="57" name="Text 55"/>
+          <p:cNvSpPr/>
+          <p:nvPr/>
+        </p:nvSpPr>
+        <p:spPr>
+          <a:xfrm>
+            <a:off x="6446520" y="2935224"/>
+            <a:ext cx="1005840" cy="292608"/>
+          </a:xfrm>
+          <a:prstGeom prst="rect">
+            <a:avLst/>
+          </a:prstGeom>
+          <a:noFill/>
+          <a:ln/>
+        </p:spPr>
+        <p:txBody>
+          <a:bodyPr wrap="square" lIns="0" tIns="0" rIns="0" bIns="0" rtlCol="0" anchor="ctr"/>
+          <a:lstStyle/>
+          <a:p>
+            <a:pPr algn="ctr" indent="0" marL="0">
+              <a:buNone/>
+            </a:pPr>
+            <a:r>
+              <a:rPr lang="en-US" sz="1000" dirty="0">
+                <a:solidFill>
+                  <a:srgbClr val="1A1A1A"/>
+                </a:solidFill>
+                <a:latin typeface="TH Sarabun New" pitchFamily="34" charset="0"/>
+                <a:ea typeface="TH Sarabun New" pitchFamily="34" charset="-122"/>
+                <a:cs typeface="TH Sarabun New" pitchFamily="34" charset="-120"/>
+              </a:rPr>
+              <a:t>เร็ว แต่ผิดได้</a:t>
+            </a:r>
+            <a:endParaRPr lang="en-US" sz="1000" dirty="0"/>
+          </a:p>
+        </p:txBody>
+      </p:sp>
+      <p:sp>
+        <p:nvSpPr>
+          <p:cNvPr id="58" name="Text 56"/>
+          <p:cNvSpPr/>
+          <p:nvPr/>
+        </p:nvSpPr>
+        <p:spPr>
+          <a:xfrm>
+            <a:off x="7452360" y="2935224"/>
+            <a:ext cx="1234440" cy="292608"/>
+          </a:xfrm>
+          <a:prstGeom prst="rect">
+            <a:avLst/>
+          </a:prstGeom>
+          <a:noFill/>
+          <a:ln/>
+        </p:spPr>
+        <p:txBody>
+          <a:bodyPr wrap="square" lIns="0" tIns="0" rIns="0" bIns="0" rtlCol="0" anchor="ctr"/>
+          <a:lstStyle/>
+          <a:p>
+            <a:pPr algn="ctr" indent="0" marL="0">
+              <a:buNone/>
+            </a:pPr>
+            <a:r>
+              <a:rPr lang="en-US" sz="1000" b="1" dirty="0">
+                <a:solidFill>
+                  <a:srgbClr val="006633"/>
+                </a:solidFill>
+                <a:latin typeface="TH Sarabun New" pitchFamily="34" charset="0"/>
+                <a:ea typeface="TH Sarabun New" pitchFamily="34" charset="-122"/>
+                <a:cs typeface="TH Sarabun New" pitchFamily="34" charset="-120"/>
+              </a:rPr>
+              <a:t>ตรวจซ้อนกัน เชื่อถือสูง</a:t>
+            </a:r>
+            <a:endParaRPr lang="en-US" sz="1000" dirty="0"/>
+          </a:p>
+        </p:txBody>
+      </p:sp>
+      <p:sp>
+        <p:nvSpPr>
+          <p:cNvPr id="59" name="Shape 57"/>
+          <p:cNvSpPr/>
+          <p:nvPr/>
+        </p:nvSpPr>
+        <p:spPr>
+          <a:xfrm>
+            <a:off x="5623560" y="3337560"/>
+            <a:ext cx="3063240" cy="1280160"/>
+          </a:xfrm>
+          <a:prstGeom prst="rect">
+            <a:avLst/>
+          </a:prstGeom>
+          <a:solidFill>
+            <a:srgbClr val="F5EDD6"/>
+          </a:solidFill>
+          <a:ln w="12700">
+            <a:solidFill>
+              <a:srgbClr val="C9A961"/>
+            </a:solidFill>
+            <a:prstDash val="solid"/>
+          </a:ln>
+        </p:spPr>
+      </p:sp>
+      <p:sp>
+        <p:nvSpPr>
+          <p:cNvPr id="60" name="Text 58"/>
+          <p:cNvSpPr/>
+          <p:nvPr/>
+        </p:nvSpPr>
+        <p:spPr>
+          <a:xfrm>
+            <a:off x="5760720" y="3429000"/>
+            <a:ext cx="2788920" cy="256032"/>
+          </a:xfrm>
+          <a:prstGeom prst="rect">
+            <a:avLst/>
+          </a:prstGeom>
+          <a:noFill/>
+          <a:ln/>
+        </p:spPr>
+        <p:txBody>
+          <a:bodyPr wrap="square" lIns="0" tIns="0" rIns="0" bIns="0" rtlCol="0" anchor="ctr"/>
+          <a:lstStyle/>
+          <a:p>
+            <a:pPr indent="0" marL="0">
+              <a:buNone/>
+            </a:pPr>
+            <a:r>
+              <a:rPr lang="en-US" sz="1200" b="1" dirty="0">
+                <a:solidFill>
+                  <a:srgbClr val="006633"/>
+                </a:solidFill>
+                <a:latin typeface="TH Sarabun New" pitchFamily="34" charset="0"/>
+                <a:ea typeface="TH Sarabun New" pitchFamily="34" charset="-122"/>
+                <a:cs typeface="TH Sarabun New" pitchFamily="34" charset="-120"/>
+              </a:rPr>
+              <a:t>ตัวอย่างใน มก.</a:t>
+            </a:r>
+            <a:endParaRPr lang="en-US" sz="1200" dirty="0"/>
+          </a:p>
+        </p:txBody>
+      </p:sp>
+      <p:sp>
+        <p:nvSpPr>
+          <p:cNvPr id="61" name="Text 59"/>
+          <p:cNvSpPr/>
+          <p:nvPr/>
+        </p:nvSpPr>
+        <p:spPr>
+          <a:xfrm>
+            <a:off x="5760720" y="3657600"/>
+            <a:ext cx="2788920" cy="274320"/>
+          </a:xfrm>
+          <a:prstGeom prst="rect">
+            <a:avLst/>
+          </a:prstGeom>
+          <a:noFill/>
+          <a:ln/>
+        </p:spPr>
+        <p:txBody>
+          <a:bodyPr wrap="square" lIns="0" tIns="0" rIns="0" bIns="0" rtlCol="0" anchor="ctr"/>
+          <a:lstStyle/>
+          <a:p>
+            <a:pPr indent="0" marL="0">
+              <a:buNone/>
+            </a:pPr>
+            <a:r>
+              <a:rPr lang="en-US" sz="1400" b="1" dirty="0">
+                <a:solidFill>
+                  <a:srgbClr val="1A1A1A"/>
+                </a:solidFill>
+                <a:latin typeface="TH Sarabun New" pitchFamily="34" charset="0"/>
+                <a:ea typeface="TH Sarabun New" pitchFamily="34" charset="-122"/>
+                <a:cs typeface="TH Sarabun New" pitchFamily="34" charset="-120"/>
+              </a:rPr>
+              <a:t>ระบบช่วยร่างข้อเสนอวิจัย</a:t>
+            </a:r>
+            <a:endParaRPr lang="en-US" sz="1400" dirty="0"/>
+          </a:p>
+        </p:txBody>
+      </p:sp>
+      <p:sp>
+        <p:nvSpPr>
+          <p:cNvPr id="62" name="Text 60"/>
+          <p:cNvSpPr/>
+          <p:nvPr/>
+        </p:nvSpPr>
+        <p:spPr>
+          <a:xfrm>
+            <a:off x="5760720" y="3931920"/>
+            <a:ext cx="2788920" cy="228600"/>
+          </a:xfrm>
+          <a:prstGeom prst="rect">
+            <a:avLst/>
+          </a:prstGeom>
+          <a:noFill/>
+          <a:ln/>
+        </p:spPr>
+        <p:txBody>
+          <a:bodyPr wrap="square" lIns="0" tIns="0" rIns="0" bIns="0" rtlCol="0" anchor="ctr"/>
+          <a:lstStyle/>
+          <a:p>
+            <a:pPr indent="0" marL="0">
+              <a:buNone/>
+            </a:pPr>
+            <a:r>
+              <a:rPr lang="en-US" sz="1000" b="1" dirty="0">
+                <a:solidFill>
+                  <a:srgbClr val="C9A961"/>
+                </a:solidFill>
+                <a:latin typeface="TH Sarabun New" pitchFamily="34" charset="0"/>
+                <a:ea typeface="TH Sarabun New" pitchFamily="34" charset="-122"/>
+                <a:cs typeface="TH Sarabun New" pitchFamily="34" charset="-120"/>
+              </a:rPr>
+              <a:t>Researcher </a:t>
+            </a:r>
+            <a:pPr indent="0" marL="0">
+              <a:buNone/>
+            </a:pPr>
+            <a:r>
+              <a:rPr lang="en-US" sz="1000" dirty="0">
+                <a:solidFill>
+                  <a:srgbClr val="4A4A4A"/>
+                </a:solidFill>
+                <a:latin typeface="TH Sarabun New" pitchFamily="34" charset="0"/>
+                <a:ea typeface="TH Sarabun New" pitchFamily="34" charset="-122"/>
+                <a:cs typeface="TH Sarabun New" pitchFamily="34" charset="-120"/>
+              </a:rPr>
+              <a:t>ค้นวรรณกรรม</a:t>
+            </a:r>
+            <a:pPr indent="0" marL="0">
+              <a:buNone/>
+            </a:pPr>
+            <a:r>
+              <a:rPr lang="en-US" sz="1000" b="1" dirty="0">
+                <a:solidFill>
+                  <a:srgbClr val="2E8B57"/>
+                </a:solidFill>
+                <a:latin typeface="TH Sarabun New" pitchFamily="34" charset="0"/>
+                <a:ea typeface="TH Sarabun New" pitchFamily="34" charset="-122"/>
+                <a:cs typeface="TH Sarabun New" pitchFamily="34" charset="-120"/>
+              </a:rPr>
+              <a:t>  →  Analyzer </a:t>
+            </a:r>
+            <a:endParaRPr lang="en-US" sz="1000" dirty="0"/>
+          </a:p>
+        </p:txBody>
+      </p:sp>
+      <p:sp>
+        <p:nvSpPr>
+          <p:cNvPr id="63" name="Text 61"/>
+          <p:cNvSpPr/>
+          <p:nvPr/>
+        </p:nvSpPr>
+        <p:spPr>
+          <a:xfrm>
+            <a:off x="5760720" y="3977640"/>
+            <a:ext cx="2788920" cy="256032"/>
+          </a:xfrm>
+          <a:prstGeom prst="rect">
+            <a:avLst/>
+          </a:prstGeom>
+          <a:noFill/>
+          <a:ln/>
+        </p:spPr>
+        <p:txBody>
+          <a:bodyPr wrap="square" lIns="0" tIns="0" rIns="0" bIns="0" rtlCol="0" anchor="ctr"/>
+          <a:lstStyle/>
+          <a:p>
+            <a:pPr indent="0" marL="0">
+              <a:buNone/>
+            </a:pPr>
+            <a:r>
+              <a:rPr lang="en-US" sz="1000" dirty="0">
+                <a:solidFill>
+                  <a:srgbClr val="4A4A4A"/>
+                </a:solidFill>
+                <a:latin typeface="TH Sarabun New" pitchFamily="34" charset="0"/>
+                <a:ea typeface="TH Sarabun New" pitchFamily="34" charset="-122"/>
+                <a:cs typeface="TH Sarabun New" pitchFamily="34" charset="-120"/>
+              </a:rPr>
+              <a:t>Researcher → Analyzer → Writer → Reviewer → คนยืนยัน</a:t>
+            </a:r>
+            <a:endParaRPr lang="en-US" sz="1000" dirty="0"/>
+          </a:p>
+        </p:txBody>
+      </p:sp>
+      <p:sp>
+        <p:nvSpPr>
+          <p:cNvPr id="64" name="Text 62"/>
+          <p:cNvSpPr/>
+          <p:nvPr/>
+        </p:nvSpPr>
+        <p:spPr>
+          <a:xfrm>
+            <a:off x="5760720" y="4251960"/>
+            <a:ext cx="2788920" cy="274320"/>
+          </a:xfrm>
+          <a:prstGeom prst="rect">
+            <a:avLst/>
+          </a:prstGeom>
+          <a:noFill/>
+          <a:ln/>
+        </p:spPr>
+        <p:txBody>
+          <a:bodyPr wrap="square" lIns="0" tIns="0" rIns="0" bIns="0" rtlCol="0" anchor="ctr"/>
+          <a:lstStyle/>
+          <a:p>
+            <a:pPr indent="0" marL="0">
+              <a:buNone/>
+            </a:pPr>
+            <a:r>
+              <a:rPr lang="en-US" sz="1100" b="1" i="1" dirty="0">
+                <a:solidFill>
+                  <a:srgbClr val="006633"/>
+                </a:solidFill>
+                <a:latin typeface="TH Sarabun New" pitchFamily="34" charset="0"/>
+                <a:ea typeface="TH Sarabun New" pitchFamily="34" charset="-122"/>
+                <a:cs typeface="TH Sarabun New" pitchFamily="34" charset="-120"/>
+              </a:rPr>
+              <a:t>ลดเวลาทำ research review จาก 2 สัปดาห์  →  1 วัน</a:t>
+            </a:r>
+            <a:endParaRPr lang="en-US" sz="1100" dirty="0"/>
+          </a:p>
+        </p:txBody>
+      </p:sp>
+      <p:sp>
+        <p:nvSpPr>
+          <p:cNvPr id="65" name="Shape 63"/>
+          <p:cNvSpPr/>
+          <p:nvPr/>
+        </p:nvSpPr>
+        <p:spPr>
+          <a:xfrm>
+            <a:off x="457200" y="4617720"/>
+            <a:ext cx="8229600" cy="411480"/>
+          </a:xfrm>
+          <a:prstGeom prst="rect">
+            <a:avLst/>
+          </a:prstGeom>
+          <a:solidFill>
+            <a:srgbClr val="004D26"/>
+          </a:solidFill>
+          <a:ln/>
+        </p:spPr>
+      </p:sp>
+      <p:sp>
+        <p:nvSpPr>
+          <p:cNvPr id="66" name="Shape 64"/>
+          <p:cNvSpPr/>
+          <p:nvPr/>
+        </p:nvSpPr>
+        <p:spPr>
+          <a:xfrm>
+            <a:off x="457200" y="4617720"/>
+            <a:ext cx="109728" cy="411480"/>
+          </a:xfrm>
+          <a:prstGeom prst="rect">
+            <a:avLst/>
+          </a:prstGeom>
+          <a:solidFill>
+            <a:srgbClr val="C9A961"/>
+          </a:solidFill>
+          <a:ln/>
+        </p:spPr>
+      </p:sp>
+      <p:sp>
+        <p:nvSpPr>
+          <p:cNvPr id="67" name="Text 65"/>
+          <p:cNvSpPr/>
+          <p:nvPr/>
+        </p:nvSpPr>
+        <p:spPr>
+          <a:xfrm>
+            <a:off x="685800" y="4617720"/>
+            <a:ext cx="8229600" cy="411480"/>
+          </a:xfrm>
+          <a:prstGeom prst="rect">
+            <a:avLst/>
+          </a:prstGeom>
+          <a:noFill/>
+          <a:ln/>
+        </p:spPr>
+        <p:txBody>
+          <a:bodyPr wrap="square" lIns="0" tIns="0" rIns="0" bIns="0" rtlCol="0" anchor="ctr"/>
+          <a:lstStyle/>
+          <a:p>
+            <a:pPr indent="0" marL="0">
+              <a:buNone/>
+            </a:pPr>
+            <a:r>
+              <a:rPr lang="en-US" sz="1200" b="1" dirty="0">
+                <a:solidFill>
+                  <a:srgbClr val="C9A961"/>
+                </a:solidFill>
+                <a:latin typeface="TH Sarabun New" pitchFamily="34" charset="0"/>
+                <a:ea typeface="TH Sarabun New" pitchFamily="34" charset="-122"/>
+                <a:cs typeface="TH Sarabun New" pitchFamily="34" charset="-120"/>
+              </a:rPr>
+              <a:t>Roadmap:  </a:t>
+            </a:r>
+            <a:pPr indent="0" marL="0">
+              <a:buNone/>
+            </a:pPr>
+            <a:r>
+              <a:rPr lang="en-US" sz="1200" dirty="0">
+                <a:solidFill>
+                  <a:srgbClr val="FFFFFF"/>
+                </a:solidFill>
+                <a:latin typeface="TH Sarabun New" pitchFamily="34" charset="0"/>
+                <a:ea typeface="TH Sarabun New" pitchFamily="34" charset="-122"/>
+                <a:cs typeface="TH Sarabun New" pitchFamily="34" charset="-120"/>
+              </a:rPr>
+              <a:t>Foundation = AI Agents เดี่ยว (workflow.ku.ac.th)  →  </a:t>
+            </a:r>
+            <a:pPr indent="0" marL="0">
+              <a:buNone/>
+            </a:pPr>
+            <a:r>
+              <a:rPr lang="en-US" sz="1200" b="1" dirty="0">
+                <a:solidFill>
+                  <a:srgbClr val="C9A961"/>
+                </a:solidFill>
+                <a:latin typeface="TH Sarabun New" pitchFamily="34" charset="0"/>
+                <a:ea typeface="TH Sarabun New" pitchFamily="34" charset="-122"/>
+                <a:cs typeface="TH Sarabun New" pitchFamily="34" charset="-120"/>
+              </a:rPr>
+              <a:t>Applied = Agentic systems</a:t>
+            </a:r>
+            <a:pPr indent="0" marL="0">
+              <a:buNone/>
+            </a:pPr>
+            <a:r>
+              <a:rPr lang="en-US" sz="1200" dirty="0">
+                <a:solidFill>
+                  <a:srgbClr val="FFFFFF"/>
+                </a:solidFill>
+                <a:latin typeface="TH Sarabun New" pitchFamily="34" charset="0"/>
+                <a:ea typeface="TH Sarabun New" pitchFamily="34" charset="-122"/>
+                <a:cs typeface="TH Sarabun New" pitchFamily="34" charset="-120"/>
+              </a:rPr>
+              <a:t>  (KU LLM + n8n + multi-agent orchestration)</a:t>
+            </a:r>
+            <a:endParaRPr lang="en-US" sz="1200" dirty="0"/>
+          </a:p>
+        </p:txBody>
+      </p:sp>
+      <p:sp>
+        <p:nvSpPr>
+          <p:cNvPr id="68" name="Text 66"/>
+          <p:cNvSpPr/>
+          <p:nvPr/>
+        </p:nvSpPr>
+        <p:spPr>
+          <a:xfrm>
+            <a:off x="8503920" y="4846320"/>
+            <a:ext cx="548640" cy="228600"/>
+          </a:xfrm>
+          <a:prstGeom prst="rect">
+            <a:avLst/>
+          </a:prstGeom>
+          <a:noFill/>
+          <a:ln/>
+        </p:spPr>
+        <p:txBody>
+          <a:bodyPr wrap="square" lIns="0" tIns="0" rIns="0" bIns="0" rtlCol="0" anchor="ctr"/>
+          <a:lstStyle/>
+          <a:p>
+            <a:pPr algn="r" indent="0" marL="0">
+              <a:buNone/>
+            </a:pPr>
+            <a:r>
+              <a:rPr lang="en-US" sz="900" dirty="0">
+                <a:solidFill>
+                  <a:srgbClr val="B0B0B0"/>
+                </a:solidFill>
+                <a:latin typeface="Calibri" pitchFamily="34" charset="0"/>
+                <a:ea typeface="Calibri" pitchFamily="34" charset="-122"/>
+                <a:cs typeface="Calibri" pitchFamily="34" charset="-120"/>
+              </a:rPr>
+              <a:t>05 / 07</a:t>
+            </a:r>
+            <a:endParaRPr lang="en-US" sz="900" dirty="0"/>
+          </a:p>
+        </p:txBody>
+      </p:sp>
+    </p:spTree>
+  </p:cSld>
+  <p:clrMapOvr>
+    <a:masterClrMapping/>
+  </p:clrMapOvr>
+</p:sld>
+</file>
+
+<file path=ppt/slides/slide6.xml><?xml version="1.0" encoding="utf-8"?>
+<p:sld xmlns:a="http://schemas.openxmlformats.org/drawingml/2006/main" xmlns:r="http://schemas.openxmlformats.org/officeDocument/2006/relationships" xmlns:p="http://schemas.openxmlformats.org/presentationml/2006/main">
+  <p:cSld name="Slide 6">
+    <p:bg>
+      <p:bgPr>
+        <a:solidFill>
+          <a:srgbClr val="FAF6EE"/>
+        </a:solidFill>
+      </p:bgPr>
+    </p:bg>
+    <p:spTree>
+      <p:nvGrpSpPr>
+        <p:cNvPr id="1" name=""/>
+        <p:cNvGrpSpPr/>
+        <p:nvPr/>
+      </p:nvGrpSpPr>
+      <p:grpSpPr>
+        <a:xfrm>
+          <a:off x="0" y="0"/>
+          <a:ext cx="0" cy="0"/>
+          <a:chOff x="0" y="0"/>
+          <a:chExt cx="0" cy="0"/>
+        </a:xfrm>
+      </p:grpSpPr>
+      <p:sp>
+        <p:nvSpPr>
+          <p:cNvPr id="2" name="Text 0"/>
+          <p:cNvSpPr/>
+          <p:nvPr/>
+        </p:nvSpPr>
+        <p:spPr>
+          <a:xfrm>
+            <a:off x="457200" y="320040"/>
+            <a:ext cx="8229600" cy="640080"/>
+          </a:xfrm>
+          <a:prstGeom prst="rect">
+            <a:avLst/>
+          </a:prstGeom>
+          <a:noFill/>
+          <a:ln/>
+        </p:spPr>
+        <p:txBody>
+          <a:bodyPr wrap="square" lIns="0" tIns="0" rIns="0" bIns="0" rtlCol="0" anchor="ctr"/>
+          <a:lstStyle/>
+          <a:p>
+            <a:pPr indent="0" marL="0">
+              <a:buNone/>
+            </a:pPr>
+            <a:r>
+              <a:rPr lang="en-US" sz="3200" b="1" dirty="0">
+                <a:solidFill>
+                  <a:srgbClr val="006633"/>
+                </a:solidFill>
+                <a:latin typeface="TH Sarabun New" pitchFamily="34" charset="0"/>
+                <a:ea typeface="TH Sarabun New" pitchFamily="34" charset="-122"/>
+                <a:cs typeface="TH Sarabun New" pitchFamily="34" charset="-120"/>
+              </a:rPr>
+              <a:t>ทำได้แล้ววันนี้ — 5 Pattern ที่ขยายต่อได้ทันที</a:t>
+            </a:r>
+            <a:endParaRPr lang="en-US" sz="3200" dirty="0"/>
+          </a:p>
+        </p:txBody>
+      </p:sp>
+      <p:sp>
+        <p:nvSpPr>
+          <p:cNvPr id="3" name="Text 1"/>
+          <p:cNvSpPr/>
+          <p:nvPr/>
+        </p:nvSpPr>
+        <p:spPr>
+          <a:xfrm>
+            <a:off x="457200" y="914400"/>
+            <a:ext cx="8229600" cy="320040"/>
+          </a:xfrm>
+          <a:prstGeom prst="rect">
+            <a:avLst/>
+          </a:prstGeom>
+          <a:noFill/>
+          <a:ln/>
+        </p:spPr>
+        <p:txBody>
+          <a:bodyPr wrap="square" lIns="0" tIns="0" rIns="0" bIns="0" rtlCol="0" anchor="ctr"/>
+          <a:lstStyle/>
+          <a:p>
+            <a:pPr indent="0" marL="0">
+              <a:buNone/>
+            </a:pPr>
+            <a:r>
+              <a:rPr lang="en-US" sz="1400" i="1" dirty="0">
+                <a:solidFill>
+                  <a:srgbClr val="6B6B6B"/>
+                </a:solidFill>
+                <a:latin typeface="TH Sarabun New" pitchFamily="34" charset="0"/>
+                <a:ea typeface="TH Sarabun New" pitchFamily="34" charset="-122"/>
+                <a:cs typeface="TH Sarabun New" pitchFamily="34" charset="-120"/>
+              </a:rPr>
+              <a:t>Quick Wins — Use cases ที่บุคลากร 119 คน ทดสอบแล้วใน Foundation Workshop</a:t>
+            </a:r>
+            <a:endParaRPr lang="en-US" sz="1400" dirty="0"/>
+          </a:p>
+        </p:txBody>
+      </p:sp>
+      <p:sp>
+        <p:nvSpPr>
+          <p:cNvPr id="4" name="Shape 2"/>
+          <p:cNvSpPr/>
+          <p:nvPr/>
+        </p:nvSpPr>
+        <p:spPr>
+          <a:xfrm>
+            <a:off x="365760" y="1371600"/>
+            <a:ext cx="1645920" cy="2468880"/>
+          </a:xfrm>
+          <a:prstGeom prst="rect">
+            <a:avLst/>
+          </a:prstGeom>
+          <a:solidFill>
+            <a:srgbClr val="FFFFFF"/>
+          </a:solidFill>
+          <a:ln w="6350">
+            <a:solidFill>
+              <a:srgbClr val="006633"/>
+            </a:solidFill>
+            <a:prstDash val="solid"/>
+          </a:ln>
+          <a:effectLst>
+            <a:outerShdw sx="100000" sy="100000" kx="0" ky="0" algn="bl" rotWithShape="0" blurRad="101600" dist="25400" dir="5400000">
+              <a:srgbClr val="000000">
+                <a:alpha val="8000"/>
+              </a:srgbClr>
+            </a:outerShdw>
+          </a:effectLst>
+        </p:spPr>
+      </p:sp>
+      <p:sp>
+        <p:nvSpPr>
+          <p:cNvPr id="5" name="Shape 3"/>
+          <p:cNvSpPr/>
+          <p:nvPr/>
+        </p:nvSpPr>
+        <p:spPr>
+          <a:xfrm>
+            <a:off x="365760" y="1371600"/>
+            <a:ext cx="1645920" cy="109728"/>
+          </a:xfrm>
+          <a:prstGeom prst="rect">
+            <a:avLst/>
+          </a:prstGeom>
+          <a:solidFill>
+            <a:srgbClr val="006633"/>
+          </a:solidFill>
+          <a:ln/>
+        </p:spPr>
+      </p:sp>
+      <p:sp>
+        <p:nvSpPr>
+          <p:cNvPr id="6" name="Shape 4"/>
+          <p:cNvSpPr/>
+          <p:nvPr/>
+        </p:nvSpPr>
+        <p:spPr>
+          <a:xfrm>
+            <a:off x="1554480" y="1554480"/>
+            <a:ext cx="320040" cy="320040"/>
+          </a:xfrm>
+          <a:prstGeom prst="ellipse">
+            <a:avLst/>
+          </a:prstGeom>
+          <a:solidFill>
+            <a:srgbClr val="006633"/>
+          </a:solidFill>
+          <a:ln/>
+        </p:spPr>
+      </p:sp>
+      <p:sp>
+        <p:nvSpPr>
+          <p:cNvPr id="7" name="Text 5"/>
+          <p:cNvSpPr/>
+          <p:nvPr/>
+        </p:nvSpPr>
+        <p:spPr>
+          <a:xfrm>
+            <a:off x="1554480" y="1554480"/>
+            <a:ext cx="320040" cy="320040"/>
+          </a:xfrm>
+          <a:prstGeom prst="rect">
+            <a:avLst/>
+          </a:prstGeom>
+          <a:noFill/>
+          <a:ln/>
+        </p:spPr>
+        <p:txBody>
+          <a:bodyPr wrap="square" lIns="0" tIns="0" rIns="0" bIns="0" rtlCol="0" anchor="ctr"/>
+          <a:lstStyle/>
+          <a:p>
+            <a:pPr algn="ctr" indent="0" marL="0">
+              <a:buNone/>
+            </a:pPr>
+            <a:r>
+              <a:rPr lang="en-US" sz="1400" b="1" dirty="0">
+                <a:solidFill>
+                  <a:srgbClr val="FFFFFF"/>
+                </a:solidFill>
+                <a:latin typeface="Calibri" pitchFamily="34" charset="0"/>
+                <a:ea typeface="Calibri" pitchFamily="34" charset="-122"/>
+                <a:cs typeface="Calibri" pitchFamily="34" charset="-120"/>
+              </a:rPr>
+              <a:t>1</a:t>
+            </a:r>
+            <a:endParaRPr lang="en-US" sz="1400" dirty="0"/>
+          </a:p>
+        </p:txBody>
+      </p:sp>
+      <p:sp>
+        <p:nvSpPr>
+          <p:cNvPr id="8" name="Text 6"/>
+          <p:cNvSpPr/>
+          <p:nvPr/>
+        </p:nvSpPr>
+        <p:spPr>
+          <a:xfrm>
+            <a:off x="502920" y="1600200"/>
+            <a:ext cx="1005840" cy="365760"/>
+          </a:xfrm>
+          <a:prstGeom prst="rect">
+            <a:avLst/>
+          </a:prstGeom>
+          <a:noFill/>
+          <a:ln/>
+        </p:spPr>
+        <p:txBody>
+          <a:bodyPr wrap="square" lIns="0" tIns="0" rIns="0" bIns="0" rtlCol="0" anchor="ctr"/>
+          <a:lstStyle/>
+          <a:p>
+            <a:pPr indent="0" marL="0">
+              <a:buNone/>
+            </a:pPr>
+            <a:r>
+              <a:rPr lang="en-US" sz="1800" b="1" dirty="0">
+                <a:solidFill>
+                  <a:srgbClr val="1A1A1A"/>
+                </a:solidFill>
+                <a:latin typeface="TH Sarabun New" pitchFamily="34" charset="0"/>
+                <a:ea typeface="TH Sarabun New" pitchFamily="34" charset="-122"/>
+                <a:cs typeface="TH Sarabun New" pitchFamily="34" charset="-120"/>
+              </a:rPr>
+              <a:t>คำร้องนิสิต</a:t>
+            </a:r>
+            <a:endParaRPr lang="en-US" sz="1800" dirty="0"/>
+          </a:p>
+        </p:txBody>
+      </p:sp>
+      <p:sp>
+        <p:nvSpPr>
+          <p:cNvPr id="9" name="Text 7"/>
+          <p:cNvSpPr/>
+          <p:nvPr/>
+        </p:nvSpPr>
+        <p:spPr>
+          <a:xfrm>
+            <a:off x="502920" y="2011680"/>
+            <a:ext cx="1371600" cy="228600"/>
+          </a:xfrm>
+          <a:prstGeom prst="rect">
+            <a:avLst/>
+          </a:prstGeom>
+          <a:noFill/>
+          <a:ln/>
+        </p:spPr>
+        <p:txBody>
+          <a:bodyPr wrap="square" lIns="0" tIns="0" rIns="0" bIns="0" rtlCol="0" anchor="ctr"/>
+          <a:lstStyle/>
+          <a:p>
+            <a:pPr indent="0" marL="0">
+              <a:buNone/>
+            </a:pPr>
+            <a:r>
+              <a:rPr lang="en-US" sz="900" b="1" spc="200" kern="0" dirty="0">
+                <a:solidFill>
+                  <a:srgbClr val="006633"/>
+                </a:solidFill>
+                <a:latin typeface="Calibri" pitchFamily="34" charset="0"/>
+                <a:ea typeface="Calibri" pitchFamily="34" charset="-122"/>
+                <a:cs typeface="Calibri" pitchFamily="34" charset="-120"/>
+              </a:rPr>
+              <a:t>Forms → LINE</a:t>
+            </a:r>
+            <a:endParaRPr lang="en-US" sz="900" dirty="0"/>
+          </a:p>
+        </p:txBody>
+      </p:sp>
+      <p:sp>
+        <p:nvSpPr>
+          <p:cNvPr id="10" name="Text 8"/>
+          <p:cNvSpPr/>
+          <p:nvPr/>
+        </p:nvSpPr>
+        <p:spPr>
+          <a:xfrm>
+            <a:off x="502920" y="2286000"/>
+            <a:ext cx="1371600" cy="822960"/>
+          </a:xfrm>
+          <a:prstGeom prst="rect">
+            <a:avLst/>
+          </a:prstGeom>
+          <a:noFill/>
+          <a:ln/>
+        </p:spPr>
+        <p:txBody>
+          <a:bodyPr wrap="square" lIns="0" tIns="0" rIns="0" bIns="0" rtlCol="0" anchor="ctr"/>
+          <a:lstStyle/>
+          <a:p>
+            <a:pPr indent="0" marL="0">
+              <a:buNone/>
+            </a:pPr>
+            <a:r>
+              <a:rPr lang="en-US" sz="1100" dirty="0">
+                <a:solidFill>
+                  <a:srgbClr val="4A4A4A"/>
+                </a:solidFill>
+                <a:latin typeface="TH Sarabun New" pitchFamily="34" charset="0"/>
+                <a:ea typeface="TH Sarabun New" pitchFamily="34" charset="-122"/>
+                <a:cs typeface="TH Sarabun New" pitchFamily="34" charset="-120"/>
+              </a:rPr>
+              <a:t>นิสิตยื่นคำร้อง → แจ้งเจ้าหน้าที่ทันทีใน LINE</a:t>
+            </a:r>
+            <a:endParaRPr lang="en-US" sz="1100" dirty="0"/>
+          </a:p>
+          <a:p>
+            <a:pPr indent="0" marL="0">
+              <a:buNone/>
+            </a:pPr>
+            <a:r>
+              <a:rPr lang="en-US" sz="1100" dirty="0">
+                <a:solidFill>
+                  <a:srgbClr val="4A4A4A"/>
+                </a:solidFill>
+                <a:latin typeface="TH Sarabun New" pitchFamily="34" charset="0"/>
+                <a:ea typeface="TH Sarabun New" pitchFamily="34" charset="-122"/>
+                <a:cs typeface="TH Sarabun New" pitchFamily="34" charset="-120"/>
+              </a:rPr>
+              <a:t>ลด lag time จาก 2 วัน → 5 วินาที</a:t>
+            </a:r>
+            <a:endParaRPr lang="en-US" sz="1100" dirty="0"/>
+          </a:p>
+        </p:txBody>
+      </p:sp>
+      <p:sp>
+        <p:nvSpPr>
+          <p:cNvPr id="11" name="Shape 9"/>
+          <p:cNvSpPr/>
+          <p:nvPr/>
+        </p:nvSpPr>
+        <p:spPr>
+          <a:xfrm>
+            <a:off x="502920" y="3154680"/>
+            <a:ext cx="1371600" cy="0"/>
+          </a:xfrm>
+          <a:prstGeom prst="line">
+            <a:avLst/>
+          </a:prstGeom>
+          <a:noFill/>
+          <a:ln w="6350">
+            <a:solidFill>
+              <a:srgbClr val="006633"/>
+            </a:solidFill>
+            <a:prstDash val="dash"/>
+          </a:ln>
+        </p:spPr>
+      </p:sp>
+      <p:sp>
+        <p:nvSpPr>
+          <p:cNvPr id="12" name="Text 10"/>
+          <p:cNvSpPr/>
+          <p:nvPr/>
+        </p:nvSpPr>
+        <p:spPr>
+          <a:xfrm>
+            <a:off x="502920" y="3200400"/>
+            <a:ext cx="1371600" cy="411480"/>
+          </a:xfrm>
+          <a:prstGeom prst="rect">
+            <a:avLst/>
+          </a:prstGeom>
+          <a:noFill/>
+          <a:ln/>
+        </p:spPr>
+        <p:txBody>
+          <a:bodyPr wrap="square" lIns="0" tIns="0" rIns="0" bIns="0" rtlCol="0" anchor="ctr"/>
+          <a:lstStyle/>
+          <a:p>
+            <a:pPr algn="ctr" indent="0" marL="0">
+              <a:buNone/>
+            </a:pPr>
+            <a:r>
+              <a:rPr lang="en-US" sz="2800" b="1" dirty="0">
+                <a:solidFill>
+                  <a:srgbClr val="006633"/>
+                </a:solidFill>
+                <a:latin typeface="Calibri" pitchFamily="34" charset="0"/>
+                <a:ea typeface="Calibri" pitchFamily="34" charset="-122"/>
+                <a:cs typeface="Calibri" pitchFamily="34" charset="-120"/>
+              </a:rPr>
+              <a:t>250</a:t>
+            </a:r>
+            <a:endParaRPr lang="en-US" sz="2800" dirty="0"/>
+          </a:p>
+        </p:txBody>
+      </p:sp>
+      <p:sp>
+        <p:nvSpPr>
+          <p:cNvPr id="13" name="Text 11"/>
+          <p:cNvSpPr/>
+          <p:nvPr/>
+        </p:nvSpPr>
+        <p:spPr>
+          <a:xfrm>
+            <a:off x="502920" y="3584448"/>
+            <a:ext cx="1371600" cy="228600"/>
+          </a:xfrm>
+          <a:prstGeom prst="rect">
+            <a:avLst/>
+          </a:prstGeom>
+          <a:noFill/>
+          <a:ln/>
+        </p:spPr>
+        <p:txBody>
+          <a:bodyPr wrap="square" lIns="0" tIns="0" rIns="0" bIns="0" rtlCol="0" anchor="ctr"/>
+          <a:lstStyle/>
+          <a:p>
+            <a:pPr algn="ctr" indent="0" marL="0">
+              <a:buNone/>
+            </a:pPr>
+            <a:r>
+              <a:rPr lang="en-US" sz="1100" dirty="0">
+                <a:solidFill>
+                  <a:srgbClr val="6B6B6B"/>
+                </a:solidFill>
+                <a:latin typeface="TH Sarabun New" pitchFamily="34" charset="0"/>
+                <a:ea typeface="TH Sarabun New" pitchFamily="34" charset="-122"/>
+                <a:cs typeface="TH Sarabun New" pitchFamily="34" charset="-120"/>
+              </a:rPr>
+              <a:t>ชม./ปี</a:t>
+            </a:r>
+            <a:endParaRPr lang="en-US" sz="1100" dirty="0"/>
+          </a:p>
+        </p:txBody>
+      </p:sp>
+      <p:sp>
+        <p:nvSpPr>
+          <p:cNvPr id="14" name="Shape 12"/>
+          <p:cNvSpPr/>
+          <p:nvPr/>
+        </p:nvSpPr>
+        <p:spPr>
+          <a:xfrm>
+            <a:off x="2057400" y="1371600"/>
+            <a:ext cx="1645920" cy="2468880"/>
+          </a:xfrm>
+          <a:prstGeom prst="rect">
+            <a:avLst/>
+          </a:prstGeom>
+          <a:solidFill>
+            <a:srgbClr val="FFFFFF"/>
+          </a:solidFill>
+          <a:ln w="6350">
+            <a:solidFill>
+              <a:srgbClr val="C9A961"/>
+            </a:solidFill>
+            <a:prstDash val="solid"/>
+          </a:ln>
+          <a:effectLst>
+            <a:outerShdw sx="100000" sy="100000" kx="0" ky="0" algn="bl" rotWithShape="0" blurRad="101600" dist="25400" dir="5400000">
+              <a:srgbClr val="000000">
+                <a:alpha val="8000"/>
+              </a:srgbClr>
+            </a:outerShdw>
+          </a:effectLst>
+        </p:spPr>
+      </p:sp>
+      <p:sp>
+        <p:nvSpPr>
+          <p:cNvPr id="15" name="Shape 13"/>
+          <p:cNvSpPr/>
+          <p:nvPr/>
+        </p:nvSpPr>
+        <p:spPr>
+          <a:xfrm>
+            <a:off x="2057400" y="1371600"/>
+            <a:ext cx="1645920" cy="109728"/>
+          </a:xfrm>
+          <a:prstGeom prst="rect">
+            <a:avLst/>
+          </a:prstGeom>
+          <a:solidFill>
+            <a:srgbClr val="C9A961"/>
+          </a:solidFill>
+          <a:ln/>
+        </p:spPr>
+      </p:sp>
+      <p:sp>
+        <p:nvSpPr>
+          <p:cNvPr id="16" name="Shape 14"/>
+          <p:cNvSpPr/>
+          <p:nvPr/>
+        </p:nvSpPr>
+        <p:spPr>
+          <a:xfrm>
+            <a:off x="3246120" y="1554480"/>
+            <a:ext cx="320040" cy="320040"/>
+          </a:xfrm>
+          <a:prstGeom prst="ellipse">
+            <a:avLst/>
+          </a:prstGeom>
+          <a:solidFill>
+            <a:srgbClr val="C9A961"/>
+          </a:solidFill>
+          <a:ln/>
+        </p:spPr>
+      </p:sp>
+      <p:sp>
+        <p:nvSpPr>
+          <p:cNvPr id="17" name="Text 15"/>
+          <p:cNvSpPr/>
+          <p:nvPr/>
+        </p:nvSpPr>
+        <p:spPr>
+          <a:xfrm>
+            <a:off x="3246120" y="1554480"/>
+            <a:ext cx="320040" cy="320040"/>
+          </a:xfrm>
+          <a:prstGeom prst="rect">
+            <a:avLst/>
+          </a:prstGeom>
+          <a:noFill/>
+          <a:ln/>
+        </p:spPr>
+        <p:txBody>
+          <a:bodyPr wrap="square" lIns="0" tIns="0" rIns="0" bIns="0" rtlCol="0" anchor="ctr"/>
+          <a:lstStyle/>
+          <a:p>
+            <a:pPr algn="ctr" indent="0" marL="0">
+              <a:buNone/>
+            </a:pPr>
+            <a:r>
+              <a:rPr lang="en-US" sz="1400" b="1" dirty="0">
+                <a:solidFill>
+                  <a:srgbClr val="FFFFFF"/>
+                </a:solidFill>
+                <a:latin typeface="Calibri" pitchFamily="34" charset="0"/>
+                <a:ea typeface="Calibri" pitchFamily="34" charset="-122"/>
+                <a:cs typeface="Calibri" pitchFamily="34" charset="-120"/>
+              </a:rPr>
+              <a:t>2</a:t>
+            </a:r>
+            <a:endParaRPr lang="en-US" sz="1400" dirty="0"/>
+          </a:p>
+        </p:txBody>
+      </p:sp>
+      <p:sp>
+        <p:nvSpPr>
+          <p:cNvPr id="18" name="Text 16"/>
+          <p:cNvSpPr/>
+          <p:nvPr/>
+        </p:nvSpPr>
+        <p:spPr>
+          <a:xfrm>
+            <a:off x="2194560" y="1600200"/>
+            <a:ext cx="1005840" cy="365760"/>
+          </a:xfrm>
+          <a:prstGeom prst="rect">
+            <a:avLst/>
+          </a:prstGeom>
+          <a:noFill/>
+          <a:ln/>
+        </p:spPr>
+        <p:txBody>
+          <a:bodyPr wrap="square" lIns="0" tIns="0" rIns="0" bIns="0" rtlCol="0" anchor="ctr"/>
+          <a:lstStyle/>
+          <a:p>
+            <a:pPr indent="0" marL="0">
+              <a:buNone/>
+            </a:pPr>
+            <a:r>
+              <a:rPr lang="en-US" sz="1800" b="1" dirty="0">
+                <a:solidFill>
+                  <a:srgbClr val="1A1A1A"/>
+                </a:solidFill>
+                <a:latin typeface="TH Sarabun New" pitchFamily="34" charset="0"/>
+                <a:ea typeface="TH Sarabun New" pitchFamily="34" charset="-122"/>
+                <a:cs typeface="TH Sarabun New" pitchFamily="34" charset="-120"/>
+              </a:rPr>
+              <a:t>รวบรวมเอกสาร</a:t>
+            </a:r>
+            <a:endParaRPr lang="en-US" sz="1800" dirty="0"/>
+          </a:p>
+        </p:txBody>
+      </p:sp>
+      <p:sp>
+        <p:nvSpPr>
+          <p:cNvPr id="19" name="Text 17"/>
+          <p:cNvSpPr/>
+          <p:nvPr/>
+        </p:nvSpPr>
+        <p:spPr>
+          <a:xfrm>
+            <a:off x="2194560" y="2011680"/>
+            <a:ext cx="1371600" cy="228600"/>
+          </a:xfrm>
+          <a:prstGeom prst="rect">
+            <a:avLst/>
+          </a:prstGeom>
+          <a:noFill/>
+          <a:ln/>
+        </p:spPr>
+        <p:txBody>
+          <a:bodyPr wrap="square" lIns="0" tIns="0" rIns="0" bIns="0" rtlCol="0" anchor="ctr"/>
+          <a:lstStyle/>
+          <a:p>
+            <a:pPr indent="0" marL="0">
+              <a:buNone/>
+            </a:pPr>
+            <a:r>
+              <a:rPr lang="en-US" sz="900" b="1" spc="200" kern="0" dirty="0">
+                <a:solidFill>
+                  <a:srgbClr val="C9A961"/>
+                </a:solidFill>
+                <a:latin typeface="Calibri" pitchFamily="34" charset="0"/>
+                <a:ea typeface="Calibri" pitchFamily="34" charset="-122"/>
+                <a:cs typeface="Calibri" pitchFamily="34" charset="-120"/>
+              </a:rPr>
+              <a:t>Gmail → Drive</a:t>
+            </a:r>
+            <a:endParaRPr lang="en-US" sz="900" dirty="0"/>
+          </a:p>
+        </p:txBody>
+      </p:sp>
+      <p:sp>
+        <p:nvSpPr>
+          <p:cNvPr id="20" name="Text 18"/>
+          <p:cNvSpPr/>
+          <p:nvPr/>
+        </p:nvSpPr>
+        <p:spPr>
+          <a:xfrm>
+            <a:off x="2194560" y="2286000"/>
+            <a:ext cx="1371600" cy="822960"/>
+          </a:xfrm>
+          <a:prstGeom prst="rect">
+            <a:avLst/>
+          </a:prstGeom>
+          <a:noFill/>
+          <a:ln/>
+        </p:spPr>
+        <p:txBody>
+          <a:bodyPr wrap="square" lIns="0" tIns="0" rIns="0" bIns="0" rtlCol="0" anchor="ctr"/>
+          <a:lstStyle/>
+          <a:p>
+            <a:pPr indent="0" marL="0">
+              <a:buNone/>
+            </a:pPr>
+            <a:r>
+              <a:rPr lang="en-US" sz="1100" dirty="0">
+                <a:solidFill>
+                  <a:srgbClr val="4A4A4A"/>
+                </a:solidFill>
+                <a:latin typeface="TH Sarabun New" pitchFamily="34" charset="0"/>
+                <a:ea typeface="TH Sarabun New" pitchFamily="34" charset="-122"/>
+                <a:cs typeface="TH Sarabun New" pitchFamily="34" charset="-120"/>
+              </a:rPr>
+              <a:t>ใบเสร็จ/รายงานที่เข้ามาทาง email</a:t>
+            </a:r>
+            <a:endParaRPr lang="en-US" sz="1100" dirty="0"/>
+          </a:p>
+          <a:p>
+            <a:pPr indent="0" marL="0">
+              <a:buNone/>
+            </a:pPr>
+            <a:r>
+              <a:rPr lang="en-US" sz="1100" dirty="0">
+                <a:solidFill>
+                  <a:srgbClr val="4A4A4A"/>
+                </a:solidFill>
+                <a:latin typeface="TH Sarabun New" pitchFamily="34" charset="0"/>
+                <a:ea typeface="TH Sarabun New" pitchFamily="34" charset="-122"/>
+                <a:cs typeface="TH Sarabun New" pitchFamily="34" charset="-120"/>
+              </a:rPr>
+              <a:t>จัดเก็บอัตโนมัติใน Drive โฟลเดอร์ที่กำหนด</a:t>
+            </a:r>
+            <a:endParaRPr lang="en-US" sz="1100" dirty="0"/>
+          </a:p>
+        </p:txBody>
+      </p:sp>
+      <p:sp>
+        <p:nvSpPr>
+          <p:cNvPr id="21" name="Shape 19"/>
+          <p:cNvSpPr/>
+          <p:nvPr/>
+        </p:nvSpPr>
+        <p:spPr>
+          <a:xfrm>
+            <a:off x="2194560" y="3154680"/>
+            <a:ext cx="1371600" cy="0"/>
+          </a:xfrm>
+          <a:prstGeom prst="line">
+            <a:avLst/>
+          </a:prstGeom>
+          <a:noFill/>
+          <a:ln w="6350">
+            <a:solidFill>
+              <a:srgbClr val="C9A961"/>
+            </a:solidFill>
+            <a:prstDash val="dash"/>
+          </a:ln>
+        </p:spPr>
+      </p:sp>
+      <p:sp>
+        <p:nvSpPr>
+          <p:cNvPr id="22" name="Text 20"/>
+          <p:cNvSpPr/>
+          <p:nvPr/>
+        </p:nvSpPr>
+        <p:spPr>
+          <a:xfrm>
+            <a:off x="2194560" y="3200400"/>
+            <a:ext cx="1371600" cy="411480"/>
+          </a:xfrm>
+          <a:prstGeom prst="rect">
+            <a:avLst/>
+          </a:prstGeom>
+          <a:noFill/>
+          <a:ln/>
+        </p:spPr>
+        <p:txBody>
+          <a:bodyPr wrap="square" lIns="0" tIns="0" rIns="0" bIns="0" rtlCol="0" anchor="ctr"/>
+          <a:lstStyle/>
+          <a:p>
+            <a:pPr algn="ctr" indent="0" marL="0">
+              <a:buNone/>
+            </a:pPr>
+            <a:r>
+              <a:rPr lang="en-US" sz="2800" b="1" dirty="0">
+                <a:solidFill>
+                  <a:srgbClr val="C9A961"/>
+                </a:solidFill>
+                <a:latin typeface="Calibri" pitchFamily="34" charset="0"/>
+                <a:ea typeface="Calibri" pitchFamily="34" charset="-122"/>
+                <a:cs typeface="Calibri" pitchFamily="34" charset="-120"/>
+              </a:rPr>
+              <a:t>33</a:t>
+            </a:r>
+            <a:endParaRPr lang="en-US" sz="2800" dirty="0"/>
+          </a:p>
+        </p:txBody>
+      </p:sp>
+      <p:sp>
+        <p:nvSpPr>
+          <p:cNvPr id="23" name="Text 21"/>
+          <p:cNvSpPr/>
+          <p:nvPr/>
+        </p:nvSpPr>
+        <p:spPr>
+          <a:xfrm>
+            <a:off x="2194560" y="3584448"/>
+            <a:ext cx="1371600" cy="228600"/>
+          </a:xfrm>
+          <a:prstGeom prst="rect">
+            <a:avLst/>
+          </a:prstGeom>
+          <a:noFill/>
+          <a:ln/>
+        </p:spPr>
+        <p:txBody>
+          <a:bodyPr wrap="square" lIns="0" tIns="0" rIns="0" bIns="0" rtlCol="0" anchor="ctr"/>
+          <a:lstStyle/>
+          <a:p>
+            <a:pPr algn="ctr" indent="0" marL="0">
+              <a:buNone/>
+            </a:pPr>
+            <a:r>
+              <a:rPr lang="en-US" sz="1100" dirty="0">
+                <a:solidFill>
+                  <a:srgbClr val="6B6B6B"/>
+                </a:solidFill>
+                <a:latin typeface="TH Sarabun New" pitchFamily="34" charset="0"/>
+                <a:ea typeface="TH Sarabun New" pitchFamily="34" charset="-122"/>
+                <a:cs typeface="TH Sarabun New" pitchFamily="34" charset="-120"/>
+              </a:rPr>
+              <a:t>ชม./ปี</a:t>
+            </a:r>
+            <a:endParaRPr lang="en-US" sz="1100" dirty="0"/>
+          </a:p>
+        </p:txBody>
+      </p:sp>
+      <p:sp>
+        <p:nvSpPr>
+          <p:cNvPr id="24" name="Shape 22"/>
+          <p:cNvSpPr/>
+          <p:nvPr/>
+        </p:nvSpPr>
+        <p:spPr>
+          <a:xfrm>
+            <a:off x="3749040" y="1371600"/>
+            <a:ext cx="1645920" cy="2468880"/>
+          </a:xfrm>
+          <a:prstGeom prst="rect">
+            <a:avLst/>
+          </a:prstGeom>
+          <a:solidFill>
+            <a:srgbClr val="FFFFFF"/>
+          </a:solidFill>
+          <a:ln w="6350">
+            <a:solidFill>
+              <a:srgbClr val="2E8B57"/>
+            </a:solidFill>
+            <a:prstDash val="solid"/>
+          </a:ln>
+          <a:effectLst>
+            <a:outerShdw sx="100000" sy="100000" kx="0" ky="0" algn="bl" rotWithShape="0" blurRad="101600" dist="25400" dir="5400000">
+              <a:srgbClr val="000000">
+                <a:alpha val="8000"/>
+              </a:srgbClr>
+            </a:outerShdw>
+          </a:effectLst>
+        </p:spPr>
+      </p:sp>
+      <p:sp>
+        <p:nvSpPr>
+          <p:cNvPr id="25" name="Shape 23"/>
+          <p:cNvSpPr/>
+          <p:nvPr/>
+        </p:nvSpPr>
+        <p:spPr>
+          <a:xfrm>
+            <a:off x="3749040" y="1371600"/>
+            <a:ext cx="1645920" cy="109728"/>
+          </a:xfrm>
+          <a:prstGeom prst="rect">
+            <a:avLst/>
+          </a:prstGeom>
+          <a:solidFill>
+            <a:srgbClr val="2E8B57"/>
+          </a:solidFill>
+          <a:ln/>
+        </p:spPr>
+      </p:sp>
+      <p:sp>
+        <p:nvSpPr>
+          <p:cNvPr id="26" name="Shape 24"/>
+          <p:cNvSpPr/>
+          <p:nvPr/>
+        </p:nvSpPr>
+        <p:spPr>
+          <a:xfrm>
+            <a:off x="4937760" y="1554480"/>
+            <a:ext cx="320040" cy="320040"/>
+          </a:xfrm>
+          <a:prstGeom prst="ellipse">
+            <a:avLst/>
+          </a:prstGeom>
+          <a:solidFill>
+            <a:srgbClr val="2E8B57"/>
+          </a:solidFill>
+          <a:ln/>
+        </p:spPr>
+      </p:sp>
+      <p:sp>
+        <p:nvSpPr>
+          <p:cNvPr id="27" name="Text 25"/>
+          <p:cNvSpPr/>
+          <p:nvPr/>
+        </p:nvSpPr>
+        <p:spPr>
+          <a:xfrm>
+            <a:off x="4937760" y="1554480"/>
+            <a:ext cx="320040" cy="320040"/>
+          </a:xfrm>
+          <a:prstGeom prst="rect">
+            <a:avLst/>
+          </a:prstGeom>
+          <a:noFill/>
+          <a:ln/>
+        </p:spPr>
+        <p:txBody>
+          <a:bodyPr wrap="square" lIns="0" tIns="0" rIns="0" bIns="0" rtlCol="0" anchor="ctr"/>
+          <a:lstStyle/>
+          <a:p>
+            <a:pPr algn="ctr" indent="0" marL="0">
+              <a:buNone/>
+            </a:pPr>
+            <a:r>
+              <a:rPr lang="en-US" sz="1400" b="1" dirty="0">
+                <a:solidFill>
+                  <a:srgbClr val="FFFFFF"/>
+                </a:solidFill>
+                <a:latin typeface="Calibri" pitchFamily="34" charset="0"/>
+                <a:ea typeface="Calibri" pitchFamily="34" charset="-122"/>
+                <a:cs typeface="Calibri" pitchFamily="34" charset="-120"/>
+              </a:rPr>
+              <a:t>3</a:t>
+            </a:r>
+            <a:endParaRPr lang="en-US" sz="1400" dirty="0"/>
+          </a:p>
+        </p:txBody>
+      </p:sp>
+      <p:sp>
+        <p:nvSpPr>
+          <p:cNvPr id="28" name="Text 26"/>
+          <p:cNvSpPr/>
+          <p:nvPr/>
+        </p:nvSpPr>
+        <p:spPr>
+          <a:xfrm>
+            <a:off x="3886200" y="1600200"/>
+            <a:ext cx="1005840" cy="365760"/>
+          </a:xfrm>
+          <a:prstGeom prst="rect">
+            <a:avLst/>
+          </a:prstGeom>
+          <a:noFill/>
+          <a:ln/>
+        </p:spPr>
+        <p:txBody>
+          <a:bodyPr wrap="square" lIns="0" tIns="0" rIns="0" bIns="0" rtlCol="0" anchor="ctr"/>
+          <a:lstStyle/>
+          <a:p>
+            <a:pPr indent="0" marL="0">
+              <a:buNone/>
+            </a:pPr>
+            <a:r>
+              <a:rPr lang="en-US" sz="1800" b="1" dirty="0">
+                <a:solidFill>
+                  <a:srgbClr val="1A1A1A"/>
+                </a:solidFill>
+                <a:latin typeface="TH Sarabun New" pitchFamily="34" charset="0"/>
+                <a:ea typeface="TH Sarabun New" pitchFamily="34" charset="-122"/>
+                <a:cs typeface="TH Sarabun New" pitchFamily="34" charset="-120"/>
+              </a:rPr>
+              <a:t>อวยพรอัตโนมัติ</a:t>
+            </a:r>
+            <a:endParaRPr lang="en-US" sz="1800" dirty="0"/>
+          </a:p>
+        </p:txBody>
+      </p:sp>
+      <p:sp>
+        <p:nvSpPr>
+          <p:cNvPr id="29" name="Text 27"/>
+          <p:cNvSpPr/>
+          <p:nvPr/>
+        </p:nvSpPr>
+        <p:spPr>
+          <a:xfrm>
+            <a:off x="3886200" y="2011680"/>
+            <a:ext cx="1371600" cy="228600"/>
+          </a:xfrm>
+          <a:prstGeom prst="rect">
+            <a:avLst/>
+          </a:prstGeom>
+          <a:noFill/>
+          <a:ln/>
+        </p:spPr>
+        <p:txBody>
+          <a:bodyPr wrap="square" lIns="0" tIns="0" rIns="0" bIns="0" rtlCol="0" anchor="ctr"/>
+          <a:lstStyle/>
+          <a:p>
+            <a:pPr indent="0" marL="0">
+              <a:buNone/>
+            </a:pPr>
+            <a:r>
+              <a:rPr lang="en-US" sz="900" b="1" spc="200" kern="0" dirty="0">
+                <a:solidFill>
+                  <a:srgbClr val="2E8B57"/>
+                </a:solidFill>
+                <a:latin typeface="Calibri" pitchFamily="34" charset="0"/>
+                <a:ea typeface="Calibri" pitchFamily="34" charset="-122"/>
+                <a:cs typeface="Calibri" pitchFamily="34" charset="-120"/>
+              </a:rPr>
+              <a:t>Schedule → LINE</a:t>
+            </a:r>
+            <a:endParaRPr lang="en-US" sz="900" dirty="0"/>
+          </a:p>
+        </p:txBody>
+      </p:sp>
+      <p:sp>
+        <p:nvSpPr>
+          <p:cNvPr id="30" name="Text 28"/>
+          <p:cNvSpPr/>
+          <p:nvPr/>
+        </p:nvSpPr>
+        <p:spPr>
+          <a:xfrm>
+            <a:off x="3886200" y="2286000"/>
+            <a:ext cx="1371600" cy="822960"/>
+          </a:xfrm>
+          <a:prstGeom prst="rect">
+            <a:avLst/>
+          </a:prstGeom>
+          <a:noFill/>
+          <a:ln/>
+        </p:spPr>
+        <p:txBody>
+          <a:bodyPr wrap="square" lIns="0" tIns="0" rIns="0" bIns="0" rtlCol="0" anchor="ctr"/>
+          <a:lstStyle/>
+          <a:p>
+            <a:pPr indent="0" marL="0">
+              <a:buNone/>
+            </a:pPr>
+            <a:r>
+              <a:rPr lang="en-US" sz="1100" dirty="0">
+                <a:solidFill>
+                  <a:srgbClr val="4A4A4A"/>
+                </a:solidFill>
+                <a:latin typeface="TH Sarabun New" pitchFamily="34" charset="0"/>
+                <a:ea typeface="TH Sarabun New" pitchFamily="34" charset="-122"/>
+                <a:cs typeface="TH Sarabun New" pitchFamily="34" charset="-120"/>
+              </a:rPr>
+              <a:t>ส่งข้อความวันเกิด/วันสำคัญ</a:t>
+            </a:r>
+            <a:endParaRPr lang="en-US" sz="1100" dirty="0"/>
+          </a:p>
+          <a:p>
+            <a:pPr indent="0" marL="0">
+              <a:buNone/>
+            </a:pPr>
+            <a:r>
+              <a:rPr lang="en-US" sz="1100" dirty="0">
+                <a:solidFill>
+                  <a:srgbClr val="4A4A4A"/>
+                </a:solidFill>
+                <a:latin typeface="TH Sarabun New" pitchFamily="34" charset="0"/>
+                <a:ea typeface="TH Sarabun New" pitchFamily="34" charset="-122"/>
+                <a:cs typeface="TH Sarabun New" pitchFamily="34" charset="-120"/>
+              </a:rPr>
+              <a:t>ให้บุคลากรในหน่วยงานทุกเช้า</a:t>
+            </a:r>
+            <a:endParaRPr lang="en-US" sz="1100" dirty="0"/>
+          </a:p>
+        </p:txBody>
+      </p:sp>
+      <p:sp>
+        <p:nvSpPr>
+          <p:cNvPr id="31" name="Shape 29"/>
+          <p:cNvSpPr/>
+          <p:nvPr/>
+        </p:nvSpPr>
+        <p:spPr>
+          <a:xfrm>
+            <a:off x="3886200" y="3154680"/>
+            <a:ext cx="1371600" cy="0"/>
+          </a:xfrm>
+          <a:prstGeom prst="line">
+            <a:avLst/>
+          </a:prstGeom>
+          <a:noFill/>
+          <a:ln w="6350">
+            <a:solidFill>
+              <a:srgbClr val="2E8B57"/>
+            </a:solidFill>
+            <a:prstDash val="dash"/>
+          </a:ln>
+        </p:spPr>
+      </p:sp>
+      <p:sp>
+        <p:nvSpPr>
+          <p:cNvPr id="32" name="Text 30"/>
+          <p:cNvSpPr/>
+          <p:nvPr/>
+        </p:nvSpPr>
+        <p:spPr>
+          <a:xfrm>
+            <a:off x="3886200" y="3200400"/>
+            <a:ext cx="1371600" cy="411480"/>
+          </a:xfrm>
+          <a:prstGeom prst="rect">
+            <a:avLst/>
+          </a:prstGeom>
+          <a:noFill/>
+          <a:ln/>
+        </p:spPr>
+        <p:txBody>
+          <a:bodyPr wrap="square" lIns="0" tIns="0" rIns="0" bIns="0" rtlCol="0" anchor="ctr"/>
+          <a:lstStyle/>
+          <a:p>
+            <a:pPr algn="ctr" indent="0" marL="0">
+              <a:buNone/>
+            </a:pPr>
+            <a:r>
+              <a:rPr lang="en-US" sz="2800" b="1" dirty="0">
+                <a:solidFill>
+                  <a:srgbClr val="2E8B57"/>
+                </a:solidFill>
+                <a:latin typeface="Calibri" pitchFamily="34" charset="0"/>
+                <a:ea typeface="Calibri" pitchFamily="34" charset="-122"/>
+                <a:cs typeface="Calibri" pitchFamily="34" charset="-120"/>
+              </a:rPr>
+              <a:t>30</a:t>
+            </a:r>
+            <a:endParaRPr lang="en-US" sz="2800" dirty="0"/>
+          </a:p>
+        </p:txBody>
+      </p:sp>
+      <p:sp>
+        <p:nvSpPr>
+          <p:cNvPr id="33" name="Text 31"/>
+          <p:cNvSpPr/>
+          <p:nvPr/>
+        </p:nvSpPr>
+        <p:spPr>
+          <a:xfrm>
+            <a:off x="3886200" y="3584448"/>
+            <a:ext cx="1371600" cy="228600"/>
+          </a:xfrm>
+          <a:prstGeom prst="rect">
+            <a:avLst/>
+          </a:prstGeom>
+          <a:noFill/>
+          <a:ln/>
+        </p:spPr>
+        <p:txBody>
+          <a:bodyPr wrap="square" lIns="0" tIns="0" rIns="0" bIns="0" rtlCol="0" anchor="ctr"/>
+          <a:lstStyle/>
+          <a:p>
+            <a:pPr algn="ctr" indent="0" marL="0">
+              <a:buNone/>
+            </a:pPr>
+            <a:r>
+              <a:rPr lang="en-US" sz="1100" dirty="0">
+                <a:solidFill>
+                  <a:srgbClr val="6B6B6B"/>
+                </a:solidFill>
+                <a:latin typeface="TH Sarabun New" pitchFamily="34" charset="0"/>
+                <a:ea typeface="TH Sarabun New" pitchFamily="34" charset="-122"/>
+                <a:cs typeface="TH Sarabun New" pitchFamily="34" charset="-120"/>
+              </a:rPr>
+              <a:t>ชม./ปี</a:t>
+            </a:r>
+            <a:endParaRPr lang="en-US" sz="1100" dirty="0"/>
+          </a:p>
+        </p:txBody>
+      </p:sp>
+      <p:sp>
+        <p:nvSpPr>
+          <p:cNvPr id="34" name="Shape 32"/>
+          <p:cNvSpPr/>
+          <p:nvPr/>
+        </p:nvSpPr>
+        <p:spPr>
+          <a:xfrm>
+            <a:off x="5440680" y="1371600"/>
+            <a:ext cx="1645920" cy="2468880"/>
+          </a:xfrm>
+          <a:prstGeom prst="rect">
+            <a:avLst/>
+          </a:prstGeom>
+          <a:solidFill>
+            <a:srgbClr val="FFFFFF"/>
+          </a:solidFill>
+          <a:ln w="6350">
+            <a:solidFill>
+              <a:srgbClr val="004D26"/>
+            </a:solidFill>
+            <a:prstDash val="solid"/>
+          </a:ln>
+          <a:effectLst>
+            <a:outerShdw sx="100000" sy="100000" kx="0" ky="0" algn="bl" rotWithShape="0" blurRad="101600" dist="25400" dir="5400000">
+              <a:srgbClr val="000000">
+                <a:alpha val="8000"/>
+              </a:srgbClr>
+            </a:outerShdw>
+          </a:effectLst>
+        </p:spPr>
+      </p:sp>
+      <p:sp>
+        <p:nvSpPr>
+          <p:cNvPr id="35" name="Shape 33"/>
+          <p:cNvSpPr/>
+          <p:nvPr/>
+        </p:nvSpPr>
+        <p:spPr>
+          <a:xfrm>
+            <a:off x="5440680" y="1371600"/>
+            <a:ext cx="1645920" cy="109728"/>
+          </a:xfrm>
+          <a:prstGeom prst="rect">
+            <a:avLst/>
+          </a:prstGeom>
+          <a:solidFill>
+            <a:srgbClr val="004D26"/>
+          </a:solidFill>
+          <a:ln/>
+        </p:spPr>
+      </p:sp>
+      <p:sp>
+        <p:nvSpPr>
+          <p:cNvPr id="36" name="Shape 34"/>
+          <p:cNvSpPr/>
+          <p:nvPr/>
+        </p:nvSpPr>
+        <p:spPr>
+          <a:xfrm>
+            <a:off x="6629400" y="1554480"/>
+            <a:ext cx="320040" cy="320040"/>
+          </a:xfrm>
+          <a:prstGeom prst="ellipse">
+            <a:avLst/>
+          </a:prstGeom>
+          <a:solidFill>
+            <a:srgbClr val="004D26"/>
+          </a:solidFill>
+          <a:ln/>
+        </p:spPr>
+      </p:sp>
+      <p:sp>
+        <p:nvSpPr>
+          <p:cNvPr id="37" name="Text 35"/>
+          <p:cNvSpPr/>
+          <p:nvPr/>
+        </p:nvSpPr>
+        <p:spPr>
+          <a:xfrm>
+            <a:off x="6629400" y="1554480"/>
+            <a:ext cx="320040" cy="320040"/>
+          </a:xfrm>
+          <a:prstGeom prst="rect">
+            <a:avLst/>
+          </a:prstGeom>
+          <a:noFill/>
+          <a:ln/>
+        </p:spPr>
+        <p:txBody>
+          <a:bodyPr wrap="square" lIns="0" tIns="0" rIns="0" bIns="0" rtlCol="0" anchor="ctr"/>
+          <a:lstStyle/>
+          <a:p>
+            <a:pPr algn="ctr" indent="0" marL="0">
+              <a:buNone/>
+            </a:pPr>
+            <a:r>
+              <a:rPr lang="en-US" sz="1400" b="1" dirty="0">
+                <a:solidFill>
+                  <a:srgbClr val="FFFFFF"/>
+                </a:solidFill>
+                <a:latin typeface="Calibri" pitchFamily="34" charset="0"/>
+                <a:ea typeface="Calibri" pitchFamily="34" charset="-122"/>
+                <a:cs typeface="Calibri" pitchFamily="34" charset="-120"/>
+              </a:rPr>
+              <a:t>4</a:t>
+            </a:r>
+            <a:endParaRPr lang="en-US" sz="1400" dirty="0"/>
+          </a:p>
+        </p:txBody>
+      </p:sp>
+      <p:sp>
+        <p:nvSpPr>
+          <p:cNvPr id="38" name="Text 36"/>
+          <p:cNvSpPr/>
+          <p:nvPr/>
+        </p:nvSpPr>
+        <p:spPr>
+          <a:xfrm>
+            <a:off x="5577840" y="1600200"/>
+            <a:ext cx="1005840" cy="365760"/>
+          </a:xfrm>
+          <a:prstGeom prst="rect">
+            <a:avLst/>
+          </a:prstGeom>
+          <a:noFill/>
+          <a:ln/>
+        </p:spPr>
+        <p:txBody>
+          <a:bodyPr wrap="square" lIns="0" tIns="0" rIns="0" bIns="0" rtlCol="0" anchor="ctr"/>
+          <a:lstStyle/>
+          <a:p>
+            <a:pPr indent="0" marL="0">
+              <a:buNone/>
+            </a:pPr>
+            <a:r>
+              <a:rPr lang="en-US" sz="1800" b="1" dirty="0">
+                <a:solidFill>
+                  <a:srgbClr val="1A1A1A"/>
+                </a:solidFill>
+                <a:latin typeface="TH Sarabun New" pitchFamily="34" charset="0"/>
+                <a:ea typeface="TH Sarabun New" pitchFamily="34" charset="-122"/>
+                <a:cs typeface="TH Sarabun New" pitchFamily="34" charset="-120"/>
+              </a:rPr>
+              <a:t>เฝ้าระวังสต๊อก</a:t>
+            </a:r>
+            <a:endParaRPr lang="en-US" sz="1800" dirty="0"/>
+          </a:p>
+        </p:txBody>
+      </p:sp>
+      <p:sp>
+        <p:nvSpPr>
+          <p:cNvPr id="39" name="Text 37"/>
+          <p:cNvSpPr/>
+          <p:nvPr/>
+        </p:nvSpPr>
+        <p:spPr>
+          <a:xfrm>
+            <a:off x="5577840" y="2011680"/>
+            <a:ext cx="1371600" cy="228600"/>
+          </a:xfrm>
+          <a:prstGeom prst="rect">
+            <a:avLst/>
+          </a:prstGeom>
+          <a:noFill/>
+          <a:ln/>
+        </p:spPr>
+        <p:txBody>
+          <a:bodyPr wrap="square" lIns="0" tIns="0" rIns="0" bIns="0" rtlCol="0" anchor="ctr"/>
+          <a:lstStyle/>
+          <a:p>
+            <a:pPr indent="0" marL="0">
+              <a:buNone/>
+            </a:pPr>
+            <a:r>
+              <a:rPr lang="en-US" sz="900" b="1" spc="200" kern="0" dirty="0">
+                <a:solidFill>
+                  <a:srgbClr val="004D26"/>
+                </a:solidFill>
+                <a:latin typeface="Calibri" pitchFamily="34" charset="0"/>
+                <a:ea typeface="Calibri" pitchFamily="34" charset="-122"/>
+                <a:cs typeface="Calibri" pitchFamily="34" charset="-120"/>
+              </a:rPr>
+              <a:t>Sheets → Alert</a:t>
+            </a:r>
+            <a:endParaRPr lang="en-US" sz="900" dirty="0"/>
+          </a:p>
+        </p:txBody>
+      </p:sp>
+      <p:sp>
+        <p:nvSpPr>
+          <p:cNvPr id="40" name="Text 38"/>
+          <p:cNvSpPr/>
+          <p:nvPr/>
+        </p:nvSpPr>
+        <p:spPr>
+          <a:xfrm>
+            <a:off x="5577840" y="2286000"/>
+            <a:ext cx="1371600" cy="822960"/>
+          </a:xfrm>
+          <a:prstGeom prst="rect">
+            <a:avLst/>
+          </a:prstGeom>
+          <a:noFill/>
+          <a:ln/>
+        </p:spPr>
+        <p:txBody>
+          <a:bodyPr wrap="square" lIns="0" tIns="0" rIns="0" bIns="0" rtlCol="0" anchor="ctr"/>
+          <a:lstStyle/>
+          <a:p>
+            <a:pPr indent="0" marL="0">
+              <a:buNone/>
+            </a:pPr>
+            <a:r>
+              <a:rPr lang="en-US" sz="1100" dirty="0">
+                <a:solidFill>
+                  <a:srgbClr val="4A4A4A"/>
+                </a:solidFill>
+                <a:latin typeface="TH Sarabun New" pitchFamily="34" charset="0"/>
+                <a:ea typeface="TH Sarabun New" pitchFamily="34" charset="-122"/>
+                <a:cs typeface="TH Sarabun New" pitchFamily="34" charset="-120"/>
+              </a:rPr>
+              <a:t>ตรวจ stock ทุก 6 ชม. → ถ้าต่ำ</a:t>
+            </a:r>
+            <a:endParaRPr lang="en-US" sz="1100" dirty="0"/>
+          </a:p>
+          <a:p>
+            <a:pPr indent="0" marL="0">
+              <a:buNone/>
+            </a:pPr>
+            <a:r>
+              <a:rPr lang="en-US" sz="1100" dirty="0">
+                <a:solidFill>
+                  <a:srgbClr val="4A4A4A"/>
+                </a:solidFill>
+                <a:latin typeface="TH Sarabun New" pitchFamily="34" charset="0"/>
+                <a:ea typeface="TH Sarabun New" pitchFamily="34" charset="-122"/>
+                <a:cs typeface="TH Sarabun New" pitchFamily="34" charset="-120"/>
+              </a:rPr>
+              <a:t>แจ้งผู้รับผิดชอบทาง LINE/Email</a:t>
+            </a:r>
+            <a:endParaRPr lang="en-US" sz="1100" dirty="0"/>
+          </a:p>
+        </p:txBody>
+      </p:sp>
+      <p:sp>
+        <p:nvSpPr>
+          <p:cNvPr id="41" name="Shape 39"/>
+          <p:cNvSpPr/>
+          <p:nvPr/>
+        </p:nvSpPr>
+        <p:spPr>
+          <a:xfrm>
+            <a:off x="5577840" y="3154680"/>
+            <a:ext cx="1371600" cy="0"/>
+          </a:xfrm>
+          <a:prstGeom prst="line">
+            <a:avLst/>
+          </a:prstGeom>
+          <a:noFill/>
+          <a:ln w="6350">
+            <a:solidFill>
+              <a:srgbClr val="004D26"/>
+            </a:solidFill>
+            <a:prstDash val="dash"/>
+          </a:ln>
+        </p:spPr>
+      </p:sp>
+      <p:sp>
+        <p:nvSpPr>
+          <p:cNvPr id="42" name="Text 40"/>
+          <p:cNvSpPr/>
+          <p:nvPr/>
+        </p:nvSpPr>
+        <p:spPr>
+          <a:xfrm>
+            <a:off x="5577840" y="3200400"/>
+            <a:ext cx="1371600" cy="411480"/>
+          </a:xfrm>
+          <a:prstGeom prst="rect">
+            <a:avLst/>
+          </a:prstGeom>
+          <a:noFill/>
+          <a:ln/>
+        </p:spPr>
+        <p:txBody>
+          <a:bodyPr wrap="square" lIns="0" tIns="0" rIns="0" bIns="0" rtlCol="0" anchor="ctr"/>
+          <a:lstStyle/>
+          <a:p>
+            <a:pPr algn="ctr" indent="0" marL="0">
+              <a:buNone/>
+            </a:pPr>
+            <a:r>
+              <a:rPr lang="en-US" sz="2800" b="1" dirty="0">
+                <a:solidFill>
+                  <a:srgbClr val="004D26"/>
+                </a:solidFill>
+                <a:latin typeface="Calibri" pitchFamily="34" charset="0"/>
+                <a:ea typeface="Calibri" pitchFamily="34" charset="-122"/>
+                <a:cs typeface="Calibri" pitchFamily="34" charset="-120"/>
+              </a:rPr>
+              <a:t>-2</a:t>
+            </a:r>
+            <a:endParaRPr lang="en-US" sz="2800" dirty="0"/>
+          </a:p>
+        </p:txBody>
+      </p:sp>
+      <p:sp>
+        <p:nvSpPr>
+          <p:cNvPr id="43" name="Text 41"/>
+          <p:cNvSpPr/>
+          <p:nvPr/>
+        </p:nvSpPr>
+        <p:spPr>
+          <a:xfrm>
+            <a:off x="5577840" y="3584448"/>
+            <a:ext cx="1371600" cy="228600"/>
+          </a:xfrm>
+          <a:prstGeom prst="rect">
+            <a:avLst/>
+          </a:prstGeom>
+          <a:noFill/>
+          <a:ln/>
+        </p:spPr>
+        <p:txBody>
+          <a:bodyPr wrap="square" lIns="0" tIns="0" rIns="0" bIns="0" rtlCol="0" anchor="ctr"/>
+          <a:lstStyle/>
+          <a:p>
+            <a:pPr algn="ctr" indent="0" marL="0">
+              <a:buNone/>
+            </a:pPr>
+            <a:r>
+              <a:rPr lang="en-US" sz="1100" dirty="0">
+                <a:solidFill>
+                  <a:srgbClr val="6B6B6B"/>
+                </a:solidFill>
+                <a:latin typeface="TH Sarabun New" pitchFamily="34" charset="0"/>
+                <a:ea typeface="TH Sarabun New" pitchFamily="34" charset="-122"/>
+                <a:cs typeface="TH Sarabun New" pitchFamily="34" charset="-120"/>
+              </a:rPr>
+              <a:t>stockout/ปี</a:t>
+            </a:r>
+            <a:endParaRPr lang="en-US" sz="1100" dirty="0"/>
+          </a:p>
+        </p:txBody>
+      </p:sp>
+      <p:sp>
+        <p:nvSpPr>
+          <p:cNvPr id="44" name="Shape 42"/>
+          <p:cNvSpPr/>
+          <p:nvPr/>
+        </p:nvSpPr>
+        <p:spPr>
+          <a:xfrm>
+            <a:off x="7132320" y="1371600"/>
+            <a:ext cx="1645920" cy="2468880"/>
+          </a:xfrm>
+          <a:prstGeom prst="rect">
+            <a:avLst/>
+          </a:prstGeom>
+          <a:solidFill>
+            <a:srgbClr val="FFFFFF"/>
+          </a:solidFill>
+          <a:ln w="6350">
+            <a:solidFill>
+              <a:srgbClr val="B83D3D"/>
+            </a:solidFill>
+            <a:prstDash val="solid"/>
+          </a:ln>
+          <a:effectLst>
+            <a:outerShdw sx="100000" sy="100000" kx="0" ky="0" algn="bl" rotWithShape="0" blurRad="101600" dist="25400" dir="5400000">
+              <a:srgbClr val="000000">
+                <a:alpha val="8000"/>
+              </a:srgbClr>
+            </a:outerShdw>
+          </a:effectLst>
+        </p:spPr>
+      </p:sp>
+      <p:sp>
+        <p:nvSpPr>
+          <p:cNvPr id="45" name="Shape 43"/>
+          <p:cNvSpPr/>
+          <p:nvPr/>
+        </p:nvSpPr>
+        <p:spPr>
+          <a:xfrm>
+            <a:off x="7132320" y="1371600"/>
+            <a:ext cx="1645920" cy="109728"/>
+          </a:xfrm>
+          <a:prstGeom prst="rect">
+            <a:avLst/>
+          </a:prstGeom>
+          <a:solidFill>
+            <a:srgbClr val="B83D3D"/>
+          </a:solidFill>
+          <a:ln/>
+        </p:spPr>
+      </p:sp>
+      <p:sp>
+        <p:nvSpPr>
+          <p:cNvPr id="46" name="Shape 44"/>
+          <p:cNvSpPr/>
+          <p:nvPr/>
+        </p:nvSpPr>
+        <p:spPr>
+          <a:xfrm>
+            <a:off x="8321040" y="1554480"/>
+            <a:ext cx="320040" cy="320040"/>
+          </a:xfrm>
+          <a:prstGeom prst="ellipse">
+            <a:avLst/>
+          </a:prstGeom>
+          <a:solidFill>
+            <a:srgbClr val="B83D3D"/>
+          </a:solidFill>
+          <a:ln/>
+        </p:spPr>
+      </p:sp>
+      <p:sp>
+        <p:nvSpPr>
+          <p:cNvPr id="47" name="Text 45"/>
+          <p:cNvSpPr/>
+          <p:nvPr/>
+        </p:nvSpPr>
+        <p:spPr>
+          <a:xfrm>
+            <a:off x="8321040" y="1554480"/>
+            <a:ext cx="320040" cy="320040"/>
+          </a:xfrm>
+          <a:prstGeom prst="rect">
+            <a:avLst/>
+          </a:prstGeom>
+          <a:noFill/>
+          <a:ln/>
+        </p:spPr>
+        <p:txBody>
+          <a:bodyPr wrap="square" lIns="0" tIns="0" rIns="0" bIns="0" rtlCol="0" anchor="ctr"/>
+          <a:lstStyle/>
+          <a:p>
+            <a:pPr algn="ctr" indent="0" marL="0">
+              <a:buNone/>
+            </a:pPr>
+            <a:r>
+              <a:rPr lang="en-US" sz="1400" b="1" dirty="0">
+                <a:solidFill>
+                  <a:srgbClr val="FFFFFF"/>
+                </a:solidFill>
+                <a:latin typeface="Calibri" pitchFamily="34" charset="0"/>
+                <a:ea typeface="Calibri" pitchFamily="34" charset="-122"/>
+                <a:cs typeface="Calibri" pitchFamily="34" charset="-120"/>
+              </a:rPr>
+              <a:t>5</a:t>
+            </a:r>
+            <a:endParaRPr lang="en-US" sz="1400" dirty="0"/>
+          </a:p>
+        </p:txBody>
+      </p:sp>
+      <p:sp>
+        <p:nvSpPr>
+          <p:cNvPr id="48" name="Text 46"/>
+          <p:cNvSpPr/>
+          <p:nvPr/>
+        </p:nvSpPr>
+        <p:spPr>
+          <a:xfrm>
+            <a:off x="7269480" y="1600200"/>
+            <a:ext cx="1005840" cy="365760"/>
+          </a:xfrm>
+          <a:prstGeom prst="rect">
+            <a:avLst/>
+          </a:prstGeom>
+          <a:noFill/>
+          <a:ln/>
+        </p:spPr>
+        <p:txBody>
+          <a:bodyPr wrap="square" lIns="0" tIns="0" rIns="0" bIns="0" rtlCol="0" anchor="ctr"/>
+          <a:lstStyle/>
+          <a:p>
+            <a:pPr indent="0" marL="0">
+              <a:buNone/>
+            </a:pPr>
+            <a:r>
+              <a:rPr lang="en-US" sz="1800" b="1" dirty="0">
+                <a:solidFill>
+                  <a:srgbClr val="1A1A1A"/>
+                </a:solidFill>
+                <a:latin typeface="TH Sarabun New" pitchFamily="34" charset="0"/>
+                <a:ea typeface="TH Sarabun New" pitchFamily="34" charset="-122"/>
+                <a:cs typeface="TH Sarabun New" pitchFamily="34" charset="-120"/>
+              </a:rPr>
+              <a:t>สรุปเอกสาร + AI</a:t>
+            </a:r>
+            <a:endParaRPr lang="en-US" sz="1800" dirty="0"/>
+          </a:p>
+        </p:txBody>
+      </p:sp>
+      <p:sp>
+        <p:nvSpPr>
+          <p:cNvPr id="49" name="Text 47"/>
+          <p:cNvSpPr/>
+          <p:nvPr/>
+        </p:nvSpPr>
+        <p:spPr>
+          <a:xfrm>
+            <a:off x="7269480" y="2011680"/>
+            <a:ext cx="1371600" cy="228600"/>
+          </a:xfrm>
+          <a:prstGeom prst="rect">
+            <a:avLst/>
+          </a:prstGeom>
+          <a:noFill/>
+          <a:ln/>
+        </p:spPr>
+        <p:txBody>
+          <a:bodyPr wrap="square" lIns="0" tIns="0" rIns="0" bIns="0" rtlCol="0" anchor="ctr"/>
+          <a:lstStyle/>
+          <a:p>
+            <a:pPr indent="0" marL="0">
+              <a:buNone/>
+            </a:pPr>
+            <a:r>
+              <a:rPr lang="en-US" sz="900" b="1" spc="200" kern="0" dirty="0">
+                <a:solidFill>
+                  <a:srgbClr val="B83D3D"/>
+                </a:solidFill>
+                <a:latin typeface="Calibri" pitchFamily="34" charset="0"/>
+                <a:ea typeface="Calibri" pitchFamily="34" charset="-122"/>
+                <a:cs typeface="Calibri" pitchFamily="34" charset="-120"/>
+              </a:rPr>
+              <a:t>Sheets → KU LLM → Email</a:t>
+            </a:r>
+            <a:endParaRPr lang="en-US" sz="900" dirty="0"/>
+          </a:p>
+        </p:txBody>
+      </p:sp>
+      <p:sp>
+        <p:nvSpPr>
+          <p:cNvPr id="50" name="Text 48"/>
+          <p:cNvSpPr/>
+          <p:nvPr/>
+        </p:nvSpPr>
+        <p:spPr>
+          <a:xfrm>
+            <a:off x="7269480" y="2286000"/>
+            <a:ext cx="1371600" cy="822960"/>
+          </a:xfrm>
+          <a:prstGeom prst="rect">
+            <a:avLst/>
+          </a:prstGeom>
+          <a:noFill/>
+          <a:ln/>
+        </p:spPr>
+        <p:txBody>
+          <a:bodyPr wrap="square" lIns="0" tIns="0" rIns="0" bIns="0" rtlCol="0" anchor="ctr"/>
+          <a:lstStyle/>
+          <a:p>
+            <a:pPr indent="0" marL="0">
+              <a:buNone/>
+            </a:pPr>
+            <a:r>
+              <a:rPr lang="en-US" sz="1100" dirty="0">
+                <a:solidFill>
+                  <a:srgbClr val="4A4A4A"/>
+                </a:solidFill>
+                <a:latin typeface="TH Sarabun New" pitchFamily="34" charset="0"/>
+                <a:ea typeface="TH Sarabun New" pitchFamily="34" charset="-122"/>
+                <a:cs typeface="TH Sarabun New" pitchFamily="34" charset="-120"/>
+              </a:rPr>
+              <a:t>AI สรุปรายงานเบิกจ่ายรายเดือน</a:t>
+            </a:r>
+            <a:endParaRPr lang="en-US" sz="1100" dirty="0"/>
+          </a:p>
+          <a:p>
+            <a:pPr indent="0" marL="0">
+              <a:buNone/>
+            </a:pPr>
+            <a:r>
+              <a:rPr lang="en-US" sz="1100" dirty="0">
+                <a:solidFill>
+                  <a:srgbClr val="4A4A4A"/>
+                </a:solidFill>
+                <a:latin typeface="TH Sarabun New" pitchFamily="34" charset="0"/>
+                <a:ea typeface="TH Sarabun New" pitchFamily="34" charset="-122"/>
+                <a:cs typeface="TH Sarabun New" pitchFamily="34" charset="-120"/>
+              </a:rPr>
+              <a:t>ส่ง executive ทางอีเมล</a:t>
+            </a:r>
+            <a:endParaRPr lang="en-US" sz="1100" dirty="0"/>
+          </a:p>
+        </p:txBody>
+      </p:sp>
+      <p:sp>
+        <p:nvSpPr>
+          <p:cNvPr id="51" name="Shape 49"/>
+          <p:cNvSpPr/>
+          <p:nvPr/>
+        </p:nvSpPr>
+        <p:spPr>
+          <a:xfrm>
+            <a:off x="7269480" y="3154680"/>
+            <a:ext cx="1371600" cy="0"/>
+          </a:xfrm>
+          <a:prstGeom prst="line">
+            <a:avLst/>
+          </a:prstGeom>
+          <a:noFill/>
+          <a:ln w="6350">
+            <a:solidFill>
+              <a:srgbClr val="B83D3D"/>
+            </a:solidFill>
+            <a:prstDash val="dash"/>
+          </a:ln>
+        </p:spPr>
+      </p:sp>
+      <p:sp>
+        <p:nvSpPr>
+          <p:cNvPr id="52" name="Text 50"/>
+          <p:cNvSpPr/>
+          <p:nvPr/>
+        </p:nvSpPr>
+        <p:spPr>
+          <a:xfrm>
+            <a:off x="7269480" y="3200400"/>
+            <a:ext cx="1371600" cy="411480"/>
+          </a:xfrm>
+          <a:prstGeom prst="rect">
+            <a:avLst/>
+          </a:prstGeom>
+          <a:noFill/>
+          <a:ln/>
+        </p:spPr>
+        <p:txBody>
+          <a:bodyPr wrap="square" lIns="0" tIns="0" rIns="0" bIns="0" rtlCol="0" anchor="ctr"/>
+          <a:lstStyle/>
+          <a:p>
+            <a:pPr algn="ctr" indent="0" marL="0">
+              <a:buNone/>
+            </a:pPr>
+            <a:r>
+              <a:rPr lang="en-US" sz="2800" b="1" dirty="0">
+                <a:solidFill>
+                  <a:srgbClr val="B83D3D"/>
+                </a:solidFill>
+                <a:latin typeface="Calibri" pitchFamily="34" charset="0"/>
+                <a:ea typeface="Calibri" pitchFamily="34" charset="-122"/>
+                <a:cs typeface="Calibri" pitchFamily="34" charset="-120"/>
+              </a:rPr>
+              <a:t>50</a:t>
+            </a:r>
+            <a:endParaRPr lang="en-US" sz="2800" dirty="0"/>
+          </a:p>
+        </p:txBody>
+      </p:sp>
+      <p:sp>
+        <p:nvSpPr>
+          <p:cNvPr id="53" name="Text 51"/>
+          <p:cNvSpPr/>
+          <p:nvPr/>
+        </p:nvSpPr>
+        <p:spPr>
+          <a:xfrm>
+            <a:off x="7269480" y="3584448"/>
+            <a:ext cx="1371600" cy="228600"/>
+          </a:xfrm>
+          <a:prstGeom prst="rect">
+            <a:avLst/>
+          </a:prstGeom>
+          <a:noFill/>
+          <a:ln/>
+        </p:spPr>
+        <p:txBody>
+          <a:bodyPr wrap="square" lIns="0" tIns="0" rIns="0" bIns="0" rtlCol="0" anchor="ctr"/>
+          <a:lstStyle/>
+          <a:p>
+            <a:pPr algn="ctr" indent="0" marL="0">
+              <a:buNone/>
+            </a:pPr>
+            <a:r>
+              <a:rPr lang="en-US" sz="1100" dirty="0">
+                <a:solidFill>
+                  <a:srgbClr val="6B6B6B"/>
+                </a:solidFill>
+                <a:latin typeface="TH Sarabun New" pitchFamily="34" charset="0"/>
+                <a:ea typeface="TH Sarabun New" pitchFamily="34" charset="-122"/>
+                <a:cs typeface="TH Sarabun New" pitchFamily="34" charset="-120"/>
+              </a:rPr>
+              <a:t>ชม./ปี</a:t>
+            </a:r>
+            <a:endParaRPr lang="en-US" sz="1100" dirty="0"/>
+          </a:p>
+        </p:txBody>
+      </p:sp>
+      <p:sp>
+        <p:nvSpPr>
+          <p:cNvPr id="54" name="Shape 52"/>
+          <p:cNvSpPr/>
+          <p:nvPr/>
+        </p:nvSpPr>
+        <p:spPr>
+          <a:xfrm>
+            <a:off x="457200" y="4160520"/>
+            <a:ext cx="8229600" cy="777240"/>
+          </a:xfrm>
+          <a:prstGeom prst="rect">
+            <a:avLst/>
+          </a:prstGeom>
+          <a:solidFill>
+            <a:srgbClr val="006633"/>
+          </a:solidFill>
+          <a:ln/>
+        </p:spPr>
+      </p:sp>
+      <p:sp>
+        <p:nvSpPr>
+          <p:cNvPr id="55" name="Text 53"/>
+          <p:cNvSpPr/>
+          <p:nvPr/>
+        </p:nvSpPr>
+        <p:spPr>
+          <a:xfrm>
+            <a:off x="457200" y="4160520"/>
+            <a:ext cx="8229600" cy="411480"/>
+          </a:xfrm>
+          <a:prstGeom prst="rect">
+            <a:avLst/>
+          </a:prstGeom>
+          <a:noFill/>
+          <a:ln/>
+        </p:spPr>
+        <p:txBody>
+          <a:bodyPr wrap="square" lIns="0" tIns="0" rIns="0" bIns="0" rtlCol="0" anchor="ctr"/>
+          <a:lstStyle/>
+          <a:p>
+            <a:pPr algn="ctr" indent="0" marL="0">
+              <a:buNone/>
+            </a:pPr>
+            <a:r>
+              <a:rPr lang="en-US" sz="2200" b="1" dirty="0">
+                <a:solidFill>
+                  <a:srgbClr val="C9A961"/>
+                </a:solidFill>
+                <a:latin typeface="TH Sarabun New" pitchFamily="34" charset="0"/>
+                <a:ea typeface="TH Sarabun New" pitchFamily="34" charset="-122"/>
+                <a:cs typeface="TH Sarabun New" pitchFamily="34" charset="-120"/>
+              </a:rPr>
+              <a:t>5 Pattern</a:t>
+            </a:r>
+            <a:pPr algn="ctr" indent="0" marL="0">
+              <a:buNone/>
+            </a:pPr>
+            <a:r>
+              <a:rPr lang="en-US" sz="1800" dirty="0">
+                <a:solidFill>
+                  <a:srgbClr val="FFFFFF"/>
+                </a:solidFill>
+                <a:latin typeface="TH Sarabun New" pitchFamily="34" charset="0"/>
+                <a:ea typeface="TH Sarabun New" pitchFamily="34" charset="-122"/>
+                <a:cs typeface="TH Sarabun New" pitchFamily="34" charset="-120"/>
+              </a:rPr>
+              <a:t>  ×  33 ส่วนงาน  ×  4 วิทยาเขต  =  </a:t>
+            </a:r>
+            <a:pPr algn="ctr" indent="0" marL="0">
+              <a:buNone/>
+            </a:pPr>
+            <a:r>
+              <a:rPr lang="en-US" sz="2200" b="1" dirty="0">
+                <a:solidFill>
+                  <a:srgbClr val="C9A961"/>
+                </a:solidFill>
+                <a:latin typeface="TH Sarabun New" pitchFamily="34" charset="0"/>
+                <a:ea typeface="TH Sarabun New" pitchFamily="34" charset="-122"/>
+                <a:cs typeface="TH Sarabun New" pitchFamily="34" charset="-120"/>
+              </a:rPr>
+              <a:t>ROI หลักหมื่นชั่วโมง/ปี</a:t>
+            </a:r>
+            <a:endParaRPr lang="en-US" sz="2200" dirty="0"/>
+          </a:p>
+        </p:txBody>
+      </p:sp>
+      <p:sp>
+        <p:nvSpPr>
+          <p:cNvPr id="56" name="Text 54"/>
+          <p:cNvSpPr/>
+          <p:nvPr/>
+        </p:nvSpPr>
+        <p:spPr>
+          <a:xfrm>
+            <a:off x="457200" y="4526280"/>
+            <a:ext cx="8229600" cy="365760"/>
+          </a:xfrm>
+          <a:prstGeom prst="rect">
+            <a:avLst/>
+          </a:prstGeom>
+          <a:noFill/>
+          <a:ln/>
+        </p:spPr>
+        <p:txBody>
+          <a:bodyPr wrap="square" lIns="0" tIns="0" rIns="0" bIns="0" rtlCol="0" anchor="ctr"/>
+          <a:lstStyle/>
+          <a:p>
+            <a:pPr algn="ctr" indent="0" marL="0">
+              <a:buNone/>
+            </a:pPr>
+            <a:r>
+              <a:rPr lang="en-US" sz="1300" i="1" dirty="0">
+                <a:solidFill>
+                  <a:srgbClr val="F5EDD6"/>
+                </a:solidFill>
+                <a:latin typeface="TH Sarabun New" pitchFamily="34" charset="0"/>
+                <a:ea typeface="TH Sarabun New" pitchFamily="34" charset="-122"/>
+                <a:cs typeface="TH Sarabun New" pitchFamily="34" charset="-120"/>
+              </a:rPr>
+              <a:t>ทุก pattern reuse ได้ในงานอื่น — บุคลากรปรับเองได้โดยไม่ต้องเขียน code</a:t>
+            </a:r>
+            <a:endParaRPr lang="en-US" sz="1300" dirty="0"/>
+          </a:p>
+        </p:txBody>
+      </p:sp>
+      <p:sp>
+        <p:nvSpPr>
+          <p:cNvPr id="57" name="Text 55"/>
+          <p:cNvSpPr/>
+          <p:nvPr/>
+        </p:nvSpPr>
+        <p:spPr>
+          <a:xfrm>
+            <a:off x="8503920" y="4846320"/>
+            <a:ext cx="548640" cy="228600"/>
+          </a:xfrm>
+          <a:prstGeom prst="rect">
+            <a:avLst/>
+          </a:prstGeom>
+          <a:noFill/>
+          <a:ln/>
+        </p:spPr>
+        <p:txBody>
+          <a:bodyPr wrap="square" lIns="0" tIns="0" rIns="0" bIns="0" rtlCol="0" anchor="ctr"/>
+          <a:lstStyle/>
+          <a:p>
+            <a:pPr algn="r" indent="0" marL="0">
+              <a:buNone/>
+            </a:pPr>
+            <a:r>
+              <a:rPr lang="en-US" sz="900" dirty="0">
+                <a:solidFill>
+                  <a:srgbClr val="B0B0B0"/>
+                </a:solidFill>
+                <a:latin typeface="Calibri" pitchFamily="34" charset="0"/>
+                <a:ea typeface="Calibri" pitchFamily="34" charset="-122"/>
+                <a:cs typeface="Calibri" pitchFamily="34" charset="-120"/>
+              </a:rPr>
+              <a:t>06 / 07</a:t>
+            </a:r>
+            <a:endParaRPr lang="en-US" sz="900" dirty="0"/>
+          </a:p>
+        </p:txBody>
+      </p:sp>
+    </p:spTree>
+  </p:cSld>
+  <p:clrMapOvr>
+    <a:masterClrMapping/>
+  </p:clrMapOvr>
+</p:sld>
+</file>
+
+<file path=ppt/slides/slide7.xml><?xml version="1.0" encoding="utf-8"?>
+<p:sld xmlns:a="http://schemas.openxmlformats.org/drawingml/2006/main" xmlns:r="http://schemas.openxmlformats.org/officeDocument/2006/relationships" xmlns:p="http://schemas.openxmlformats.org/presentationml/2006/main">
+  <p:cSld name="Slide 7">
+    <p:bg>
+      <p:bgPr>
+        <a:solidFill>
+          <a:srgbClr val="FFFFFF"/>
+        </a:solidFill>
+      </p:bgPr>
+    </p:bg>
+    <p:spTree>
+      <p:nvGrpSpPr>
+        <p:cNvPr id="1" name=""/>
+        <p:cNvGrpSpPr/>
+        <p:nvPr/>
+      </p:nvGrpSpPr>
+      <p:grpSpPr>
+        <a:xfrm>
+          <a:off x="0" y="0"/>
+          <a:ext cx="0" cy="0"/>
+          <a:chOff x="0" y="0"/>
+          <a:chExt cx="0" cy="0"/>
+        </a:xfrm>
+      </p:grpSpPr>
+      <p:sp>
+        <p:nvSpPr>
+          <p:cNvPr id="2" name="Text 0"/>
+          <p:cNvSpPr/>
+          <p:nvPr/>
+        </p:nvSpPr>
+        <p:spPr>
+          <a:xfrm>
+            <a:off x="457200" y="320040"/>
+            <a:ext cx="8229600" cy="640080"/>
+          </a:xfrm>
+          <a:prstGeom prst="rect">
+            <a:avLst/>
+          </a:prstGeom>
+          <a:noFill/>
+          <a:ln/>
+        </p:spPr>
+        <p:txBody>
+          <a:bodyPr wrap="square" lIns="0" tIns="0" rIns="0" bIns="0" rtlCol="0" anchor="ctr"/>
+          <a:lstStyle/>
+          <a:p>
+            <a:pPr indent="0" marL="0">
+              <a:buNone/>
+            </a:pPr>
+            <a:r>
+              <a:rPr lang="en-US" sz="3600" b="1" dirty="0">
+                <a:solidFill>
+                  <a:srgbClr val="006633"/>
+                </a:solidFill>
+                <a:latin typeface="TH Sarabun New" pitchFamily="34" charset="0"/>
+                <a:ea typeface="TH Sarabun New" pitchFamily="34" charset="-122"/>
+                <a:cs typeface="TH Sarabun New" pitchFamily="34" charset="-120"/>
+              </a:rPr>
               <a:t>Roadmap 18 เดือน + งบที่ขอ</a:t>
             </a:r>
             <a:endParaRPr lang="en-US" sz="3600" dirty="0"/>
@@ -8559,7 +13105,7 @@
                 <a:ea typeface="Calibri" pitchFamily="34" charset="-122"/>
                 <a:cs typeface="Calibri" pitchFamily="34" charset="-120"/>
               </a:rPr>
-              <a:t>05 / 05</a:t>
+              <a:t>07 / 07</a:t>
             </a:r>
             <a:endParaRPr lang="en-US" sz="900" dirty="0"/>
           </a:p>

--- a/Slides/Exec_Summary/KU_AI_Direction.pptx
+++ b/Slides/Exec_Summary/KU_AI_Direction.pptx
@@ -4805,7 +4805,7 @@
     <p:bg>
       <p:bgPr>
         <a:solidFill>
-          <a:srgbClr val="FFFFFF"/>
+          <a:srgbClr val="FAF6EE"/>
         </a:solidFill>
       </p:bgPr>
     </p:bg>
@@ -4848,7 +4848,7 @@
               <a:buNone/>
             </a:pPr>
             <a:r>
-              <a:rPr lang="en-US" sz="3200" b="1" dirty="0">
+              <a:rPr lang="en-US" sz="2800" b="1" dirty="0">
                 <a:solidFill>
                   <a:srgbClr val="006633"/>
                 </a:solidFill>
@@ -4856,9 +4856,9 @@
                 <a:ea typeface="TH Sarabun New" pitchFamily="34" charset="-122"/>
                 <a:cs typeface="TH Sarabun New" pitchFamily="34" charset="-120"/>
               </a:rPr>
-              <a:t>สถาปัตยกรรม AI Agent</a:t>
-            </a:r>
-            <a:endParaRPr lang="en-US" sz="3200" dirty="0"/>
+              <a:t>สถาปัตยกรรม AI Agent  —  Mapped กับโครงสร้าง มก.</a:t>
+            </a:r>
+            <a:endParaRPr lang="en-US" sz="2800" dirty="0"/>
           </a:p>
         </p:txBody>
       </p:sp>
@@ -4895,7 +4895,7 @@
                 <a:ea typeface="TH Sarabun New" pitchFamily="34" charset="-122"/>
                 <a:cs typeface="TH Sarabun New" pitchFamily="34" charset="-120"/>
               </a:rPr>
-              <a:t>User สั่งงาน → Agent ใช้ Tools/Database + LLM → ทำ Action → Feedback Loop</a:t>
+              <a:t>6 องค์ประกอบหลัก  •  ทุกตัวแมพกับโครงสร้างที่ มก. มีอยู่แล้ว (apigw.ku.ac.th + workflow.ku.ac.th)</a:t>
             </a:r>
             <a:endParaRPr lang="en-US" sz="1300" dirty="0"/>
           </a:p>
@@ -4903,187 +4903,455 @@
       </p:sp>
       <p:sp>
         <p:nvSpPr>
-          <p:cNvPr id="4" name="Text 2"/>
-          <p:cNvSpPr/>
-          <p:nvPr/>
-        </p:nvSpPr>
-        <p:spPr>
-          <a:xfrm>
-            <a:off x="3794760" y="1097280"/>
-            <a:ext cx="548640" cy="457200"/>
-          </a:xfrm>
-          <a:prstGeom prst="rect">
-            <a:avLst/>
-          </a:prstGeom>
-          <a:noFill/>
-          <a:ln/>
-        </p:spPr>
-        <p:txBody>
-          <a:bodyPr wrap="square" lIns="0" tIns="0" rIns="0" bIns="0" rtlCol="0" anchor="ctr"/>
-          <a:lstStyle/>
-          <a:p>
-            <a:pPr algn="ctr" indent="0" marL="0">
-              <a:buNone/>
-            </a:pPr>
-            <a:r>
-              <a:rPr lang="en-US" sz="2600" dirty="0">
-                <a:solidFill>
-                  <a:srgbClr val="000000"/>
-                </a:solidFill>
-              </a:rPr>
-              <a:t>👥</a:t>
-            </a:r>
-            <a:endParaRPr lang="en-US" sz="2600" dirty="0"/>
-          </a:p>
-        </p:txBody>
-      </p:sp>
-      <p:sp>
-        <p:nvSpPr>
-          <p:cNvPr id="5" name="Text 3"/>
-          <p:cNvSpPr/>
-          <p:nvPr/>
-        </p:nvSpPr>
-        <p:spPr>
-          <a:xfrm>
-            <a:off x="4343400" y="1188720"/>
-            <a:ext cx="731520" cy="320040"/>
-          </a:xfrm>
-          <a:prstGeom prst="rect">
-            <a:avLst/>
-          </a:prstGeom>
-          <a:noFill/>
-          <a:ln/>
-        </p:spPr>
-        <p:txBody>
-          <a:bodyPr wrap="square" lIns="0" tIns="0" rIns="0" bIns="0" rtlCol="0" anchor="ctr"/>
-          <a:lstStyle/>
-          <a:p>
-            <a:pPr indent="0" marL="0">
-              <a:buNone/>
-            </a:pPr>
-            <a:r>
-              <a:rPr lang="en-US" sz="1400" b="1" dirty="0">
-                <a:solidFill>
-                  <a:srgbClr val="006633"/>
-                </a:solidFill>
-                <a:latin typeface="TH Sarabun New" pitchFamily="34" charset="0"/>
-                <a:ea typeface="TH Sarabun New" pitchFamily="34" charset="-122"/>
-                <a:cs typeface="TH Sarabun New" pitchFamily="34" charset="-120"/>
-              </a:rPr>
-              <a:t>User</a:t>
-            </a:r>
-            <a:endParaRPr lang="en-US" sz="1400" dirty="0"/>
-          </a:p>
-        </p:txBody>
-      </p:sp>
-      <p:sp>
-        <p:nvSpPr>
-          <p:cNvPr id="6" name="Shape 4"/>
-          <p:cNvSpPr/>
-          <p:nvPr/>
-        </p:nvSpPr>
-        <p:spPr>
-          <a:xfrm>
-            <a:off x="4023360" y="1645920"/>
-            <a:ext cx="0" cy="274320"/>
-          </a:xfrm>
-          <a:prstGeom prst="line">
-            <a:avLst/>
-          </a:prstGeom>
-          <a:noFill/>
+          <p:cNvPr id="4" name="Shape 2"/>
+          <p:cNvSpPr/>
+          <p:nvPr/>
+        </p:nvSpPr>
+        <p:spPr>
+          <a:xfrm>
+            <a:off x="4160520" y="2606040"/>
+            <a:ext cx="1005840" cy="1005840"/>
+          </a:xfrm>
+          <a:prstGeom prst="roundRect">
+            <a:avLst>
+              <a:gd name="adj" fmla="val 10909"/>
+            </a:avLst>
+          </a:prstGeom>
+          <a:solidFill>
+            <a:srgbClr val="E8F5E9"/>
+          </a:solidFill>
           <a:ln w="25400">
-            <a:solidFill>
-              <a:srgbClr val="1A1A1A"/>
-            </a:solidFill>
-            <a:prstDash val="solid"/>
-            <a:tailEnd type="triangle"/>
-          </a:ln>
-        </p:spPr>
-      </p:sp>
-      <p:sp>
-        <p:nvSpPr>
-          <p:cNvPr id="7" name="Shape 5"/>
-          <p:cNvSpPr/>
-          <p:nvPr/>
-        </p:nvSpPr>
-        <p:spPr>
-          <a:xfrm>
-            <a:off x="4206240" y="1645920"/>
-            <a:ext cx="0" cy="274320"/>
-          </a:xfrm>
-          <a:prstGeom prst="line">
-            <a:avLst/>
-          </a:prstGeom>
-          <a:noFill/>
-          <a:ln w="25400">
-            <a:solidFill>
-              <a:srgbClr val="1A1A1A"/>
-            </a:solidFill>
-            <a:prstDash val="solid"/>
-            <a:headEnd type="triangle"/>
-          </a:ln>
-        </p:spPr>
-      </p:sp>
-      <p:sp>
-        <p:nvSpPr>
-          <p:cNvPr id="8" name="Shape 6"/>
-          <p:cNvSpPr/>
-          <p:nvPr/>
-        </p:nvSpPr>
-        <p:spPr>
-          <a:xfrm>
-            <a:off x="1371600" y="1691640"/>
-            <a:ext cx="6400800" cy="2697480"/>
-          </a:xfrm>
-          <a:prstGeom prst="rect">
-            <a:avLst/>
-          </a:prstGeom>
-          <a:solidFill>
-            <a:srgbClr val="F8F9F7"/>
-          </a:solidFill>
-          <a:ln w="19050">
-            <a:solidFill>
-              <a:srgbClr val="1A1A1A"/>
-            </a:solidFill>
-            <a:prstDash val="solid"/>
-          </a:ln>
-        </p:spPr>
-      </p:sp>
-      <p:sp>
-        <p:nvSpPr>
-          <p:cNvPr id="9" name="Shape 7"/>
-          <p:cNvSpPr/>
-          <p:nvPr/>
-        </p:nvSpPr>
-        <p:spPr>
-          <a:xfrm>
-            <a:off x="3749040" y="1783080"/>
-            <a:ext cx="731520" cy="640080"/>
-          </a:xfrm>
-          <a:prstGeom prst="rect">
-            <a:avLst/>
-          </a:prstGeom>
-          <a:solidFill>
-            <a:srgbClr val="FFFFFF"/>
-          </a:solidFill>
-          <a:ln w="31750">
             <a:solidFill>
               <a:srgbClr val="006633"/>
             </a:solidFill>
             <a:prstDash val="solid"/>
           </a:ln>
-        </p:spPr>
-      </p:sp>
-      <p:sp>
-        <p:nvSpPr>
-          <p:cNvPr id="10" name="Shape 8"/>
-          <p:cNvSpPr/>
-          <p:nvPr/>
-        </p:nvSpPr>
-        <p:spPr>
-          <a:xfrm>
-            <a:off x="3840480" y="1874520"/>
-            <a:ext cx="548640" cy="457200"/>
+          <a:effectLst>
+            <a:outerShdw sx="100000" sy="100000" kx="0" ky="0" algn="bl" rotWithShape="0" blurRad="127000" dist="25400" dir="5400000">
+              <a:srgbClr val="000000">
+                <a:alpha val="15000"/>
+              </a:srgbClr>
+            </a:outerShdw>
+          </a:effectLst>
+        </p:spPr>
+      </p:sp>
+      <p:sp>
+        <p:nvSpPr>
+          <p:cNvPr id="5" name="Text 3"/>
+          <p:cNvSpPr/>
+          <p:nvPr/>
+        </p:nvSpPr>
+        <p:spPr>
+          <a:xfrm>
+            <a:off x="4160520" y="2651760"/>
+            <a:ext cx="1005840" cy="594360"/>
+          </a:xfrm>
+          <a:prstGeom prst="rect">
+            <a:avLst/>
+          </a:prstGeom>
+          <a:noFill/>
+          <a:ln/>
+        </p:spPr>
+        <p:txBody>
+          <a:bodyPr wrap="square" lIns="0" tIns="0" rIns="0" bIns="0" rtlCol="0" anchor="ctr"/>
+          <a:lstStyle/>
+          <a:p>
+            <a:pPr algn="ctr" indent="0" marL="0">
+              <a:buNone/>
+            </a:pPr>
+            <a:r>
+              <a:rPr lang="en-US" sz="3800" dirty="0">
+                <a:solidFill>
+                  <a:srgbClr val="000000"/>
+                </a:solidFill>
+              </a:rPr>
+              <a:t>🧠</a:t>
+            </a:r>
+            <a:endParaRPr lang="en-US" sz="3800" dirty="0"/>
+          </a:p>
+        </p:txBody>
+      </p:sp>
+      <p:sp>
+        <p:nvSpPr>
+          <p:cNvPr id="6" name="Text 4"/>
+          <p:cNvSpPr/>
+          <p:nvPr/>
+        </p:nvSpPr>
+        <p:spPr>
+          <a:xfrm>
+            <a:off x="4160520" y="3246120"/>
+            <a:ext cx="1005840" cy="274320"/>
+          </a:xfrm>
+          <a:prstGeom prst="rect">
+            <a:avLst/>
+          </a:prstGeom>
+          <a:noFill/>
+          <a:ln/>
+        </p:spPr>
+        <p:txBody>
+          <a:bodyPr wrap="square" lIns="0" tIns="0" rIns="0" bIns="0" rtlCol="0" anchor="ctr"/>
+          <a:lstStyle/>
+          <a:p>
+            <a:pPr algn="ctr" indent="0" marL="0">
+              <a:buNone/>
+            </a:pPr>
+            <a:r>
+              <a:rPr lang="en-US" sz="1300" b="1" dirty="0">
+                <a:solidFill>
+                  <a:srgbClr val="006633"/>
+                </a:solidFill>
+                <a:latin typeface="TH Sarabun New" pitchFamily="34" charset="0"/>
+                <a:ea typeface="TH Sarabun New" pitchFamily="34" charset="-122"/>
+                <a:cs typeface="TH Sarabun New" pitchFamily="34" charset="-120"/>
+              </a:rPr>
+              <a:t>สมอง</a:t>
+            </a:r>
+            <a:endParaRPr lang="en-US" sz="1300" dirty="0"/>
+          </a:p>
+        </p:txBody>
+      </p:sp>
+      <p:sp>
+        <p:nvSpPr>
+          <p:cNvPr id="7" name="Shape 5"/>
+          <p:cNvSpPr/>
+          <p:nvPr/>
+        </p:nvSpPr>
+        <p:spPr>
+          <a:xfrm>
+            <a:off x="3383280" y="1143000"/>
+            <a:ext cx="2560320" cy="502920"/>
+          </a:xfrm>
+          <a:prstGeom prst="rect">
+            <a:avLst/>
+          </a:prstGeom>
+          <a:solidFill>
+            <a:srgbClr val="FFFFFF"/>
+          </a:solidFill>
+          <a:ln w="22860">
+            <a:solidFill>
+              <a:srgbClr val="C9A961"/>
+            </a:solidFill>
+            <a:prstDash val="solid"/>
+          </a:ln>
+          <a:effectLst>
+            <a:outerShdw sx="100000" sy="100000" kx="0" ky="0" algn="bl" rotWithShape="0" blurRad="76200" dist="12700" dir="5400000">
+              <a:srgbClr val="000000">
+                <a:alpha val="8000"/>
+              </a:srgbClr>
+            </a:outerShdw>
+          </a:effectLst>
+        </p:spPr>
+      </p:sp>
+      <p:sp>
+        <p:nvSpPr>
+          <p:cNvPr id="8" name="Shape 6"/>
+          <p:cNvSpPr/>
+          <p:nvPr/>
+        </p:nvSpPr>
+        <p:spPr>
+          <a:xfrm>
+            <a:off x="3383280" y="1143000"/>
+            <a:ext cx="2560320" cy="73152"/>
+          </a:xfrm>
+          <a:prstGeom prst="rect">
+            <a:avLst/>
+          </a:prstGeom>
+          <a:solidFill>
+            <a:srgbClr val="C9A961"/>
+          </a:solidFill>
+          <a:ln/>
+        </p:spPr>
+      </p:sp>
+      <p:sp>
+        <p:nvSpPr>
+          <p:cNvPr id="9" name="Text 7"/>
+          <p:cNvSpPr/>
+          <p:nvPr/>
+        </p:nvSpPr>
+        <p:spPr>
+          <a:xfrm>
+            <a:off x="3429000" y="1252728"/>
+            <a:ext cx="411480" cy="411480"/>
+          </a:xfrm>
+          <a:prstGeom prst="rect">
+            <a:avLst/>
+          </a:prstGeom>
+          <a:noFill/>
+          <a:ln/>
+        </p:spPr>
+        <p:txBody>
+          <a:bodyPr wrap="square" lIns="0" tIns="0" rIns="0" bIns="0" rtlCol="0" anchor="ctr"/>
+          <a:lstStyle/>
+          <a:p>
+            <a:pPr algn="ctr" indent="0" marL="0">
+              <a:buNone/>
+            </a:pPr>
+            <a:r>
+              <a:rPr lang="en-US" sz="2000" dirty="0">
+                <a:solidFill>
+                  <a:srgbClr val="000000"/>
+                </a:solidFill>
+              </a:rPr>
+              <a:t>💼</a:t>
+            </a:r>
+            <a:endParaRPr lang="en-US" sz="2000" dirty="0"/>
+          </a:p>
+        </p:txBody>
+      </p:sp>
+      <p:sp>
+        <p:nvSpPr>
+          <p:cNvPr id="10" name="Text 8"/>
+          <p:cNvSpPr/>
+          <p:nvPr/>
+        </p:nvSpPr>
+        <p:spPr>
+          <a:xfrm>
+            <a:off x="3886200" y="1261872"/>
+            <a:ext cx="2011680" cy="274320"/>
+          </a:xfrm>
+          <a:prstGeom prst="rect">
+            <a:avLst/>
+          </a:prstGeom>
+          <a:noFill/>
+          <a:ln/>
+        </p:spPr>
+        <p:txBody>
+          <a:bodyPr wrap="square" lIns="0" tIns="0" rIns="0" bIns="0" rtlCol="0" anchor="ctr"/>
+          <a:lstStyle/>
+          <a:p>
+            <a:pPr indent="0" marL="0">
+              <a:buNone/>
+            </a:pPr>
+            <a:r>
+              <a:rPr lang="en-US" sz="1300" b="1" dirty="0">
+                <a:solidFill>
+                  <a:srgbClr val="1A1A1A"/>
+                </a:solidFill>
+                <a:latin typeface="TH Sarabun New" pitchFamily="34" charset="0"/>
+                <a:ea typeface="TH Sarabun New" pitchFamily="34" charset="-122"/>
+                <a:cs typeface="TH Sarabun New" pitchFamily="34" charset="-120"/>
+              </a:rPr>
+              <a:t>คำสั่งเริ่มต้น</a:t>
+            </a:r>
+            <a:endParaRPr lang="en-US" sz="1300" dirty="0"/>
+          </a:p>
+        </p:txBody>
+      </p:sp>
+      <p:sp>
+        <p:nvSpPr>
+          <p:cNvPr id="11" name="Text 9"/>
+          <p:cNvSpPr/>
+          <p:nvPr/>
+        </p:nvSpPr>
+        <p:spPr>
+          <a:xfrm>
+            <a:off x="3886200" y="1472184"/>
+            <a:ext cx="2011680" cy="201168"/>
+          </a:xfrm>
+          <a:prstGeom prst="rect">
+            <a:avLst/>
+          </a:prstGeom>
+          <a:noFill/>
+          <a:ln/>
+        </p:spPr>
+        <p:txBody>
+          <a:bodyPr wrap="square" lIns="0" tIns="0" rIns="0" bIns="0" rtlCol="0" anchor="ctr"/>
+          <a:lstStyle/>
+          <a:p>
+            <a:pPr indent="0" marL="0">
+              <a:buNone/>
+            </a:pPr>
+            <a:r>
+              <a:rPr lang="en-US" sz="1000" i="1" dirty="0">
+                <a:solidFill>
+                  <a:srgbClr val="6B6B6B"/>
+                </a:solidFill>
+                <a:latin typeface="Calibri" pitchFamily="34" charset="0"/>
+                <a:ea typeface="Calibri" pitchFamily="34" charset="-122"/>
+                <a:cs typeface="Calibri" pitchFamily="34" charset="-120"/>
+              </a:rPr>
+              <a:t>(Prompt)</a:t>
+            </a:r>
+            <a:endParaRPr lang="en-US" sz="1000" dirty="0"/>
+          </a:p>
+        </p:txBody>
+      </p:sp>
+      <p:sp>
+        <p:nvSpPr>
+          <p:cNvPr id="12" name="Shape 10"/>
+          <p:cNvSpPr/>
+          <p:nvPr/>
+        </p:nvSpPr>
+        <p:spPr>
+          <a:xfrm>
+            <a:off x="3383280" y="1828800"/>
+            <a:ext cx="2560320" cy="594360"/>
+          </a:xfrm>
+          <a:prstGeom prst="rect">
+            <a:avLst/>
+          </a:prstGeom>
+          <a:solidFill>
+            <a:srgbClr val="FFFFFF"/>
+          </a:solidFill>
+          <a:ln w="22860">
+            <a:solidFill>
+              <a:srgbClr val="004D26"/>
+            </a:solidFill>
+            <a:prstDash val="solid"/>
+          </a:ln>
+          <a:effectLst>
+            <a:outerShdw sx="100000" sy="100000" kx="0" ky="0" algn="bl" rotWithShape="0" blurRad="76200" dist="12700" dir="5400000">
+              <a:srgbClr val="000000">
+                <a:alpha val="8000"/>
+              </a:srgbClr>
+            </a:outerShdw>
+          </a:effectLst>
+        </p:spPr>
+      </p:sp>
+      <p:sp>
+        <p:nvSpPr>
+          <p:cNvPr id="13" name="Shape 11"/>
+          <p:cNvSpPr/>
+          <p:nvPr/>
+        </p:nvSpPr>
+        <p:spPr>
+          <a:xfrm>
+            <a:off x="3383280" y="1828800"/>
+            <a:ext cx="2560320" cy="73152"/>
+          </a:xfrm>
+          <a:prstGeom prst="rect">
+            <a:avLst/>
+          </a:prstGeom>
+          <a:solidFill>
+            <a:srgbClr val="004D26"/>
+          </a:solidFill>
+          <a:ln/>
+        </p:spPr>
+      </p:sp>
+      <p:sp>
+        <p:nvSpPr>
+          <p:cNvPr id="14" name="Text 12"/>
+          <p:cNvSpPr/>
+          <p:nvPr/>
+        </p:nvSpPr>
+        <p:spPr>
+          <a:xfrm>
+            <a:off x="3429000" y="1938528"/>
+            <a:ext cx="411480" cy="411480"/>
+          </a:xfrm>
+          <a:prstGeom prst="rect">
+            <a:avLst/>
+          </a:prstGeom>
+          <a:noFill/>
+          <a:ln/>
+        </p:spPr>
+        <p:txBody>
+          <a:bodyPr wrap="square" lIns="0" tIns="0" rIns="0" bIns="0" rtlCol="0" anchor="ctr"/>
+          <a:lstStyle/>
+          <a:p>
+            <a:pPr algn="ctr" indent="0" marL="0">
+              <a:buNone/>
+            </a:pPr>
+            <a:r>
+              <a:rPr lang="en-US" sz="2000" dirty="0">
+                <a:solidFill>
+                  <a:srgbClr val="000000"/>
+                </a:solidFill>
+              </a:rPr>
+              <a:t>🤖</a:t>
+            </a:r>
+            <a:endParaRPr lang="en-US" sz="2000" dirty="0"/>
+          </a:p>
+        </p:txBody>
+      </p:sp>
+      <p:sp>
+        <p:nvSpPr>
+          <p:cNvPr id="15" name="Text 13"/>
+          <p:cNvSpPr/>
+          <p:nvPr/>
+        </p:nvSpPr>
+        <p:spPr>
+          <a:xfrm>
+            <a:off x="3886200" y="1947672"/>
+            <a:ext cx="2011680" cy="274320"/>
+          </a:xfrm>
+          <a:prstGeom prst="rect">
+            <a:avLst/>
+          </a:prstGeom>
+          <a:noFill/>
+          <a:ln/>
+        </p:spPr>
+        <p:txBody>
+          <a:bodyPr wrap="square" lIns="0" tIns="0" rIns="0" bIns="0" rtlCol="0" anchor="ctr"/>
+          <a:lstStyle/>
+          <a:p>
+            <a:pPr indent="0" marL="0">
+              <a:buNone/>
+            </a:pPr>
+            <a:r>
+              <a:rPr lang="en-US" sz="1300" b="1" dirty="0">
+                <a:solidFill>
+                  <a:srgbClr val="1A1A1A"/>
+                </a:solidFill>
+                <a:latin typeface="TH Sarabun New" pitchFamily="34" charset="0"/>
+                <a:ea typeface="TH Sarabun New" pitchFamily="34" charset="-122"/>
+                <a:cs typeface="TH Sarabun New" pitchFamily="34" charset="-120"/>
+              </a:rPr>
+              <a:t>แกนหลักของเอเจนต์</a:t>
+            </a:r>
+            <a:endParaRPr lang="en-US" sz="1300" dirty="0"/>
+          </a:p>
+        </p:txBody>
+      </p:sp>
+      <p:sp>
+        <p:nvSpPr>
+          <p:cNvPr id="16" name="Text 14"/>
+          <p:cNvSpPr/>
+          <p:nvPr/>
+        </p:nvSpPr>
+        <p:spPr>
+          <a:xfrm>
+            <a:off x="3886200" y="2157984"/>
+            <a:ext cx="2011680" cy="201168"/>
+          </a:xfrm>
+          <a:prstGeom prst="rect">
+            <a:avLst/>
+          </a:prstGeom>
+          <a:noFill/>
+          <a:ln/>
+        </p:spPr>
+        <p:txBody>
+          <a:bodyPr wrap="square" lIns="0" tIns="0" rIns="0" bIns="0" rtlCol="0" anchor="ctr"/>
+          <a:lstStyle/>
+          <a:p>
+            <a:pPr indent="0" marL="0">
+              <a:buNone/>
+            </a:pPr>
+            <a:r>
+              <a:rPr lang="en-US" sz="1000" i="1" dirty="0">
+                <a:solidFill>
+                  <a:srgbClr val="6B6B6B"/>
+                </a:solidFill>
+                <a:latin typeface="Calibri" pitchFamily="34" charset="0"/>
+                <a:ea typeface="Calibri" pitchFamily="34" charset="-122"/>
+                <a:cs typeface="Calibri" pitchFamily="34" charset="-120"/>
+              </a:rPr>
+              <a:t>(LLM / สมอง)</a:t>
+            </a:r>
+            <a:endParaRPr lang="en-US" sz="1000" dirty="0"/>
+          </a:p>
+        </p:txBody>
+      </p:sp>
+      <p:sp>
+        <p:nvSpPr>
+          <p:cNvPr id="17" name="Shape 15"/>
+          <p:cNvSpPr/>
+          <p:nvPr/>
+        </p:nvSpPr>
+        <p:spPr>
+          <a:xfrm>
+            <a:off x="3474720" y="2148840"/>
+            <a:ext cx="2377440" cy="219456"/>
           </a:xfrm>
           <a:prstGeom prst="rect">
             <a:avLst/>
@@ -5101,152 +5369,14 @@
       </p:sp>
       <p:sp>
         <p:nvSpPr>
-          <p:cNvPr id="11" name="Shape 9"/>
-          <p:cNvSpPr/>
-          <p:nvPr/>
-        </p:nvSpPr>
-        <p:spPr>
-          <a:xfrm>
-            <a:off x="3675888" y="1920240"/>
-            <a:ext cx="73152" cy="0"/>
-          </a:xfrm>
-          <a:prstGeom prst="line">
-            <a:avLst/>
-          </a:prstGeom>
-          <a:noFill/>
-          <a:ln w="19050">
-            <a:solidFill>
-              <a:srgbClr val="006633"/>
-            </a:solidFill>
-            <a:prstDash val="solid"/>
-          </a:ln>
-        </p:spPr>
-      </p:sp>
-      <p:sp>
-        <p:nvSpPr>
-          <p:cNvPr id="12" name="Shape 10"/>
-          <p:cNvSpPr/>
-          <p:nvPr/>
-        </p:nvSpPr>
-        <p:spPr>
-          <a:xfrm>
-            <a:off x="4480560" y="1920240"/>
-            <a:ext cx="73152" cy="0"/>
-          </a:xfrm>
-          <a:prstGeom prst="line">
-            <a:avLst/>
-          </a:prstGeom>
-          <a:noFill/>
-          <a:ln w="19050">
-            <a:solidFill>
-              <a:srgbClr val="006633"/>
-            </a:solidFill>
-            <a:prstDash val="solid"/>
-          </a:ln>
-        </p:spPr>
-      </p:sp>
-      <p:sp>
-        <p:nvSpPr>
-          <p:cNvPr id="13" name="Shape 11"/>
-          <p:cNvSpPr/>
-          <p:nvPr/>
-        </p:nvSpPr>
-        <p:spPr>
-          <a:xfrm>
-            <a:off x="3675888" y="2103120"/>
-            <a:ext cx="73152" cy="0"/>
-          </a:xfrm>
-          <a:prstGeom prst="line">
-            <a:avLst/>
-          </a:prstGeom>
-          <a:noFill/>
-          <a:ln w="19050">
-            <a:solidFill>
-              <a:srgbClr val="006633"/>
-            </a:solidFill>
-            <a:prstDash val="solid"/>
-          </a:ln>
-        </p:spPr>
-      </p:sp>
-      <p:sp>
-        <p:nvSpPr>
-          <p:cNvPr id="14" name="Shape 12"/>
-          <p:cNvSpPr/>
-          <p:nvPr/>
-        </p:nvSpPr>
-        <p:spPr>
-          <a:xfrm>
-            <a:off x="4480560" y="2103120"/>
-            <a:ext cx="73152" cy="0"/>
-          </a:xfrm>
-          <a:prstGeom prst="line">
-            <a:avLst/>
-          </a:prstGeom>
-          <a:noFill/>
-          <a:ln w="19050">
-            <a:solidFill>
-              <a:srgbClr val="006633"/>
-            </a:solidFill>
-            <a:prstDash val="solid"/>
-          </a:ln>
-        </p:spPr>
-      </p:sp>
-      <p:sp>
-        <p:nvSpPr>
-          <p:cNvPr id="15" name="Shape 13"/>
-          <p:cNvSpPr/>
-          <p:nvPr/>
-        </p:nvSpPr>
-        <p:spPr>
-          <a:xfrm>
-            <a:off x="3675888" y="2286000"/>
-            <a:ext cx="73152" cy="0"/>
-          </a:xfrm>
-          <a:prstGeom prst="line">
-            <a:avLst/>
-          </a:prstGeom>
-          <a:noFill/>
-          <a:ln w="19050">
-            <a:solidFill>
-              <a:srgbClr val="006633"/>
-            </a:solidFill>
-            <a:prstDash val="solid"/>
-          </a:ln>
-        </p:spPr>
-      </p:sp>
-      <p:sp>
-        <p:nvSpPr>
-          <p:cNvPr id="16" name="Shape 14"/>
-          <p:cNvSpPr/>
-          <p:nvPr/>
-        </p:nvSpPr>
-        <p:spPr>
-          <a:xfrm>
-            <a:off x="4480560" y="2286000"/>
-            <a:ext cx="73152" cy="0"/>
-          </a:xfrm>
-          <a:prstGeom prst="line">
-            <a:avLst/>
-          </a:prstGeom>
-          <a:noFill/>
-          <a:ln w="19050">
-            <a:solidFill>
-              <a:srgbClr val="006633"/>
-            </a:solidFill>
-            <a:prstDash val="solid"/>
-          </a:ln>
-        </p:spPr>
-      </p:sp>
-      <p:sp>
-        <p:nvSpPr>
-          <p:cNvPr id="17" name="Text 15"/>
-          <p:cNvSpPr/>
-          <p:nvPr/>
-        </p:nvSpPr>
-        <p:spPr>
-          <a:xfrm>
-            <a:off x="3749040" y="1828800"/>
-            <a:ext cx="731520" cy="548640"/>
+          <p:cNvPr id="18" name="Text 16"/>
+          <p:cNvSpPr/>
+          <p:nvPr/>
+        </p:nvSpPr>
+        <p:spPr>
+          <a:xfrm>
+            <a:off x="3474720" y="2148840"/>
+            <a:ext cx="2377440" cy="219456"/>
           </a:xfrm>
           <a:prstGeom prst="rect">
             <a:avLst/>
@@ -5262,7 +5392,7 @@
               <a:buNone/>
             </a:pPr>
             <a:r>
-              <a:rPr lang="en-US" sz="2200" b="1" i="1" dirty="0">
+              <a:rPr lang="en-US" sz="900" b="1" dirty="0">
                 <a:solidFill>
                   <a:srgbClr val="006633"/>
                 </a:solidFill>
@@ -5270,48 +5400,9 @@
                 <a:ea typeface="Calibri" pitchFamily="34" charset="-122"/>
                 <a:cs typeface="Calibri" pitchFamily="34" charset="-120"/>
               </a:rPr>
-              <a:t>AI</a:t>
-            </a:r>
-            <a:endParaRPr lang="en-US" sz="2200" dirty="0"/>
-          </a:p>
-        </p:txBody>
-      </p:sp>
-      <p:sp>
-        <p:nvSpPr>
-          <p:cNvPr id="18" name="Text 16"/>
-          <p:cNvSpPr/>
-          <p:nvPr/>
-        </p:nvSpPr>
-        <p:spPr>
-          <a:xfrm>
-            <a:off x="2468880" y="1920240"/>
-            <a:ext cx="1188720" cy="320040"/>
-          </a:xfrm>
-          <a:prstGeom prst="rect">
-            <a:avLst/>
-          </a:prstGeom>
-          <a:noFill/>
-          <a:ln/>
-        </p:spPr>
-        <p:txBody>
-          <a:bodyPr wrap="square" lIns="0" tIns="0" rIns="0" bIns="0" rtlCol="0" anchor="ctr"/>
-          <a:lstStyle/>
-          <a:p>
-            <a:pPr algn="r" indent="0" marL="0">
-              <a:buNone/>
-            </a:pPr>
-            <a:r>
-              <a:rPr lang="en-US" sz="1400" b="1" dirty="0">
-                <a:solidFill>
-                  <a:srgbClr val="1A1A1A"/>
-                </a:solidFill>
-                <a:latin typeface="TH Sarabun New" pitchFamily="34" charset="0"/>
-                <a:ea typeface="TH Sarabun New" pitchFamily="34" charset="-122"/>
-                <a:cs typeface="TH Sarabun New" pitchFamily="34" charset="-120"/>
-              </a:rPr>
-              <a:t>AI Agent</a:t>
-            </a:r>
-            <a:endParaRPr lang="en-US" sz="1400" dirty="0"/>
+              <a:t>apigw.ku.ac.th  •  KU LLM (Mistral-7B)</a:t>
+            </a:r>
+            <a:endParaRPr lang="en-US" sz="900" dirty="0"/>
           </a:p>
         </p:txBody>
       </p:sp>
@@ -5323,722 +5414,8 @@
         </p:nvSpPr>
         <p:spPr>
           <a:xfrm>
-            <a:off x="1645920" y="2194560"/>
-            <a:ext cx="777240" cy="182880"/>
-          </a:xfrm>
-          <a:prstGeom prst="ellipse">
-            <a:avLst/>
-          </a:prstGeom>
-          <a:solidFill>
-            <a:srgbClr val="C9A961"/>
-          </a:solidFill>
-          <a:ln w="12700">
-            <a:solidFill>
-              <a:srgbClr val="C9A961"/>
-            </a:solidFill>
-            <a:prstDash val="solid"/>
-          </a:ln>
-        </p:spPr>
-      </p:sp>
-      <p:sp>
-        <p:nvSpPr>
-          <p:cNvPr id="20" name="Shape 18"/>
-          <p:cNvSpPr/>
-          <p:nvPr/>
-        </p:nvSpPr>
-        <p:spPr>
-          <a:xfrm>
-            <a:off x="1645920" y="2286000"/>
-            <a:ext cx="777240" cy="411480"/>
-          </a:xfrm>
-          <a:prstGeom prst="rect">
-            <a:avLst/>
-          </a:prstGeom>
-          <a:solidFill>
-            <a:srgbClr val="C9A961"/>
-          </a:solidFill>
-          <a:ln/>
-        </p:spPr>
-      </p:sp>
-      <p:sp>
-        <p:nvSpPr>
-          <p:cNvPr id="21" name="Shape 19"/>
-          <p:cNvSpPr/>
-          <p:nvPr/>
-        </p:nvSpPr>
-        <p:spPr>
-          <a:xfrm>
-            <a:off x="1645920" y="2606040"/>
-            <a:ext cx="777240" cy="182880"/>
-          </a:xfrm>
-          <a:prstGeom prst="ellipse">
-            <a:avLst/>
-          </a:prstGeom>
-          <a:solidFill>
-            <a:srgbClr val="F5EDD6"/>
-          </a:solidFill>
-          <a:ln w="12700">
-            <a:solidFill>
-              <a:srgbClr val="C9A961"/>
-            </a:solidFill>
-            <a:prstDash val="solid"/>
-          </a:ln>
-        </p:spPr>
-      </p:sp>
-      <p:sp>
-        <p:nvSpPr>
-          <p:cNvPr id="22" name="Shape 20"/>
-          <p:cNvSpPr/>
-          <p:nvPr/>
-        </p:nvSpPr>
-        <p:spPr>
-          <a:xfrm>
-            <a:off x="1737360" y="2468880"/>
-            <a:ext cx="594360" cy="0"/>
-          </a:xfrm>
-          <a:prstGeom prst="line">
-            <a:avLst/>
-          </a:prstGeom>
-          <a:noFill/>
-          <a:ln w="6350">
-            <a:solidFill>
-              <a:srgbClr val="FFFFFF"/>
-            </a:solidFill>
-            <a:prstDash val="solid"/>
-          </a:ln>
-        </p:spPr>
-      </p:sp>
-      <p:sp>
-        <p:nvSpPr>
-          <p:cNvPr id="23" name="Text 21"/>
-          <p:cNvSpPr/>
-          <p:nvPr/>
-        </p:nvSpPr>
-        <p:spPr>
-          <a:xfrm>
-            <a:off x="1371600" y="2834640"/>
-            <a:ext cx="1325880" cy="274320"/>
-          </a:xfrm>
-          <a:prstGeom prst="rect">
-            <a:avLst/>
-          </a:prstGeom>
-          <a:noFill/>
-          <a:ln/>
-        </p:spPr>
-        <p:txBody>
-          <a:bodyPr wrap="square" lIns="0" tIns="0" rIns="0" bIns="0" rtlCol="0" anchor="ctr"/>
-          <a:lstStyle/>
-          <a:p>
-            <a:pPr algn="ctr" indent="0" marL="0">
-              <a:buNone/>
-            </a:pPr>
-            <a:r>
-              <a:rPr lang="en-US" sz="1200" b="1" dirty="0">
-                <a:solidFill>
-                  <a:srgbClr val="1A1A1A"/>
-                </a:solidFill>
-                <a:latin typeface="TH Sarabun New" pitchFamily="34" charset="0"/>
-                <a:ea typeface="TH Sarabun New" pitchFamily="34" charset="-122"/>
-                <a:cs typeface="TH Sarabun New" pitchFamily="34" charset="-120"/>
-              </a:rPr>
-              <a:t>Database</a:t>
-            </a:r>
-            <a:endParaRPr lang="en-US" sz="1200" dirty="0"/>
-          </a:p>
-        </p:txBody>
-      </p:sp>
-      <p:sp>
-        <p:nvSpPr>
-          <p:cNvPr id="24" name="Shape 22"/>
-          <p:cNvSpPr/>
-          <p:nvPr/>
-        </p:nvSpPr>
-        <p:spPr>
-          <a:xfrm>
-            <a:off x="1645920" y="3429000"/>
-            <a:ext cx="777240" cy="182880"/>
-          </a:xfrm>
-          <a:prstGeom prst="ellipse">
-            <a:avLst/>
-          </a:prstGeom>
-          <a:solidFill>
-            <a:srgbClr val="2E8B57"/>
-          </a:solidFill>
-          <a:ln w="12700">
-            <a:solidFill>
-              <a:srgbClr val="006633"/>
-            </a:solidFill>
-            <a:prstDash val="solid"/>
-          </a:ln>
-        </p:spPr>
-      </p:sp>
-      <p:sp>
-        <p:nvSpPr>
-          <p:cNvPr id="25" name="Shape 23"/>
-          <p:cNvSpPr/>
-          <p:nvPr/>
-        </p:nvSpPr>
-        <p:spPr>
-          <a:xfrm>
-            <a:off x="1645920" y="3520440"/>
-            <a:ext cx="777240" cy="411480"/>
-          </a:xfrm>
-          <a:prstGeom prst="rect">
-            <a:avLst/>
-          </a:prstGeom>
-          <a:solidFill>
-            <a:srgbClr val="2E8B57"/>
-          </a:solidFill>
-          <a:ln/>
-        </p:spPr>
-      </p:sp>
-      <p:sp>
-        <p:nvSpPr>
-          <p:cNvPr id="26" name="Shape 24"/>
-          <p:cNvSpPr/>
-          <p:nvPr/>
-        </p:nvSpPr>
-        <p:spPr>
-          <a:xfrm>
-            <a:off x="1645920" y="3840480"/>
-            <a:ext cx="777240" cy="182880"/>
-          </a:xfrm>
-          <a:prstGeom prst="ellipse">
-            <a:avLst/>
-          </a:prstGeom>
-          <a:solidFill>
-            <a:srgbClr val="E8F5E9"/>
-          </a:solidFill>
-          <a:ln w="12700">
-            <a:solidFill>
-              <a:srgbClr val="006633"/>
-            </a:solidFill>
-            <a:prstDash val="solid"/>
-          </a:ln>
-        </p:spPr>
-      </p:sp>
-      <p:sp>
-        <p:nvSpPr>
-          <p:cNvPr id="27" name="Shape 25"/>
-          <p:cNvSpPr/>
-          <p:nvPr/>
-        </p:nvSpPr>
-        <p:spPr>
-          <a:xfrm>
-            <a:off x="1783080" y="3685032"/>
-            <a:ext cx="36576" cy="36576"/>
-          </a:xfrm>
-          <a:prstGeom prst="ellipse">
-            <a:avLst/>
-          </a:prstGeom>
-          <a:solidFill>
-            <a:srgbClr val="FFFFFF"/>
-          </a:solidFill>
-          <a:ln/>
-        </p:spPr>
-      </p:sp>
-      <p:sp>
-        <p:nvSpPr>
-          <p:cNvPr id="28" name="Shape 26"/>
-          <p:cNvSpPr/>
-          <p:nvPr/>
-        </p:nvSpPr>
-        <p:spPr>
-          <a:xfrm>
-            <a:off x="1783080" y="3794760"/>
-            <a:ext cx="36576" cy="36576"/>
-          </a:xfrm>
-          <a:prstGeom prst="ellipse">
-            <a:avLst/>
-          </a:prstGeom>
-          <a:solidFill>
-            <a:srgbClr val="FFFFFF"/>
-          </a:solidFill>
-          <a:ln/>
-        </p:spPr>
-      </p:sp>
-      <p:sp>
-        <p:nvSpPr>
-          <p:cNvPr id="29" name="Shape 27"/>
-          <p:cNvSpPr/>
-          <p:nvPr/>
-        </p:nvSpPr>
-        <p:spPr>
-          <a:xfrm>
-            <a:off x="1901952" y="3685032"/>
-            <a:ext cx="36576" cy="36576"/>
-          </a:xfrm>
-          <a:prstGeom prst="ellipse">
-            <a:avLst/>
-          </a:prstGeom>
-          <a:solidFill>
-            <a:srgbClr val="FFFFFF"/>
-          </a:solidFill>
-          <a:ln/>
-        </p:spPr>
-      </p:sp>
-      <p:sp>
-        <p:nvSpPr>
-          <p:cNvPr id="30" name="Shape 28"/>
-          <p:cNvSpPr/>
-          <p:nvPr/>
-        </p:nvSpPr>
-        <p:spPr>
-          <a:xfrm>
-            <a:off x="1901952" y="3794760"/>
-            <a:ext cx="36576" cy="36576"/>
-          </a:xfrm>
-          <a:prstGeom prst="ellipse">
-            <a:avLst/>
-          </a:prstGeom>
-          <a:solidFill>
-            <a:srgbClr val="FFFFFF"/>
-          </a:solidFill>
-          <a:ln/>
-        </p:spPr>
-      </p:sp>
-      <p:sp>
-        <p:nvSpPr>
-          <p:cNvPr id="31" name="Shape 29"/>
-          <p:cNvSpPr/>
-          <p:nvPr/>
-        </p:nvSpPr>
-        <p:spPr>
-          <a:xfrm>
-            <a:off x="2020824" y="3685032"/>
-            <a:ext cx="36576" cy="36576"/>
-          </a:xfrm>
-          <a:prstGeom prst="ellipse">
-            <a:avLst/>
-          </a:prstGeom>
-          <a:solidFill>
-            <a:srgbClr val="FFFFFF"/>
-          </a:solidFill>
-          <a:ln/>
-        </p:spPr>
-      </p:sp>
-      <p:sp>
-        <p:nvSpPr>
-          <p:cNvPr id="32" name="Shape 30"/>
-          <p:cNvSpPr/>
-          <p:nvPr/>
-        </p:nvSpPr>
-        <p:spPr>
-          <a:xfrm>
-            <a:off x="2020824" y="3794760"/>
-            <a:ext cx="36576" cy="36576"/>
-          </a:xfrm>
-          <a:prstGeom prst="ellipse">
-            <a:avLst/>
-          </a:prstGeom>
-          <a:solidFill>
-            <a:srgbClr val="FFFFFF"/>
-          </a:solidFill>
-          <a:ln/>
-        </p:spPr>
-      </p:sp>
-      <p:sp>
-        <p:nvSpPr>
-          <p:cNvPr id="33" name="Shape 31"/>
-          <p:cNvSpPr/>
-          <p:nvPr/>
-        </p:nvSpPr>
-        <p:spPr>
-          <a:xfrm>
-            <a:off x="2139696" y="3685032"/>
-            <a:ext cx="36576" cy="36576"/>
-          </a:xfrm>
-          <a:prstGeom prst="ellipse">
-            <a:avLst/>
-          </a:prstGeom>
-          <a:solidFill>
-            <a:srgbClr val="FFFFFF"/>
-          </a:solidFill>
-          <a:ln/>
-        </p:spPr>
-      </p:sp>
-      <p:sp>
-        <p:nvSpPr>
-          <p:cNvPr id="34" name="Shape 32"/>
-          <p:cNvSpPr/>
-          <p:nvPr/>
-        </p:nvSpPr>
-        <p:spPr>
-          <a:xfrm>
-            <a:off x="2139696" y="3794760"/>
-            <a:ext cx="36576" cy="36576"/>
-          </a:xfrm>
-          <a:prstGeom prst="ellipse">
-            <a:avLst/>
-          </a:prstGeom>
-          <a:solidFill>
-            <a:srgbClr val="FFFFFF"/>
-          </a:solidFill>
-          <a:ln/>
-        </p:spPr>
-      </p:sp>
-      <p:sp>
-        <p:nvSpPr>
-          <p:cNvPr id="35" name="Text 33"/>
-          <p:cNvSpPr/>
-          <p:nvPr/>
-        </p:nvSpPr>
-        <p:spPr>
-          <a:xfrm>
-            <a:off x="1280160" y="4069080"/>
-            <a:ext cx="1508760" cy="411480"/>
-          </a:xfrm>
-          <a:prstGeom prst="rect">
-            <a:avLst/>
-          </a:prstGeom>
-          <a:noFill/>
-          <a:ln/>
-        </p:spPr>
-        <p:txBody>
-          <a:bodyPr wrap="square" lIns="0" tIns="0" rIns="0" bIns="0" rtlCol="0" anchor="ctr"/>
-          <a:lstStyle/>
-          <a:p>
-            <a:pPr algn="ctr" indent="0" marL="0">
-              <a:buNone/>
-            </a:pPr>
-            <a:r>
-              <a:rPr lang="en-US" sz="1200" b="1" dirty="0">
-                <a:solidFill>
-                  <a:srgbClr val="1A1A1A"/>
-                </a:solidFill>
-                <a:latin typeface="TH Sarabun New" pitchFamily="34" charset="0"/>
-                <a:ea typeface="TH Sarabun New" pitchFamily="34" charset="-122"/>
-                <a:cs typeface="TH Sarabun New" pitchFamily="34" charset="-120"/>
-              </a:rPr>
-              <a:t>Vector</a:t>
-            </a:r>
-            <a:endParaRPr lang="en-US" sz="1200" dirty="0"/>
-          </a:p>
-          <a:p>
-            <a:pPr algn="ctr" indent="0" marL="0">
-              <a:buNone/>
-            </a:pPr>
-            <a:r>
-              <a:rPr lang="en-US" sz="1200" b="1" dirty="0">
-                <a:solidFill>
-                  <a:srgbClr val="1A1A1A"/>
-                </a:solidFill>
-                <a:latin typeface="TH Sarabun New" pitchFamily="34" charset="0"/>
-                <a:ea typeface="TH Sarabun New" pitchFamily="34" charset="-122"/>
-                <a:cs typeface="TH Sarabun New" pitchFamily="34" charset="-120"/>
-              </a:rPr>
-              <a:t>Database</a:t>
-            </a:r>
-            <a:endParaRPr lang="en-US" sz="1200" dirty="0"/>
-          </a:p>
-        </p:txBody>
-      </p:sp>
-      <p:sp>
-        <p:nvSpPr>
-          <p:cNvPr id="36" name="Shape 34"/>
-          <p:cNvSpPr/>
-          <p:nvPr/>
-        </p:nvSpPr>
-        <p:spPr>
-          <a:xfrm>
-            <a:off x="4069080" y="2926080"/>
-            <a:ext cx="822960" cy="777240"/>
-          </a:xfrm>
-          <a:prstGeom prst="rect">
-            <a:avLst/>
-          </a:prstGeom>
-          <a:solidFill>
-            <a:srgbClr val="FFFFFF"/>
-          </a:solidFill>
-          <a:ln w="25400">
-            <a:solidFill>
-              <a:srgbClr val="006633"/>
-            </a:solidFill>
-            <a:prstDash val="solid"/>
-          </a:ln>
-        </p:spPr>
-      </p:sp>
-      <p:sp>
-        <p:nvSpPr>
-          <p:cNvPr id="37" name="Text 35"/>
-          <p:cNvSpPr/>
-          <p:nvPr/>
-        </p:nvSpPr>
-        <p:spPr>
-          <a:xfrm>
-            <a:off x="4069080" y="2926080"/>
-            <a:ext cx="822960" cy="777240"/>
-          </a:xfrm>
-          <a:prstGeom prst="rect">
-            <a:avLst/>
-          </a:prstGeom>
-          <a:noFill/>
-          <a:ln/>
-        </p:spPr>
-        <p:txBody>
-          <a:bodyPr wrap="square" lIns="0" tIns="0" rIns="0" bIns="0" rtlCol="0" anchor="ctr"/>
-          <a:lstStyle/>
-          <a:p>
-            <a:pPr algn="ctr" indent="0" marL="0">
-              <a:buNone/>
-            </a:pPr>
-            <a:r>
-              <a:rPr lang="en-US" sz="3200" dirty="0">
-                <a:solidFill>
-                  <a:srgbClr val="000000"/>
-                </a:solidFill>
-              </a:rPr>
-              <a:t>🧠</a:t>
-            </a:r>
-            <a:endParaRPr lang="en-US" sz="3200" dirty="0"/>
-          </a:p>
-        </p:txBody>
-      </p:sp>
-      <p:sp>
-        <p:nvSpPr>
-          <p:cNvPr id="38" name="Text 36"/>
-          <p:cNvSpPr/>
-          <p:nvPr/>
-        </p:nvSpPr>
-        <p:spPr>
-          <a:xfrm>
-            <a:off x="3611880" y="3749040"/>
-            <a:ext cx="1737360" cy="274320"/>
-          </a:xfrm>
-          <a:prstGeom prst="rect">
-            <a:avLst/>
-          </a:prstGeom>
-          <a:noFill/>
-          <a:ln/>
-        </p:spPr>
-        <p:txBody>
-          <a:bodyPr wrap="square" lIns="0" tIns="0" rIns="0" bIns="0" rtlCol="0" anchor="ctr"/>
-          <a:lstStyle/>
-          <a:p>
-            <a:pPr algn="ctr" indent="0" marL="0">
-              <a:buNone/>
-            </a:pPr>
-            <a:r>
-              <a:rPr lang="en-US" sz="1300" b="1" dirty="0">
-                <a:solidFill>
-                  <a:srgbClr val="1A1A1A"/>
-                </a:solidFill>
-                <a:latin typeface="TH Sarabun New" pitchFamily="34" charset="0"/>
-                <a:ea typeface="TH Sarabun New" pitchFamily="34" charset="-122"/>
-                <a:cs typeface="TH Sarabun New" pitchFamily="34" charset="-120"/>
-              </a:rPr>
-              <a:t>LLM</a:t>
-            </a:r>
-            <a:endParaRPr lang="en-US" sz="1300" dirty="0"/>
-          </a:p>
-        </p:txBody>
-      </p:sp>
-      <p:sp>
-        <p:nvSpPr>
-          <p:cNvPr id="39" name="Shape 37"/>
-          <p:cNvSpPr/>
-          <p:nvPr/>
-        </p:nvSpPr>
-        <p:spPr>
-          <a:xfrm>
-            <a:off x="6126480" y="2926080"/>
-            <a:ext cx="822960" cy="777240"/>
-          </a:xfrm>
-          <a:prstGeom prst="rect">
-            <a:avLst/>
-          </a:prstGeom>
-          <a:solidFill>
-            <a:srgbClr val="FFFFFF"/>
-          </a:solidFill>
-          <a:ln w="25400">
-            <a:solidFill>
-              <a:srgbClr val="B83D3D"/>
-            </a:solidFill>
-            <a:prstDash val="solid"/>
-          </a:ln>
-        </p:spPr>
-      </p:sp>
-      <p:sp>
-        <p:nvSpPr>
-          <p:cNvPr id="40" name="Text 38"/>
-          <p:cNvSpPr/>
-          <p:nvPr/>
-        </p:nvSpPr>
-        <p:spPr>
-          <a:xfrm>
-            <a:off x="6126480" y="2926080"/>
-            <a:ext cx="822960" cy="777240"/>
-          </a:xfrm>
-          <a:prstGeom prst="rect">
-            <a:avLst/>
-          </a:prstGeom>
-          <a:noFill/>
-          <a:ln/>
-        </p:spPr>
-        <p:txBody>
-          <a:bodyPr wrap="square" lIns="0" tIns="0" rIns="0" bIns="0" rtlCol="0" anchor="ctr"/>
-          <a:lstStyle/>
-          <a:p>
-            <a:pPr algn="ctr" indent="0" marL="0">
-              <a:buNone/>
-            </a:pPr>
-            <a:r>
-              <a:rPr lang="en-US" sz="3200" dirty="0">
-                <a:solidFill>
-                  <a:srgbClr val="000000"/>
-                </a:solidFill>
-              </a:rPr>
-              <a:t>⚙️</a:t>
-            </a:r>
-            <a:endParaRPr lang="en-US" sz="3200" dirty="0"/>
-          </a:p>
-        </p:txBody>
-      </p:sp>
-      <p:sp>
-        <p:nvSpPr>
-          <p:cNvPr id="41" name="Text 39"/>
-          <p:cNvSpPr/>
-          <p:nvPr/>
-        </p:nvSpPr>
-        <p:spPr>
-          <a:xfrm>
-            <a:off x="5669280" y="3749040"/>
-            <a:ext cx="1737360" cy="274320"/>
-          </a:xfrm>
-          <a:prstGeom prst="rect">
-            <a:avLst/>
-          </a:prstGeom>
-          <a:noFill/>
-          <a:ln/>
-        </p:spPr>
-        <p:txBody>
-          <a:bodyPr wrap="square" lIns="0" tIns="0" rIns="0" bIns="0" rtlCol="0" anchor="ctr"/>
-          <a:lstStyle/>
-          <a:p>
-            <a:pPr algn="ctr" indent="0" marL="0">
-              <a:buNone/>
-            </a:pPr>
-            <a:r>
-              <a:rPr lang="en-US" sz="1300" b="1" dirty="0">
-                <a:solidFill>
-                  <a:srgbClr val="1A1A1A"/>
-                </a:solidFill>
-                <a:latin typeface="TH Sarabun New" pitchFamily="34" charset="0"/>
-                <a:ea typeface="TH Sarabun New" pitchFamily="34" charset="-122"/>
-                <a:cs typeface="TH Sarabun New" pitchFamily="34" charset="-120"/>
-              </a:rPr>
-              <a:t>Action</a:t>
-            </a:r>
-            <a:endParaRPr lang="en-US" sz="1300" dirty="0"/>
-          </a:p>
-        </p:txBody>
-      </p:sp>
-      <p:sp>
-        <p:nvSpPr>
-          <p:cNvPr id="42" name="Shape 40"/>
-          <p:cNvSpPr/>
-          <p:nvPr/>
-        </p:nvSpPr>
-        <p:spPr>
-          <a:xfrm>
-            <a:off x="2468880" y="2423160"/>
-            <a:ext cx="1234440" cy="-274320"/>
-          </a:xfrm>
-          <a:prstGeom prst="line">
-            <a:avLst/>
-          </a:prstGeom>
-          <a:noFill/>
-          <a:ln w="19050">
-            <a:solidFill>
-              <a:srgbClr val="1A1A1A"/>
-            </a:solidFill>
-            <a:prstDash val="solid"/>
-            <a:tailEnd type="triangle"/>
-          </a:ln>
-        </p:spPr>
-      </p:sp>
-      <p:sp>
-        <p:nvSpPr>
-          <p:cNvPr id="43" name="Shape 41"/>
-          <p:cNvSpPr/>
-          <p:nvPr/>
-        </p:nvSpPr>
-        <p:spPr>
-          <a:xfrm>
-            <a:off x="2468880" y="2606040"/>
-            <a:ext cx="1234440" cy="-320040"/>
-          </a:xfrm>
-          <a:prstGeom prst="line">
-            <a:avLst/>
-          </a:prstGeom>
-          <a:noFill/>
-          <a:ln w="19050">
-            <a:solidFill>
-              <a:srgbClr val="1A1A1A"/>
-            </a:solidFill>
-            <a:prstDash val="solid"/>
-            <a:headEnd type="triangle"/>
-          </a:ln>
-        </p:spPr>
-      </p:sp>
-      <p:sp>
-        <p:nvSpPr>
-          <p:cNvPr id="44" name="Shape 42"/>
-          <p:cNvSpPr/>
-          <p:nvPr/>
-        </p:nvSpPr>
-        <p:spPr>
-          <a:xfrm flipV="1">
-            <a:off x="2468880" y="3657600"/>
-            <a:ext cx="1234440" cy="-1508760"/>
-          </a:xfrm>
-          <a:prstGeom prst="line">
-            <a:avLst/>
-          </a:prstGeom>
-          <a:noFill/>
-          <a:ln w="19050">
-            <a:solidFill>
-              <a:srgbClr val="1A1A1A"/>
-            </a:solidFill>
-            <a:prstDash val="solid"/>
-            <a:tailEnd type="triangle"/>
-          </a:ln>
-        </p:spPr>
-      </p:sp>
-      <p:sp>
-        <p:nvSpPr>
-          <p:cNvPr id="45" name="Shape 43"/>
-          <p:cNvSpPr/>
-          <p:nvPr/>
-        </p:nvSpPr>
-        <p:spPr>
-          <a:xfrm flipV="1">
-            <a:off x="2468880" y="3840480"/>
-            <a:ext cx="1234440" cy="-1508760"/>
-          </a:xfrm>
-          <a:prstGeom prst="line">
-            <a:avLst/>
-          </a:prstGeom>
-          <a:noFill/>
-          <a:ln w="19050">
-            <a:solidFill>
-              <a:srgbClr val="1A1A1A"/>
-            </a:solidFill>
-            <a:prstDash val="solid"/>
-            <a:headEnd type="triangle"/>
-          </a:ln>
-        </p:spPr>
-      </p:sp>
-      <p:sp>
-        <p:nvSpPr>
-          <p:cNvPr id="46" name="Shape 44"/>
-          <p:cNvSpPr/>
-          <p:nvPr/>
-        </p:nvSpPr>
-        <p:spPr>
-          <a:xfrm>
-            <a:off x="4114800" y="2468880"/>
-            <a:ext cx="0" cy="411480"/>
+            <a:off x="4663440" y="1664208"/>
+            <a:ext cx="0" cy="146304"/>
           </a:xfrm>
           <a:prstGeom prst="line">
             <a:avLst/>
@@ -6055,14 +5432,14 @@
       </p:sp>
       <p:sp>
         <p:nvSpPr>
-          <p:cNvPr id="47" name="Shape 45"/>
-          <p:cNvSpPr/>
-          <p:nvPr/>
-        </p:nvSpPr>
-        <p:spPr>
-          <a:xfrm>
-            <a:off x="4937760" y="3314700"/>
-            <a:ext cx="1143000" cy="0"/>
+          <p:cNvPr id="20" name="Shape 18"/>
+          <p:cNvSpPr/>
+          <p:nvPr/>
+        </p:nvSpPr>
+        <p:spPr>
+          <a:xfrm>
+            <a:off x="4663440" y="2441448"/>
+            <a:ext cx="0" cy="146304"/>
           </a:xfrm>
           <a:prstGeom prst="line">
             <a:avLst/>
@@ -6079,14 +5456,14 @@
       </p:sp>
       <p:sp>
         <p:nvSpPr>
-          <p:cNvPr id="48" name="Shape 46"/>
-          <p:cNvSpPr/>
-          <p:nvPr/>
-        </p:nvSpPr>
-        <p:spPr>
-          <a:xfrm>
-            <a:off x="4069080" y="4160520"/>
-            <a:ext cx="822960" cy="457200"/>
+          <p:cNvPr id="21" name="Shape 19"/>
+          <p:cNvSpPr/>
+          <p:nvPr/>
+        </p:nvSpPr>
+        <p:spPr>
+          <a:xfrm>
+            <a:off x="457200" y="2103120"/>
+            <a:ext cx="2560320" cy="1234440"/>
           </a:xfrm>
           <a:prstGeom prst="rect">
             <a:avLst/>
@@ -6094,24 +5471,51 @@
           <a:solidFill>
             <a:srgbClr val="FFFFFF"/>
           </a:solidFill>
-          <a:ln w="25400">
+          <a:ln w="22860">
             <a:solidFill>
-              <a:srgbClr val="006633"/>
+              <a:srgbClr val="2E8B57"/>
             </a:solidFill>
             <a:prstDash val="solid"/>
           </a:ln>
-        </p:spPr>
-      </p:sp>
-      <p:sp>
-        <p:nvSpPr>
-          <p:cNvPr id="49" name="Text 47"/>
-          <p:cNvSpPr/>
-          <p:nvPr/>
-        </p:nvSpPr>
-        <p:spPr>
-          <a:xfrm>
-            <a:off x="4069080" y="4160520"/>
-            <a:ext cx="822960" cy="457200"/>
+          <a:effectLst>
+            <a:outerShdw sx="100000" sy="100000" kx="0" ky="0" algn="bl" rotWithShape="0" blurRad="76200" dist="12700" dir="5400000">
+              <a:srgbClr val="000000">
+                <a:alpha val="8000"/>
+              </a:srgbClr>
+            </a:outerShdw>
+          </a:effectLst>
+        </p:spPr>
+      </p:sp>
+      <p:sp>
+        <p:nvSpPr>
+          <p:cNvPr id="22" name="Shape 20"/>
+          <p:cNvSpPr/>
+          <p:nvPr/>
+        </p:nvSpPr>
+        <p:spPr>
+          <a:xfrm>
+            <a:off x="457200" y="2103120"/>
+            <a:ext cx="2560320" cy="73152"/>
+          </a:xfrm>
+          <a:prstGeom prst="rect">
+            <a:avLst/>
+          </a:prstGeom>
+          <a:solidFill>
+            <a:srgbClr val="2E8B57"/>
+          </a:solidFill>
+          <a:ln/>
+        </p:spPr>
+      </p:sp>
+      <p:sp>
+        <p:nvSpPr>
+          <p:cNvPr id="23" name="Text 21"/>
+          <p:cNvSpPr/>
+          <p:nvPr/>
+        </p:nvSpPr>
+        <p:spPr>
+          <a:xfrm>
+            <a:off x="502920" y="2212848"/>
+            <a:ext cx="411480" cy="411480"/>
           </a:xfrm>
           <a:prstGeom prst="rect">
             <a:avLst/>
@@ -6127,43 +5531,43 @@
               <a:buNone/>
             </a:pPr>
             <a:r>
-              <a:rPr lang="en-US" sz="2200" dirty="0">
+              <a:rPr lang="en-US" sz="2000" dirty="0">
                 <a:solidFill>
                   <a:srgbClr val="000000"/>
                 </a:solidFill>
               </a:rPr>
-              <a:t>🔄</a:t>
-            </a:r>
-            <a:endParaRPr lang="en-US" sz="2200" dirty="0"/>
-          </a:p>
-        </p:txBody>
-      </p:sp>
-      <p:sp>
-        <p:nvSpPr>
-          <p:cNvPr id="50" name="Text 48"/>
-          <p:cNvSpPr/>
-          <p:nvPr/>
-        </p:nvSpPr>
-        <p:spPr>
-          <a:xfrm>
-            <a:off x="4983480" y="4251960"/>
-            <a:ext cx="1463040" cy="274320"/>
-          </a:xfrm>
-          <a:prstGeom prst="rect">
-            <a:avLst/>
-          </a:prstGeom>
-          <a:noFill/>
-          <a:ln/>
-        </p:spPr>
-        <p:txBody>
-          <a:bodyPr wrap="square" lIns="0" tIns="0" rIns="0" bIns="0" rtlCol="0" anchor="ctr"/>
-          <a:lstStyle/>
-          <a:p>
-            <a:pPr indent="0" marL="0">
-              <a:buNone/>
-            </a:pPr>
-            <a:r>
-              <a:rPr lang="en-US" sz="1200" b="1" dirty="0">
+              <a:t>💭</a:t>
+            </a:r>
+            <a:endParaRPr lang="en-US" sz="2000" dirty="0"/>
+          </a:p>
+        </p:txBody>
+      </p:sp>
+      <p:sp>
+        <p:nvSpPr>
+          <p:cNvPr id="24" name="Text 22"/>
+          <p:cNvSpPr/>
+          <p:nvPr/>
+        </p:nvSpPr>
+        <p:spPr>
+          <a:xfrm>
+            <a:off x="960120" y="2221992"/>
+            <a:ext cx="2011680" cy="274320"/>
+          </a:xfrm>
+          <a:prstGeom prst="rect">
+            <a:avLst/>
+          </a:prstGeom>
+          <a:noFill/>
+          <a:ln/>
+        </p:spPr>
+        <p:txBody>
+          <a:bodyPr wrap="square" lIns="0" tIns="0" rIns="0" bIns="0" rtlCol="0" anchor="ctr"/>
+          <a:lstStyle/>
+          <a:p>
+            <a:pPr indent="0" marL="0">
+              <a:buNone/>
+            </a:pPr>
+            <a:r>
+              <a:rPr lang="en-US" sz="1300" b="1" dirty="0">
                 <a:solidFill>
                   <a:srgbClr val="1A1A1A"/>
                 </a:solidFill>
@@ -6171,94 +5575,117 @@
                 <a:ea typeface="TH Sarabun New" pitchFamily="34" charset="-122"/>
                 <a:cs typeface="TH Sarabun New" pitchFamily="34" charset="-120"/>
               </a:rPr>
-              <a:t>Feedback Loop</a:t>
-            </a:r>
-            <a:endParaRPr lang="en-US" sz="1200" dirty="0"/>
-          </a:p>
-        </p:txBody>
-      </p:sp>
-      <p:sp>
-        <p:nvSpPr>
-          <p:cNvPr id="51" name="Text 49"/>
-          <p:cNvSpPr/>
-          <p:nvPr/>
-        </p:nvSpPr>
-        <p:spPr>
-          <a:xfrm>
-            <a:off x="3703320" y="4663440"/>
-            <a:ext cx="457200" cy="274320"/>
-          </a:xfrm>
-          <a:prstGeom prst="rect">
-            <a:avLst/>
-          </a:prstGeom>
-          <a:noFill/>
-          <a:ln/>
-        </p:spPr>
-        <p:txBody>
-          <a:bodyPr wrap="square" lIns="0" tIns="0" rIns="0" bIns="0" rtlCol="0" anchor="ctr"/>
-          <a:lstStyle/>
-          <a:p>
-            <a:pPr algn="ctr" indent="0" marL="0">
-              <a:buNone/>
-            </a:pPr>
-            <a:r>
-              <a:rPr lang="en-US" sz="1600" dirty="0">
-                <a:solidFill>
-                  <a:srgbClr val="B0B0B0"/>
-                </a:solidFill>
-              </a:rPr>
-              <a:t>↻</a:t>
-            </a:r>
-            <a:endParaRPr lang="en-US" sz="1600" dirty="0"/>
-          </a:p>
-        </p:txBody>
-      </p:sp>
-      <p:sp>
-        <p:nvSpPr>
-          <p:cNvPr id="52" name="Text 50"/>
-          <p:cNvSpPr/>
-          <p:nvPr/>
-        </p:nvSpPr>
-        <p:spPr>
-          <a:xfrm>
-            <a:off x="4800600" y="4663440"/>
-            <a:ext cx="457200" cy="274320"/>
-          </a:xfrm>
-          <a:prstGeom prst="rect">
-            <a:avLst/>
-          </a:prstGeom>
-          <a:noFill/>
-          <a:ln/>
-        </p:spPr>
-        <p:txBody>
-          <a:bodyPr wrap="square" lIns="0" tIns="0" rIns="0" bIns="0" rtlCol="0" anchor="ctr"/>
-          <a:lstStyle/>
-          <a:p>
-            <a:pPr algn="ctr" indent="0" marL="0">
-              <a:buNone/>
-            </a:pPr>
-            <a:r>
-              <a:rPr lang="en-US" sz="1600" dirty="0">
-                <a:solidFill>
-                  <a:srgbClr val="B0B0B0"/>
-                </a:solidFill>
-              </a:rPr>
-              <a:t>↺</a:t>
-            </a:r>
-            <a:endParaRPr lang="en-US" sz="1600" dirty="0"/>
-          </a:p>
-        </p:txBody>
-      </p:sp>
-      <p:sp>
-        <p:nvSpPr>
-          <p:cNvPr id="53" name="Shape 51"/>
-          <p:cNvSpPr/>
-          <p:nvPr/>
-        </p:nvSpPr>
-        <p:spPr>
-          <a:xfrm>
-            <a:off x="7955280" y="1783080"/>
-            <a:ext cx="1097280" cy="2606040"/>
+              <a:t>โมดูลความจำ</a:t>
+            </a:r>
+            <a:endParaRPr lang="en-US" sz="1300" dirty="0"/>
+          </a:p>
+        </p:txBody>
+      </p:sp>
+      <p:sp>
+        <p:nvSpPr>
+          <p:cNvPr id="25" name="Text 23"/>
+          <p:cNvSpPr/>
+          <p:nvPr/>
+        </p:nvSpPr>
+        <p:spPr>
+          <a:xfrm>
+            <a:off x="960120" y="2432304"/>
+            <a:ext cx="2011680" cy="201168"/>
+          </a:xfrm>
+          <a:prstGeom prst="rect">
+            <a:avLst/>
+          </a:prstGeom>
+          <a:noFill/>
+          <a:ln/>
+        </p:spPr>
+        <p:txBody>
+          <a:bodyPr wrap="square" lIns="0" tIns="0" rIns="0" bIns="0" rtlCol="0" anchor="ctr"/>
+          <a:lstStyle/>
+          <a:p>
+            <a:pPr indent="0" marL="0">
+              <a:buNone/>
+            </a:pPr>
+            <a:r>
+              <a:rPr lang="en-US" sz="1000" i="1" dirty="0">
+                <a:solidFill>
+                  <a:srgbClr val="6B6B6B"/>
+                </a:solidFill>
+                <a:latin typeface="Calibri" pitchFamily="34" charset="0"/>
+                <a:ea typeface="Calibri" pitchFamily="34" charset="-122"/>
+                <a:cs typeface="Calibri" pitchFamily="34" charset="-120"/>
+              </a:rPr>
+              <a:t>(Memory)</a:t>
+            </a:r>
+            <a:endParaRPr lang="en-US" sz="1000" dirty="0"/>
+          </a:p>
+        </p:txBody>
+      </p:sp>
+      <p:sp>
+        <p:nvSpPr>
+          <p:cNvPr id="26" name="Text 24"/>
+          <p:cNvSpPr/>
+          <p:nvPr/>
+        </p:nvSpPr>
+        <p:spPr>
+          <a:xfrm>
+            <a:off x="548640" y="2670048"/>
+            <a:ext cx="2377440" cy="365760"/>
+          </a:xfrm>
+          <a:prstGeom prst="rect">
+            <a:avLst/>
+          </a:prstGeom>
+          <a:noFill/>
+          <a:ln/>
+        </p:spPr>
+        <p:txBody>
+          <a:bodyPr wrap="square" lIns="0" tIns="0" rIns="0" bIns="0" rtlCol="0" anchor="ctr"/>
+          <a:lstStyle/>
+          <a:p>
+            <a:pPr indent="0" marL="0">
+              <a:buNone/>
+            </a:pPr>
+            <a:r>
+              <a:rPr lang="en-US" sz="1000" dirty="0">
+                <a:solidFill>
+                  <a:srgbClr val="4A4A4A"/>
+                </a:solidFill>
+                <a:latin typeface="TH Sarabun New" pitchFamily="34" charset="0"/>
+                <a:ea typeface="TH Sarabun New" pitchFamily="34" charset="-122"/>
+                <a:cs typeface="TH Sarabun New" pitchFamily="34" charset="-120"/>
+              </a:rPr>
+              <a:t>💬 ระยะสั้น (chat history)</a:t>
+            </a:r>
+            <a:endParaRPr lang="en-US" sz="1000" dirty="0"/>
+          </a:p>
+          <a:p>
+            <a:pPr indent="0" marL="0">
+              <a:buNone/>
+            </a:pPr>
+            <a:r>
+              <a:rPr lang="en-US" sz="1000" dirty="0">
+                <a:solidFill>
+                  <a:srgbClr val="4A4A4A"/>
+                </a:solidFill>
+                <a:latin typeface="TH Sarabun New" pitchFamily="34" charset="0"/>
+                <a:ea typeface="TH Sarabun New" pitchFamily="34" charset="-122"/>
+                <a:cs typeface="TH Sarabun New" pitchFamily="34" charset="-120"/>
+              </a:rPr>
+              <a:t>🗄 ระยะยาว (database)</a:t>
+            </a:r>
+            <a:endParaRPr lang="en-US" sz="1000" dirty="0"/>
+          </a:p>
+        </p:txBody>
+      </p:sp>
+      <p:sp>
+        <p:nvSpPr>
+          <p:cNvPr id="27" name="Shape 25"/>
+          <p:cNvSpPr/>
+          <p:nvPr/>
+        </p:nvSpPr>
+        <p:spPr>
+          <a:xfrm>
+            <a:off x="548640" y="3063240"/>
+            <a:ext cx="2377440" cy="219456"/>
           </a:xfrm>
           <a:prstGeom prst="rect">
             <a:avLst/>
@@ -6276,14 +5703,14 @@
       </p:sp>
       <p:sp>
         <p:nvSpPr>
-          <p:cNvPr id="54" name="Text 52"/>
-          <p:cNvSpPr/>
-          <p:nvPr/>
-        </p:nvSpPr>
-        <p:spPr>
-          <a:xfrm>
-            <a:off x="7955280" y="1874520"/>
-            <a:ext cx="1097280" cy="502920"/>
+          <p:cNvPr id="28" name="Text 26"/>
+          <p:cNvSpPr/>
+          <p:nvPr/>
+        </p:nvSpPr>
+        <p:spPr>
+          <a:xfrm>
+            <a:off x="548640" y="3063240"/>
+            <a:ext cx="2377440" cy="219456"/>
           </a:xfrm>
           <a:prstGeom prst="rect">
             <a:avLst/>
@@ -6299,63 +5726,7 @@
               <a:buNone/>
             </a:pPr>
             <a:r>
-              <a:rPr lang="en-US" sz="1100" b="1" dirty="0">
-                <a:solidFill>
-                  <a:srgbClr val="006633"/>
-                </a:solidFill>
-                <a:latin typeface="TH Sarabun New" pitchFamily="34" charset="0"/>
-                <a:ea typeface="TH Sarabun New" pitchFamily="34" charset="-122"/>
-                <a:cs typeface="TH Sarabun New" pitchFamily="34" charset="-120"/>
-              </a:rPr>
-              <a:t>ตัวอย่าง</a:t>
-            </a:r>
-            <a:endParaRPr lang="en-US" sz="1100" dirty="0"/>
-          </a:p>
-          <a:p>
-            <a:pPr algn="ctr" indent="0" marL="0">
-              <a:buNone/>
-            </a:pPr>
-            <a:r>
-              <a:rPr lang="en-US" sz="1100" b="1" dirty="0">
-                <a:solidFill>
-                  <a:srgbClr val="006633"/>
-                </a:solidFill>
-                <a:latin typeface="TH Sarabun New" pitchFamily="34" charset="0"/>
-                <a:ea typeface="TH Sarabun New" pitchFamily="34" charset="-122"/>
-                <a:cs typeface="TH Sarabun New" pitchFamily="34" charset="-120"/>
-              </a:rPr>
-              <a:t>ใน มก.</a:t>
-            </a:r>
-            <a:endParaRPr lang="en-US" sz="1100" dirty="0"/>
-          </a:p>
-        </p:txBody>
-      </p:sp>
-      <p:sp>
-        <p:nvSpPr>
-          <p:cNvPr id="55" name="Text 53"/>
-          <p:cNvSpPr/>
-          <p:nvPr/>
-        </p:nvSpPr>
-        <p:spPr>
-          <a:xfrm>
-            <a:off x="8001000" y="2423160"/>
-            <a:ext cx="1005840" cy="182880"/>
-          </a:xfrm>
-          <a:prstGeom prst="rect">
-            <a:avLst/>
-          </a:prstGeom>
-          <a:noFill/>
-          <a:ln/>
-        </p:spPr>
-        <p:txBody>
-          <a:bodyPr wrap="square" lIns="0" tIns="0" rIns="0" bIns="0" rtlCol="0" anchor="ctr"/>
-          <a:lstStyle/>
-          <a:p>
-            <a:pPr algn="ctr" indent="0" marL="0">
-              <a:buNone/>
-            </a:pPr>
-            <a:r>
-              <a:rPr lang="en-US" sz="800" b="1" spc="100" kern="0" dirty="0">
+              <a:rPr lang="en-US" sz="900" b="1" dirty="0">
                 <a:solidFill>
                   <a:srgbClr val="006633"/>
                 </a:solidFill>
@@ -6363,22 +5734,122 @@
                 <a:ea typeface="Calibri" pitchFamily="34" charset="-122"/>
                 <a:cs typeface="Calibri" pitchFamily="34" charset="-120"/>
               </a:rPr>
-              <a:t>User</a:t>
-            </a:r>
-            <a:endParaRPr lang="en-US" sz="800" dirty="0"/>
-          </a:p>
-        </p:txBody>
-      </p:sp>
-      <p:sp>
-        <p:nvSpPr>
-          <p:cNvPr id="56" name="Text 54"/>
-          <p:cNvSpPr/>
-          <p:nvPr/>
-        </p:nvSpPr>
-        <p:spPr>
-          <a:xfrm>
-            <a:off x="8001000" y="2560320"/>
-            <a:ext cx="1005840" cy="201168"/>
+              <a:t>Vector DB  •  BGE-M3 embeddings</a:t>
+            </a:r>
+            <a:endParaRPr lang="en-US" sz="900" dirty="0"/>
+          </a:p>
+        </p:txBody>
+      </p:sp>
+      <p:sp>
+        <p:nvSpPr>
+          <p:cNvPr id="29" name="Shape 27"/>
+          <p:cNvSpPr/>
+          <p:nvPr/>
+        </p:nvSpPr>
+        <p:spPr>
+          <a:xfrm>
+            <a:off x="3063240" y="2971800"/>
+            <a:ext cx="1051560" cy="0"/>
+          </a:xfrm>
+          <a:prstGeom prst="line">
+            <a:avLst/>
+          </a:prstGeom>
+          <a:noFill/>
+          <a:ln w="22860">
+            <a:solidFill>
+              <a:srgbClr val="1A1A1A"/>
+            </a:solidFill>
+            <a:prstDash val="solid"/>
+            <a:tailEnd type="triangle"/>
+          </a:ln>
+        </p:spPr>
+      </p:sp>
+      <p:sp>
+        <p:nvSpPr>
+          <p:cNvPr id="30" name="Shape 28"/>
+          <p:cNvSpPr/>
+          <p:nvPr/>
+        </p:nvSpPr>
+        <p:spPr>
+          <a:xfrm>
+            <a:off x="3063240" y="3154680"/>
+            <a:ext cx="1051560" cy="0"/>
+          </a:xfrm>
+          <a:prstGeom prst="line">
+            <a:avLst/>
+          </a:prstGeom>
+          <a:noFill/>
+          <a:ln w="22860">
+            <a:solidFill>
+              <a:srgbClr val="1A1A1A"/>
+            </a:solidFill>
+            <a:prstDash val="solid"/>
+            <a:headEnd type="triangle"/>
+          </a:ln>
+        </p:spPr>
+      </p:sp>
+      <p:sp>
+        <p:nvSpPr>
+          <p:cNvPr id="31" name="Shape 29"/>
+          <p:cNvSpPr/>
+          <p:nvPr/>
+        </p:nvSpPr>
+        <p:spPr>
+          <a:xfrm>
+            <a:off x="6263640" y="2103120"/>
+            <a:ext cx="2560320" cy="1234440"/>
+          </a:xfrm>
+          <a:prstGeom prst="rect">
+            <a:avLst/>
+          </a:prstGeom>
+          <a:solidFill>
+            <a:srgbClr val="FFFFFF"/>
+          </a:solidFill>
+          <a:ln w="22860">
+            <a:solidFill>
+              <a:srgbClr val="C9A961"/>
+            </a:solidFill>
+            <a:prstDash val="solid"/>
+          </a:ln>
+          <a:effectLst>
+            <a:outerShdw sx="100000" sy="100000" kx="0" ky="0" algn="bl" rotWithShape="0" blurRad="76200" dist="12700" dir="5400000">
+              <a:srgbClr val="000000">
+                <a:alpha val="8000"/>
+              </a:srgbClr>
+            </a:outerShdw>
+          </a:effectLst>
+        </p:spPr>
+      </p:sp>
+      <p:sp>
+        <p:nvSpPr>
+          <p:cNvPr id="32" name="Shape 30"/>
+          <p:cNvSpPr/>
+          <p:nvPr/>
+        </p:nvSpPr>
+        <p:spPr>
+          <a:xfrm>
+            <a:off x="6263640" y="2103120"/>
+            <a:ext cx="2560320" cy="73152"/>
+          </a:xfrm>
+          <a:prstGeom prst="rect">
+            <a:avLst/>
+          </a:prstGeom>
+          <a:solidFill>
+            <a:srgbClr val="C9A961"/>
+          </a:solidFill>
+          <a:ln/>
+        </p:spPr>
+      </p:sp>
+      <p:sp>
+        <p:nvSpPr>
+          <p:cNvPr id="33" name="Text 31"/>
+          <p:cNvSpPr/>
+          <p:nvPr/>
+        </p:nvSpPr>
+        <p:spPr>
+          <a:xfrm>
+            <a:off x="6309360" y="2212848"/>
+            <a:ext cx="411480" cy="411480"/>
           </a:xfrm>
           <a:prstGeom prst="rect">
             <a:avLst/>
@@ -6394,7 +5865,43 @@
               <a:buNone/>
             </a:pPr>
             <a:r>
-              <a:rPr lang="en-US" sz="1000" dirty="0">
+              <a:rPr lang="en-US" sz="2000" dirty="0">
+                <a:solidFill>
+                  <a:srgbClr val="000000"/>
+                </a:solidFill>
+              </a:rPr>
+              <a:t>🗺</a:t>
+            </a:r>
+            <a:endParaRPr lang="en-US" sz="2000" dirty="0"/>
+          </a:p>
+        </p:txBody>
+      </p:sp>
+      <p:sp>
+        <p:nvSpPr>
+          <p:cNvPr id="34" name="Text 32"/>
+          <p:cNvSpPr/>
+          <p:nvPr/>
+        </p:nvSpPr>
+        <p:spPr>
+          <a:xfrm>
+            <a:off x="6766560" y="2221992"/>
+            <a:ext cx="2011680" cy="274320"/>
+          </a:xfrm>
+          <a:prstGeom prst="rect">
+            <a:avLst/>
+          </a:prstGeom>
+          <a:noFill/>
+          <a:ln/>
+        </p:spPr>
+        <p:txBody>
+          <a:bodyPr wrap="square" lIns="0" tIns="0" rIns="0" bIns="0" rtlCol="0" anchor="ctr"/>
+          <a:lstStyle/>
+          <a:p>
+            <a:pPr indent="0" marL="0">
+              <a:buNone/>
+            </a:pPr>
+            <a:r>
+              <a:rPr lang="en-US" sz="1300" b="1" dirty="0">
                 <a:solidFill>
                   <a:srgbClr val="1A1A1A"/>
                 </a:solidFill>
@@ -6402,61 +5909,142 @@
                 <a:ea typeface="TH Sarabun New" pitchFamily="34" charset="-122"/>
                 <a:cs typeface="TH Sarabun New" pitchFamily="34" charset="-120"/>
               </a:rPr>
-              <a:t>นิสิต/อาจารย์</a:t>
-            </a:r>
-            <a:endParaRPr lang="en-US" sz="1000" dirty="0"/>
-          </a:p>
-        </p:txBody>
-      </p:sp>
-      <p:sp>
-        <p:nvSpPr>
-          <p:cNvPr id="57" name="Text 55"/>
-          <p:cNvSpPr/>
-          <p:nvPr/>
-        </p:nvSpPr>
-        <p:spPr>
-          <a:xfrm>
-            <a:off x="8001000" y="2788920"/>
-            <a:ext cx="1005840" cy="182880"/>
-          </a:xfrm>
-          <a:prstGeom prst="rect">
-            <a:avLst/>
-          </a:prstGeom>
-          <a:noFill/>
-          <a:ln/>
-        </p:spPr>
-        <p:txBody>
-          <a:bodyPr wrap="square" lIns="0" tIns="0" rIns="0" bIns="0" rtlCol="0" anchor="ctr"/>
-          <a:lstStyle/>
-          <a:p>
-            <a:pPr algn="ctr" indent="0" marL="0">
-              <a:buNone/>
-            </a:pPr>
-            <a:r>
-              <a:rPr lang="en-US" sz="800" b="1" spc="100" kern="0" dirty="0">
-                <a:solidFill>
-                  <a:srgbClr val="006633"/>
+              <a:t>โมดูลการวางแผน</a:t>
+            </a:r>
+            <a:endParaRPr lang="en-US" sz="1300" dirty="0"/>
+          </a:p>
+        </p:txBody>
+      </p:sp>
+      <p:sp>
+        <p:nvSpPr>
+          <p:cNvPr id="35" name="Text 33"/>
+          <p:cNvSpPr/>
+          <p:nvPr/>
+        </p:nvSpPr>
+        <p:spPr>
+          <a:xfrm>
+            <a:off x="6766560" y="2432304"/>
+            <a:ext cx="2011680" cy="201168"/>
+          </a:xfrm>
+          <a:prstGeom prst="rect">
+            <a:avLst/>
+          </a:prstGeom>
+          <a:noFill/>
+          <a:ln/>
+        </p:spPr>
+        <p:txBody>
+          <a:bodyPr wrap="square" lIns="0" tIns="0" rIns="0" bIns="0" rtlCol="0" anchor="ctr"/>
+          <a:lstStyle/>
+          <a:p>
+            <a:pPr indent="0" marL="0">
+              <a:buNone/>
+            </a:pPr>
+            <a:r>
+              <a:rPr lang="en-US" sz="1000" i="1" dirty="0">
+                <a:solidFill>
+                  <a:srgbClr val="6B6B6B"/>
                 </a:solidFill>
                 <a:latin typeface="Calibri" pitchFamily="34" charset="0"/>
                 <a:ea typeface="Calibri" pitchFamily="34" charset="-122"/>
                 <a:cs typeface="Calibri" pitchFamily="34" charset="-120"/>
               </a:rPr>
-              <a:t>LLM</a:t>
-            </a:r>
-            <a:endParaRPr lang="en-US" sz="800" dirty="0"/>
-          </a:p>
-        </p:txBody>
-      </p:sp>
-      <p:sp>
-        <p:nvSpPr>
-          <p:cNvPr id="58" name="Text 56"/>
-          <p:cNvSpPr/>
-          <p:nvPr/>
-        </p:nvSpPr>
-        <p:spPr>
-          <a:xfrm>
-            <a:off x="8001000" y="2926080"/>
-            <a:ext cx="1005840" cy="201168"/>
+              <a:t>(Planning)</a:t>
+            </a:r>
+            <a:endParaRPr lang="en-US" sz="1000" dirty="0"/>
+          </a:p>
+        </p:txBody>
+      </p:sp>
+      <p:sp>
+        <p:nvSpPr>
+          <p:cNvPr id="36" name="Text 34"/>
+          <p:cNvSpPr/>
+          <p:nvPr/>
+        </p:nvSpPr>
+        <p:spPr>
+          <a:xfrm>
+            <a:off x="6355080" y="2670048"/>
+            <a:ext cx="2377440" cy="365760"/>
+          </a:xfrm>
+          <a:prstGeom prst="rect">
+            <a:avLst/>
+          </a:prstGeom>
+          <a:noFill/>
+          <a:ln/>
+        </p:spPr>
+        <p:txBody>
+          <a:bodyPr wrap="square" lIns="0" tIns="0" rIns="0" bIns="0" rtlCol="0" anchor="ctr"/>
+          <a:lstStyle/>
+          <a:p>
+            <a:pPr indent="0" marL="0">
+              <a:buNone/>
+            </a:pPr>
+            <a:r>
+              <a:rPr lang="en-US" sz="1000" dirty="0">
+                <a:solidFill>
+                  <a:srgbClr val="4A4A4A"/>
+                </a:solidFill>
+                <a:latin typeface="TH Sarabun New" pitchFamily="34" charset="0"/>
+                <a:ea typeface="TH Sarabun New" pitchFamily="34" charset="-122"/>
+                <a:cs typeface="TH Sarabun New" pitchFamily="34" charset="-120"/>
+              </a:rPr>
+              <a:t>Workflow steps: ① → ② → ③ → ④</a:t>
+            </a:r>
+            <a:endParaRPr lang="en-US" sz="1000" dirty="0"/>
+          </a:p>
+          <a:p>
+            <a:pPr indent="0" marL="0">
+              <a:buNone/>
+            </a:pPr>
+            <a:r>
+              <a:rPr lang="en-US" sz="1000" dirty="0">
+                <a:solidFill>
+                  <a:srgbClr val="4A4A4A"/>
+                </a:solidFill>
+                <a:latin typeface="TH Sarabun New" pitchFamily="34" charset="0"/>
+                <a:ea typeface="TH Sarabun New" pitchFamily="34" charset="-122"/>
+                <a:cs typeface="TH Sarabun New" pitchFamily="34" charset="-120"/>
+              </a:rPr>
+              <a:t>breakdown task → execute</a:t>
+            </a:r>
+            <a:endParaRPr lang="en-US" sz="1000" dirty="0"/>
+          </a:p>
+        </p:txBody>
+      </p:sp>
+      <p:sp>
+        <p:nvSpPr>
+          <p:cNvPr id="37" name="Shape 35"/>
+          <p:cNvSpPr/>
+          <p:nvPr/>
+        </p:nvSpPr>
+        <p:spPr>
+          <a:xfrm>
+            <a:off x="6355080" y="3063240"/>
+            <a:ext cx="2377440" cy="219456"/>
+          </a:xfrm>
+          <a:prstGeom prst="rect">
+            <a:avLst/>
+          </a:prstGeom>
+          <a:solidFill>
+            <a:srgbClr val="E8F5E9"/>
+          </a:solidFill>
+          <a:ln w="6350">
+            <a:solidFill>
+              <a:srgbClr val="006633"/>
+            </a:solidFill>
+            <a:prstDash val="solid"/>
+          </a:ln>
+        </p:spPr>
+      </p:sp>
+      <p:sp>
+        <p:nvSpPr>
+          <p:cNvPr id="38" name="Text 36"/>
+          <p:cNvSpPr/>
+          <p:nvPr/>
+        </p:nvSpPr>
+        <p:spPr>
+          <a:xfrm>
+            <a:off x="6355080" y="3063240"/>
+            <a:ext cx="2377440" cy="219456"/>
           </a:xfrm>
           <a:prstGeom prst="rect">
             <a:avLst/>
@@ -6472,46 +6060,7 @@
               <a:buNone/>
             </a:pPr>
             <a:r>
-              <a:rPr lang="en-US" sz="1000" dirty="0">
-                <a:solidFill>
-                  <a:srgbClr val="1A1A1A"/>
-                </a:solidFill>
-                <a:latin typeface="TH Sarabun New" pitchFamily="34" charset="0"/>
-                <a:ea typeface="TH Sarabun New" pitchFamily="34" charset="-122"/>
-                <a:cs typeface="TH Sarabun New" pitchFamily="34" charset="-120"/>
-              </a:rPr>
-              <a:t>KU LLM</a:t>
-            </a:r>
-            <a:endParaRPr lang="en-US" sz="1000" dirty="0"/>
-          </a:p>
-        </p:txBody>
-      </p:sp>
-      <p:sp>
-        <p:nvSpPr>
-          <p:cNvPr id="59" name="Text 57"/>
-          <p:cNvSpPr/>
-          <p:nvPr/>
-        </p:nvSpPr>
-        <p:spPr>
-          <a:xfrm>
-            <a:off x="8001000" y="3154680"/>
-            <a:ext cx="1005840" cy="182880"/>
-          </a:xfrm>
-          <a:prstGeom prst="rect">
-            <a:avLst/>
-          </a:prstGeom>
-          <a:noFill/>
-          <a:ln/>
-        </p:spPr>
-        <p:txBody>
-          <a:bodyPr wrap="square" lIns="0" tIns="0" rIns="0" bIns="0" rtlCol="0" anchor="ctr"/>
-          <a:lstStyle/>
-          <a:p>
-            <a:pPr algn="ctr" indent="0" marL="0">
-              <a:buNone/>
-            </a:pPr>
-            <a:r>
-              <a:rPr lang="en-US" sz="800" b="1" spc="100" kern="0" dirty="0">
+              <a:rPr lang="en-US" sz="900" b="1" dirty="0">
                 <a:solidFill>
                   <a:srgbClr val="006633"/>
                 </a:solidFill>
@@ -6519,22 +6068,122 @@
                 <a:ea typeface="Calibri" pitchFamily="34" charset="-122"/>
                 <a:cs typeface="Calibri" pitchFamily="34" charset="-120"/>
               </a:rPr>
-              <a:t>DB</a:t>
-            </a:r>
-            <a:endParaRPr lang="en-US" sz="800" dirty="0"/>
-          </a:p>
-        </p:txBody>
-      </p:sp>
-      <p:sp>
-        <p:nvSpPr>
-          <p:cNvPr id="60" name="Text 58"/>
-          <p:cNvSpPr/>
-          <p:nvPr/>
-        </p:nvSpPr>
-        <p:spPr>
-          <a:xfrm>
-            <a:off x="8001000" y="3291840"/>
-            <a:ext cx="1005840" cy="201168"/>
+              <a:t>workflow.ku.ac.th  •  n8n</a:t>
+            </a:r>
+            <a:endParaRPr lang="en-US" sz="900" dirty="0"/>
+          </a:p>
+        </p:txBody>
+      </p:sp>
+      <p:sp>
+        <p:nvSpPr>
+          <p:cNvPr id="39" name="Shape 37"/>
+          <p:cNvSpPr/>
+          <p:nvPr/>
+        </p:nvSpPr>
+        <p:spPr>
+          <a:xfrm>
+            <a:off x="5212080" y="2971800"/>
+            <a:ext cx="1033272" cy="0"/>
+          </a:xfrm>
+          <a:prstGeom prst="line">
+            <a:avLst/>
+          </a:prstGeom>
+          <a:noFill/>
+          <a:ln w="22860">
+            <a:solidFill>
+              <a:srgbClr val="1A1A1A"/>
+            </a:solidFill>
+            <a:prstDash val="solid"/>
+            <a:tailEnd type="triangle"/>
+          </a:ln>
+        </p:spPr>
+      </p:sp>
+      <p:sp>
+        <p:nvSpPr>
+          <p:cNvPr id="40" name="Shape 38"/>
+          <p:cNvSpPr/>
+          <p:nvPr/>
+        </p:nvSpPr>
+        <p:spPr>
+          <a:xfrm>
+            <a:off x="5212080" y="3154680"/>
+            <a:ext cx="1033272" cy="0"/>
+          </a:xfrm>
+          <a:prstGeom prst="line">
+            <a:avLst/>
+          </a:prstGeom>
+          <a:noFill/>
+          <a:ln w="22860">
+            <a:solidFill>
+              <a:srgbClr val="1A1A1A"/>
+            </a:solidFill>
+            <a:prstDash val="solid"/>
+            <a:headEnd type="triangle"/>
+          </a:ln>
+        </p:spPr>
+      </p:sp>
+      <p:sp>
+        <p:nvSpPr>
+          <p:cNvPr id="41" name="Shape 39"/>
+          <p:cNvSpPr/>
+          <p:nvPr/>
+        </p:nvSpPr>
+        <p:spPr>
+          <a:xfrm>
+            <a:off x="457200" y="3520440"/>
+            <a:ext cx="2560320" cy="960120"/>
+          </a:xfrm>
+          <a:prstGeom prst="rect">
+            <a:avLst/>
+          </a:prstGeom>
+          <a:solidFill>
+            <a:srgbClr val="FFFFFF"/>
+          </a:solidFill>
+          <a:ln w="22860">
+            <a:solidFill>
+              <a:srgbClr val="006633"/>
+            </a:solidFill>
+            <a:prstDash val="solid"/>
+          </a:ln>
+          <a:effectLst>
+            <a:outerShdw sx="100000" sy="100000" kx="0" ky="0" algn="bl" rotWithShape="0" blurRad="76200" dist="12700" dir="5400000">
+              <a:srgbClr val="000000">
+                <a:alpha val="8000"/>
+              </a:srgbClr>
+            </a:outerShdw>
+          </a:effectLst>
+        </p:spPr>
+      </p:sp>
+      <p:sp>
+        <p:nvSpPr>
+          <p:cNvPr id="42" name="Shape 40"/>
+          <p:cNvSpPr/>
+          <p:nvPr/>
+        </p:nvSpPr>
+        <p:spPr>
+          <a:xfrm>
+            <a:off x="457200" y="3520440"/>
+            <a:ext cx="2560320" cy="73152"/>
+          </a:xfrm>
+          <a:prstGeom prst="rect">
+            <a:avLst/>
+          </a:prstGeom>
+          <a:solidFill>
+            <a:srgbClr val="006633"/>
+          </a:solidFill>
+          <a:ln/>
+        </p:spPr>
+      </p:sp>
+      <p:sp>
+        <p:nvSpPr>
+          <p:cNvPr id="43" name="Text 41"/>
+          <p:cNvSpPr/>
+          <p:nvPr/>
+        </p:nvSpPr>
+        <p:spPr>
+          <a:xfrm>
+            <a:off x="502920" y="3630168"/>
+            <a:ext cx="411480" cy="411480"/>
           </a:xfrm>
           <a:prstGeom prst="rect">
             <a:avLst/>
@@ -6550,7 +6199,43 @@
               <a:buNone/>
             </a:pPr>
             <a:r>
-              <a:rPr lang="en-US" sz="1000" dirty="0">
+              <a:rPr lang="en-US" sz="2000" dirty="0">
+                <a:solidFill>
+                  <a:srgbClr val="000000"/>
+                </a:solidFill>
+              </a:rPr>
+              <a:t>📚</a:t>
+            </a:r>
+            <a:endParaRPr lang="en-US" sz="2000" dirty="0"/>
+          </a:p>
+        </p:txBody>
+      </p:sp>
+      <p:sp>
+        <p:nvSpPr>
+          <p:cNvPr id="44" name="Text 42"/>
+          <p:cNvSpPr/>
+          <p:nvPr/>
+        </p:nvSpPr>
+        <p:spPr>
+          <a:xfrm>
+            <a:off x="960120" y="3639312"/>
+            <a:ext cx="2011680" cy="274320"/>
+          </a:xfrm>
+          <a:prstGeom prst="rect">
+            <a:avLst/>
+          </a:prstGeom>
+          <a:noFill/>
+          <a:ln/>
+        </p:spPr>
+        <p:txBody>
+          <a:bodyPr wrap="square" lIns="0" tIns="0" rIns="0" bIns="0" rtlCol="0" anchor="ctr"/>
+          <a:lstStyle/>
+          <a:p>
+            <a:pPr indent="0" marL="0">
+              <a:buNone/>
+            </a:pPr>
+            <a:r>
+              <a:rPr lang="en-US" sz="1300" b="1" dirty="0">
                 <a:solidFill>
                   <a:srgbClr val="1A1A1A"/>
                 </a:solidFill>
@@ -6558,61 +6243,142 @@
                 <a:ea typeface="TH Sarabun New" pitchFamily="34" charset="-122"/>
                 <a:cs typeface="TH Sarabun New" pitchFamily="34" charset="-120"/>
               </a:rPr>
-              <a:t>ทะเบียน</a:t>
-            </a:r>
-            <a:endParaRPr lang="en-US" sz="1000" dirty="0"/>
-          </a:p>
-        </p:txBody>
-      </p:sp>
-      <p:sp>
-        <p:nvSpPr>
-          <p:cNvPr id="61" name="Text 59"/>
-          <p:cNvSpPr/>
-          <p:nvPr/>
-        </p:nvSpPr>
-        <p:spPr>
-          <a:xfrm>
-            <a:off x="8001000" y="3520440"/>
-            <a:ext cx="1005840" cy="182880"/>
-          </a:xfrm>
-          <a:prstGeom prst="rect">
-            <a:avLst/>
-          </a:prstGeom>
-          <a:noFill/>
-          <a:ln/>
-        </p:spPr>
-        <p:txBody>
-          <a:bodyPr wrap="square" lIns="0" tIns="0" rIns="0" bIns="0" rtlCol="0" anchor="ctr"/>
-          <a:lstStyle/>
-          <a:p>
-            <a:pPr algn="ctr" indent="0" marL="0">
-              <a:buNone/>
-            </a:pPr>
-            <a:r>
-              <a:rPr lang="en-US" sz="800" b="1" spc="100" kern="0" dirty="0">
-                <a:solidFill>
-                  <a:srgbClr val="006633"/>
+              <a:t>องค์ความรู้</a:t>
+            </a:r>
+            <a:endParaRPr lang="en-US" sz="1300" dirty="0"/>
+          </a:p>
+        </p:txBody>
+      </p:sp>
+      <p:sp>
+        <p:nvSpPr>
+          <p:cNvPr id="45" name="Text 43"/>
+          <p:cNvSpPr/>
+          <p:nvPr/>
+        </p:nvSpPr>
+        <p:spPr>
+          <a:xfrm>
+            <a:off x="960120" y="3849624"/>
+            <a:ext cx="2011680" cy="201168"/>
+          </a:xfrm>
+          <a:prstGeom prst="rect">
+            <a:avLst/>
+          </a:prstGeom>
+          <a:noFill/>
+          <a:ln/>
+        </p:spPr>
+        <p:txBody>
+          <a:bodyPr wrap="square" lIns="0" tIns="0" rIns="0" bIns="0" rtlCol="0" anchor="ctr"/>
+          <a:lstStyle/>
+          <a:p>
+            <a:pPr indent="0" marL="0">
+              <a:buNone/>
+            </a:pPr>
+            <a:r>
+              <a:rPr lang="en-US" sz="1000" i="1" dirty="0">
+                <a:solidFill>
+                  <a:srgbClr val="6B6B6B"/>
                 </a:solidFill>
                 <a:latin typeface="Calibri" pitchFamily="34" charset="0"/>
                 <a:ea typeface="Calibri" pitchFamily="34" charset="-122"/>
                 <a:cs typeface="Calibri" pitchFamily="34" charset="-120"/>
               </a:rPr>
-              <a:t>Vector</a:t>
-            </a:r>
-            <a:endParaRPr lang="en-US" sz="800" dirty="0"/>
-          </a:p>
-        </p:txBody>
-      </p:sp>
-      <p:sp>
-        <p:nvSpPr>
-          <p:cNvPr id="62" name="Text 60"/>
-          <p:cNvSpPr/>
-          <p:nvPr/>
-        </p:nvSpPr>
-        <p:spPr>
-          <a:xfrm>
-            <a:off x="8001000" y="3657600"/>
-            <a:ext cx="1005840" cy="201168"/>
+              <a:t>(Knowledge)</a:t>
+            </a:r>
+            <a:endParaRPr lang="en-US" sz="1000" dirty="0"/>
+          </a:p>
+        </p:txBody>
+      </p:sp>
+      <p:sp>
+        <p:nvSpPr>
+          <p:cNvPr id="46" name="Text 44"/>
+          <p:cNvSpPr/>
+          <p:nvPr/>
+        </p:nvSpPr>
+        <p:spPr>
+          <a:xfrm>
+            <a:off x="548640" y="4087368"/>
+            <a:ext cx="2377440" cy="91440"/>
+          </a:xfrm>
+          <a:prstGeom prst="rect">
+            <a:avLst/>
+          </a:prstGeom>
+          <a:noFill/>
+          <a:ln/>
+        </p:spPr>
+        <p:txBody>
+          <a:bodyPr wrap="square" lIns="0" tIns="0" rIns="0" bIns="0" rtlCol="0" anchor="ctr"/>
+          <a:lstStyle/>
+          <a:p>
+            <a:pPr indent="0" marL="0">
+              <a:buNone/>
+            </a:pPr>
+            <a:r>
+              <a:rPr lang="en-US" sz="1000" dirty="0">
+                <a:solidFill>
+                  <a:srgbClr val="4A4A4A"/>
+                </a:solidFill>
+                <a:latin typeface="TH Sarabun New" pitchFamily="34" charset="0"/>
+                <a:ea typeface="TH Sarabun New" pitchFamily="34" charset="-122"/>
+                <a:cs typeface="TH Sarabun New" pitchFamily="34" charset="-120"/>
+              </a:rPr>
+              <a:t>course materials, KU databases,</a:t>
+            </a:r>
+            <a:endParaRPr lang="en-US" sz="1000" dirty="0"/>
+          </a:p>
+          <a:p>
+            <a:pPr indent="0" marL="0">
+              <a:buNone/>
+            </a:pPr>
+            <a:r>
+              <a:rPr lang="en-US" sz="1000" dirty="0">
+                <a:solidFill>
+                  <a:srgbClr val="4A4A4A"/>
+                </a:solidFill>
+                <a:latin typeface="TH Sarabun New" pitchFamily="34" charset="0"/>
+                <a:ea typeface="TH Sarabun New" pitchFamily="34" charset="-122"/>
+                <a:cs typeface="TH Sarabun New" pitchFamily="34" charset="-120"/>
+              </a:rPr>
+              <a:t>research papers, manuals</a:t>
+            </a:r>
+            <a:endParaRPr lang="en-US" sz="1000" dirty="0"/>
+          </a:p>
+        </p:txBody>
+      </p:sp>
+      <p:sp>
+        <p:nvSpPr>
+          <p:cNvPr id="47" name="Shape 45"/>
+          <p:cNvSpPr/>
+          <p:nvPr/>
+        </p:nvSpPr>
+        <p:spPr>
+          <a:xfrm>
+            <a:off x="548640" y="4206240"/>
+            <a:ext cx="2377440" cy="219456"/>
+          </a:xfrm>
+          <a:prstGeom prst="rect">
+            <a:avLst/>
+          </a:prstGeom>
+          <a:solidFill>
+            <a:srgbClr val="E8F5E9"/>
+          </a:solidFill>
+          <a:ln w="6350">
+            <a:solidFill>
+              <a:srgbClr val="006633"/>
+            </a:solidFill>
+            <a:prstDash val="solid"/>
+          </a:ln>
+        </p:spPr>
+      </p:sp>
+      <p:sp>
+        <p:nvSpPr>
+          <p:cNvPr id="48" name="Text 46"/>
+          <p:cNvSpPr/>
+          <p:nvPr/>
+        </p:nvSpPr>
+        <p:spPr>
+          <a:xfrm>
+            <a:off x="548640" y="4206240"/>
+            <a:ext cx="2377440" cy="219456"/>
           </a:xfrm>
           <a:prstGeom prst="rect">
             <a:avLst/>
@@ -6628,46 +6394,7 @@
               <a:buNone/>
             </a:pPr>
             <a:r>
-              <a:rPr lang="en-US" sz="1000" dirty="0">
-                <a:solidFill>
-                  <a:srgbClr val="1A1A1A"/>
-                </a:solidFill>
-                <a:latin typeface="TH Sarabun New" pitchFamily="34" charset="0"/>
-                <a:ea typeface="TH Sarabun New" pitchFamily="34" charset="-122"/>
-                <a:cs typeface="TH Sarabun New" pitchFamily="34" charset="-120"/>
-              </a:rPr>
-              <a:t>BGE-M3</a:t>
-            </a:r>
-            <a:endParaRPr lang="en-US" sz="1000" dirty="0"/>
-          </a:p>
-        </p:txBody>
-      </p:sp>
-      <p:sp>
-        <p:nvSpPr>
-          <p:cNvPr id="63" name="Text 61"/>
-          <p:cNvSpPr/>
-          <p:nvPr/>
-        </p:nvSpPr>
-        <p:spPr>
-          <a:xfrm>
-            <a:off x="8001000" y="3886200"/>
-            <a:ext cx="1005840" cy="182880"/>
-          </a:xfrm>
-          <a:prstGeom prst="rect">
-            <a:avLst/>
-          </a:prstGeom>
-          <a:noFill/>
-          <a:ln/>
-        </p:spPr>
-        <p:txBody>
-          <a:bodyPr wrap="square" lIns="0" tIns="0" rIns="0" bIns="0" rtlCol="0" anchor="ctr"/>
-          <a:lstStyle/>
-          <a:p>
-            <a:pPr algn="ctr" indent="0" marL="0">
-              <a:buNone/>
-            </a:pPr>
-            <a:r>
-              <a:rPr lang="en-US" sz="800" b="1" spc="100" kern="0" dirty="0">
+              <a:rPr lang="en-US" sz="900" b="1" dirty="0">
                 <a:solidFill>
                   <a:srgbClr val="006633"/>
                 </a:solidFill>
@@ -6675,22 +6402,98 @@
                 <a:ea typeface="Calibri" pitchFamily="34" charset="-122"/>
                 <a:cs typeface="Calibri" pitchFamily="34" charset="-120"/>
               </a:rPr>
-              <a:t>Action</a:t>
-            </a:r>
-            <a:endParaRPr lang="en-US" sz="800" dirty="0"/>
-          </a:p>
-        </p:txBody>
-      </p:sp>
-      <p:sp>
-        <p:nvSpPr>
-          <p:cNvPr id="64" name="Text 62"/>
-          <p:cNvSpPr/>
-          <p:nvPr/>
-        </p:nvSpPr>
-        <p:spPr>
-          <a:xfrm>
-            <a:off x="8001000" y="4023360"/>
-            <a:ext cx="1005840" cy="201168"/>
+              <a:t>ku.ac.th data sources</a:t>
+            </a:r>
+            <a:endParaRPr lang="en-US" sz="900" dirty="0"/>
+          </a:p>
+        </p:txBody>
+      </p:sp>
+      <p:sp>
+        <p:nvSpPr>
+          <p:cNvPr id="49" name="Shape 47"/>
+          <p:cNvSpPr/>
+          <p:nvPr/>
+        </p:nvSpPr>
+        <p:spPr>
+          <a:xfrm>
+            <a:off x="3063240" y="3703320"/>
+            <a:ext cx="1097280" cy="-411480"/>
+          </a:xfrm>
+          <a:prstGeom prst="line">
+            <a:avLst/>
+          </a:prstGeom>
+          <a:noFill/>
+          <a:ln w="19050">
+            <a:solidFill>
+              <a:srgbClr val="1A1A1A"/>
+            </a:solidFill>
+            <a:prstDash val="solid"/>
+            <a:tailEnd type="triangle"/>
+          </a:ln>
+        </p:spPr>
+      </p:sp>
+      <p:sp>
+        <p:nvSpPr>
+          <p:cNvPr id="50" name="Shape 48"/>
+          <p:cNvSpPr/>
+          <p:nvPr/>
+        </p:nvSpPr>
+        <p:spPr>
+          <a:xfrm>
+            <a:off x="3657600" y="3703320"/>
+            <a:ext cx="2377440" cy="777240"/>
+          </a:xfrm>
+          <a:prstGeom prst="rect">
+            <a:avLst/>
+          </a:prstGeom>
+          <a:solidFill>
+            <a:srgbClr val="FFFFFF"/>
+          </a:solidFill>
+          <a:ln w="22860">
+            <a:solidFill>
+              <a:srgbClr val="B83D3D"/>
+            </a:solidFill>
+            <a:prstDash val="solid"/>
+          </a:ln>
+          <a:effectLst>
+            <a:outerShdw sx="100000" sy="100000" kx="0" ky="0" algn="bl" rotWithShape="0" blurRad="76200" dist="12700" dir="5400000">
+              <a:srgbClr val="000000">
+                <a:alpha val="8000"/>
+              </a:srgbClr>
+            </a:outerShdw>
+          </a:effectLst>
+        </p:spPr>
+      </p:sp>
+      <p:sp>
+        <p:nvSpPr>
+          <p:cNvPr id="51" name="Shape 49"/>
+          <p:cNvSpPr/>
+          <p:nvPr/>
+        </p:nvSpPr>
+        <p:spPr>
+          <a:xfrm>
+            <a:off x="3657600" y="3703320"/>
+            <a:ext cx="2377440" cy="73152"/>
+          </a:xfrm>
+          <a:prstGeom prst="rect">
+            <a:avLst/>
+          </a:prstGeom>
+          <a:solidFill>
+            <a:srgbClr val="B83D3D"/>
+          </a:solidFill>
+          <a:ln/>
+        </p:spPr>
+      </p:sp>
+      <p:sp>
+        <p:nvSpPr>
+          <p:cNvPr id="52" name="Text 50"/>
+          <p:cNvSpPr/>
+          <p:nvPr/>
+        </p:nvSpPr>
+        <p:spPr>
+          <a:xfrm>
+            <a:off x="3703320" y="3813048"/>
+            <a:ext cx="411480" cy="411480"/>
           </a:xfrm>
           <a:prstGeom prst="rect">
             <a:avLst/>
@@ -6706,7 +6509,43 @@
               <a:buNone/>
             </a:pPr>
             <a:r>
-              <a:rPr lang="en-US" sz="1000" dirty="0">
+              <a:rPr lang="en-US" sz="2000" dirty="0">
+                <a:solidFill>
+                  <a:srgbClr val="000000"/>
+                </a:solidFill>
+              </a:rPr>
+              <a:t>🛠</a:t>
+            </a:r>
+            <a:endParaRPr lang="en-US" sz="2000" dirty="0"/>
+          </a:p>
+        </p:txBody>
+      </p:sp>
+      <p:sp>
+        <p:nvSpPr>
+          <p:cNvPr id="53" name="Text 51"/>
+          <p:cNvSpPr/>
+          <p:nvPr/>
+        </p:nvSpPr>
+        <p:spPr>
+          <a:xfrm>
+            <a:off x="4160520" y="3822192"/>
+            <a:ext cx="1828800" cy="274320"/>
+          </a:xfrm>
+          <a:prstGeom prst="rect">
+            <a:avLst/>
+          </a:prstGeom>
+          <a:noFill/>
+          <a:ln/>
+        </p:spPr>
+        <p:txBody>
+          <a:bodyPr wrap="square" lIns="0" tIns="0" rIns="0" bIns="0" rtlCol="0" anchor="ctr"/>
+          <a:lstStyle/>
+          <a:p>
+            <a:pPr indent="0" marL="0">
+              <a:buNone/>
+            </a:pPr>
+            <a:r>
+              <a:rPr lang="en-US" sz="1300" b="1" dirty="0">
                 <a:solidFill>
                   <a:srgbClr val="1A1A1A"/>
                 </a:solidFill>
@@ -6714,7 +6553,46 @@
                 <a:ea typeface="TH Sarabun New" pitchFamily="34" charset="-122"/>
                 <a:cs typeface="TH Sarabun New" pitchFamily="34" charset="-120"/>
               </a:rPr>
-              <a:t>ตอบ / Email</a:t>
+              <a:t>เครื่องมือ</a:t>
+            </a:r>
+            <a:endParaRPr lang="en-US" sz="1300" dirty="0"/>
+          </a:p>
+        </p:txBody>
+      </p:sp>
+      <p:sp>
+        <p:nvSpPr>
+          <p:cNvPr id="54" name="Text 52"/>
+          <p:cNvSpPr/>
+          <p:nvPr/>
+        </p:nvSpPr>
+        <p:spPr>
+          <a:xfrm>
+            <a:off x="4160520" y="4032504"/>
+            <a:ext cx="1828800" cy="201168"/>
+          </a:xfrm>
+          <a:prstGeom prst="rect">
+            <a:avLst/>
+          </a:prstGeom>
+          <a:noFill/>
+          <a:ln/>
+        </p:spPr>
+        <p:txBody>
+          <a:bodyPr wrap="square" lIns="0" tIns="0" rIns="0" bIns="0" rtlCol="0" anchor="ctr"/>
+          <a:lstStyle/>
+          <a:p>
+            <a:pPr indent="0" marL="0">
+              <a:buNone/>
+            </a:pPr>
+            <a:r>
+              <a:rPr lang="en-US" sz="1000" i="1" dirty="0">
+                <a:solidFill>
+                  <a:srgbClr val="6B6B6B"/>
+                </a:solidFill>
+                <a:latin typeface="Calibri" pitchFamily="34" charset="0"/>
+                <a:ea typeface="Calibri" pitchFamily="34" charset="-122"/>
+                <a:cs typeface="Calibri" pitchFamily="34" charset="-120"/>
+              </a:rPr>
+              <a:t>(Tools)</a:t>
             </a:r>
             <a:endParaRPr lang="en-US" sz="1000" dirty="0"/>
           </a:p>
@@ -6722,14 +6600,396 @@
       </p:sp>
       <p:sp>
         <p:nvSpPr>
-          <p:cNvPr id="65" name="Shape 63"/>
-          <p:cNvSpPr/>
-          <p:nvPr/>
-        </p:nvSpPr>
-        <p:spPr>
-          <a:xfrm>
-            <a:off x="457200" y="4663440"/>
-            <a:ext cx="8229600" cy="365760"/>
+          <p:cNvPr id="55" name="Shape 53"/>
+          <p:cNvSpPr/>
+          <p:nvPr/>
+        </p:nvSpPr>
+        <p:spPr>
+          <a:xfrm>
+            <a:off x="3749040" y="4206240"/>
+            <a:ext cx="2194560" cy="219456"/>
+          </a:xfrm>
+          <a:prstGeom prst="rect">
+            <a:avLst/>
+          </a:prstGeom>
+          <a:solidFill>
+            <a:srgbClr val="E8F5E9"/>
+          </a:solidFill>
+          <a:ln w="6350">
+            <a:solidFill>
+              <a:srgbClr val="006633"/>
+            </a:solidFill>
+            <a:prstDash val="solid"/>
+          </a:ln>
+        </p:spPr>
+      </p:sp>
+      <p:sp>
+        <p:nvSpPr>
+          <p:cNvPr id="56" name="Text 54"/>
+          <p:cNvSpPr/>
+          <p:nvPr/>
+        </p:nvSpPr>
+        <p:spPr>
+          <a:xfrm>
+            <a:off x="3749040" y="4206240"/>
+            <a:ext cx="2194560" cy="219456"/>
+          </a:xfrm>
+          <a:prstGeom prst="rect">
+            <a:avLst/>
+          </a:prstGeom>
+          <a:noFill/>
+          <a:ln/>
+        </p:spPr>
+        <p:txBody>
+          <a:bodyPr wrap="square" lIns="0" tIns="0" rIns="0" bIns="0" rtlCol="0" anchor="ctr"/>
+          <a:lstStyle/>
+          <a:p>
+            <a:pPr algn="ctr" indent="0" marL="0">
+              <a:buNone/>
+            </a:pPr>
+            <a:r>
+              <a:rPr lang="en-US" sz="900" b="1" dirty="0">
+                <a:solidFill>
+                  <a:srgbClr val="006633"/>
+                </a:solidFill>
+                <a:latin typeface="Calibri" pitchFamily="34" charset="0"/>
+                <a:ea typeface="Calibri" pitchFamily="34" charset="-122"/>
+                <a:cs typeface="Calibri" pitchFamily="34" charset="-120"/>
+              </a:rPr>
+              <a:t>Google APIs + KU systems</a:t>
+            </a:r>
+            <a:endParaRPr lang="en-US" sz="900" dirty="0"/>
+          </a:p>
+        </p:txBody>
+      </p:sp>
+      <p:sp>
+        <p:nvSpPr>
+          <p:cNvPr id="57" name="Shape 55"/>
+          <p:cNvSpPr/>
+          <p:nvPr/>
+        </p:nvSpPr>
+        <p:spPr>
+          <a:xfrm>
+            <a:off x="4663440" y="3630168"/>
+            <a:ext cx="0" cy="64008"/>
+          </a:xfrm>
+          <a:prstGeom prst="line">
+            <a:avLst/>
+          </a:prstGeom>
+          <a:noFill/>
+          <a:ln w="19050">
+            <a:solidFill>
+              <a:srgbClr val="1A1A1A"/>
+            </a:solidFill>
+            <a:prstDash val="solid"/>
+            <a:tailEnd type="triangle"/>
+          </a:ln>
+        </p:spPr>
+      </p:sp>
+      <p:sp>
+        <p:nvSpPr>
+          <p:cNvPr id="58" name="Shape 56"/>
+          <p:cNvSpPr/>
+          <p:nvPr/>
+        </p:nvSpPr>
+        <p:spPr>
+          <a:xfrm flipV="1">
+            <a:off x="6080760" y="4087368"/>
+            <a:ext cx="228600" cy="-292608"/>
+          </a:xfrm>
+          <a:prstGeom prst="line">
+            <a:avLst/>
+          </a:prstGeom>
+          <a:noFill/>
+          <a:ln w="12700">
+            <a:solidFill>
+              <a:srgbClr val="B83D3D"/>
+            </a:solidFill>
+            <a:prstDash val="dash"/>
+          </a:ln>
+        </p:spPr>
+      </p:sp>
+      <p:sp>
+        <p:nvSpPr>
+          <p:cNvPr id="59" name="Text 57"/>
+          <p:cNvSpPr/>
+          <p:nvPr/>
+        </p:nvSpPr>
+        <p:spPr>
+          <a:xfrm>
+            <a:off x="6263640" y="3703320"/>
+            <a:ext cx="274320" cy="182880"/>
+          </a:xfrm>
+          <a:prstGeom prst="rect">
+            <a:avLst/>
+          </a:prstGeom>
+          <a:noFill/>
+          <a:ln/>
+        </p:spPr>
+        <p:txBody>
+          <a:bodyPr wrap="square" lIns="0" tIns="0" rIns="0" bIns="0" rtlCol="0" anchor="ctr"/>
+          <a:lstStyle/>
+          <a:p>
+            <a:pPr algn="ctr" indent="0" marL="0">
+              <a:buNone/>
+            </a:pPr>
+            <a:r>
+              <a:rPr lang="en-US" sz="1100" dirty="0">
+                <a:solidFill>
+                  <a:srgbClr val="000000"/>
+                </a:solidFill>
+              </a:rPr>
+              <a:t>🔍</a:t>
+            </a:r>
+            <a:endParaRPr lang="en-US" sz="1100" dirty="0"/>
+          </a:p>
+        </p:txBody>
+      </p:sp>
+      <p:sp>
+        <p:nvSpPr>
+          <p:cNvPr id="60" name="Text 58"/>
+          <p:cNvSpPr/>
+          <p:nvPr/>
+        </p:nvSpPr>
+        <p:spPr>
+          <a:xfrm>
+            <a:off x="6537960" y="3685032"/>
+            <a:ext cx="1280160" cy="219456"/>
+          </a:xfrm>
+          <a:prstGeom prst="rect">
+            <a:avLst/>
+          </a:prstGeom>
+          <a:noFill/>
+          <a:ln/>
+        </p:spPr>
+        <p:txBody>
+          <a:bodyPr wrap="square" lIns="0" tIns="0" rIns="0" bIns="0" rtlCol="0" anchor="ctr"/>
+          <a:lstStyle/>
+          <a:p>
+            <a:pPr indent="0" marL="0">
+              <a:buNone/>
+            </a:pPr>
+            <a:r>
+              <a:rPr lang="en-US" sz="1100" dirty="0">
+                <a:solidFill>
+                  <a:srgbClr val="4A4A4A"/>
+                </a:solidFill>
+                <a:latin typeface="TH Sarabun New" pitchFamily="34" charset="0"/>
+                <a:ea typeface="TH Sarabun New" pitchFamily="34" charset="-122"/>
+                <a:cs typeface="TH Sarabun New" pitchFamily="34" charset="-120"/>
+              </a:rPr>
+              <a:t>ค้นหาข้อมูล</a:t>
+            </a:r>
+            <a:endParaRPr lang="en-US" sz="1100" dirty="0"/>
+          </a:p>
+        </p:txBody>
+      </p:sp>
+      <p:sp>
+        <p:nvSpPr>
+          <p:cNvPr id="61" name="Shape 59"/>
+          <p:cNvSpPr/>
+          <p:nvPr/>
+        </p:nvSpPr>
+        <p:spPr>
+          <a:xfrm flipV="1">
+            <a:off x="6080760" y="4087368"/>
+            <a:ext cx="228600" cy="-36576"/>
+          </a:xfrm>
+          <a:prstGeom prst="line">
+            <a:avLst/>
+          </a:prstGeom>
+          <a:noFill/>
+          <a:ln w="12700">
+            <a:solidFill>
+              <a:srgbClr val="B83D3D"/>
+            </a:solidFill>
+            <a:prstDash val="dash"/>
+          </a:ln>
+        </p:spPr>
+      </p:sp>
+      <p:sp>
+        <p:nvSpPr>
+          <p:cNvPr id="62" name="Text 60"/>
+          <p:cNvSpPr/>
+          <p:nvPr/>
+        </p:nvSpPr>
+        <p:spPr>
+          <a:xfrm>
+            <a:off x="6263640" y="3959352"/>
+            <a:ext cx="274320" cy="182880"/>
+          </a:xfrm>
+          <a:prstGeom prst="rect">
+            <a:avLst/>
+          </a:prstGeom>
+          <a:noFill/>
+          <a:ln/>
+        </p:spPr>
+        <p:txBody>
+          <a:bodyPr wrap="square" lIns="0" tIns="0" rIns="0" bIns="0" rtlCol="0" anchor="ctr"/>
+          <a:lstStyle/>
+          <a:p>
+            <a:pPr algn="ctr" indent="0" marL="0">
+              <a:buNone/>
+            </a:pPr>
+            <a:r>
+              <a:rPr lang="en-US" sz="1100" dirty="0">
+                <a:solidFill>
+                  <a:srgbClr val="000000"/>
+                </a:solidFill>
+              </a:rPr>
+              <a:t>🧮</a:t>
+            </a:r>
+            <a:endParaRPr lang="en-US" sz="1100" dirty="0"/>
+          </a:p>
+        </p:txBody>
+      </p:sp>
+      <p:sp>
+        <p:nvSpPr>
+          <p:cNvPr id="63" name="Text 61"/>
+          <p:cNvSpPr/>
+          <p:nvPr/>
+        </p:nvSpPr>
+        <p:spPr>
+          <a:xfrm>
+            <a:off x="6537960" y="3941064"/>
+            <a:ext cx="1280160" cy="219456"/>
+          </a:xfrm>
+          <a:prstGeom prst="rect">
+            <a:avLst/>
+          </a:prstGeom>
+          <a:noFill/>
+          <a:ln/>
+        </p:spPr>
+        <p:txBody>
+          <a:bodyPr wrap="square" lIns="0" tIns="0" rIns="0" bIns="0" rtlCol="0" anchor="ctr"/>
+          <a:lstStyle/>
+          <a:p>
+            <a:pPr indent="0" marL="0">
+              <a:buNone/>
+            </a:pPr>
+            <a:r>
+              <a:rPr lang="en-US" sz="1100" dirty="0">
+                <a:solidFill>
+                  <a:srgbClr val="4A4A4A"/>
+                </a:solidFill>
+                <a:latin typeface="TH Sarabun New" pitchFamily="34" charset="0"/>
+                <a:ea typeface="TH Sarabun New" pitchFamily="34" charset="-122"/>
+                <a:cs typeface="TH Sarabun New" pitchFamily="34" charset="-120"/>
+              </a:rPr>
+              <a:t>คำนวณ</a:t>
+            </a:r>
+            <a:endParaRPr lang="en-US" sz="1100" dirty="0"/>
+          </a:p>
+        </p:txBody>
+      </p:sp>
+      <p:sp>
+        <p:nvSpPr>
+          <p:cNvPr id="64" name="Shape 62"/>
+          <p:cNvSpPr/>
+          <p:nvPr/>
+        </p:nvSpPr>
+        <p:spPr>
+          <a:xfrm>
+            <a:off x="6080760" y="4087368"/>
+            <a:ext cx="228600" cy="219456"/>
+          </a:xfrm>
+          <a:prstGeom prst="line">
+            <a:avLst/>
+          </a:prstGeom>
+          <a:noFill/>
+          <a:ln w="12700">
+            <a:solidFill>
+              <a:srgbClr val="B83D3D"/>
+            </a:solidFill>
+            <a:prstDash val="dash"/>
+          </a:ln>
+        </p:spPr>
+      </p:sp>
+      <p:sp>
+        <p:nvSpPr>
+          <p:cNvPr id="65" name="Text 63"/>
+          <p:cNvSpPr/>
+          <p:nvPr/>
+        </p:nvSpPr>
+        <p:spPr>
+          <a:xfrm>
+            <a:off x="6263640" y="4215384"/>
+            <a:ext cx="274320" cy="182880"/>
+          </a:xfrm>
+          <a:prstGeom prst="rect">
+            <a:avLst/>
+          </a:prstGeom>
+          <a:noFill/>
+          <a:ln/>
+        </p:spPr>
+        <p:txBody>
+          <a:bodyPr wrap="square" lIns="0" tIns="0" rIns="0" bIns="0" rtlCol="0" anchor="ctr"/>
+          <a:lstStyle/>
+          <a:p>
+            <a:pPr algn="ctr" indent="0" marL="0">
+              <a:buNone/>
+            </a:pPr>
+            <a:r>
+              <a:rPr lang="en-US" sz="1100" dirty="0">
+                <a:solidFill>
+                  <a:srgbClr val="000000"/>
+                </a:solidFill>
+              </a:rPr>
+              <a:t>🗄</a:t>
+            </a:r>
+            <a:endParaRPr lang="en-US" sz="1100" dirty="0"/>
+          </a:p>
+        </p:txBody>
+      </p:sp>
+      <p:sp>
+        <p:nvSpPr>
+          <p:cNvPr id="66" name="Text 64"/>
+          <p:cNvSpPr/>
+          <p:nvPr/>
+        </p:nvSpPr>
+        <p:spPr>
+          <a:xfrm>
+            <a:off x="6537960" y="4197096"/>
+            <a:ext cx="1280160" cy="219456"/>
+          </a:xfrm>
+          <a:prstGeom prst="rect">
+            <a:avLst/>
+          </a:prstGeom>
+          <a:noFill/>
+          <a:ln/>
+        </p:spPr>
+        <p:txBody>
+          <a:bodyPr wrap="square" lIns="0" tIns="0" rIns="0" bIns="0" rtlCol="0" anchor="ctr"/>
+          <a:lstStyle/>
+          <a:p>
+            <a:pPr indent="0" marL="0">
+              <a:buNone/>
+            </a:pPr>
+            <a:r>
+              <a:rPr lang="en-US" sz="1100" dirty="0">
+                <a:solidFill>
+                  <a:srgbClr val="4A4A4A"/>
+                </a:solidFill>
+                <a:latin typeface="TH Sarabun New" pitchFamily="34" charset="0"/>
+                <a:ea typeface="TH Sarabun New" pitchFamily="34" charset="-122"/>
+                <a:cs typeface="TH Sarabun New" pitchFamily="34" charset="-120"/>
+              </a:rPr>
+              <a:t>ฐานข้อมูล</a:t>
+            </a:r>
+            <a:endParaRPr lang="en-US" sz="1100" dirty="0"/>
+          </a:p>
+        </p:txBody>
+      </p:sp>
+      <p:sp>
+        <p:nvSpPr>
+          <p:cNvPr id="67" name="Shape 65"/>
+          <p:cNvSpPr/>
+          <p:nvPr/>
+        </p:nvSpPr>
+        <p:spPr>
+          <a:xfrm>
+            <a:off x="457200" y="4617720"/>
+            <a:ext cx="8229600" cy="411480"/>
           </a:xfrm>
           <a:prstGeom prst="rect">
             <a:avLst/>
@@ -6742,14 +7002,14 @@
       </p:sp>
       <p:sp>
         <p:nvSpPr>
-          <p:cNvPr id="66" name="Shape 64"/>
-          <p:cNvSpPr/>
-          <p:nvPr/>
-        </p:nvSpPr>
-        <p:spPr>
-          <a:xfrm>
-            <a:off x="457200" y="4663440"/>
-            <a:ext cx="109728" cy="365760"/>
+          <p:cNvPr id="68" name="Shape 66"/>
+          <p:cNvSpPr/>
+          <p:nvPr/>
+        </p:nvSpPr>
+        <p:spPr>
+          <a:xfrm>
+            <a:off x="457200" y="4617720"/>
+            <a:ext cx="109728" cy="411480"/>
           </a:xfrm>
           <a:prstGeom prst="rect">
             <a:avLst/>
@@ -6762,30 +7022,30 @@
       </p:sp>
       <p:sp>
         <p:nvSpPr>
-          <p:cNvPr id="67" name="Text 65"/>
-          <p:cNvSpPr/>
-          <p:nvPr/>
-        </p:nvSpPr>
-        <p:spPr>
-          <a:xfrm>
-            <a:off x="685800" y="4663440"/>
-            <a:ext cx="8229600" cy="365760"/>
-          </a:xfrm>
-          <a:prstGeom prst="rect">
-            <a:avLst/>
-          </a:prstGeom>
-          <a:noFill/>
-          <a:ln/>
-        </p:spPr>
-        <p:txBody>
-          <a:bodyPr wrap="square" lIns="0" tIns="0" rIns="0" bIns="0" rtlCol="0" anchor="ctr"/>
-          <a:lstStyle/>
-          <a:p>
-            <a:pPr indent="0" marL="0">
-              <a:buNone/>
-            </a:pPr>
-            <a:r>
-              <a:rPr lang="en-US" sz="1200" b="1" dirty="0">
+          <p:cNvPr id="69" name="Text 67"/>
+          <p:cNvSpPr/>
+          <p:nvPr/>
+        </p:nvSpPr>
+        <p:spPr>
+          <a:xfrm>
+            <a:off x="685800" y="4617720"/>
+            <a:ext cx="8229600" cy="411480"/>
+          </a:xfrm>
+          <a:prstGeom prst="rect">
+            <a:avLst/>
+          </a:prstGeom>
+          <a:noFill/>
+          <a:ln/>
+        </p:spPr>
+        <p:txBody>
+          <a:bodyPr wrap="square" lIns="0" tIns="0" rIns="0" bIns="0" rtlCol="0" anchor="ctr"/>
+          <a:lstStyle/>
+          <a:p>
+            <a:pPr indent="0" marL="0">
+              <a:buNone/>
+            </a:pPr>
+            <a:r>
+              <a:rPr lang="en-US" sz="1100" b="1" dirty="0">
                 <a:solidFill>
                   <a:srgbClr val="C9A961"/>
                 </a:solidFill>
@@ -6793,13 +7053,13 @@
                 <a:ea typeface="TH Sarabun New" pitchFamily="34" charset="-122"/>
                 <a:cs typeface="TH Sarabun New" pitchFamily="34" charset="-120"/>
               </a:rPr>
-              <a:t>Use case มก. :  </a:t>
-            </a:r>
-            <a:pPr indent="0" marL="0">
-              <a:buNone/>
-            </a:pPr>
-            <a:r>
-              <a:rPr lang="en-US" sz="1200" dirty="0">
+              <a:t>ของ มก. ครบ! :  </a:t>
+            </a:r>
+            <a:pPr indent="0" marL="0">
+              <a:buNone/>
+            </a:pPr>
+            <a:r>
+              <a:rPr lang="en-US" sz="1100" dirty="0">
                 <a:solidFill>
                   <a:srgbClr val="FFFFFF"/>
                 </a:solidFill>
@@ -6807,15 +7067,71 @@
                 <a:ea typeface="TH Sarabun New" pitchFamily="34" charset="-122"/>
                 <a:cs typeface="TH Sarabun New" pitchFamily="34" charset="-120"/>
               </a:rPr>
-              <a:t>ผู้ช่วยอาจารย์ตอบคำถามนิสิต 24/7  —  ค้นจาก KU LLM + Vector DB (course materials) + ระบบทะเบียน</a:t>
-            </a:r>
-            <a:endParaRPr lang="en-US" sz="1200" dirty="0"/>
-          </a:p>
-        </p:txBody>
-      </p:sp>
-      <p:sp>
-        <p:nvSpPr>
-          <p:cNvPr id="68" name="Text 66"/>
+              <a:t>Prompt = ผู้ใช้   •   LLM = </a:t>
+            </a:r>
+            <a:pPr indent="0" marL="0">
+              <a:buNone/>
+            </a:pPr>
+            <a:r>
+              <a:rPr lang="en-US" sz="1100" b="1" dirty="0">
+                <a:solidFill>
+                  <a:srgbClr val="C9A961"/>
+                </a:solidFill>
+                <a:latin typeface="TH Sarabun New" pitchFamily="34" charset="0"/>
+                <a:ea typeface="TH Sarabun New" pitchFamily="34" charset="-122"/>
+                <a:cs typeface="TH Sarabun New" pitchFamily="34" charset="-120"/>
+              </a:rPr>
+              <a:t>apigw.ku.ac.th</a:t>
+            </a:r>
+            <a:pPr indent="0" marL="0">
+              <a:buNone/>
+            </a:pPr>
+            <a:r>
+              <a:rPr lang="en-US" sz="1100" dirty="0">
+                <a:solidFill>
+                  <a:srgbClr val="FFFFFF"/>
+                </a:solidFill>
+                <a:latin typeface="TH Sarabun New" pitchFamily="34" charset="0"/>
+                <a:ea typeface="TH Sarabun New" pitchFamily="34" charset="-122"/>
+                <a:cs typeface="TH Sarabun New" pitchFamily="34" charset="-120"/>
+              </a:rPr>
+              <a:t>   •   Planning = </a:t>
+            </a:r>
+            <a:pPr indent="0" marL="0">
+              <a:buNone/>
+            </a:pPr>
+            <a:r>
+              <a:rPr lang="en-US" sz="1100" b="1" dirty="0">
+                <a:solidFill>
+                  <a:srgbClr val="C9A961"/>
+                </a:solidFill>
+                <a:latin typeface="TH Sarabun New" pitchFamily="34" charset="0"/>
+                <a:ea typeface="TH Sarabun New" pitchFamily="34" charset="-122"/>
+                <a:cs typeface="TH Sarabun New" pitchFamily="34" charset="-120"/>
+              </a:rPr>
+              <a:t>workflow.ku.ac.th</a:t>
+            </a:r>
+            <a:pPr indent="0" marL="0">
+              <a:buNone/>
+            </a:pPr>
+            <a:r>
+              <a:rPr lang="en-US" sz="1100" dirty="0">
+                <a:solidFill>
+                  <a:srgbClr val="FFFFFF"/>
+                </a:solidFill>
+                <a:latin typeface="TH Sarabun New" pitchFamily="34" charset="0"/>
+                <a:ea typeface="TH Sarabun New" pitchFamily="34" charset="-122"/>
+                <a:cs typeface="TH Sarabun New" pitchFamily="34" charset="-120"/>
+              </a:rPr>
+              <a:t>   •   Memory/Knowledge/Tools = KU data + APIs</a:t>
+            </a:r>
+            <a:endParaRPr lang="en-US" sz="1100" dirty="0"/>
+          </a:p>
+        </p:txBody>
+      </p:sp>
+      <p:sp>
+        <p:nvSpPr>
+          <p:cNvPr id="70" name="Text 68"/>
           <p:cNvSpPr/>
           <p:nvPr/>
         </p:nvSpPr>
